--- a/slides/Week3-Wed-Working-Day.pptx
+++ b/slides/Week3-Wed-Working-Day.pptx
@@ -7,6 +7,14 @@
   <p:sldIdLst>
     <p:sldId id="256" r:id="rId7"/>
     <p:sldId id="257" r:id="rId8"/>
+    <p:sldId id="258" r:id="rId9"/>
+    <p:sldId id="259" r:id="rId10"/>
+    <p:sldId id="260" r:id="rId11"/>
+    <p:sldId id="261" r:id="rId12"/>
+    <p:sldId id="262" r:id="rId13"/>
+    <p:sldId id="263" r:id="rId15"/>
+    <p:sldId id="264" r:id="rId16"/>
+    <p:sldId id="265" r:id="rId17"/>
   </p:sldIdLst>
   <p:sldSz cx="12191695" cy="6858000" type="screen4x3"/>
   <p:notesSz cx="6858000" cy="9144000"/>
@@ -106,6 +114,426 @@
     </a:lvl9pPr>
   </p:defaultTextStyle>
 </p:presentation>
+</file>
+
+<file path=ppt/notesMasters/notesMaster1.xml><?xml version="1.0" encoding="utf-8"?>
+<p:notesMaster xmlns:a="http://schemas.openxmlformats.org/drawingml/2006/main" xmlns:p="http://schemas.openxmlformats.org/presentationml/2006/main" xmlns:r="http://schemas.openxmlformats.org/officeDocument/2006/relationships">
+  <p:cSld>
+    <p:bg>
+      <p:bgRef idx="1001">
+        <a:schemeClr val="bg1"/>
+      </p:bgRef>
+    </p:bg>
+    <p:spTree>
+      <p:nvGrpSpPr>
+        <p:cNvPr id="1" name=""/>
+        <p:cNvGrpSpPr/>
+        <p:nvPr/>
+      </p:nvGrpSpPr>
+      <p:grpSpPr>
+        <a:xfrm>
+          <a:off x="0" y="0"/>
+          <a:ext cx="0" cy="0"/>
+          <a:chOff x="0" y="0"/>
+          <a:chExt cx="0" cy="0"/>
+        </a:xfrm>
+      </p:grpSpPr>
+      <p:sp>
+        <p:nvSpPr>
+          <p:cNvPr id="2" name="Header Placeholder 1"/>
+          <p:cNvSpPr>
+            <a:spLocks noGrp="1"/>
+          </p:cNvSpPr>
+          <p:nvPr>
+            <p:ph type="hdr" sz="quarter"/>
+          </p:nvPr>
+        </p:nvSpPr>
+        <p:spPr>
+          <a:xfrm>
+            <a:off x="0" y="0"/>
+            <a:ext cx="2971800" cy="457200"/>
+          </a:xfrm>
+          <a:prstGeom prst="rect">
+            <a:avLst/>
+          </a:prstGeom>
+        </p:spPr>
+        <p:txBody>
+          <a:bodyPr vert="horz" lIns="91440" tIns="45720" rIns="91440" bIns="45720" rtlCol="0"/>
+          <a:lstStyle>
+            <a:lvl1pPr algn="l">
+              <a:defRPr sz="1200"/>
+            </a:lvl1pPr>
+          </a:lstStyle>
+          <a:p>
+            <a:endParaRPr lang="en-US"/>
+          </a:p>
+        </p:txBody>
+      </p:sp>
+      <p:sp>
+        <p:nvSpPr>
+          <p:cNvPr id="3" name="Date Placeholder 2"/>
+          <p:cNvSpPr>
+            <a:spLocks noGrp="1"/>
+          </p:cNvSpPr>
+          <p:nvPr>
+            <p:ph type="dt" idx="1"/>
+          </p:nvPr>
+        </p:nvSpPr>
+        <p:spPr>
+          <a:xfrm>
+            <a:off x="3884613" y="0"/>
+            <a:ext cx="2971800" cy="457200"/>
+          </a:xfrm>
+          <a:prstGeom prst="rect">
+            <a:avLst/>
+          </a:prstGeom>
+        </p:spPr>
+        <p:txBody>
+          <a:bodyPr vert="horz" lIns="91440" tIns="45720" rIns="91440" bIns="45720" rtlCol="0"/>
+          <a:lstStyle>
+            <a:lvl1pPr algn="r">
+              <a:defRPr sz="1200"/>
+            </a:lvl1pPr>
+          </a:lstStyle>
+          <a:p>
+            <a:fld id="{0F89C1C7-3DCD-1040-A9CF-14679D8B5DDD}" type="datetimeFigureOut">
+              <a:rPr lang="en-US" smtClean="0"/>
+              <a:t>10/17/16</a:t>
+            </a:fld>
+            <a:endParaRPr lang="en-US"/>
+          </a:p>
+        </p:txBody>
+      </p:sp>
+      <p:sp>
+        <p:nvSpPr>
+          <p:cNvPr id="4" name="Slide Image Placeholder 3"/>
+          <p:cNvSpPr>
+            <a:spLocks noGrp="1" noRot="1" noChangeAspect="1"/>
+          </p:cNvSpPr>
+          <p:nvPr>
+            <p:ph type="sldImg" idx="2"/>
+          </p:nvPr>
+        </p:nvSpPr>
+        <p:spPr>
+          <a:xfrm>
+            <a:off x="1143000" y="685800"/>
+            <a:ext cx="4572000" cy="3429000"/>
+          </a:xfrm>
+          <a:prstGeom prst="rect">
+            <a:avLst/>
+          </a:prstGeom>
+          <a:noFill/>
+          <a:ln w="12700">
+            <a:solidFill>
+              <a:prstClr val="black"/>
+            </a:solidFill>
+          </a:ln>
+        </p:spPr>
+        <p:txBody>
+          <a:bodyPr vert="horz" lIns="91440" tIns="45720" rIns="91440" bIns="45720" rtlCol="0" anchor="ctr"/>
+          <a:lstStyle/>
+          <a:p>
+            <a:endParaRPr lang="en-US"/>
+          </a:p>
+        </p:txBody>
+      </p:sp>
+      <p:sp>
+        <p:nvSpPr>
+          <p:cNvPr id="5" name="Notes Placeholder 4"/>
+          <p:cNvSpPr>
+            <a:spLocks noGrp="1"/>
+          </p:cNvSpPr>
+          <p:nvPr>
+            <p:ph type="body" sz="quarter" idx="3"/>
+          </p:nvPr>
+        </p:nvSpPr>
+        <p:spPr>
+          <a:xfrm>
+            <a:off x="685800" y="4343400"/>
+            <a:ext cx="5486400" cy="4114800"/>
+          </a:xfrm>
+          <a:prstGeom prst="rect">
+            <a:avLst/>
+          </a:prstGeom>
+        </p:spPr>
+        <p:txBody>
+          <a:bodyPr vert="horz" lIns="91440" tIns="45720" rIns="91440" bIns="45720" rtlCol="0"/>
+          <a:lstStyle/>
+          <a:p>
+            <a:pPr lvl="0"/>
+            <a:r>
+              <a:rPr lang="en-US" smtClean="0"/>
+              <a:t>Click to edit Master text styles</a:t>
+            </a:r>
+          </a:p>
+          <a:p>
+            <a:pPr lvl="1"/>
+            <a:r>
+              <a:rPr lang="en-US" smtClean="0"/>
+              <a:t>Second level</a:t>
+            </a:r>
+          </a:p>
+          <a:p>
+            <a:pPr lvl="2"/>
+            <a:r>
+              <a:rPr lang="en-US" smtClean="0"/>
+              <a:t>Third level</a:t>
+            </a:r>
+          </a:p>
+          <a:p>
+            <a:pPr lvl="3"/>
+            <a:r>
+              <a:rPr lang="en-US" smtClean="0"/>
+              <a:t>Fourth level</a:t>
+            </a:r>
+          </a:p>
+          <a:p>
+            <a:pPr lvl="4"/>
+            <a:r>
+              <a:rPr lang="en-US" smtClean="0"/>
+              <a:t>Fifth level</a:t>
+            </a:r>
+            <a:endParaRPr lang="en-US"/>
+          </a:p>
+        </p:txBody>
+      </p:sp>
+      <p:sp>
+        <p:nvSpPr>
+          <p:cNvPr id="6" name="Footer Placeholder 5"/>
+          <p:cNvSpPr>
+            <a:spLocks noGrp="1"/>
+          </p:cNvSpPr>
+          <p:nvPr>
+            <p:ph type="ftr" sz="quarter" idx="4"/>
+          </p:nvPr>
+        </p:nvSpPr>
+        <p:spPr>
+          <a:xfrm>
+            <a:off x="0" y="8685213"/>
+            <a:ext cx="2971800" cy="457200"/>
+          </a:xfrm>
+          <a:prstGeom prst="rect">
+            <a:avLst/>
+          </a:prstGeom>
+        </p:spPr>
+        <p:txBody>
+          <a:bodyPr vert="horz" lIns="91440" tIns="45720" rIns="91440" bIns="45720" rtlCol="0" anchor="b"/>
+          <a:lstStyle>
+            <a:lvl1pPr algn="l">
+              <a:defRPr sz="1200"/>
+            </a:lvl1pPr>
+          </a:lstStyle>
+          <a:p>
+            <a:endParaRPr lang="en-US"/>
+          </a:p>
+        </p:txBody>
+      </p:sp>
+      <p:sp>
+        <p:nvSpPr>
+          <p:cNvPr id="7" name="Slide Number Placeholder 6"/>
+          <p:cNvSpPr>
+            <a:spLocks noGrp="1"/>
+          </p:cNvSpPr>
+          <p:nvPr>
+            <p:ph type="sldNum" sz="quarter" idx="5"/>
+          </p:nvPr>
+        </p:nvSpPr>
+        <p:spPr>
+          <a:xfrm>
+            <a:off x="3884613" y="8685213"/>
+            <a:ext cx="2971800" cy="457200"/>
+          </a:xfrm>
+          <a:prstGeom prst="rect">
+            <a:avLst/>
+          </a:prstGeom>
+        </p:spPr>
+        <p:txBody>
+          <a:bodyPr vert="horz" lIns="91440" tIns="45720" rIns="91440" bIns="45720" rtlCol="0" anchor="b"/>
+          <a:lstStyle>
+            <a:lvl1pPr algn="r">
+              <a:defRPr sz="1200"/>
+            </a:lvl1pPr>
+          </a:lstStyle>
+          <a:p>
+            <a:fld id="{BB5E49A5-4136-284D-997B-48E1D791AD67}" type="slidenum">
+              <a:rPr lang="en-US" smtClean="0"/>
+              <a:t>‹#›</a:t>
+            </a:fld>
+            <a:endParaRPr lang="en-US"/>
+          </a:p>
+        </p:txBody>
+      </p:sp>
+    </p:spTree>
+    <p:extLst>
+      <p:ext uri="{BB962C8B-B14F-4D97-AF65-F5344CB8AC3E}">
+        <p14:creationId xmlns:p14="http://schemas.microsoft.com/office/powerpoint/2010/main" val="2623252185"/>
+      </p:ext>
+    </p:extLst>
+  </p:cSld>
+  <p:clrMap bg1="lt1" tx1="dk1" bg2="lt2" tx2="dk2" accent1="accent1" accent2="accent2" accent3="accent3" accent4="accent4" accent5="accent5" accent6="accent6" hlink="hlink" folHlink="folHlink"/>
+  <p:notesStyle>
+    <a:lvl1pPr marL="0" algn="l" defTabSz="457200" rtl="0" eaLnBrk="1" latinLnBrk="0" hangingPunct="1">
+      <a:defRPr sz="1200" kern="1200">
+        <a:solidFill>
+          <a:schemeClr val="tx1"/>
+        </a:solidFill>
+        <a:latin typeface="+mn-lt"/>
+        <a:ea typeface="+mn-ea"/>
+        <a:cs typeface="+mn-cs"/>
+      </a:defRPr>
+    </a:lvl1pPr>
+    <a:lvl2pPr marL="457200" algn="l" defTabSz="457200" rtl="0" eaLnBrk="1" latinLnBrk="0" hangingPunct="1">
+      <a:defRPr sz="1200" kern="1200">
+        <a:solidFill>
+          <a:schemeClr val="tx1"/>
+        </a:solidFill>
+        <a:latin typeface="+mn-lt"/>
+        <a:ea typeface="+mn-ea"/>
+        <a:cs typeface="+mn-cs"/>
+      </a:defRPr>
+    </a:lvl2pPr>
+    <a:lvl3pPr marL="914400" algn="l" defTabSz="457200" rtl="0" eaLnBrk="1" latinLnBrk="0" hangingPunct="1">
+      <a:defRPr sz="1200" kern="1200">
+        <a:solidFill>
+          <a:schemeClr val="tx1"/>
+        </a:solidFill>
+        <a:latin typeface="+mn-lt"/>
+        <a:ea typeface="+mn-ea"/>
+        <a:cs typeface="+mn-cs"/>
+      </a:defRPr>
+    </a:lvl3pPr>
+    <a:lvl4pPr marL="1371600" algn="l" defTabSz="457200" rtl="0" eaLnBrk="1" latinLnBrk="0" hangingPunct="1">
+      <a:defRPr sz="1200" kern="1200">
+        <a:solidFill>
+          <a:schemeClr val="tx1"/>
+        </a:solidFill>
+        <a:latin typeface="+mn-lt"/>
+        <a:ea typeface="+mn-ea"/>
+        <a:cs typeface="+mn-cs"/>
+      </a:defRPr>
+    </a:lvl4pPr>
+    <a:lvl5pPr marL="1828800" algn="l" defTabSz="457200" rtl="0" eaLnBrk="1" latinLnBrk="0" hangingPunct="1">
+      <a:defRPr sz="1200" kern="1200">
+        <a:solidFill>
+          <a:schemeClr val="tx1"/>
+        </a:solidFill>
+        <a:latin typeface="+mn-lt"/>
+        <a:ea typeface="+mn-ea"/>
+        <a:cs typeface="+mn-cs"/>
+      </a:defRPr>
+    </a:lvl5pPr>
+    <a:lvl6pPr marL="2286000" algn="l" defTabSz="457200" rtl="0" eaLnBrk="1" latinLnBrk="0" hangingPunct="1">
+      <a:defRPr sz="1200" kern="1200">
+        <a:solidFill>
+          <a:schemeClr val="tx1"/>
+        </a:solidFill>
+        <a:latin typeface="+mn-lt"/>
+        <a:ea typeface="+mn-ea"/>
+        <a:cs typeface="+mn-cs"/>
+      </a:defRPr>
+    </a:lvl6pPr>
+    <a:lvl7pPr marL="2743200" algn="l" defTabSz="457200" rtl="0" eaLnBrk="1" latinLnBrk="0" hangingPunct="1">
+      <a:defRPr sz="1200" kern="1200">
+        <a:solidFill>
+          <a:schemeClr val="tx1"/>
+        </a:solidFill>
+        <a:latin typeface="+mn-lt"/>
+        <a:ea typeface="+mn-ea"/>
+        <a:cs typeface="+mn-cs"/>
+      </a:defRPr>
+    </a:lvl7pPr>
+    <a:lvl8pPr marL="3200400" algn="l" defTabSz="457200" rtl="0" eaLnBrk="1" latinLnBrk="0" hangingPunct="1">
+      <a:defRPr sz="1200" kern="1200">
+        <a:solidFill>
+          <a:schemeClr val="tx1"/>
+        </a:solidFill>
+        <a:latin typeface="+mn-lt"/>
+        <a:ea typeface="+mn-ea"/>
+        <a:cs typeface="+mn-cs"/>
+      </a:defRPr>
+    </a:lvl8pPr>
+    <a:lvl9pPr marL="3657600" algn="l" defTabSz="457200" rtl="0" eaLnBrk="1" latinLnBrk="0" hangingPunct="1">
+      <a:defRPr sz="1200" kern="1200">
+        <a:solidFill>
+          <a:schemeClr val="tx1"/>
+        </a:solidFill>
+        <a:latin typeface="+mn-lt"/>
+        <a:ea typeface="+mn-ea"/>
+        <a:cs typeface="+mn-cs"/>
+      </a:defRPr>
+    </a:lvl9pPr>
+  </p:notesStyle>
+</p:notesMaster>
+</file>
+
+<file path=ppt/notesSlides/notesSlide1.xml><?xml version="1.0" encoding="utf-8"?>
+<p:notes xmlns:a="http://schemas.openxmlformats.org/drawingml/2006/main" xmlns:p="http://schemas.openxmlformats.org/presentationml/2006/main" xmlns:r="http://schemas.openxmlformats.org/officeDocument/2006/relationships">
+  <p:cSld>
+    <p:spTree>
+      <p:nvGrpSpPr>
+        <p:cNvPr id="1" name=""/>
+        <p:cNvGrpSpPr/>
+        <p:nvPr/>
+      </p:nvGrpSpPr>
+      <p:grpSpPr>
+        <a:xfrm>
+          <a:off x="0" y="0"/>
+          <a:ext cx="0" cy="0"/>
+          <a:chOff x="0" y="0"/>
+          <a:chExt cx="0" cy="0"/>
+        </a:xfrm>
+      </p:grpSpPr>
+      <p:sp>
+        <p:nvSpPr>
+          <p:cNvPr id="2" name="Slide Image Placeholder 1"/>
+          <p:cNvSpPr>
+            <a:spLocks noGrp="1"/>
+          </p:cNvSpPr>
+          <p:nvPr>
+            <p:ph type="sldImg" idx="2"/>
+          </p:nvPr>
+        </p:nvSpPr>
+        <p:spPr/>
+      </p:sp>
+      <p:sp>
+        <p:nvSpPr>
+          <p:cNvPr id="3" name="Notes Placeholder 2"/>
+          <p:cNvSpPr>
+            <a:spLocks noGrp="1"/>
+          </p:cNvSpPr>
+          <p:nvPr>
+            <p:ph type="body" idx="3" sz="quarter"/>
+          </p:nvPr>
+        </p:nvSpPr>
+        <p:spPr/>
+        <p:txBody>
+          <a:bodyPr/>
+          <a:lstStyle/>
+          <a:p>
+            <a:r>
+              <a:t>Sora web/app discontinued 2026-04-26. Recommend Veo 3.1 / Runway / Kling / Pika for pitch videos.</a:t>
+            </a:r>
+          </a:p>
+        </p:txBody>
+      </p:sp>
+      <p:sp>
+        <p:nvSpPr>
+          <p:cNvPr id="4" name="Slide Number Placeholder 3"/>
+          <p:cNvSpPr>
+            <a:spLocks noGrp="1"/>
+          </p:cNvSpPr>
+          <p:nvPr>
+            <p:ph type="sldNum" idx="5" sz="quarter"/>
+          </p:nvPr>
+        </p:nvSpPr>
+        <p:spPr/>
+      </p:sp>
+    </p:spTree>
+  </p:cSld>
+  <p:clrMapOvr>
+    <a:masterClrMapping/>
+  </p:clrMapOvr>
+</p:notes>
 </file>
 
 <file path=ppt/slideLayouts/slideLayout1.xml><?xml version="1.0" encoding="utf-8"?>
@@ -3175,7 +3603,7 @@
                 </a:solidFill>
                 <a:latin typeface="Courier New"/>
               </a:rPr>
-              <a:t>WEEK 3 · WEDNESDAY</a:t>
+              <a:t>WEEK 3 - WEDNESDAY</a:t>
             </a:r>
           </a:p>
         </p:txBody>
@@ -3214,7 +3642,304 @@
                 </a:solidFill>
                 <a:latin typeface="Arial"/>
               </a:rPr>
-              <a:t>Working Day</a:t>
+              <a:t>Planning Day: What's the problem?</a:t>
+            </a:r>
+          </a:p>
+        </p:txBody>
+      </p:sp>
+      <p:sp>
+        <p:nvSpPr>
+          <p:cNvPr id="5" name="TextBox 4"/>
+          <p:cNvSpPr txBox="1"/>
+          <p:nvPr/>
+        </p:nvSpPr>
+        <p:spPr>
+          <a:xfrm>
+            <a:off x="841248" y="4160520"/>
+            <a:ext cx="10058400" cy="457200"/>
+          </a:xfrm>
+          <a:prstGeom prst="rect">
+            <a:avLst/>
+          </a:prstGeom>
+          <a:noFill/>
+        </p:spPr>
+        <p:txBody>
+          <a:bodyPr wrap="square" anchor="t">
+            <a:spAutoFit/>
+          </a:bodyPr>
+          <a:lstStyle/>
+          <a:p>
+            <a:pPr algn="l">
+              <a:lnSpc>
+                <a:spcPct val="100000"/>
+              </a:lnSpc>
+            </a:pPr>
+            <a:r>
+              <a:rPr sz="1500" b="0">
+                <a:solidFill>
+                  <a:srgbClr val="8A94A6"/>
+                </a:solidFill>
+                <a:latin typeface="Arial"/>
+              </a:rPr>
+              <a:t>Final project - value-centered need finding + storyboard</a:t>
+            </a:r>
+          </a:p>
+        </p:txBody>
+      </p:sp>
+    </p:spTree>
+  </p:cSld>
+  <p:clrMapOvr>
+    <a:masterClrMapping/>
+  </p:clrMapOvr>
+</p:sld>
+</file>
+
+<file path=ppt/slides/slide10.xml><?xml version="1.0" encoding="utf-8"?>
+<p:sld xmlns:a="http://schemas.openxmlformats.org/drawingml/2006/main" xmlns:p="http://schemas.openxmlformats.org/presentationml/2006/main" xmlns:r="http://schemas.openxmlformats.org/officeDocument/2006/relationships">
+  <p:cSld>
+    <p:bg>
+      <p:bgPr>
+        <a:solidFill>
+          <a:srgbClr val="0B0E14"/>
+        </a:solidFill>
+        <a:effectLst/>
+      </p:bgPr>
+    </p:bg>
+    <p:spTree>
+      <p:nvGrpSpPr>
+        <p:cNvPr id="1" name=""/>
+        <p:cNvGrpSpPr/>
+        <p:nvPr/>
+      </p:nvGrpSpPr>
+      <p:grpSpPr/>
+      <p:sp>
+        <p:nvSpPr>
+          <p:cNvPr id="2" name="TextBox 1"/>
+          <p:cNvSpPr txBox="1"/>
+          <p:nvPr/>
+        </p:nvSpPr>
+        <p:spPr>
+          <a:xfrm>
+            <a:off x="640080" y="502920"/>
+            <a:ext cx="10058400" cy="365760"/>
+          </a:xfrm>
+          <a:prstGeom prst="rect">
+            <a:avLst/>
+          </a:prstGeom>
+          <a:noFill/>
+        </p:spPr>
+        <p:txBody>
+          <a:bodyPr wrap="square" anchor="t">
+            <a:spAutoFit/>
+          </a:bodyPr>
+          <a:lstStyle/>
+          <a:p>
+            <a:pPr algn="l">
+              <a:lnSpc>
+                <a:spcPct val="100000"/>
+              </a:lnSpc>
+            </a:pPr>
+            <a:r>
+              <a:rPr sz="1300" b="1">
+                <a:solidFill>
+                  <a:srgbClr val="00FF41"/>
+                </a:solidFill>
+                <a:latin typeface="Courier New"/>
+              </a:rPr>
+              <a:t>CARRY IT TO THURSDAY</a:t>
+            </a:r>
+          </a:p>
+        </p:txBody>
+      </p:sp>
+      <p:sp>
+        <p:nvSpPr>
+          <p:cNvPr id="3" name="Rectangle 2"/>
+          <p:cNvSpPr/>
+          <p:nvPr/>
+        </p:nvSpPr>
+        <p:spPr>
+          <a:xfrm>
+            <a:off x="640080" y="932688"/>
+            <a:ext cx="822960" cy="73152"/>
+          </a:xfrm>
+          <a:prstGeom prst="rect">
+            <a:avLst/>
+          </a:prstGeom>
+          <a:solidFill>
+            <a:srgbClr val="00FF41"/>
+          </a:solidFill>
+          <a:ln>
+            <a:noFill/>
+          </a:ln>
+          <a:effectLst/>
+        </p:spPr>
+        <p:style>
+          <a:lnRef idx="1">
+            <a:schemeClr val="accent1"/>
+          </a:lnRef>
+          <a:fillRef idx="3">
+            <a:schemeClr val="accent1"/>
+          </a:fillRef>
+          <a:effectRef idx="2">
+            <a:schemeClr val="accent1"/>
+          </a:effectRef>
+          <a:fontRef idx="minor">
+            <a:schemeClr val="lt1"/>
+          </a:fontRef>
+        </p:style>
+        <p:txBody>
+          <a:bodyPr rtlCol="0" anchor="ctr"/>
+          <a:lstStyle/>
+          <a:p>
+            <a:pPr algn="ctr"/>
+          </a:p>
+        </p:txBody>
+      </p:sp>
+      <p:sp>
+        <p:nvSpPr>
+          <p:cNvPr id="4" name="TextBox 3"/>
+          <p:cNvSpPr txBox="1"/>
+          <p:nvPr/>
+        </p:nvSpPr>
+        <p:spPr>
+          <a:xfrm>
+            <a:off x="640080" y="1188720"/>
+            <a:ext cx="10972800" cy="1097280"/>
+          </a:xfrm>
+          <a:prstGeom prst="rect">
+            <a:avLst/>
+          </a:prstGeom>
+          <a:noFill/>
+        </p:spPr>
+        <p:txBody>
+          <a:bodyPr wrap="square" anchor="t">
+            <a:spAutoFit/>
+          </a:bodyPr>
+          <a:lstStyle/>
+          <a:p>
+            <a:pPr algn="l">
+              <a:lnSpc>
+                <a:spcPct val="100000"/>
+              </a:lnSpc>
+            </a:pPr>
+            <a:r>
+              <a:rPr sz="3400" b="1">
+                <a:solidFill>
+                  <a:srgbClr val="F5F7FA"/>
+                </a:solidFill>
+                <a:latin typeface="Arial"/>
+              </a:rPr>
+              <a:t>Your plan is your build</a:t>
+            </a:r>
+          </a:p>
+        </p:txBody>
+      </p:sp>
+      <p:sp>
+        <p:nvSpPr>
+          <p:cNvPr id="5" name="TextBox 4"/>
+          <p:cNvSpPr txBox="1"/>
+          <p:nvPr/>
+        </p:nvSpPr>
+        <p:spPr>
+          <a:xfrm>
+            <a:off x="658368" y="2286000"/>
+            <a:ext cx="10881360" cy="3657600"/>
+          </a:xfrm>
+          <a:prstGeom prst="rect">
+            <a:avLst/>
+          </a:prstGeom>
+          <a:noFill/>
+        </p:spPr>
+        <p:txBody>
+          <a:bodyPr wrap="square" anchor="t">
+            <a:spAutoFit/>
+          </a:bodyPr>
+          <a:lstStyle/>
+          <a:p>
+            <a:pPr algn="l">
+              <a:lnSpc>
+                <a:spcPct val="112000"/>
+              </a:lnSpc>
+            </a:pPr>
+            <a:r>
+              <a:rPr sz="2100" b="0">
+                <a:solidFill>
+                  <a:srgbClr val="F5F7FA"/>
+                </a:solidFill>
+                <a:latin typeface="Arial"/>
+              </a:rPr>
+              <a:t>Tomorrow you build straight from the prompts your value tree produced, test it, and present it in the evening.</a:t>
+            </a:r>
+          </a:p>
+          <a:p>
+            <a:pPr algn="l">
+              <a:lnSpc>
+                <a:spcPct val="112000"/>
+              </a:lnSpc>
+            </a:pPr>
+            <a:r>
+              <a:rPr sz="2000" b="0">
+                <a:solidFill>
+                  <a:srgbClr val="F5F7FA"/>
+                </a:solidFill>
+                <a:latin typeface="Arial"/>
+              </a:rPr>
+              <a:t/>
+            </a:r>
+          </a:p>
+          <a:p>
+            <a:pPr algn="l">
+              <a:lnSpc>
+                <a:spcPct val="112000"/>
+              </a:lnSpc>
+            </a:pPr>
+            <a:r>
+              <a:rPr sz="1700" b="0">
+                <a:solidFill>
+                  <a:srgbClr val="8A94A6"/>
+                </a:solidFill>
+                <a:latin typeface="Arial"/>
+              </a:rPr>
+              <a:t>Guest lecture today: Figma. Bring your questions about design + prototyping.</a:t>
+            </a:r>
+          </a:p>
+        </p:txBody>
+      </p:sp>
+      <p:sp>
+        <p:nvSpPr>
+          <p:cNvPr id="6" name="TextBox 5"/>
+          <p:cNvSpPr txBox="1"/>
+          <p:nvPr/>
+        </p:nvSpPr>
+        <p:spPr>
+          <a:xfrm>
+            <a:off x="640080" y="6355080"/>
+            <a:ext cx="10972800" cy="365760"/>
+          </a:xfrm>
+          <a:prstGeom prst="rect">
+            <a:avLst/>
+          </a:prstGeom>
+          <a:noFill/>
+        </p:spPr>
+        <p:txBody>
+          <a:bodyPr wrap="square" anchor="t">
+            <a:spAutoFit/>
+          </a:bodyPr>
+          <a:lstStyle/>
+          <a:p>
+            <a:pPr algn="l">
+              <a:lnSpc>
+                <a:spcPct val="100000"/>
+              </a:lnSpc>
+            </a:pPr>
+            <a:r>
+              <a:rPr sz="1000" b="0">
+                <a:solidFill>
+                  <a:srgbClr val="5A6474"/>
+                </a:solidFill>
+                <a:latin typeface="Courier New"/>
+              </a:rPr>
+              <a:t>Good Code, Good Vibes · TECHIE 1121 · Cornell Tech · Summer 2026</a:t>
             </a:r>
           </a:p>
         </p:txBody>
@@ -3279,7 +4004,7 @@
                 </a:solidFill>
                 <a:latin typeface="Courier New"/>
               </a:rPr>
-              <a:t>USE TODAY WELL</a:t>
+              <a:t>THE TURN</a:t>
             </a:r>
           </a:p>
         </p:txBody>
@@ -3337,7 +4062,7 @@
         <p:spPr>
           <a:xfrm>
             <a:off x="640080" y="1188720"/>
-            <a:ext cx="10972800" cy="914400"/>
+            <a:ext cx="10972800" cy="1097280"/>
           </a:xfrm>
           <a:prstGeom prst="rect">
             <a:avLst/>
@@ -3362,7 +4087,7 @@
                 </a:solidFill>
                 <a:latin typeface="Arial"/>
               </a:rPr>
-              <a:t>Working day — before final presentations</a:t>
+              <a:t>Tuesday told you IF it works. Today you decide what to build.</a:t>
             </a:r>
           </a:p>
         </p:txBody>
@@ -3375,8 +4100,2591 @@
         </p:nvSpPr>
         <p:spPr>
           <a:xfrm>
-            <a:off x="822960" y="2286000"/>
-            <a:ext cx="10515600" cy="3840480"/>
+            <a:off x="658368" y="2286000"/>
+            <a:ext cx="10881360" cy="3657600"/>
+          </a:xfrm>
+          <a:prstGeom prst="rect">
+            <a:avLst/>
+          </a:prstGeom>
+          <a:noFill/>
+        </p:spPr>
+        <p:txBody>
+          <a:bodyPr wrap="square" anchor="t">
+            <a:spAutoFit/>
+          </a:bodyPr>
+          <a:lstStyle/>
+          <a:p>
+            <a:pPr algn="l">
+              <a:lnSpc>
+                <a:spcPct val="112000"/>
+              </a:lnSpc>
+            </a:pPr>
+            <a:r>
+              <a:rPr sz="2100" b="0">
+                <a:solidFill>
+                  <a:srgbClr val="F5F7FA"/>
+                </a:solidFill>
+                <a:latin typeface="Arial"/>
+              </a:rPr>
+              <a:t>You verified your Project 2 and found where the design doesn't move the value. Today you plan the fix - for a real person </a:t>
+            </a:r>
+            <a:r>
+              <a:rPr sz="2100" b="1">
+                <a:solidFill>
+                  <a:srgbClr val="00FF41"/>
+                </a:solidFill>
+                <a:latin typeface="Arial"/>
+              </a:rPr>
+              <a:t>outside this class.</a:t>
+            </a:r>
+          </a:p>
+          <a:p>
+            <a:pPr algn="l">
+              <a:lnSpc>
+                <a:spcPct val="112000"/>
+              </a:lnSpc>
+            </a:pPr>
+            <a:r>
+              <a:rPr sz="2000" b="0">
+                <a:solidFill>
+                  <a:srgbClr val="F5F7FA"/>
+                </a:solidFill>
+                <a:latin typeface="Arial"/>
+              </a:rPr>
+              <a:t/>
+            </a:r>
+          </a:p>
+          <a:p>
+            <a:pPr algn="l">
+              <a:lnSpc>
+                <a:spcPct val="112000"/>
+              </a:lnSpc>
+            </a:pPr>
+            <a:r>
+              <a:rPr sz="1900" b="0">
+                <a:solidFill>
+                  <a:srgbClr val="8A94A6"/>
+                </a:solidFill>
+                <a:latin typeface="Arial"/>
+              </a:rPr>
+              <a:t>Open with the Figma guest talk, then find the real need.</a:t>
+            </a:r>
+          </a:p>
+        </p:txBody>
+      </p:sp>
+      <p:sp>
+        <p:nvSpPr>
+          <p:cNvPr id="6" name="TextBox 5"/>
+          <p:cNvSpPr txBox="1"/>
+          <p:nvPr/>
+        </p:nvSpPr>
+        <p:spPr>
+          <a:xfrm>
+            <a:off x="640080" y="6355080"/>
+            <a:ext cx="10972800" cy="365760"/>
+          </a:xfrm>
+          <a:prstGeom prst="rect">
+            <a:avLst/>
+          </a:prstGeom>
+          <a:noFill/>
+        </p:spPr>
+        <p:txBody>
+          <a:bodyPr wrap="square" anchor="t">
+            <a:spAutoFit/>
+          </a:bodyPr>
+          <a:lstStyle/>
+          <a:p>
+            <a:pPr algn="l">
+              <a:lnSpc>
+                <a:spcPct val="100000"/>
+              </a:lnSpc>
+            </a:pPr>
+            <a:r>
+              <a:rPr sz="1000" b="0">
+                <a:solidFill>
+                  <a:srgbClr val="5A6474"/>
+                </a:solidFill>
+                <a:latin typeface="Courier New"/>
+              </a:rPr>
+              <a:t>Good Code, Good Vibes · TECHIE 1121 · Cornell Tech · Summer 2026</a:t>
+            </a:r>
+          </a:p>
+        </p:txBody>
+      </p:sp>
+    </p:spTree>
+  </p:cSld>
+  <p:clrMapOvr>
+    <a:masterClrMapping/>
+  </p:clrMapOvr>
+</p:sld>
+</file>
+
+<file path=ppt/slides/slide3.xml><?xml version="1.0" encoding="utf-8"?>
+<p:sld xmlns:a="http://schemas.openxmlformats.org/drawingml/2006/main" xmlns:p="http://schemas.openxmlformats.org/presentationml/2006/main" xmlns:r="http://schemas.openxmlformats.org/officeDocument/2006/relationships">
+  <p:cSld>
+    <p:bg>
+      <p:bgPr>
+        <a:solidFill>
+          <a:srgbClr val="0B0E14"/>
+        </a:solidFill>
+        <a:effectLst/>
+      </p:bgPr>
+    </p:bg>
+    <p:spTree>
+      <p:nvGrpSpPr>
+        <p:cNvPr id="1" name=""/>
+        <p:cNvGrpSpPr/>
+        <p:nvPr/>
+      </p:nvGrpSpPr>
+      <p:grpSpPr/>
+      <p:sp>
+        <p:nvSpPr>
+          <p:cNvPr id="2" name="TextBox 1"/>
+          <p:cNvSpPr txBox="1"/>
+          <p:nvPr/>
+        </p:nvSpPr>
+        <p:spPr>
+          <a:xfrm>
+            <a:off x="640080" y="502920"/>
+            <a:ext cx="10058400" cy="365760"/>
+          </a:xfrm>
+          <a:prstGeom prst="rect">
+            <a:avLst/>
+          </a:prstGeom>
+          <a:noFill/>
+        </p:spPr>
+        <p:txBody>
+          <a:bodyPr wrap="square" anchor="t">
+            <a:spAutoFit/>
+          </a:bodyPr>
+          <a:lstStyle/>
+          <a:p>
+            <a:pPr algn="l">
+              <a:lnSpc>
+                <a:spcPct val="100000"/>
+              </a:lnSpc>
+            </a:pPr>
+            <a:r>
+              <a:rPr sz="1300" b="1">
+                <a:solidFill>
+                  <a:srgbClr val="00FF41"/>
+                </a:solidFill>
+                <a:latin typeface="Courier New"/>
+              </a:rPr>
+              <a:t>KEEP YOUR VALUE</a:t>
+            </a:r>
+          </a:p>
+        </p:txBody>
+      </p:sp>
+      <p:sp>
+        <p:nvSpPr>
+          <p:cNvPr id="3" name="Rectangle 2"/>
+          <p:cNvSpPr/>
+          <p:nvPr/>
+        </p:nvSpPr>
+        <p:spPr>
+          <a:xfrm>
+            <a:off x="640080" y="932688"/>
+            <a:ext cx="822960" cy="73152"/>
+          </a:xfrm>
+          <a:prstGeom prst="rect">
+            <a:avLst/>
+          </a:prstGeom>
+          <a:solidFill>
+            <a:srgbClr val="00FF41"/>
+          </a:solidFill>
+          <a:ln>
+            <a:noFill/>
+          </a:ln>
+          <a:effectLst/>
+        </p:spPr>
+        <p:style>
+          <a:lnRef idx="1">
+            <a:schemeClr val="accent1"/>
+          </a:lnRef>
+          <a:fillRef idx="3">
+            <a:schemeClr val="accent1"/>
+          </a:fillRef>
+          <a:effectRef idx="2">
+            <a:schemeClr val="accent1"/>
+          </a:effectRef>
+          <a:fontRef idx="minor">
+            <a:schemeClr val="lt1"/>
+          </a:fontRef>
+        </p:style>
+        <p:txBody>
+          <a:bodyPr rtlCol="0" anchor="ctr"/>
+          <a:lstStyle/>
+          <a:p>
+            <a:pPr algn="ctr"/>
+          </a:p>
+        </p:txBody>
+      </p:sp>
+      <p:sp>
+        <p:nvSpPr>
+          <p:cNvPr id="4" name="TextBox 3"/>
+          <p:cNvSpPr txBox="1"/>
+          <p:nvPr/>
+        </p:nvSpPr>
+        <p:spPr>
+          <a:xfrm>
+            <a:off x="640080" y="1188720"/>
+            <a:ext cx="10972800" cy="1097280"/>
+          </a:xfrm>
+          <a:prstGeom prst="rect">
+            <a:avLst/>
+          </a:prstGeom>
+          <a:noFill/>
+        </p:spPr>
+        <p:txBody>
+          <a:bodyPr wrap="square" anchor="t">
+            <a:spAutoFit/>
+          </a:bodyPr>
+          <a:lstStyle/>
+          <a:p>
+            <a:pPr algn="l">
+              <a:lnSpc>
+                <a:spcPct val="100000"/>
+              </a:lnSpc>
+            </a:pPr>
+            <a:r>
+              <a:rPr sz="3400" b="1">
+                <a:solidFill>
+                  <a:srgbClr val="F5F7FA"/>
+                </a:solidFill>
+                <a:latin typeface="Arial"/>
+              </a:rPr>
+              <a:t>Change the design, not the commitment</a:t>
+            </a:r>
+          </a:p>
+        </p:txBody>
+      </p:sp>
+      <p:sp>
+        <p:nvSpPr>
+          <p:cNvPr id="5" name="TextBox 4"/>
+          <p:cNvSpPr txBox="1"/>
+          <p:nvPr/>
+        </p:nvSpPr>
+        <p:spPr>
+          <a:xfrm>
+            <a:off x="658368" y="2286000"/>
+            <a:ext cx="10881360" cy="3657600"/>
+          </a:xfrm>
+          <a:prstGeom prst="rect">
+            <a:avLst/>
+          </a:prstGeom>
+          <a:noFill/>
+        </p:spPr>
+        <p:txBody>
+          <a:bodyPr wrap="square" anchor="t">
+            <a:spAutoFit/>
+          </a:bodyPr>
+          <a:lstStyle/>
+          <a:p>
+            <a:pPr algn="l">
+              <a:lnSpc>
+                <a:spcPct val="112000"/>
+              </a:lnSpc>
+            </a:pPr>
+            <a:r>
+              <a:rPr sz="2100" b="0">
+                <a:solidFill>
+                  <a:srgbClr val="F5F7FA"/>
+                </a:solidFill>
+                <a:latin typeface="Arial"/>
+              </a:rPr>
+              <a:t>You already have a value and Tuesday's verdict. The final is the NEXT iteration of that value - not a new theme.</a:t>
+            </a:r>
+          </a:p>
+          <a:p>
+            <a:pPr algn="l">
+              <a:lnSpc>
+                <a:spcPct val="112000"/>
+              </a:lnSpc>
+            </a:pPr>
+            <a:r>
+              <a:rPr sz="2000" b="0">
+                <a:solidFill>
+                  <a:srgbClr val="F5F7FA"/>
+                </a:solidFill>
+                <a:latin typeface="Arial"/>
+              </a:rPr>
+              <a:t/>
+            </a:r>
+          </a:p>
+          <a:p>
+            <a:pPr algn="l">
+              <a:lnSpc>
+                <a:spcPct val="112000"/>
+              </a:lnSpc>
+            </a:pPr>
+            <a:r>
+              <a:rPr sz="1900" b="0">
+                <a:solidFill>
+                  <a:srgbClr val="8A94A6"/>
+                </a:solidFill>
+                <a:latin typeface="Arial"/>
+              </a:rPr>
+              <a:t>Today's job: name a specific beneficiary, and find what they actually need.</a:t>
+            </a:r>
+          </a:p>
+        </p:txBody>
+      </p:sp>
+      <p:sp>
+        <p:nvSpPr>
+          <p:cNvPr id="6" name="TextBox 5"/>
+          <p:cNvSpPr txBox="1"/>
+          <p:nvPr/>
+        </p:nvSpPr>
+        <p:spPr>
+          <a:xfrm>
+            <a:off x="640080" y="6355080"/>
+            <a:ext cx="10972800" cy="365760"/>
+          </a:xfrm>
+          <a:prstGeom prst="rect">
+            <a:avLst/>
+          </a:prstGeom>
+          <a:noFill/>
+        </p:spPr>
+        <p:txBody>
+          <a:bodyPr wrap="square" anchor="t">
+            <a:spAutoFit/>
+          </a:bodyPr>
+          <a:lstStyle/>
+          <a:p>
+            <a:pPr algn="l">
+              <a:lnSpc>
+                <a:spcPct val="100000"/>
+              </a:lnSpc>
+            </a:pPr>
+            <a:r>
+              <a:rPr sz="1000" b="0">
+                <a:solidFill>
+                  <a:srgbClr val="5A6474"/>
+                </a:solidFill>
+                <a:latin typeface="Courier New"/>
+              </a:rPr>
+              <a:t>Good Code, Good Vibes · TECHIE 1121 · Cornell Tech · Summer 2026</a:t>
+            </a:r>
+          </a:p>
+        </p:txBody>
+      </p:sp>
+    </p:spTree>
+  </p:cSld>
+  <p:clrMapOvr>
+    <a:masterClrMapping/>
+  </p:clrMapOvr>
+</p:sld>
+</file>
+
+<file path=ppt/slides/slide4.xml><?xml version="1.0" encoding="utf-8"?>
+<p:sld xmlns:a="http://schemas.openxmlformats.org/drawingml/2006/main" xmlns:p="http://schemas.openxmlformats.org/presentationml/2006/main" xmlns:r="http://schemas.openxmlformats.org/officeDocument/2006/relationships">
+  <p:cSld>
+    <p:bg>
+      <p:bgPr>
+        <a:solidFill>
+          <a:srgbClr val="0B0E14"/>
+        </a:solidFill>
+        <a:effectLst/>
+      </p:bgPr>
+    </p:bg>
+    <p:spTree>
+      <p:nvGrpSpPr>
+        <p:cNvPr id="1" name=""/>
+        <p:cNvGrpSpPr/>
+        <p:nvPr/>
+      </p:nvGrpSpPr>
+      <p:grpSpPr/>
+      <p:sp>
+        <p:nvSpPr>
+          <p:cNvPr id="2" name="TextBox 1"/>
+          <p:cNvSpPr txBox="1"/>
+          <p:nvPr/>
+        </p:nvSpPr>
+        <p:spPr>
+          <a:xfrm>
+            <a:off x="640080" y="502920"/>
+            <a:ext cx="10058400" cy="365760"/>
+          </a:xfrm>
+          <a:prstGeom prst="rect">
+            <a:avLst/>
+          </a:prstGeom>
+          <a:noFill/>
+        </p:spPr>
+        <p:txBody>
+          <a:bodyPr wrap="square" anchor="t">
+            <a:spAutoFit/>
+          </a:bodyPr>
+          <a:lstStyle/>
+          <a:p>
+            <a:pPr algn="l">
+              <a:lnSpc>
+                <a:spcPct val="100000"/>
+              </a:lnSpc>
+            </a:pPr>
+            <a:r>
+              <a:rPr sz="1300" b="1">
+                <a:solidFill>
+                  <a:srgbClr val="00FF41"/>
+                </a:solidFill>
+                <a:latin typeface="Courier New"/>
+              </a:rPr>
+              <a:t>FIND THE NEED</a:t>
+            </a:r>
+          </a:p>
+        </p:txBody>
+      </p:sp>
+      <p:sp>
+        <p:nvSpPr>
+          <p:cNvPr id="3" name="Rectangle 2"/>
+          <p:cNvSpPr/>
+          <p:nvPr/>
+        </p:nvSpPr>
+        <p:spPr>
+          <a:xfrm>
+            <a:off x="640080" y="932688"/>
+            <a:ext cx="822960" cy="73152"/>
+          </a:xfrm>
+          <a:prstGeom prst="rect">
+            <a:avLst/>
+          </a:prstGeom>
+          <a:solidFill>
+            <a:srgbClr val="00FF41"/>
+          </a:solidFill>
+          <a:ln>
+            <a:noFill/>
+          </a:ln>
+          <a:effectLst/>
+        </p:spPr>
+        <p:style>
+          <a:lnRef idx="1">
+            <a:schemeClr val="accent1"/>
+          </a:lnRef>
+          <a:fillRef idx="3">
+            <a:schemeClr val="accent1"/>
+          </a:fillRef>
+          <a:effectRef idx="2">
+            <a:schemeClr val="accent1"/>
+          </a:effectRef>
+          <a:fontRef idx="minor">
+            <a:schemeClr val="lt1"/>
+          </a:fontRef>
+        </p:style>
+        <p:txBody>
+          <a:bodyPr rtlCol="0" anchor="ctr"/>
+          <a:lstStyle/>
+          <a:p>
+            <a:pPr algn="ctr"/>
+          </a:p>
+        </p:txBody>
+      </p:sp>
+      <p:sp>
+        <p:nvSpPr>
+          <p:cNvPr id="4" name="TextBox 3"/>
+          <p:cNvSpPr txBox="1"/>
+          <p:nvPr/>
+        </p:nvSpPr>
+        <p:spPr>
+          <a:xfrm>
+            <a:off x="640080" y="1188720"/>
+            <a:ext cx="10972800" cy="914400"/>
+          </a:xfrm>
+          <a:prstGeom prst="rect">
+            <a:avLst/>
+          </a:prstGeom>
+          <a:noFill/>
+        </p:spPr>
+        <p:txBody>
+          <a:bodyPr wrap="square" anchor="t">
+            <a:spAutoFit/>
+          </a:bodyPr>
+          <a:lstStyle/>
+          <a:p>
+            <a:pPr algn="l">
+              <a:lnSpc>
+                <a:spcPct val="100000"/>
+              </a:lnSpc>
+            </a:pPr>
+            <a:r>
+              <a:rPr sz="3200" b="1">
+                <a:solidFill>
+                  <a:srgbClr val="F5F7FA"/>
+                </a:solidFill>
+                <a:latin typeface="Arial"/>
+              </a:rPr>
+              <a:t>Talk to someone - don't guess</a:t>
+            </a:r>
+          </a:p>
+        </p:txBody>
+      </p:sp>
+      <p:sp>
+        <p:nvSpPr>
+          <p:cNvPr id="5" name="Rounded Rectangle 4"/>
+          <p:cNvSpPr/>
+          <p:nvPr/>
+        </p:nvSpPr>
+        <p:spPr>
+          <a:xfrm>
+            <a:off x="640080" y="2468880"/>
+            <a:ext cx="3393338" cy="3383280"/>
+          </a:xfrm>
+          <a:prstGeom prst="roundRect">
+            <a:avLst/>
+          </a:prstGeom>
+          <a:solidFill>
+            <a:srgbClr val="151B26"/>
+          </a:solidFill>
+          <a:ln>
+            <a:noFill/>
+          </a:ln>
+          <a:effectLst/>
+        </p:spPr>
+        <p:style>
+          <a:lnRef idx="1">
+            <a:schemeClr val="accent1"/>
+          </a:lnRef>
+          <a:fillRef idx="3">
+            <a:schemeClr val="accent1"/>
+          </a:fillRef>
+          <a:effectRef idx="2">
+            <a:schemeClr val="accent1"/>
+          </a:effectRef>
+          <a:fontRef idx="minor">
+            <a:schemeClr val="lt1"/>
+          </a:fontRef>
+        </p:style>
+        <p:txBody>
+          <a:bodyPr rtlCol="0" anchor="ctr"/>
+          <a:lstStyle/>
+          <a:p>
+            <a:pPr algn="ctr"/>
+          </a:p>
+        </p:txBody>
+      </p:sp>
+      <p:sp>
+        <p:nvSpPr>
+          <p:cNvPr id="6" name="Rectangle 5"/>
+          <p:cNvSpPr/>
+          <p:nvPr/>
+        </p:nvSpPr>
+        <p:spPr>
+          <a:xfrm>
+            <a:off x="640080" y="2468880"/>
+            <a:ext cx="3393338" cy="82296"/>
+          </a:xfrm>
+          <a:prstGeom prst="rect">
+            <a:avLst/>
+          </a:prstGeom>
+          <a:solidFill>
+            <a:srgbClr val="00FF41"/>
+          </a:solidFill>
+          <a:ln>
+            <a:noFill/>
+          </a:ln>
+          <a:effectLst/>
+        </p:spPr>
+        <p:style>
+          <a:lnRef idx="1">
+            <a:schemeClr val="accent1"/>
+          </a:lnRef>
+          <a:fillRef idx="3">
+            <a:schemeClr val="accent1"/>
+          </a:fillRef>
+          <a:effectRef idx="2">
+            <a:schemeClr val="accent1"/>
+          </a:effectRef>
+          <a:fontRef idx="minor">
+            <a:schemeClr val="lt1"/>
+          </a:fontRef>
+        </p:style>
+        <p:txBody>
+          <a:bodyPr rtlCol="0" anchor="ctr"/>
+          <a:lstStyle/>
+          <a:p>
+            <a:pPr algn="ctr"/>
+          </a:p>
+        </p:txBody>
+      </p:sp>
+      <p:sp>
+        <p:nvSpPr>
+          <p:cNvPr id="7" name="TextBox 6"/>
+          <p:cNvSpPr txBox="1"/>
+          <p:nvPr/>
+        </p:nvSpPr>
+        <p:spPr>
+          <a:xfrm>
+            <a:off x="914400" y="2788920"/>
+            <a:ext cx="2844698" cy="457200"/>
+          </a:xfrm>
+          <a:prstGeom prst="rect">
+            <a:avLst/>
+          </a:prstGeom>
+          <a:noFill/>
+        </p:spPr>
+        <p:txBody>
+          <a:bodyPr wrap="square" anchor="t">
+            <a:spAutoFit/>
+          </a:bodyPr>
+          <a:lstStyle/>
+          <a:p>
+            <a:pPr algn="l">
+              <a:lnSpc>
+                <a:spcPct val="100000"/>
+              </a:lnSpc>
+            </a:pPr>
+            <a:r>
+              <a:rPr sz="1200" b="1">
+                <a:solidFill>
+                  <a:srgbClr val="00FF41"/>
+                </a:solidFill>
+                <a:latin typeface="Courier New"/>
+              </a:rPr>
+              <a:t>INTERVIEW</a:t>
+            </a:r>
+          </a:p>
+        </p:txBody>
+      </p:sp>
+      <p:sp>
+        <p:nvSpPr>
+          <p:cNvPr id="8" name="TextBox 7"/>
+          <p:cNvSpPr txBox="1"/>
+          <p:nvPr/>
+        </p:nvSpPr>
+        <p:spPr>
+          <a:xfrm>
+            <a:off x="914400" y="3246120"/>
+            <a:ext cx="2844698" cy="822960"/>
+          </a:xfrm>
+          <a:prstGeom prst="rect">
+            <a:avLst/>
+          </a:prstGeom>
+          <a:noFill/>
+        </p:spPr>
+        <p:txBody>
+          <a:bodyPr wrap="square" anchor="t">
+            <a:spAutoFit/>
+          </a:bodyPr>
+          <a:lstStyle/>
+          <a:p>
+            <a:pPr algn="l">
+              <a:lnSpc>
+                <a:spcPct val="100000"/>
+              </a:lnSpc>
+            </a:pPr>
+            <a:r>
+              <a:rPr sz="2000" b="1">
+                <a:solidFill>
+                  <a:srgbClr val="F5F7FA"/>
+                </a:solidFill>
+                <a:latin typeface="Arial"/>
+              </a:rPr>
+              <a:t>Ask, don't pitch</a:t>
+            </a:r>
+          </a:p>
+        </p:txBody>
+      </p:sp>
+      <p:sp>
+        <p:nvSpPr>
+          <p:cNvPr id="9" name="TextBox 8"/>
+          <p:cNvSpPr txBox="1"/>
+          <p:nvPr/>
+        </p:nvSpPr>
+        <p:spPr>
+          <a:xfrm>
+            <a:off x="914400" y="4114800"/>
+            <a:ext cx="2844698" cy="1554480"/>
+          </a:xfrm>
+          <a:prstGeom prst="rect">
+            <a:avLst/>
+          </a:prstGeom>
+          <a:noFill/>
+        </p:spPr>
+        <p:txBody>
+          <a:bodyPr wrap="square" anchor="t">
+            <a:spAutoFit/>
+          </a:bodyPr>
+          <a:lstStyle/>
+          <a:p>
+            <a:pPr algn="l">
+              <a:lnSpc>
+                <a:spcPct val="110000"/>
+              </a:lnSpc>
+            </a:pPr>
+            <a:r>
+              <a:rPr sz="1500" b="0">
+                <a:solidFill>
+                  <a:srgbClr val="8A94A6"/>
+                </a:solidFill>
+                <a:latin typeface="Arial"/>
+              </a:rPr>
+              <a:t>A short conversation with a real person outside the class. Ask about their problem, not your idea.</a:t>
+            </a:r>
+          </a:p>
+        </p:txBody>
+      </p:sp>
+      <p:sp>
+        <p:nvSpPr>
+          <p:cNvPr id="10" name="Rounded Rectangle 9"/>
+          <p:cNvSpPr/>
+          <p:nvPr/>
+        </p:nvSpPr>
+        <p:spPr>
+          <a:xfrm>
+            <a:off x="4399178" y="2468880"/>
+            <a:ext cx="3393338" cy="3383280"/>
+          </a:xfrm>
+          <a:prstGeom prst="roundRect">
+            <a:avLst/>
+          </a:prstGeom>
+          <a:solidFill>
+            <a:srgbClr val="151B26"/>
+          </a:solidFill>
+          <a:ln>
+            <a:noFill/>
+          </a:ln>
+          <a:effectLst/>
+        </p:spPr>
+        <p:style>
+          <a:lnRef idx="1">
+            <a:schemeClr val="accent1"/>
+          </a:lnRef>
+          <a:fillRef idx="3">
+            <a:schemeClr val="accent1"/>
+          </a:fillRef>
+          <a:effectRef idx="2">
+            <a:schemeClr val="accent1"/>
+          </a:effectRef>
+          <a:fontRef idx="minor">
+            <a:schemeClr val="lt1"/>
+          </a:fontRef>
+        </p:style>
+        <p:txBody>
+          <a:bodyPr rtlCol="0" anchor="ctr"/>
+          <a:lstStyle/>
+          <a:p>
+            <a:pPr algn="ctr"/>
+          </a:p>
+        </p:txBody>
+      </p:sp>
+      <p:sp>
+        <p:nvSpPr>
+          <p:cNvPr id="11" name="Rectangle 10"/>
+          <p:cNvSpPr/>
+          <p:nvPr/>
+        </p:nvSpPr>
+        <p:spPr>
+          <a:xfrm>
+            <a:off x="4399178" y="2468880"/>
+            <a:ext cx="3393338" cy="82296"/>
+          </a:xfrm>
+          <a:prstGeom prst="rect">
+            <a:avLst/>
+          </a:prstGeom>
+          <a:solidFill>
+            <a:srgbClr val="00FF41"/>
+          </a:solidFill>
+          <a:ln>
+            <a:noFill/>
+          </a:ln>
+          <a:effectLst/>
+        </p:spPr>
+        <p:style>
+          <a:lnRef idx="1">
+            <a:schemeClr val="accent1"/>
+          </a:lnRef>
+          <a:fillRef idx="3">
+            <a:schemeClr val="accent1"/>
+          </a:fillRef>
+          <a:effectRef idx="2">
+            <a:schemeClr val="accent1"/>
+          </a:effectRef>
+          <a:fontRef idx="minor">
+            <a:schemeClr val="lt1"/>
+          </a:fontRef>
+        </p:style>
+        <p:txBody>
+          <a:bodyPr rtlCol="0" anchor="ctr"/>
+          <a:lstStyle/>
+          <a:p>
+            <a:pPr algn="ctr"/>
+          </a:p>
+        </p:txBody>
+      </p:sp>
+      <p:sp>
+        <p:nvSpPr>
+          <p:cNvPr id="12" name="TextBox 11"/>
+          <p:cNvSpPr txBox="1"/>
+          <p:nvPr/>
+        </p:nvSpPr>
+        <p:spPr>
+          <a:xfrm>
+            <a:off x="4673498" y="2788920"/>
+            <a:ext cx="2844698" cy="457200"/>
+          </a:xfrm>
+          <a:prstGeom prst="rect">
+            <a:avLst/>
+          </a:prstGeom>
+          <a:noFill/>
+        </p:spPr>
+        <p:txBody>
+          <a:bodyPr wrap="square" anchor="t">
+            <a:spAutoFit/>
+          </a:bodyPr>
+          <a:lstStyle/>
+          <a:p>
+            <a:pPr algn="l">
+              <a:lnSpc>
+                <a:spcPct val="100000"/>
+              </a:lnSpc>
+            </a:pPr>
+            <a:r>
+              <a:rPr sz="1200" b="1">
+                <a:solidFill>
+                  <a:srgbClr val="00FF41"/>
+                </a:solidFill>
+                <a:latin typeface="Courier New"/>
+              </a:rPr>
+              <a:t>PERSONA</a:t>
+            </a:r>
+          </a:p>
+        </p:txBody>
+      </p:sp>
+      <p:sp>
+        <p:nvSpPr>
+          <p:cNvPr id="13" name="TextBox 12"/>
+          <p:cNvSpPr txBox="1"/>
+          <p:nvPr/>
+        </p:nvSpPr>
+        <p:spPr>
+          <a:xfrm>
+            <a:off x="4673498" y="3246120"/>
+            <a:ext cx="2844698" cy="822960"/>
+          </a:xfrm>
+          <a:prstGeom prst="rect">
+            <a:avLst/>
+          </a:prstGeom>
+          <a:noFill/>
+        </p:spPr>
+        <p:txBody>
+          <a:bodyPr wrap="square" anchor="t">
+            <a:spAutoFit/>
+          </a:bodyPr>
+          <a:lstStyle/>
+          <a:p>
+            <a:pPr algn="l">
+              <a:lnSpc>
+                <a:spcPct val="100000"/>
+              </a:lnSpc>
+            </a:pPr>
+            <a:r>
+              <a:rPr sz="2000" b="1">
+                <a:solidFill>
+                  <a:srgbClr val="F5F7FA"/>
+                </a:solidFill>
+                <a:latin typeface="Arial"/>
+              </a:rPr>
+              <a:t>One specific human</a:t>
+            </a:r>
+          </a:p>
+        </p:txBody>
+      </p:sp>
+      <p:sp>
+        <p:nvSpPr>
+          <p:cNvPr id="14" name="TextBox 13"/>
+          <p:cNvSpPr txBox="1"/>
+          <p:nvPr/>
+        </p:nvSpPr>
+        <p:spPr>
+          <a:xfrm>
+            <a:off x="4673498" y="4114800"/>
+            <a:ext cx="2844698" cy="1554480"/>
+          </a:xfrm>
+          <a:prstGeom prst="rect">
+            <a:avLst/>
+          </a:prstGeom>
+          <a:noFill/>
+        </p:spPr>
+        <p:txBody>
+          <a:bodyPr wrap="square" anchor="t">
+            <a:spAutoFit/>
+          </a:bodyPr>
+          <a:lstStyle/>
+          <a:p>
+            <a:pPr algn="l">
+              <a:lnSpc>
+                <a:spcPct val="110000"/>
+              </a:lnSpc>
+            </a:pPr>
+            <a:r>
+              <a:rPr sz="1500" b="0">
+                <a:solidFill>
+                  <a:srgbClr val="8A94A6"/>
+                </a:solidFill>
+                <a:latin typeface="Arial"/>
+              </a:rPr>
+              <a:t>Name, situation, goal, frustration, context. Not 'students' - one person you design for.</a:t>
+            </a:r>
+          </a:p>
+        </p:txBody>
+      </p:sp>
+      <p:sp>
+        <p:nvSpPr>
+          <p:cNvPr id="15" name="Rounded Rectangle 14"/>
+          <p:cNvSpPr/>
+          <p:nvPr/>
+        </p:nvSpPr>
+        <p:spPr>
+          <a:xfrm>
+            <a:off x="8158276" y="2468880"/>
+            <a:ext cx="3393338" cy="3383280"/>
+          </a:xfrm>
+          <a:prstGeom prst="roundRect">
+            <a:avLst/>
+          </a:prstGeom>
+          <a:solidFill>
+            <a:srgbClr val="151B26"/>
+          </a:solidFill>
+          <a:ln>
+            <a:noFill/>
+          </a:ln>
+          <a:effectLst/>
+        </p:spPr>
+        <p:style>
+          <a:lnRef idx="1">
+            <a:schemeClr val="accent1"/>
+          </a:lnRef>
+          <a:fillRef idx="3">
+            <a:schemeClr val="accent1"/>
+          </a:fillRef>
+          <a:effectRef idx="2">
+            <a:schemeClr val="accent1"/>
+          </a:effectRef>
+          <a:fontRef idx="minor">
+            <a:schemeClr val="lt1"/>
+          </a:fontRef>
+        </p:style>
+        <p:txBody>
+          <a:bodyPr rtlCol="0" anchor="ctr"/>
+          <a:lstStyle/>
+          <a:p>
+            <a:pPr algn="ctr"/>
+          </a:p>
+        </p:txBody>
+      </p:sp>
+      <p:sp>
+        <p:nvSpPr>
+          <p:cNvPr id="16" name="Rectangle 15"/>
+          <p:cNvSpPr/>
+          <p:nvPr/>
+        </p:nvSpPr>
+        <p:spPr>
+          <a:xfrm>
+            <a:off x="8158276" y="2468880"/>
+            <a:ext cx="3393338" cy="82296"/>
+          </a:xfrm>
+          <a:prstGeom prst="rect">
+            <a:avLst/>
+          </a:prstGeom>
+          <a:solidFill>
+            <a:srgbClr val="00FF41"/>
+          </a:solidFill>
+          <a:ln>
+            <a:noFill/>
+          </a:ln>
+          <a:effectLst/>
+        </p:spPr>
+        <p:style>
+          <a:lnRef idx="1">
+            <a:schemeClr val="accent1"/>
+          </a:lnRef>
+          <a:fillRef idx="3">
+            <a:schemeClr val="accent1"/>
+          </a:fillRef>
+          <a:effectRef idx="2">
+            <a:schemeClr val="accent1"/>
+          </a:effectRef>
+          <a:fontRef idx="minor">
+            <a:schemeClr val="lt1"/>
+          </a:fontRef>
+        </p:style>
+        <p:txBody>
+          <a:bodyPr rtlCol="0" anchor="ctr"/>
+          <a:lstStyle/>
+          <a:p>
+            <a:pPr algn="ctr"/>
+          </a:p>
+        </p:txBody>
+      </p:sp>
+      <p:sp>
+        <p:nvSpPr>
+          <p:cNvPr id="17" name="TextBox 16"/>
+          <p:cNvSpPr txBox="1"/>
+          <p:nvPr/>
+        </p:nvSpPr>
+        <p:spPr>
+          <a:xfrm>
+            <a:off x="8432596" y="2788920"/>
+            <a:ext cx="2844698" cy="457200"/>
+          </a:xfrm>
+          <a:prstGeom prst="rect">
+            <a:avLst/>
+          </a:prstGeom>
+          <a:noFill/>
+        </p:spPr>
+        <p:txBody>
+          <a:bodyPr wrap="square" anchor="t">
+            <a:spAutoFit/>
+          </a:bodyPr>
+          <a:lstStyle/>
+          <a:p>
+            <a:pPr algn="l">
+              <a:lnSpc>
+                <a:spcPct val="100000"/>
+              </a:lnSpc>
+            </a:pPr>
+            <a:r>
+              <a:rPr sz="1200" b="1">
+                <a:solidFill>
+                  <a:srgbClr val="00FF41"/>
+                </a:solidFill>
+                <a:latin typeface="Courier New"/>
+              </a:rPr>
+              <a:t>THE NEED</a:t>
+            </a:r>
+          </a:p>
+        </p:txBody>
+      </p:sp>
+      <p:sp>
+        <p:nvSpPr>
+          <p:cNvPr id="18" name="TextBox 17"/>
+          <p:cNvSpPr txBox="1"/>
+          <p:nvPr/>
+        </p:nvSpPr>
+        <p:spPr>
+          <a:xfrm>
+            <a:off x="8432596" y="3246120"/>
+            <a:ext cx="2844698" cy="822960"/>
+          </a:xfrm>
+          <a:prstGeom prst="rect">
+            <a:avLst/>
+          </a:prstGeom>
+          <a:noFill/>
+        </p:spPr>
+        <p:txBody>
+          <a:bodyPr wrap="square" anchor="t">
+            <a:spAutoFit/>
+          </a:bodyPr>
+          <a:lstStyle/>
+          <a:p>
+            <a:pPr algn="l">
+              <a:lnSpc>
+                <a:spcPct val="100000"/>
+              </a:lnSpc>
+            </a:pPr>
+            <a:r>
+              <a:rPr sz="2000" b="1">
+                <a:solidFill>
+                  <a:srgbClr val="F5F7FA"/>
+                </a:solidFill>
+                <a:latin typeface="Arial"/>
+              </a:rPr>
+              <a:t>In their words</a:t>
+            </a:r>
+          </a:p>
+        </p:txBody>
+      </p:sp>
+      <p:sp>
+        <p:nvSpPr>
+          <p:cNvPr id="19" name="TextBox 18"/>
+          <p:cNvSpPr txBox="1"/>
+          <p:nvPr/>
+        </p:nvSpPr>
+        <p:spPr>
+          <a:xfrm>
+            <a:off x="8432596" y="4114800"/>
+            <a:ext cx="2844698" cy="1554480"/>
+          </a:xfrm>
+          <a:prstGeom prst="rect">
+            <a:avLst/>
+          </a:prstGeom>
+          <a:noFill/>
+        </p:spPr>
+        <p:txBody>
+          <a:bodyPr wrap="square" anchor="t">
+            <a:spAutoFit/>
+          </a:bodyPr>
+          <a:lstStyle/>
+          <a:p>
+            <a:pPr algn="l">
+              <a:lnSpc>
+                <a:spcPct val="110000"/>
+              </a:lnSpc>
+            </a:pPr>
+            <a:r>
+              <a:rPr sz="1500" b="0">
+                <a:solidFill>
+                  <a:srgbClr val="8A94A6"/>
+                </a:solidFill>
+                <a:latin typeface="Arial"/>
+              </a:rPr>
+              <a:t>Write the need the way they would say it. That sentence is what your design has to serve.</a:t>
+            </a:r>
+          </a:p>
+        </p:txBody>
+      </p:sp>
+      <p:sp>
+        <p:nvSpPr>
+          <p:cNvPr id="20" name="TextBox 19"/>
+          <p:cNvSpPr txBox="1"/>
+          <p:nvPr/>
+        </p:nvSpPr>
+        <p:spPr>
+          <a:xfrm>
+            <a:off x="640080" y="6355080"/>
+            <a:ext cx="10972800" cy="365760"/>
+          </a:xfrm>
+          <a:prstGeom prst="rect">
+            <a:avLst/>
+          </a:prstGeom>
+          <a:noFill/>
+        </p:spPr>
+        <p:txBody>
+          <a:bodyPr wrap="square" anchor="t">
+            <a:spAutoFit/>
+          </a:bodyPr>
+          <a:lstStyle/>
+          <a:p>
+            <a:pPr algn="l">
+              <a:lnSpc>
+                <a:spcPct val="100000"/>
+              </a:lnSpc>
+            </a:pPr>
+            <a:r>
+              <a:rPr sz="1000" b="0">
+                <a:solidFill>
+                  <a:srgbClr val="5A6474"/>
+                </a:solidFill>
+                <a:latin typeface="Courier New"/>
+              </a:rPr>
+              <a:t>Good Code, Good Vibes · TECHIE 1121 · Cornell Tech · Summer 2026</a:t>
+            </a:r>
+          </a:p>
+        </p:txBody>
+      </p:sp>
+    </p:spTree>
+  </p:cSld>
+  <p:clrMapOvr>
+    <a:masterClrMapping/>
+  </p:clrMapOvr>
+</p:sld>
+</file>
+
+<file path=ppt/slides/slide5.xml><?xml version="1.0" encoding="utf-8"?>
+<p:sld xmlns:a="http://schemas.openxmlformats.org/drawingml/2006/main" xmlns:p="http://schemas.openxmlformats.org/presentationml/2006/main" xmlns:r="http://schemas.openxmlformats.org/officeDocument/2006/relationships">
+  <p:cSld>
+    <p:bg>
+      <p:bgPr>
+        <a:solidFill>
+          <a:srgbClr val="0B0E14"/>
+        </a:solidFill>
+        <a:effectLst/>
+      </p:bgPr>
+    </p:bg>
+    <p:spTree>
+      <p:nvGrpSpPr>
+        <p:cNvPr id="1" name=""/>
+        <p:cNvGrpSpPr/>
+        <p:nvPr/>
+      </p:nvGrpSpPr>
+      <p:grpSpPr/>
+      <p:sp>
+        <p:nvSpPr>
+          <p:cNvPr id="2" name="TextBox 1"/>
+          <p:cNvSpPr txBox="1"/>
+          <p:nvPr/>
+        </p:nvSpPr>
+        <p:spPr>
+          <a:xfrm>
+            <a:off x="640080" y="502920"/>
+            <a:ext cx="10058400" cy="365760"/>
+          </a:xfrm>
+          <a:prstGeom prst="rect">
+            <a:avLst/>
+          </a:prstGeom>
+          <a:noFill/>
+        </p:spPr>
+        <p:txBody>
+          <a:bodyPr wrap="square" anchor="t">
+            <a:spAutoFit/>
+          </a:bodyPr>
+          <a:lstStyle/>
+          <a:p>
+            <a:pPr algn="l">
+              <a:lnSpc>
+                <a:spcPct val="100000"/>
+              </a:lnSpc>
+            </a:pPr>
+            <a:r>
+              <a:rPr sz="1300" b="1">
+                <a:solidFill>
+                  <a:srgbClr val="00FF41"/>
+                </a:solidFill>
+                <a:latin typeface="Courier New"/>
+              </a:rPr>
+              <a:t>OPERATIONALIZE - THE VALUE TREE</a:t>
+            </a:r>
+          </a:p>
+        </p:txBody>
+      </p:sp>
+      <p:sp>
+        <p:nvSpPr>
+          <p:cNvPr id="3" name="Rectangle 2"/>
+          <p:cNvSpPr/>
+          <p:nvPr/>
+        </p:nvSpPr>
+        <p:spPr>
+          <a:xfrm>
+            <a:off x="640080" y="932688"/>
+            <a:ext cx="822960" cy="73152"/>
+          </a:xfrm>
+          <a:prstGeom prst="rect">
+            <a:avLst/>
+          </a:prstGeom>
+          <a:solidFill>
+            <a:srgbClr val="00FF41"/>
+          </a:solidFill>
+          <a:ln>
+            <a:noFill/>
+          </a:ln>
+          <a:effectLst/>
+        </p:spPr>
+        <p:style>
+          <a:lnRef idx="1">
+            <a:schemeClr val="accent1"/>
+          </a:lnRef>
+          <a:fillRef idx="3">
+            <a:schemeClr val="accent1"/>
+          </a:fillRef>
+          <a:effectRef idx="2">
+            <a:schemeClr val="accent1"/>
+          </a:effectRef>
+          <a:fontRef idx="minor">
+            <a:schemeClr val="lt1"/>
+          </a:fontRef>
+        </p:style>
+        <p:txBody>
+          <a:bodyPr rtlCol="0" anchor="ctr"/>
+          <a:lstStyle/>
+          <a:p>
+            <a:pPr algn="ctr"/>
+          </a:p>
+        </p:txBody>
+      </p:sp>
+      <p:sp>
+        <p:nvSpPr>
+          <p:cNvPr id="4" name="TextBox 3"/>
+          <p:cNvSpPr txBox="1"/>
+          <p:nvPr/>
+        </p:nvSpPr>
+        <p:spPr>
+          <a:xfrm>
+            <a:off x="640080" y="1188720"/>
+            <a:ext cx="10972800" cy="1097280"/>
+          </a:xfrm>
+          <a:prstGeom prst="rect">
+            <a:avLst/>
+          </a:prstGeom>
+          <a:noFill/>
+        </p:spPr>
+        <p:txBody>
+          <a:bodyPr wrap="square" anchor="t">
+            <a:spAutoFit/>
+          </a:bodyPr>
+          <a:lstStyle/>
+          <a:p>
+            <a:pPr algn="l">
+              <a:lnSpc>
+                <a:spcPct val="100000"/>
+              </a:lnSpc>
+            </a:pPr>
+            <a:r>
+              <a:rPr sz="3400" b="1">
+                <a:solidFill>
+                  <a:srgbClr val="F5F7FA"/>
+                </a:solidFill>
+                <a:latin typeface="Arial"/>
+              </a:rPr>
+              <a:t>From value down to the prompts you'll build</a:t>
+            </a:r>
+          </a:p>
+        </p:txBody>
+      </p:sp>
+      <p:sp>
+        <p:nvSpPr>
+          <p:cNvPr id="5" name="TextBox 4"/>
+          <p:cNvSpPr txBox="1"/>
+          <p:nvPr/>
+        </p:nvSpPr>
+        <p:spPr>
+          <a:xfrm>
+            <a:off x="658368" y="2286000"/>
+            <a:ext cx="10881360" cy="3657600"/>
+          </a:xfrm>
+          <a:prstGeom prst="rect">
+            <a:avLst/>
+          </a:prstGeom>
+          <a:noFill/>
+        </p:spPr>
+        <p:txBody>
+          <a:bodyPr wrap="square" anchor="t">
+            <a:spAutoFit/>
+          </a:bodyPr>
+          <a:lstStyle/>
+          <a:p>
+            <a:pPr algn="l">
+              <a:lnSpc>
+                <a:spcPct val="112000"/>
+              </a:lnSpc>
+            </a:pPr>
+            <a:r>
+              <a:rPr sz="2000" b="0">
+                <a:solidFill>
+                  <a:srgbClr val="F5F7FA"/>
+                </a:solidFill>
+                <a:latin typeface="Arial"/>
+              </a:rPr>
+              <a:t>Break your value down until it becomes something you can actually build:</a:t>
+            </a:r>
+          </a:p>
+          <a:p>
+            <a:pPr algn="l">
+              <a:lnSpc>
+                <a:spcPct val="112000"/>
+              </a:lnSpc>
+            </a:pPr>
+            <a:r>
+              <a:rPr sz="2000" b="0">
+                <a:solidFill>
+                  <a:srgbClr val="F5F7FA"/>
+                </a:solidFill>
+                <a:latin typeface="Arial"/>
+              </a:rPr>
+              <a:t/>
+            </a:r>
+          </a:p>
+          <a:p>
+            <a:pPr algn="l">
+              <a:lnSpc>
+                <a:spcPct val="112000"/>
+              </a:lnSpc>
+            </a:pPr>
+            <a:r>
+              <a:rPr sz="2200" b="0">
+                <a:solidFill>
+                  <a:srgbClr val="F5F7FA"/>
+                </a:solidFill>
+                <a:latin typeface="Arial"/>
+              </a:rPr>
+              <a:t>value  -&gt;  norms  -&gt;  requirements  -&gt;  features  -&gt;  </a:t>
+            </a:r>
+            <a:r>
+              <a:rPr sz="2200" b="1">
+                <a:solidFill>
+                  <a:srgbClr val="00FF41"/>
+                </a:solidFill>
+                <a:latin typeface="Arial"/>
+              </a:rPr>
+              <a:t>the prompts you run tomorrow</a:t>
+            </a:r>
+          </a:p>
+          <a:p>
+            <a:pPr algn="l">
+              <a:lnSpc>
+                <a:spcPct val="112000"/>
+              </a:lnSpc>
+            </a:pPr>
+            <a:r>
+              <a:rPr sz="2000" b="0">
+                <a:solidFill>
+                  <a:srgbClr val="F5F7FA"/>
+                </a:solidFill>
+                <a:latin typeface="Arial"/>
+              </a:rPr>
+              <a:t/>
+            </a:r>
+          </a:p>
+          <a:p>
+            <a:pPr algn="l">
+              <a:lnSpc>
+                <a:spcPct val="112000"/>
+              </a:lnSpc>
+            </a:pPr>
+            <a:r>
+              <a:rPr sz="1700" b="0">
+                <a:solidFill>
+                  <a:srgbClr val="8A94A6"/>
+                </a:solidFill>
+                <a:latin typeface="Arial"/>
+              </a:rPr>
+              <a:t>The bottom of the tree IS your Thursday build plan - the exact prompts, grounded in the value.</a:t>
+            </a:r>
+          </a:p>
+        </p:txBody>
+      </p:sp>
+      <p:sp>
+        <p:nvSpPr>
+          <p:cNvPr id="6" name="TextBox 5"/>
+          <p:cNvSpPr txBox="1"/>
+          <p:nvPr/>
+        </p:nvSpPr>
+        <p:spPr>
+          <a:xfrm>
+            <a:off x="640080" y="6355080"/>
+            <a:ext cx="10972800" cy="365760"/>
+          </a:xfrm>
+          <a:prstGeom prst="rect">
+            <a:avLst/>
+          </a:prstGeom>
+          <a:noFill/>
+        </p:spPr>
+        <p:txBody>
+          <a:bodyPr wrap="square" anchor="t">
+            <a:spAutoFit/>
+          </a:bodyPr>
+          <a:lstStyle/>
+          <a:p>
+            <a:pPr algn="l">
+              <a:lnSpc>
+                <a:spcPct val="100000"/>
+              </a:lnSpc>
+            </a:pPr>
+            <a:r>
+              <a:rPr sz="1000" b="0">
+                <a:solidFill>
+                  <a:srgbClr val="5A6474"/>
+                </a:solidFill>
+                <a:latin typeface="Courier New"/>
+              </a:rPr>
+              <a:t>Good Code, Good Vibes · TECHIE 1121 · Cornell Tech · Summer 2026</a:t>
+            </a:r>
+          </a:p>
+        </p:txBody>
+      </p:sp>
+    </p:spTree>
+  </p:cSld>
+  <p:clrMapOvr>
+    <a:masterClrMapping/>
+  </p:clrMapOvr>
+</p:sld>
+</file>
+
+<file path=ppt/slides/slide6.xml><?xml version="1.0" encoding="utf-8"?>
+<p:sld xmlns:a="http://schemas.openxmlformats.org/drawingml/2006/main" xmlns:p="http://schemas.openxmlformats.org/presentationml/2006/main" xmlns:r="http://schemas.openxmlformats.org/officeDocument/2006/relationships">
+  <p:cSld>
+    <p:bg>
+      <p:bgPr>
+        <a:solidFill>
+          <a:srgbClr val="0B0E14"/>
+        </a:solidFill>
+        <a:effectLst/>
+      </p:bgPr>
+    </p:bg>
+    <p:spTree>
+      <p:nvGrpSpPr>
+        <p:cNvPr id="1" name=""/>
+        <p:cNvGrpSpPr/>
+        <p:nvPr/>
+      </p:nvGrpSpPr>
+      <p:grpSpPr/>
+      <p:sp>
+        <p:nvSpPr>
+          <p:cNvPr id="2" name="TextBox 1"/>
+          <p:cNvSpPr txBox="1"/>
+          <p:nvPr/>
+        </p:nvSpPr>
+        <p:spPr>
+          <a:xfrm>
+            <a:off x="640080" y="502920"/>
+            <a:ext cx="10058400" cy="365760"/>
+          </a:xfrm>
+          <a:prstGeom prst="rect">
+            <a:avLst/>
+          </a:prstGeom>
+          <a:noFill/>
+        </p:spPr>
+        <p:txBody>
+          <a:bodyPr wrap="square" anchor="t">
+            <a:spAutoFit/>
+          </a:bodyPr>
+          <a:lstStyle/>
+          <a:p>
+            <a:pPr algn="l">
+              <a:lnSpc>
+                <a:spcPct val="100000"/>
+              </a:lnSpc>
+            </a:pPr>
+            <a:r>
+              <a:rPr sz="1300" b="1">
+                <a:solidFill>
+                  <a:srgbClr val="00FF41"/>
+                </a:solidFill>
+                <a:latin typeface="Courier New"/>
+              </a:rPr>
+              <a:t>STORYBOARD IT</a:t>
+            </a:r>
+          </a:p>
+        </p:txBody>
+      </p:sp>
+      <p:sp>
+        <p:nvSpPr>
+          <p:cNvPr id="3" name="Rectangle 2"/>
+          <p:cNvSpPr/>
+          <p:nvPr/>
+        </p:nvSpPr>
+        <p:spPr>
+          <a:xfrm>
+            <a:off x="640080" y="932688"/>
+            <a:ext cx="822960" cy="73152"/>
+          </a:xfrm>
+          <a:prstGeom prst="rect">
+            <a:avLst/>
+          </a:prstGeom>
+          <a:solidFill>
+            <a:srgbClr val="00FF41"/>
+          </a:solidFill>
+          <a:ln>
+            <a:noFill/>
+          </a:ln>
+          <a:effectLst/>
+        </p:spPr>
+        <p:style>
+          <a:lnRef idx="1">
+            <a:schemeClr val="accent1"/>
+          </a:lnRef>
+          <a:fillRef idx="3">
+            <a:schemeClr val="accent1"/>
+          </a:fillRef>
+          <a:effectRef idx="2">
+            <a:schemeClr val="accent1"/>
+          </a:effectRef>
+          <a:fontRef idx="minor">
+            <a:schemeClr val="lt1"/>
+          </a:fontRef>
+        </p:style>
+        <p:txBody>
+          <a:bodyPr rtlCol="0" anchor="ctr"/>
+          <a:lstStyle/>
+          <a:p>
+            <a:pPr algn="ctr"/>
+          </a:p>
+        </p:txBody>
+      </p:sp>
+      <p:sp>
+        <p:nvSpPr>
+          <p:cNvPr id="4" name="TextBox 3"/>
+          <p:cNvSpPr txBox="1"/>
+          <p:nvPr/>
+        </p:nvSpPr>
+        <p:spPr>
+          <a:xfrm>
+            <a:off x="640080" y="1188720"/>
+            <a:ext cx="10972800" cy="1097280"/>
+          </a:xfrm>
+          <a:prstGeom prst="rect">
+            <a:avLst/>
+          </a:prstGeom>
+          <a:noFill/>
+        </p:spPr>
+        <p:txBody>
+          <a:bodyPr wrap="square" anchor="t">
+            <a:spAutoFit/>
+          </a:bodyPr>
+          <a:lstStyle/>
+          <a:p>
+            <a:pPr algn="l">
+              <a:lnSpc>
+                <a:spcPct val="100000"/>
+              </a:lnSpc>
+            </a:pPr>
+            <a:r>
+              <a:rPr sz="3400" b="1">
+                <a:solidFill>
+                  <a:srgbClr val="F5F7FA"/>
+                </a:solidFill>
+                <a:latin typeface="Arial"/>
+              </a:rPr>
+              <a:t>4-8 frames: the value in use</a:t>
+            </a:r>
+          </a:p>
+        </p:txBody>
+      </p:sp>
+      <p:sp>
+        <p:nvSpPr>
+          <p:cNvPr id="5" name="TextBox 4"/>
+          <p:cNvSpPr txBox="1"/>
+          <p:nvPr/>
+        </p:nvSpPr>
+        <p:spPr>
+          <a:xfrm>
+            <a:off x="658368" y="2286000"/>
+            <a:ext cx="10881360" cy="3657600"/>
+          </a:xfrm>
+          <a:prstGeom prst="rect">
+            <a:avLst/>
+          </a:prstGeom>
+          <a:noFill/>
+        </p:spPr>
+        <p:txBody>
+          <a:bodyPr wrap="square" anchor="t">
+            <a:spAutoFit/>
+          </a:bodyPr>
+          <a:lstStyle/>
+          <a:p>
+            <a:pPr algn="l">
+              <a:lnSpc>
+                <a:spcPct val="112000"/>
+              </a:lnSpc>
+            </a:pPr>
+            <a:r>
+              <a:rPr sz="2000" b="1">
+                <a:solidFill>
+                  <a:srgbClr val="00FF41"/>
+                </a:solidFill>
+                <a:latin typeface="Arial"/>
+              </a:rPr>
+              <a:t>•  </a:t>
+            </a:r>
+            <a:r>
+              <a:rPr sz="2000" b="0">
+                <a:solidFill>
+                  <a:srgbClr val="F5F7FA"/>
+                </a:solidFill>
+                <a:latin typeface="Arial"/>
+              </a:rPr>
+              <a:t>Frame the user, their problem, where your thing enters, and what changes.</a:t>
+            </a:r>
+          </a:p>
+          <a:p>
+            <a:pPr algn="l">
+              <a:lnSpc>
+                <a:spcPct val="112000"/>
+              </a:lnSpc>
+            </a:pPr>
+            <a:r>
+              <a:rPr sz="2000" b="1">
+                <a:solidFill>
+                  <a:srgbClr val="00FF41"/>
+                </a:solidFill>
+                <a:latin typeface="Arial"/>
+              </a:rPr>
+              <a:t>•  </a:t>
+            </a:r>
+            <a:r>
+              <a:rPr sz="2000" b="0">
+                <a:solidFill>
+                  <a:srgbClr val="F5F7FA"/>
+                </a:solidFill>
+                <a:latin typeface="Arial"/>
+              </a:rPr>
+              <a:t>Hand-drawn (photograph it) or AI-assisted - rough is fine.</a:t>
+            </a:r>
+          </a:p>
+          <a:p>
+            <a:pPr algn="l">
+              <a:lnSpc>
+                <a:spcPct val="112000"/>
+              </a:lnSpc>
+            </a:pPr>
+            <a:r>
+              <a:rPr sz="2000" b="1">
+                <a:solidFill>
+                  <a:srgbClr val="00FF41"/>
+                </a:solidFill>
+                <a:latin typeface="Arial"/>
+              </a:rPr>
+              <a:t>•  </a:t>
+            </a:r>
+            <a:r>
+              <a:rPr sz="2000" b="0">
+                <a:solidFill>
+                  <a:srgbClr val="F5F7FA"/>
+                </a:solidFill>
+                <a:latin typeface="Arial"/>
+              </a:rPr>
+              <a:t>It doubles as your Thursday pitch skeleton.</a:t>
+            </a:r>
+          </a:p>
+          <a:p>
+            <a:pPr algn="l">
+              <a:lnSpc>
+                <a:spcPct val="112000"/>
+              </a:lnSpc>
+            </a:pPr>
+            <a:r>
+              <a:rPr sz="2000" b="1">
+                <a:solidFill>
+                  <a:srgbClr val="00FF41"/>
+                </a:solidFill>
+                <a:latin typeface="Arial"/>
+              </a:rPr>
+              <a:t>•  </a:t>
+            </a:r>
+            <a:r>
+              <a:rPr sz="2000" b="0">
+                <a:solidFill>
+                  <a:srgbClr val="F5F7FA"/>
+                </a:solidFill>
+                <a:latin typeface="Arial"/>
+              </a:rPr>
+              <a:t>Show the value living in the design, not just in the copy.</a:t>
+            </a:r>
+          </a:p>
+        </p:txBody>
+      </p:sp>
+      <p:sp>
+        <p:nvSpPr>
+          <p:cNvPr id="6" name="TextBox 5"/>
+          <p:cNvSpPr txBox="1"/>
+          <p:nvPr/>
+        </p:nvSpPr>
+        <p:spPr>
+          <a:xfrm>
+            <a:off x="640080" y="6355080"/>
+            <a:ext cx="10972800" cy="365760"/>
+          </a:xfrm>
+          <a:prstGeom prst="rect">
+            <a:avLst/>
+          </a:prstGeom>
+          <a:noFill/>
+        </p:spPr>
+        <p:txBody>
+          <a:bodyPr wrap="square" anchor="t">
+            <a:spAutoFit/>
+          </a:bodyPr>
+          <a:lstStyle/>
+          <a:p>
+            <a:pPr algn="l">
+              <a:lnSpc>
+                <a:spcPct val="100000"/>
+              </a:lnSpc>
+            </a:pPr>
+            <a:r>
+              <a:rPr sz="1000" b="0">
+                <a:solidFill>
+                  <a:srgbClr val="5A6474"/>
+                </a:solidFill>
+                <a:latin typeface="Courier New"/>
+              </a:rPr>
+              <a:t>Good Code, Good Vibes · TECHIE 1121 · Cornell Tech · Summer 2026</a:t>
+            </a:r>
+          </a:p>
+        </p:txBody>
+      </p:sp>
+    </p:spTree>
+  </p:cSld>
+  <p:clrMapOvr>
+    <a:masterClrMapping/>
+  </p:clrMapOvr>
+</p:sld>
+</file>
+
+<file path=ppt/slides/slide7.xml><?xml version="1.0" encoding="utf-8"?>
+<p:sld xmlns:a="http://schemas.openxmlformats.org/drawingml/2006/main" xmlns:p="http://schemas.openxmlformats.org/presentationml/2006/main" xmlns:r="http://schemas.openxmlformats.org/officeDocument/2006/relationships">
+  <p:cSld>
+    <p:bg>
+      <p:bgPr>
+        <a:solidFill>
+          <a:srgbClr val="0B0E14"/>
+        </a:solidFill>
+        <a:effectLst/>
+      </p:bgPr>
+    </p:bg>
+    <p:spTree>
+      <p:nvGrpSpPr>
+        <p:cNvPr id="1" name=""/>
+        <p:cNvGrpSpPr/>
+        <p:nvPr/>
+      </p:nvGrpSpPr>
+      <p:grpSpPr/>
+      <p:sp>
+        <p:nvSpPr>
+          <p:cNvPr id="2" name="TextBox 1"/>
+          <p:cNvSpPr txBox="1"/>
+          <p:nvPr/>
+        </p:nvSpPr>
+        <p:spPr>
+          <a:xfrm>
+            <a:off x="640080" y="502920"/>
+            <a:ext cx="10058400" cy="365760"/>
+          </a:xfrm>
+          <a:prstGeom prst="rect">
+            <a:avLst/>
+          </a:prstGeom>
+          <a:noFill/>
+        </p:spPr>
+        <p:txBody>
+          <a:bodyPr wrap="square" anchor="t">
+            <a:spAutoFit/>
+          </a:bodyPr>
+          <a:lstStyle/>
+          <a:p>
+            <a:pPr algn="l">
+              <a:lnSpc>
+                <a:spcPct val="100000"/>
+              </a:lnSpc>
+            </a:pPr>
+            <a:r>
+              <a:rPr sz="1300" b="1">
+                <a:solidFill>
+                  <a:srgbClr val="00FF41"/>
+                </a:solidFill>
+                <a:latin typeface="Courier New"/>
+              </a:rPr>
+              <a:t>TOOLS FOR TODAY</a:t>
+            </a:r>
+          </a:p>
+        </p:txBody>
+      </p:sp>
+      <p:sp>
+        <p:nvSpPr>
+          <p:cNvPr id="3" name="Rectangle 2"/>
+          <p:cNvSpPr/>
+          <p:nvPr/>
+        </p:nvSpPr>
+        <p:spPr>
+          <a:xfrm>
+            <a:off x="640080" y="932688"/>
+            <a:ext cx="822960" cy="73152"/>
+          </a:xfrm>
+          <a:prstGeom prst="rect">
+            <a:avLst/>
+          </a:prstGeom>
+          <a:solidFill>
+            <a:srgbClr val="00FF41"/>
+          </a:solidFill>
+          <a:ln>
+            <a:noFill/>
+          </a:ln>
+          <a:effectLst/>
+        </p:spPr>
+        <p:style>
+          <a:lnRef idx="1">
+            <a:schemeClr val="accent1"/>
+          </a:lnRef>
+          <a:fillRef idx="3">
+            <a:schemeClr val="accent1"/>
+          </a:fillRef>
+          <a:effectRef idx="2">
+            <a:schemeClr val="accent1"/>
+          </a:effectRef>
+          <a:fontRef idx="minor">
+            <a:schemeClr val="lt1"/>
+          </a:fontRef>
+        </p:style>
+        <p:txBody>
+          <a:bodyPr rtlCol="0" anchor="ctr"/>
+          <a:lstStyle/>
+          <a:p>
+            <a:pPr algn="ctr"/>
+          </a:p>
+        </p:txBody>
+      </p:sp>
+      <p:sp>
+        <p:nvSpPr>
+          <p:cNvPr id="4" name="TextBox 3"/>
+          <p:cNvSpPr txBox="1"/>
+          <p:nvPr/>
+        </p:nvSpPr>
+        <p:spPr>
+          <a:xfrm>
+            <a:off x="640080" y="1188720"/>
+            <a:ext cx="10972800" cy="1097280"/>
+          </a:xfrm>
+          <a:prstGeom prst="rect">
+            <a:avLst/>
+          </a:prstGeom>
+          <a:noFill/>
+        </p:spPr>
+        <p:txBody>
+          <a:bodyPr wrap="square" anchor="t">
+            <a:spAutoFit/>
+          </a:bodyPr>
+          <a:lstStyle/>
+          <a:p>
+            <a:pPr algn="l">
+              <a:lnSpc>
+                <a:spcPct val="100000"/>
+              </a:lnSpc>
+            </a:pPr>
+            <a:r>
+              <a:rPr sz="3400" b="1">
+                <a:solidFill>
+                  <a:srgbClr val="F5F7FA"/>
+                </a:solidFill>
+                <a:latin typeface="Arial"/>
+              </a:rPr>
+              <a:t>Storyboard + pitch</a:t>
+            </a:r>
+          </a:p>
+        </p:txBody>
+      </p:sp>
+      <p:sp>
+        <p:nvSpPr>
+          <p:cNvPr id="5" name="TextBox 4"/>
+          <p:cNvSpPr txBox="1"/>
+          <p:nvPr/>
+        </p:nvSpPr>
+        <p:spPr>
+          <a:xfrm>
+            <a:off x="658368" y="2286000"/>
+            <a:ext cx="10881360" cy="3657600"/>
+          </a:xfrm>
+          <a:prstGeom prst="rect">
+            <a:avLst/>
+          </a:prstGeom>
+          <a:noFill/>
+        </p:spPr>
+        <p:txBody>
+          <a:bodyPr wrap="square" anchor="t">
+            <a:spAutoFit/>
+          </a:bodyPr>
+          <a:lstStyle/>
+          <a:p>
+            <a:pPr algn="l">
+              <a:lnSpc>
+                <a:spcPct val="112000"/>
+              </a:lnSpc>
+            </a:pPr>
+            <a:r>
+              <a:rPr sz="2000" b="1">
+                <a:solidFill>
+                  <a:srgbClr val="00FF41"/>
+                </a:solidFill>
+                <a:latin typeface="Arial"/>
+              </a:rPr>
+              <a:t>•  </a:t>
+            </a:r>
+            <a:r>
+              <a:rPr sz="2000" b="0">
+                <a:solidFill>
+                  <a:srgbClr val="F5F7FA"/>
+                </a:solidFill>
+                <a:latin typeface="Arial"/>
+              </a:rPr>
+              <a:t>Storyboard: FigJam / Figma, Canva, Google Slides (one frame per slide), or Storyboarder (free &amp; open-source).</a:t>
+            </a:r>
+          </a:p>
+          <a:p>
+            <a:pPr algn="l">
+              <a:lnSpc>
+                <a:spcPct val="112000"/>
+              </a:lnSpc>
+            </a:pPr>
+            <a:r>
+              <a:rPr sz="2000" b="1">
+                <a:solidFill>
+                  <a:srgbClr val="00FF41"/>
+                </a:solidFill>
+                <a:latin typeface="Arial"/>
+              </a:rPr>
+              <a:t>•  </a:t>
+            </a:r>
+            <a:r>
+              <a:rPr sz="2000" b="0">
+                <a:solidFill>
+                  <a:srgbClr val="F5F7FA"/>
+                </a:solidFill>
+                <a:latin typeface="Arial"/>
+              </a:rPr>
+              <a:t>AI pitch video (for Thursday): Google Veo 3.1 (in Flow), Runway, Kling, or Pika.</a:t>
+            </a:r>
+          </a:p>
+          <a:p>
+            <a:pPr algn="l">
+              <a:lnSpc>
+                <a:spcPct val="112000"/>
+              </a:lnSpc>
+            </a:pPr>
+            <a:r>
+              <a:rPr sz="2000" b="1">
+                <a:solidFill>
+                  <a:srgbClr val="00FF41"/>
+                </a:solidFill>
+                <a:latin typeface="Arial"/>
+              </a:rPr>
+              <a:t>•  </a:t>
+            </a:r>
+            <a:r>
+              <a:rPr sz="2000" b="0">
+                <a:solidFill>
+                  <a:srgbClr val="F5F7FA"/>
+                </a:solidFill>
+                <a:latin typeface="Arial"/>
+              </a:rPr>
+              <a:t>Note: OpenAI retired the Sora app in April 2026 - use Veo / Runway / Kling / Pika instead.</a:t>
+            </a:r>
+          </a:p>
+          <a:p>
+            <a:pPr algn="l">
+              <a:lnSpc>
+                <a:spcPct val="112000"/>
+              </a:lnSpc>
+            </a:pPr>
+            <a:r>
+              <a:rPr sz="2000" b="1">
+                <a:solidFill>
+                  <a:srgbClr val="00FF41"/>
+                </a:solidFill>
+                <a:latin typeface="Arial"/>
+              </a:rPr>
+              <a:t>•  </a:t>
+            </a:r>
+            <a:r>
+              <a:rPr sz="2000" b="0">
+                <a:solidFill>
+                  <a:srgbClr val="F5F7FA"/>
+                </a:solidFill>
+                <a:latin typeface="Arial"/>
+              </a:rPr>
+              <a:t>Free tiers add watermarks + limits - fine for a class pitch.</a:t>
+            </a:r>
+          </a:p>
+          <a:p>
+            <a:pPr algn="l">
+              <a:lnSpc>
+                <a:spcPct val="112000"/>
+              </a:lnSpc>
+            </a:pPr>
+            <a:r>
+              <a:rPr sz="2000" b="1">
+                <a:solidFill>
+                  <a:srgbClr val="00FF41"/>
+                </a:solidFill>
+                <a:latin typeface="Arial"/>
+              </a:rPr>
+              <a:t>•  </a:t>
+            </a:r>
+            <a:r>
+              <a:rPr sz="2000" b="0">
+                <a:solidFill>
+                  <a:srgbClr val="F5F7FA"/>
+                </a:solidFill>
+                <a:latin typeface="Arial"/>
+              </a:rPr>
+              <a:t>Interview + persona: just talk to a person; capture notes in FigJam or a doc.</a:t>
+            </a:r>
+          </a:p>
+        </p:txBody>
+      </p:sp>
+      <p:sp>
+        <p:nvSpPr>
+          <p:cNvPr id="6" name="TextBox 5"/>
+          <p:cNvSpPr txBox="1"/>
+          <p:nvPr/>
+        </p:nvSpPr>
+        <p:spPr>
+          <a:xfrm>
+            <a:off x="640080" y="6355080"/>
+            <a:ext cx="10972800" cy="365760"/>
+          </a:xfrm>
+          <a:prstGeom prst="rect">
+            <a:avLst/>
+          </a:prstGeom>
+          <a:noFill/>
+        </p:spPr>
+        <p:txBody>
+          <a:bodyPr wrap="square" anchor="t">
+            <a:spAutoFit/>
+          </a:bodyPr>
+          <a:lstStyle/>
+          <a:p>
+            <a:pPr algn="l">
+              <a:lnSpc>
+                <a:spcPct val="100000"/>
+              </a:lnSpc>
+            </a:pPr>
+            <a:r>
+              <a:rPr sz="1000" b="0">
+                <a:solidFill>
+                  <a:srgbClr val="5A6474"/>
+                </a:solidFill>
+                <a:latin typeface="Courier New"/>
+              </a:rPr>
+              <a:t>Good Code, Good Vibes · TECHIE 1121 · Cornell Tech · Summer 2026</a:t>
+            </a:r>
+          </a:p>
+        </p:txBody>
+      </p:sp>
+    </p:spTree>
+  </p:cSld>
+  <p:clrMapOvr>
+    <a:masterClrMapping/>
+  </p:clrMapOvr>
+</p:sld>
+</file>
+
+<file path=ppt/slides/slide8.xml><?xml version="1.0" encoding="utf-8"?>
+<p:sld xmlns:a="http://schemas.openxmlformats.org/drawingml/2006/main" xmlns:p="http://schemas.openxmlformats.org/presentationml/2006/main" xmlns:r="http://schemas.openxmlformats.org/officeDocument/2006/relationships">
+  <p:cSld>
+    <p:bg>
+      <p:bgPr>
+        <a:solidFill>
+          <a:srgbClr val="0B0E14"/>
+        </a:solidFill>
+        <a:effectLst/>
+      </p:bgPr>
+    </p:bg>
+    <p:spTree>
+      <p:nvGrpSpPr>
+        <p:cNvPr id="1" name=""/>
+        <p:cNvGrpSpPr/>
+        <p:nvPr/>
+      </p:nvGrpSpPr>
+      <p:grpSpPr/>
+      <p:sp>
+        <p:nvSpPr>
+          <p:cNvPr id="2" name="TextBox 1"/>
+          <p:cNvSpPr txBox="1"/>
+          <p:nvPr/>
+        </p:nvSpPr>
+        <p:spPr>
+          <a:xfrm>
+            <a:off x="640080" y="502920"/>
+            <a:ext cx="10058400" cy="365760"/>
+          </a:xfrm>
+          <a:prstGeom prst="rect">
+            <a:avLst/>
+          </a:prstGeom>
+          <a:noFill/>
+        </p:spPr>
+        <p:txBody>
+          <a:bodyPr wrap="square" anchor="t">
+            <a:spAutoFit/>
+          </a:bodyPr>
+          <a:lstStyle/>
+          <a:p>
+            <a:pPr algn="l">
+              <a:lnSpc>
+                <a:spcPct val="100000"/>
+              </a:lnSpc>
+            </a:pPr>
+            <a:r>
+              <a:rPr sz="1300" b="1">
+                <a:solidFill>
+                  <a:srgbClr val="00FF41"/>
+                </a:solidFill>
+                <a:latin typeface="Courier New"/>
+              </a:rPr>
+              <a:t>SCREENSHOT SLOT</a:t>
+            </a:r>
+          </a:p>
+        </p:txBody>
+      </p:sp>
+      <p:sp>
+        <p:nvSpPr>
+          <p:cNvPr id="3" name="Rectangle 2"/>
+          <p:cNvSpPr/>
+          <p:nvPr/>
+        </p:nvSpPr>
+        <p:spPr>
+          <a:xfrm>
+            <a:off x="640080" y="932688"/>
+            <a:ext cx="822960" cy="73152"/>
+          </a:xfrm>
+          <a:prstGeom prst="rect">
+            <a:avLst/>
+          </a:prstGeom>
+          <a:solidFill>
+            <a:srgbClr val="00FF41"/>
+          </a:solidFill>
+          <a:ln>
+            <a:noFill/>
+          </a:ln>
+          <a:effectLst/>
+        </p:spPr>
+        <p:style>
+          <a:lnRef idx="1">
+            <a:schemeClr val="accent1"/>
+          </a:lnRef>
+          <a:fillRef idx="3">
+            <a:schemeClr val="accent1"/>
+          </a:fillRef>
+          <a:effectRef idx="2">
+            <a:schemeClr val="accent1"/>
+          </a:effectRef>
+          <a:fontRef idx="minor">
+            <a:schemeClr val="lt1"/>
+          </a:fontRef>
+        </p:style>
+        <p:txBody>
+          <a:bodyPr rtlCol="0" anchor="ctr"/>
+          <a:lstStyle/>
+          <a:p>
+            <a:pPr algn="ctr"/>
+          </a:p>
+        </p:txBody>
+      </p:sp>
+      <p:sp>
+        <p:nvSpPr>
+          <p:cNvPr id="4" name="TextBox 3"/>
+          <p:cNvSpPr txBox="1"/>
+          <p:nvPr/>
+        </p:nvSpPr>
+        <p:spPr>
+          <a:xfrm>
+            <a:off x="640080" y="1188720"/>
+            <a:ext cx="10972800" cy="914400"/>
+          </a:xfrm>
+          <a:prstGeom prst="rect">
+            <a:avLst/>
+          </a:prstGeom>
+          <a:noFill/>
+        </p:spPr>
+        <p:txBody>
+          <a:bodyPr wrap="square" anchor="t">
+            <a:spAutoFit/>
+          </a:bodyPr>
+          <a:lstStyle/>
+          <a:p>
+            <a:pPr algn="l">
+              <a:lnSpc>
+                <a:spcPct val="100000"/>
+              </a:lnSpc>
+            </a:pPr>
+            <a:r>
+              <a:rPr sz="3000" b="1">
+                <a:solidFill>
+                  <a:srgbClr val="F5F7FA"/>
+                </a:solidFill>
+                <a:latin typeface="Arial"/>
+              </a:rPr>
+              <a:t>Show an example</a:t>
+            </a:r>
+          </a:p>
+        </p:txBody>
+      </p:sp>
+      <p:sp>
+        <p:nvSpPr>
+          <p:cNvPr id="5" name="Rounded Rectangle 4"/>
+          <p:cNvSpPr/>
+          <p:nvPr/>
+        </p:nvSpPr>
+        <p:spPr>
+          <a:xfrm>
+            <a:off x="2194560" y="2331720"/>
+            <a:ext cx="7772400" cy="3566160"/>
+          </a:xfrm>
+          <a:prstGeom prst="roundRect">
+            <a:avLst/>
+          </a:prstGeom>
+          <a:solidFill>
+            <a:srgbClr val="151B26"/>
+          </a:solidFill>
+          <a:ln w="19050">
+            <a:solidFill>
+              <a:srgbClr val="00FF41"/>
+            </a:solidFill>
+            <a:prstDash val="dash"/>
+          </a:ln>
+          <a:effectLst/>
+        </p:spPr>
+        <p:style>
+          <a:lnRef idx="1">
+            <a:schemeClr val="accent1"/>
+          </a:lnRef>
+          <a:fillRef idx="3">
+            <a:schemeClr val="accent1"/>
+          </a:fillRef>
+          <a:effectRef idx="2">
+            <a:schemeClr val="accent1"/>
+          </a:effectRef>
+          <a:fontRef idx="minor">
+            <a:schemeClr val="lt1"/>
+          </a:fontRef>
+        </p:style>
+        <p:txBody>
+          <a:bodyPr rtlCol="0" anchor="ctr"/>
+          <a:lstStyle/>
+          <a:p>
+            <a:pPr algn="ctr"/>
+          </a:p>
+        </p:txBody>
+      </p:sp>
+      <p:sp>
+        <p:nvSpPr>
+          <p:cNvPr id="6" name="TextBox 5"/>
+          <p:cNvSpPr txBox="1"/>
+          <p:nvPr/>
+        </p:nvSpPr>
+        <p:spPr>
+          <a:xfrm>
+            <a:off x="2194560" y="3383280"/>
+            <a:ext cx="7772400" cy="731520"/>
+          </a:xfrm>
+          <a:prstGeom prst="rect">
+            <a:avLst/>
+          </a:prstGeom>
+          <a:noFill/>
+        </p:spPr>
+        <p:txBody>
+          <a:bodyPr wrap="square" anchor="t">
+            <a:spAutoFit/>
+          </a:bodyPr>
+          <a:lstStyle/>
+          <a:p>
+            <a:pPr algn="ctr">
+              <a:lnSpc>
+                <a:spcPct val="100000"/>
+              </a:lnSpc>
+            </a:pPr>
+            <a:r>
+              <a:rPr sz="2200" b="1">
+                <a:solidFill>
+                  <a:srgbClr val="00FF41"/>
+                </a:solidFill>
+                <a:latin typeface="Courier New"/>
+              </a:rPr>
+              <a:t>[ example storyboard or persona goes here ]</a:t>
+            </a:r>
+          </a:p>
+        </p:txBody>
+      </p:sp>
+      <p:sp>
+        <p:nvSpPr>
+          <p:cNvPr id="7" name="TextBox 6"/>
+          <p:cNvSpPr txBox="1"/>
+          <p:nvPr/>
+        </p:nvSpPr>
+        <p:spPr>
+          <a:xfrm>
+            <a:off x="2194560" y="4114800"/>
+            <a:ext cx="7772400" cy="731520"/>
+          </a:xfrm>
+          <a:prstGeom prst="rect">
+            <a:avLst/>
+          </a:prstGeom>
+          <a:noFill/>
+        </p:spPr>
+        <p:txBody>
+          <a:bodyPr wrap="square" anchor="t">
+            <a:spAutoFit/>
+          </a:bodyPr>
+          <a:lstStyle/>
+          <a:p>
+            <a:pPr algn="ctr">
+              <a:lnSpc>
+                <a:spcPct val="100000"/>
+              </a:lnSpc>
+            </a:pPr>
+            <a:r>
+              <a:rPr sz="1400" b="0">
+                <a:solidFill>
+                  <a:srgbClr val="8A94A6"/>
+                </a:solidFill>
+                <a:latin typeface="Arial"/>
+              </a:rPr>
+              <a:t>a strong persona, a storyboard, or an AI-pitch still</a:t>
+            </a:r>
+          </a:p>
+        </p:txBody>
+      </p:sp>
+      <p:sp>
+        <p:nvSpPr>
+          <p:cNvPr id="8" name="TextBox 7"/>
+          <p:cNvSpPr txBox="1"/>
+          <p:nvPr/>
+        </p:nvSpPr>
+        <p:spPr>
+          <a:xfrm>
+            <a:off x="640080" y="6355080"/>
+            <a:ext cx="10972800" cy="365760"/>
+          </a:xfrm>
+          <a:prstGeom prst="rect">
+            <a:avLst/>
+          </a:prstGeom>
+          <a:noFill/>
+        </p:spPr>
+        <p:txBody>
+          <a:bodyPr wrap="square" anchor="t">
+            <a:spAutoFit/>
+          </a:bodyPr>
+          <a:lstStyle/>
+          <a:p>
+            <a:pPr algn="l">
+              <a:lnSpc>
+                <a:spcPct val="100000"/>
+              </a:lnSpc>
+            </a:pPr>
+            <a:r>
+              <a:rPr sz="1000" b="0">
+                <a:solidFill>
+                  <a:srgbClr val="5A6474"/>
+                </a:solidFill>
+                <a:latin typeface="Courier New"/>
+              </a:rPr>
+              <a:t>Good Code, Good Vibes · TECHIE 1121 · Cornell Tech · Summer 2026</a:t>
+            </a:r>
+          </a:p>
+        </p:txBody>
+      </p:sp>
+    </p:spTree>
+  </p:cSld>
+  <p:clrMapOvr>
+    <a:masterClrMapping/>
+  </p:clrMapOvr>
+</p:sld>
+</file>
+
+<file path=ppt/slides/slide9.xml><?xml version="1.0" encoding="utf-8"?>
+<p:sld xmlns:a="http://schemas.openxmlformats.org/drawingml/2006/main" xmlns:p="http://schemas.openxmlformats.org/presentationml/2006/main" xmlns:r="http://schemas.openxmlformats.org/officeDocument/2006/relationships">
+  <p:cSld>
+    <p:bg>
+      <p:bgPr>
+        <a:solidFill>
+          <a:srgbClr val="0B0E14"/>
+        </a:solidFill>
+        <a:effectLst/>
+      </p:bgPr>
+    </p:bg>
+    <p:spTree>
+      <p:nvGrpSpPr>
+        <p:cNvPr id="1" name=""/>
+        <p:cNvGrpSpPr/>
+        <p:nvPr/>
+      </p:nvGrpSpPr>
+      <p:grpSpPr/>
+      <p:sp>
+        <p:nvSpPr>
+          <p:cNvPr id="2" name="TextBox 1"/>
+          <p:cNvSpPr txBox="1"/>
+          <p:nvPr/>
+        </p:nvSpPr>
+        <p:spPr>
+          <a:xfrm>
+            <a:off x="640080" y="502920"/>
+            <a:ext cx="10058400" cy="365760"/>
+          </a:xfrm>
+          <a:prstGeom prst="rect">
+            <a:avLst/>
+          </a:prstGeom>
+          <a:noFill/>
+        </p:spPr>
+        <p:txBody>
+          <a:bodyPr wrap="square" anchor="t">
+            <a:spAutoFit/>
+          </a:bodyPr>
+          <a:lstStyle/>
+          <a:p>
+            <a:pPr algn="l">
+              <a:lnSpc>
+                <a:spcPct val="100000"/>
+              </a:lnSpc>
+            </a:pPr>
+            <a:r>
+              <a:rPr sz="1300" b="1">
+                <a:solidFill>
+                  <a:srgbClr val="00FF41"/>
+                </a:solidFill>
+                <a:latin typeface="Courier New"/>
+              </a:rPr>
+              <a:t>ACTIVITY - TODAY (TEAM)</a:t>
+            </a:r>
+          </a:p>
+        </p:txBody>
+      </p:sp>
+      <p:sp>
+        <p:nvSpPr>
+          <p:cNvPr id="3" name="Rectangle 2"/>
+          <p:cNvSpPr/>
+          <p:nvPr/>
+        </p:nvSpPr>
+        <p:spPr>
+          <a:xfrm>
+            <a:off x="640080" y="932688"/>
+            <a:ext cx="822960" cy="73152"/>
+          </a:xfrm>
+          <a:prstGeom prst="rect">
+            <a:avLst/>
+          </a:prstGeom>
+          <a:solidFill>
+            <a:srgbClr val="00FF41"/>
+          </a:solidFill>
+          <a:ln>
+            <a:noFill/>
+          </a:ln>
+          <a:effectLst/>
+        </p:spPr>
+        <p:style>
+          <a:lnRef idx="1">
+            <a:schemeClr val="accent1"/>
+          </a:lnRef>
+          <a:fillRef idx="3">
+            <a:schemeClr val="accent1"/>
+          </a:fillRef>
+          <a:effectRef idx="2">
+            <a:schemeClr val="accent1"/>
+          </a:effectRef>
+          <a:fontRef idx="minor">
+            <a:schemeClr val="lt1"/>
+          </a:fontRef>
+        </p:style>
+        <p:txBody>
+          <a:bodyPr rtlCol="0" anchor="ctr"/>
+          <a:lstStyle/>
+          <a:p>
+            <a:pPr algn="ctr"/>
+          </a:p>
+        </p:txBody>
+      </p:sp>
+      <p:sp>
+        <p:nvSpPr>
+          <p:cNvPr id="4" name="TextBox 3"/>
+          <p:cNvSpPr txBox="1"/>
+          <p:nvPr/>
+        </p:nvSpPr>
+        <p:spPr>
+          <a:xfrm>
+            <a:off x="640080" y="1325880"/>
+            <a:ext cx="10972800" cy="1828800"/>
+          </a:xfrm>
+          <a:prstGeom prst="rect">
+            <a:avLst/>
+          </a:prstGeom>
+          <a:noFill/>
+        </p:spPr>
+        <p:txBody>
+          <a:bodyPr wrap="square" anchor="t">
+            <a:spAutoFit/>
+          </a:bodyPr>
+          <a:lstStyle/>
+          <a:p>
+            <a:pPr algn="l">
+              <a:lnSpc>
+                <a:spcPct val="105000"/>
+              </a:lnSpc>
+            </a:pPr>
+            <a:r>
+              <a:rPr sz="3800" b="1">
+                <a:solidFill>
+                  <a:srgbClr val="F5F7FA"/>
+                </a:solidFill>
+                <a:latin typeface="Arial"/>
+              </a:rPr>
+              <a:t>Plan the next iteration of your value.</a:t>
+            </a:r>
+          </a:p>
+        </p:txBody>
+      </p:sp>
+      <p:sp>
+        <p:nvSpPr>
+          <p:cNvPr id="5" name="TextBox 4"/>
+          <p:cNvSpPr txBox="1"/>
+          <p:nvPr/>
+        </p:nvSpPr>
+        <p:spPr>
+          <a:xfrm>
+            <a:off x="658368" y="3611880"/>
+            <a:ext cx="10972800" cy="1737360"/>
           </a:xfrm>
           <a:prstGeom prst="rect">
             <a:avLst/>
@@ -3395,22 +6703,22 @@
               </a:lnSpc>
             </a:pPr>
             <a:r>
-              <a:rPr sz="2000" b="1">
+              <a:rPr sz="1900" b="1">
                 <a:solidFill>
                   <a:srgbClr val="00FF41"/>
                 </a:solidFill>
                 <a:latin typeface="Arial"/>
               </a:rPr>
-              <a:t>✓  </a:t>
-            </a:r>
-            <a:r>
-              <a:rPr sz="2000" b="0">
-                <a:solidFill>
-                  <a:srgbClr val="F5F7FA"/>
+              <a:t>→  </a:t>
+            </a:r>
+            <a:r>
+              <a:rPr sz="1900" b="0">
+                <a:solidFill>
+                  <a:srgbClr val="8A94A6"/>
                 </a:solidFill>
                 <a:latin typeface="Arial"/>
               </a:rPr>
-              <a:t>Fix the top usability issues from Monday.</a:t>
+              <a:t>Interview a real person outside the class -&gt; build a persona + the need in their words.</a:t>
             </a:r>
           </a:p>
           <a:p>
@@ -3420,22 +6728,22 @@
               </a:lnSpc>
             </a:pPr>
             <a:r>
-              <a:rPr sz="2000" b="1">
+              <a:rPr sz="1900" b="1">
                 <a:solidFill>
                   <a:srgbClr val="00FF41"/>
                 </a:solidFill>
                 <a:latin typeface="Arial"/>
               </a:rPr>
-              <a:t>✓  </a:t>
-            </a:r>
-            <a:r>
-              <a:rPr sz="2000" b="0">
-                <a:solidFill>
-                  <a:srgbClr val="F5F7FA"/>
+              <a:t>→  </a:t>
+            </a:r>
+            <a:r>
+              <a:rPr sz="1900" b="0">
+                <a:solidFill>
+                  <a:srgbClr val="8A94A6"/>
                 </a:solidFill>
                 <a:latin typeface="Arial"/>
               </a:rPr>
-              <a:t>Resolve the values tension from Tuesday (dissolve / compromise / trade-off).</a:t>
+              <a:t>Operationalize: value -&gt; norms -&gt; requirements -&gt; features -&gt; the prompts you'll build.</a:t>
             </a:r>
           </a:p>
           <a:p>
@@ -3445,104 +6753,123 @@
               </a:lnSpc>
             </a:pPr>
             <a:r>
-              <a:rPr sz="2000" b="1">
+              <a:rPr sz="1900" b="1">
                 <a:solidFill>
                   <a:srgbClr val="00FF41"/>
                 </a:solidFill>
                 <a:latin typeface="Arial"/>
               </a:rPr>
-              <a:t>✓  </a:t>
-            </a:r>
-            <a:r>
-              <a:rPr sz="2000" b="0">
-                <a:solidFill>
-                  <a:srgbClr val="F5F7FA"/>
+              <a:t>→  </a:t>
+            </a:r>
+            <a:r>
+              <a:rPr sz="1900" b="0">
+                <a:solidFill>
+                  <a:srgbClr val="8A94A6"/>
                 </a:solidFill>
                 <a:latin typeface="Arial"/>
               </a:rPr>
-              <a:t>Get the live demo solid — rehearse the happy path.</a:t>
-            </a:r>
-          </a:p>
+              <a:t>Storyboard the solution (4-8 frames) and scope the smallest real thing for Thursday.</a:t>
+            </a:r>
+          </a:p>
+        </p:txBody>
+      </p:sp>
+      <p:sp>
+        <p:nvSpPr>
+          <p:cNvPr id="6" name="Rounded Rectangle 5"/>
+          <p:cNvSpPr/>
+          <p:nvPr/>
+        </p:nvSpPr>
+        <p:spPr>
+          <a:xfrm>
+            <a:off x="640080" y="5532120"/>
+            <a:ext cx="10911535" cy="658368"/>
+          </a:xfrm>
+          <a:prstGeom prst="roundRect">
+            <a:avLst/>
+          </a:prstGeom>
+          <a:solidFill>
+            <a:srgbClr val="151B26"/>
+          </a:solidFill>
+          <a:ln w="19050">
+            <a:solidFill>
+              <a:srgbClr val="00FF41"/>
+            </a:solidFill>
+          </a:ln>
+          <a:effectLst/>
+        </p:spPr>
+        <p:style>
+          <a:lnRef idx="1">
+            <a:schemeClr val="accent1"/>
+          </a:lnRef>
+          <a:fillRef idx="3">
+            <a:schemeClr val="accent1"/>
+          </a:fillRef>
+          <a:effectRef idx="2">
+            <a:schemeClr val="accent1"/>
+          </a:effectRef>
+          <a:fontRef idx="minor">
+            <a:schemeClr val="lt1"/>
+          </a:fontRef>
+        </p:style>
+        <p:txBody>
+          <a:bodyPr rtlCol="0" anchor="ctr"/>
+          <a:lstStyle/>
+          <a:p>
+            <a:pPr algn="ctr"/>
+          </a:p>
+        </p:txBody>
+      </p:sp>
+      <p:sp>
+        <p:nvSpPr>
+          <p:cNvPr id="7" name="TextBox 6"/>
+          <p:cNvSpPr txBox="1"/>
+          <p:nvPr/>
+        </p:nvSpPr>
+        <p:spPr>
+          <a:xfrm>
+            <a:off x="914400" y="5532120"/>
+            <a:ext cx="10362895" cy="658368"/>
+          </a:xfrm>
+          <a:prstGeom prst="rect">
+            <a:avLst/>
+          </a:prstGeom>
+          <a:noFill/>
+        </p:spPr>
+        <p:txBody>
+          <a:bodyPr wrap="square" anchor="ctr">
+            <a:spAutoFit/>
+          </a:bodyPr>
+          <a:lstStyle/>
           <a:p>
             <a:pPr algn="l">
               <a:lnSpc>
-                <a:spcPct val="135000"/>
+                <a:spcPct val="100000"/>
               </a:lnSpc>
             </a:pPr>
             <a:r>
-              <a:rPr sz="2000" b="1">
+              <a:rPr sz="1600" b="1">
                 <a:solidFill>
                   <a:srgbClr val="00FF41"/>
                 </a:solidFill>
                 <a:latin typeface="Arial"/>
               </a:rPr>
-              <a:t>✓  </a:t>
-            </a:r>
-            <a:r>
-              <a:rPr sz="2000" b="0">
+              <a:t>▶  </a:t>
+            </a:r>
+            <a:r>
+              <a:rPr sz="1600" b="1">
                 <a:solidFill>
                   <a:srgbClr val="F5F7FA"/>
                 </a:solidFill>
                 <a:latin typeface="Arial"/>
               </a:rPr>
-              <a:t>Write the deep ethical reflection (this is 25% — and AI writing isn’t allowed here).</a:t>
-            </a:r>
-          </a:p>
-          <a:p>
-            <a:pPr algn="l">
-              <a:lnSpc>
-                <a:spcPct val="135000"/>
-              </a:lnSpc>
-            </a:pPr>
-            <a:r>
-              <a:rPr sz="2000" b="1">
-                <a:solidFill>
-                  <a:srgbClr val="00FF41"/>
-                </a:solidFill>
-                <a:latin typeface="Arial"/>
-              </a:rPr>
-              <a:t>✓  </a:t>
-            </a:r>
-            <a:r>
-              <a:rPr sz="2000" b="0">
-                <a:solidFill>
-                  <a:srgbClr val="F5F7FA"/>
-                </a:solidFill>
-                <a:latin typeface="Arial"/>
-              </a:rPr>
-              <a:t>Capture screenshots / a short video in case the live link fails.</a:t>
-            </a:r>
-          </a:p>
-          <a:p>
-            <a:pPr algn="l">
-              <a:lnSpc>
-                <a:spcPct val="135000"/>
-              </a:lnSpc>
-            </a:pPr>
-            <a:r>
-              <a:rPr sz="2000" b="1">
-                <a:solidFill>
-                  <a:srgbClr val="00FF41"/>
-                </a:solidFill>
-                <a:latin typeface="Arial"/>
-              </a:rPr>
-              <a:t>✓  </a:t>
-            </a:r>
-            <a:r>
-              <a:rPr sz="2000" b="0">
-                <a:solidFill>
-                  <a:srgbClr val="F5F7FA"/>
-                </a:solidFill>
-                <a:latin typeface="Arial"/>
-              </a:rPr>
-              <a:t>Instructors are here — grab us for a check-in.</a:t>
-            </a:r>
-          </a:p>
-        </p:txBody>
-      </p:sp>
-      <p:sp>
-        <p:nvSpPr>
-          <p:cNvPr id="6" name="TextBox 5"/>
+              <a:t>Deliverable = planning-report.md + your storyboard - this is Checkpoint 2 of the final</a:t>
+            </a:r>
+          </a:p>
+        </p:txBody>
+      </p:sp>
+      <p:sp>
+        <p:nvSpPr>
+          <p:cNvPr id="8" name="TextBox 7"/>
           <p:cNvSpPr txBox="1"/>
           <p:nvPr/>
         </p:nvSpPr>
@@ -3905,4 +7232,324 @@
   </a:objectDefaults>
   <a:extraClrSchemeLst/>
 </a:theme>
+</file>
+
+<file path=ppt/theme/theme2.xml><?xml version="1.0" encoding="utf-8"?>
+<a:theme xmlns:a="http://schemas.openxmlformats.org/drawingml/2006/main" name="Office Theme">
+  <a:themeElements>
+    <a:clrScheme name="Office">
+      <a:dk1>
+        <a:sysClr val="windowText" lastClr="000000"/>
+      </a:dk1>
+      <a:lt1>
+        <a:sysClr val="window" lastClr="FFFFFF"/>
+      </a:lt1>
+      <a:dk2>
+        <a:srgbClr val="1F497D"/>
+      </a:dk2>
+      <a:lt2>
+        <a:srgbClr val="EEECE1"/>
+      </a:lt2>
+      <a:accent1>
+        <a:srgbClr val="4F81BD"/>
+      </a:accent1>
+      <a:accent2>
+        <a:srgbClr val="C0504D"/>
+      </a:accent2>
+      <a:accent3>
+        <a:srgbClr val="9BBB59"/>
+      </a:accent3>
+      <a:accent4>
+        <a:srgbClr val="8064A2"/>
+      </a:accent4>
+      <a:accent5>
+        <a:srgbClr val="4BACC6"/>
+      </a:accent5>
+      <a:accent6>
+        <a:srgbClr val="F79646"/>
+      </a:accent6>
+      <a:hlink>
+        <a:srgbClr val="0000FF"/>
+      </a:hlink>
+      <a:folHlink>
+        <a:srgbClr val="800080"/>
+      </a:folHlink>
+    </a:clrScheme>
+    <a:fontScheme name="Office">
+      <a:majorFont>
+        <a:latin typeface="Calibri"/>
+        <a:ea typeface=""/>
+        <a:cs typeface=""/>
+        <a:font script="Jpan" typeface="ＭＳ Ｐゴシック"/>
+        <a:font script="Hang" typeface="맑은 고딕"/>
+        <a:font script="Hans" typeface="宋体"/>
+        <a:font script="Hant" typeface="新細明體"/>
+        <a:font script="Arab" typeface="Times New Roman"/>
+        <a:font script="Hebr" typeface="Times New Roman"/>
+        <a:font script="Thai" typeface="Angsana New"/>
+        <a:font script="Ethi" typeface="Nyala"/>
+        <a:font script="Beng" typeface="Vrinda"/>
+        <a:font script="Gujr" typeface="Shruti"/>
+        <a:font script="Khmr" typeface="MoolBoran"/>
+        <a:font script="Knda" typeface="Tunga"/>
+        <a:font script="Guru" typeface="Raavi"/>
+        <a:font script="Cans" typeface="Euphemia"/>
+        <a:font script="Cher" typeface="Plantagenet Cherokee"/>
+        <a:font script="Yiii" typeface="Microsoft Yi Baiti"/>
+        <a:font script="Tibt" typeface="Microsoft Himalaya"/>
+        <a:font script="Thaa" typeface="MV Boli"/>
+        <a:font script="Deva" typeface="Mangal"/>
+        <a:font script="Telu" typeface="Gautami"/>
+        <a:font script="Taml" typeface="Latha"/>
+        <a:font script="Syrc" typeface="Estrangelo Edessa"/>
+        <a:font script="Orya" typeface="Kalinga"/>
+        <a:font script="Mlym" typeface="Kartika"/>
+        <a:font script="Laoo" typeface="DokChampa"/>
+        <a:font script="Sinh" typeface="Iskoola Pota"/>
+        <a:font script="Mong" typeface="Mongolian Baiti"/>
+        <a:font script="Viet" typeface="Times New Roman"/>
+        <a:font script="Uigh" typeface="Microsoft Uighur"/>
+        <a:font script="Geor" typeface="Sylfaen"/>
+      </a:majorFont>
+      <a:minorFont>
+        <a:latin typeface="Calibri"/>
+        <a:ea typeface=""/>
+        <a:cs typeface=""/>
+        <a:font script="Jpan" typeface="ＭＳ Ｐゴシック"/>
+        <a:font script="Hang" typeface="맑은 고딕"/>
+        <a:font script="Hans" typeface="宋体"/>
+        <a:font script="Hant" typeface="新細明體"/>
+        <a:font script="Arab" typeface="Arial"/>
+        <a:font script="Hebr" typeface="Arial"/>
+        <a:font script="Thai" typeface="Cordia New"/>
+        <a:font script="Ethi" typeface="Nyala"/>
+        <a:font script="Beng" typeface="Vrinda"/>
+        <a:font script="Gujr" typeface="Shruti"/>
+        <a:font script="Khmr" typeface="DaunPenh"/>
+        <a:font script="Knda" typeface="Tunga"/>
+        <a:font script="Guru" typeface="Raavi"/>
+        <a:font script="Cans" typeface="Euphemia"/>
+        <a:font script="Cher" typeface="Plantagenet Cherokee"/>
+        <a:font script="Yiii" typeface="Microsoft Yi Baiti"/>
+        <a:font script="Tibt" typeface="Microsoft Himalaya"/>
+        <a:font script="Thaa" typeface="MV Boli"/>
+        <a:font script="Deva" typeface="Mangal"/>
+        <a:font script="Telu" typeface="Gautami"/>
+        <a:font script="Taml" typeface="Latha"/>
+        <a:font script="Syrc" typeface="Estrangelo Edessa"/>
+        <a:font script="Orya" typeface="Kalinga"/>
+        <a:font script="Mlym" typeface="Kartika"/>
+        <a:font script="Laoo" typeface="DokChampa"/>
+        <a:font script="Sinh" typeface="Iskoola Pota"/>
+        <a:font script="Mong" typeface="Mongolian Baiti"/>
+        <a:font script="Viet" typeface="Arial"/>
+        <a:font script="Uigh" typeface="Microsoft Uighur"/>
+        <a:font script="Geor" typeface="Sylfaen"/>
+      </a:minorFont>
+    </a:fontScheme>
+    <a:fmtScheme name="Office">
+      <a:fillStyleLst>
+        <a:solidFill>
+          <a:schemeClr val="phClr"/>
+        </a:solidFill>
+        <a:gradFill rotWithShape="1">
+          <a:gsLst>
+            <a:gs pos="0">
+              <a:schemeClr val="phClr">
+                <a:tint val="50000"/>
+                <a:satMod val="300000"/>
+              </a:schemeClr>
+            </a:gs>
+            <a:gs pos="35000">
+              <a:schemeClr val="phClr">
+                <a:tint val="37000"/>
+                <a:satMod val="300000"/>
+              </a:schemeClr>
+            </a:gs>
+            <a:gs pos="100000">
+              <a:schemeClr val="phClr">
+                <a:tint val="15000"/>
+                <a:satMod val="350000"/>
+              </a:schemeClr>
+            </a:gs>
+          </a:gsLst>
+          <a:lin ang="16200000" scaled="1"/>
+        </a:gradFill>
+        <a:gradFill rotWithShape="1">
+          <a:gsLst>
+            <a:gs pos="0">
+              <a:schemeClr val="phClr">
+                <a:tint val="100000"/>
+                <a:shade val="100000"/>
+                <a:satMod val="130000"/>
+              </a:schemeClr>
+            </a:gs>
+            <a:gs pos="100000">
+              <a:schemeClr val="phClr">
+                <a:tint val="50000"/>
+                <a:shade val="100000"/>
+                <a:satMod val="350000"/>
+              </a:schemeClr>
+            </a:gs>
+          </a:gsLst>
+          <a:lin ang="16200000" scaled="0"/>
+        </a:gradFill>
+      </a:fillStyleLst>
+      <a:lnStyleLst>
+        <a:ln w="9525" cap="flat" cmpd="sng" algn="ctr">
+          <a:solidFill>
+            <a:schemeClr val="phClr">
+              <a:shade val="95000"/>
+              <a:satMod val="105000"/>
+            </a:schemeClr>
+          </a:solidFill>
+          <a:prstDash val="solid"/>
+        </a:ln>
+        <a:ln w="25400" cap="flat" cmpd="sng" algn="ctr">
+          <a:solidFill>
+            <a:schemeClr val="phClr"/>
+          </a:solidFill>
+          <a:prstDash val="solid"/>
+        </a:ln>
+        <a:ln w="38100" cap="flat" cmpd="sng" algn="ctr">
+          <a:solidFill>
+            <a:schemeClr val="phClr"/>
+          </a:solidFill>
+          <a:prstDash val="solid"/>
+        </a:ln>
+      </a:lnStyleLst>
+      <a:effectStyleLst>
+        <a:effectStyle>
+          <a:effectLst>
+            <a:outerShdw blurRad="40000" dist="20000" dir="5400000" rotWithShape="0">
+              <a:srgbClr val="000000">
+                <a:alpha val="38000"/>
+              </a:srgbClr>
+            </a:outerShdw>
+          </a:effectLst>
+        </a:effectStyle>
+        <a:effectStyle>
+          <a:effectLst>
+            <a:outerShdw blurRad="40000" dist="23000" dir="5400000" rotWithShape="0">
+              <a:srgbClr val="000000">
+                <a:alpha val="35000"/>
+              </a:srgbClr>
+            </a:outerShdw>
+          </a:effectLst>
+        </a:effectStyle>
+        <a:effectStyle>
+          <a:effectLst>
+            <a:outerShdw blurRad="40000" dist="23000" dir="5400000" rotWithShape="0">
+              <a:srgbClr val="000000">
+                <a:alpha val="35000"/>
+              </a:srgbClr>
+            </a:outerShdw>
+          </a:effectLst>
+          <a:scene3d>
+            <a:camera prst="orthographicFront">
+              <a:rot lat="0" lon="0" rev="0"/>
+            </a:camera>
+            <a:lightRig rig="threePt" dir="t">
+              <a:rot lat="0" lon="0" rev="1200000"/>
+            </a:lightRig>
+          </a:scene3d>
+          <a:sp3d>
+            <a:bevelT w="63500" h="25400"/>
+          </a:sp3d>
+        </a:effectStyle>
+      </a:effectStyleLst>
+      <a:bgFillStyleLst>
+        <a:solidFill>
+          <a:schemeClr val="phClr"/>
+        </a:solidFill>
+        <a:gradFill rotWithShape="1">
+          <a:gsLst>
+            <a:gs pos="0">
+              <a:schemeClr val="phClr">
+                <a:tint val="40000"/>
+                <a:satMod val="350000"/>
+              </a:schemeClr>
+            </a:gs>
+            <a:gs pos="40000">
+              <a:schemeClr val="phClr">
+                <a:tint val="45000"/>
+                <a:shade val="99000"/>
+                <a:satMod val="350000"/>
+              </a:schemeClr>
+            </a:gs>
+            <a:gs pos="100000">
+              <a:schemeClr val="phClr">
+                <a:shade val="20000"/>
+                <a:satMod val="255000"/>
+              </a:schemeClr>
+            </a:gs>
+          </a:gsLst>
+          <a:path path="circle">
+            <a:fillToRect l="50000" t="-80000" r="50000" b="180000"/>
+          </a:path>
+        </a:gradFill>
+        <a:gradFill rotWithShape="1">
+          <a:gsLst>
+            <a:gs pos="0">
+              <a:schemeClr val="phClr">
+                <a:tint val="80000"/>
+                <a:satMod val="300000"/>
+              </a:schemeClr>
+            </a:gs>
+            <a:gs pos="100000">
+              <a:schemeClr val="phClr">
+                <a:shade val="30000"/>
+                <a:satMod val="200000"/>
+              </a:schemeClr>
+            </a:gs>
+          </a:gsLst>
+          <a:path path="circle">
+            <a:fillToRect l="50000" t="50000" r="50000" b="50000"/>
+          </a:path>
+        </a:gradFill>
+      </a:bgFillStyleLst>
+    </a:fmtScheme>
+  </a:themeElements>
+  <a:objectDefaults>
+    <a:spDef>
+      <a:spPr/>
+      <a:bodyPr/>
+      <a:lstStyle/>
+      <a:style>
+        <a:lnRef idx="1">
+          <a:schemeClr val="accent1"/>
+        </a:lnRef>
+        <a:fillRef idx="3">
+          <a:schemeClr val="accent1"/>
+        </a:fillRef>
+        <a:effectRef idx="2">
+          <a:schemeClr val="accent1"/>
+        </a:effectRef>
+        <a:fontRef idx="minor">
+          <a:schemeClr val="lt1"/>
+        </a:fontRef>
+      </a:style>
+    </a:spDef>
+    <a:lnDef>
+      <a:spPr/>
+      <a:bodyPr/>
+      <a:lstStyle/>
+      <a:style>
+        <a:lnRef idx="2">
+          <a:schemeClr val="accent1"/>
+        </a:lnRef>
+        <a:fillRef idx="0">
+          <a:schemeClr val="accent1"/>
+        </a:fillRef>
+        <a:effectRef idx="1">
+          <a:schemeClr val="accent1"/>
+        </a:effectRef>
+        <a:fontRef idx="minor">
+          <a:schemeClr val="tx1"/>
+        </a:fontRef>
+      </a:style>
+    </a:lnDef>
+  </a:objectDefaults>
+  <a:extraClrSchemeLst/>
+</a:theme>
 </file>
--- a/slides/Week3-Wed-Working-Day.pptx
+++ b/slides/Week3-Wed-Working-Day.pptx
@@ -3900,7 +3900,7 @@
                 </a:solidFill>
                 <a:latin typeface="Arial"/>
               </a:rPr>
-              <a:t>Guest lecture today: Figma. Bring your questions about design + prototyping.</a:t>
+              <a:t>Guest lecture today: Remy Stewart (Figma). Bring your questions about design + prototyping.</a:t>
             </a:r>
           </a:p>
         </p:txBody>
@@ -4167,7 +4167,7 @@
                 </a:solidFill>
                 <a:latin typeface="Arial"/>
               </a:rPr>
-              <a:t>Open with the Figma guest talk, then find the real need.</a:t>
+              <a:t>Open with Remy Stewart's Figma guest talk, then find the real need.</a:t>
             </a:r>
           </a:p>
         </p:txBody>

--- a/slides/Week3-Wed-Working-Day.pptx
+++ b/slides/Week3-Wed-Working-Day.pptx
@@ -15,6 +15,11 @@
     <p:sldId id="263" r:id="rId15"/>
     <p:sldId id="264" r:id="rId16"/>
     <p:sldId id="265" r:id="rId17"/>
+    <p:sldId id="266" r:id="rId18"/>
+    <p:sldId id="267" r:id="rId19"/>
+    <p:sldId id="268" r:id="rId20"/>
+    <p:sldId id="269" r:id="rId21"/>
+    <p:sldId id="270" r:id="rId22"/>
   </p:sldIdLst>
   <p:sldSz cx="12191695" cy="6858000" type="screen4x3"/>
   <p:notesSz cx="6858000" cy="9144000"/>
@@ -467,6 +472,76 @@
 </file>
 
 <file path=ppt/notesSlides/notesSlide1.xml><?xml version="1.0" encoding="utf-8"?>
+<p:notes xmlns:a="http://schemas.openxmlformats.org/drawingml/2006/main" xmlns:p="http://schemas.openxmlformats.org/presentationml/2006/main" xmlns:r="http://schemas.openxmlformats.org/officeDocument/2006/relationships">
+  <p:cSld>
+    <p:spTree>
+      <p:nvGrpSpPr>
+        <p:cNvPr id="1" name=""/>
+        <p:cNvGrpSpPr/>
+        <p:nvPr/>
+      </p:nvGrpSpPr>
+      <p:grpSpPr>
+        <a:xfrm>
+          <a:off x="0" y="0"/>
+          <a:ext cx="0" cy="0"/>
+          <a:chOff x="0" y="0"/>
+          <a:chExt cx="0" cy="0"/>
+        </a:xfrm>
+      </p:grpSpPr>
+      <p:sp>
+        <p:nvSpPr>
+          <p:cNvPr id="2" name="Slide Image Placeholder 1"/>
+          <p:cNvSpPr>
+            <a:spLocks noGrp="1"/>
+          </p:cNvSpPr>
+          <p:nvPr>
+            <p:ph type="sldImg" idx="2"/>
+          </p:nvPr>
+        </p:nvSpPr>
+        <p:spPr/>
+      </p:sp>
+      <p:sp>
+        <p:nvSpPr>
+          <p:cNvPr id="3" name="Notes Placeholder 2"/>
+          <p:cNvSpPr>
+            <a:spLocks noGrp="1"/>
+          </p:cNvSpPr>
+          <p:nvPr>
+            <p:ph type="body" idx="3" sz="quarter"/>
+          </p:nvPr>
+        </p:nvSpPr>
+        <p:spPr/>
+        <p:txBody>
+          <a:bodyPr/>
+          <a:lstStyle/>
+          <a:p>
+            <a:r>
+              <a:t>AI personas are fast + frictionless but can launder assumptions back as 'data'. Comparing to a real human is the check.</a:t>
+            </a:r>
+          </a:p>
+        </p:txBody>
+      </p:sp>
+      <p:sp>
+        <p:nvSpPr>
+          <p:cNvPr id="4" name="Slide Number Placeholder 3"/>
+          <p:cNvSpPr>
+            <a:spLocks noGrp="1"/>
+          </p:cNvSpPr>
+          <p:nvPr>
+            <p:ph type="sldNum" idx="5" sz="quarter"/>
+          </p:nvPr>
+        </p:nvSpPr>
+        <p:spPr/>
+      </p:sp>
+    </p:spTree>
+  </p:cSld>
+  <p:clrMapOvr>
+    <a:masterClrMapping/>
+  </p:clrMapOvr>
+</p:notes>
+</file>
+
+<file path=ppt/notesSlides/notesSlide2.xml><?xml version="1.0" encoding="utf-8"?>
 <p:notes xmlns:a="http://schemas.openxmlformats.org/drawingml/2006/main" xmlns:p="http://schemas.openxmlformats.org/presentationml/2006/main" xmlns:r="http://schemas.openxmlformats.org/officeDocument/2006/relationships">
   <p:cSld>
     <p:spTree>
@@ -3746,6 +3821,1641 @@
                 </a:solidFill>
                 <a:latin typeface="Courier New"/>
               </a:rPr>
+              <a:t>OPERATIONALIZE - THE VALUE TREE</a:t>
+            </a:r>
+          </a:p>
+        </p:txBody>
+      </p:sp>
+      <p:sp>
+        <p:nvSpPr>
+          <p:cNvPr id="3" name="Rectangle 2"/>
+          <p:cNvSpPr/>
+          <p:nvPr/>
+        </p:nvSpPr>
+        <p:spPr>
+          <a:xfrm>
+            <a:off x="640080" y="932688"/>
+            <a:ext cx="822960" cy="73152"/>
+          </a:xfrm>
+          <a:prstGeom prst="rect">
+            <a:avLst/>
+          </a:prstGeom>
+          <a:solidFill>
+            <a:srgbClr val="00FF41"/>
+          </a:solidFill>
+          <a:ln>
+            <a:noFill/>
+          </a:ln>
+          <a:effectLst/>
+        </p:spPr>
+        <p:style>
+          <a:lnRef idx="1">
+            <a:schemeClr val="accent1"/>
+          </a:lnRef>
+          <a:fillRef idx="3">
+            <a:schemeClr val="accent1"/>
+          </a:fillRef>
+          <a:effectRef idx="2">
+            <a:schemeClr val="accent1"/>
+          </a:effectRef>
+          <a:fontRef idx="minor">
+            <a:schemeClr val="lt1"/>
+          </a:fontRef>
+        </p:style>
+        <p:txBody>
+          <a:bodyPr rtlCol="0" anchor="ctr"/>
+          <a:lstStyle/>
+          <a:p>
+            <a:pPr algn="ctr"/>
+          </a:p>
+        </p:txBody>
+      </p:sp>
+      <p:sp>
+        <p:nvSpPr>
+          <p:cNvPr id="4" name="TextBox 3"/>
+          <p:cNvSpPr txBox="1"/>
+          <p:nvPr/>
+        </p:nvSpPr>
+        <p:spPr>
+          <a:xfrm>
+            <a:off x="640080" y="1188720"/>
+            <a:ext cx="10972800" cy="1097280"/>
+          </a:xfrm>
+          <a:prstGeom prst="rect">
+            <a:avLst/>
+          </a:prstGeom>
+          <a:noFill/>
+        </p:spPr>
+        <p:txBody>
+          <a:bodyPr wrap="square" anchor="t">
+            <a:spAutoFit/>
+          </a:bodyPr>
+          <a:lstStyle/>
+          <a:p>
+            <a:pPr algn="l">
+              <a:lnSpc>
+                <a:spcPct val="100000"/>
+              </a:lnSpc>
+            </a:pPr>
+            <a:r>
+              <a:rPr sz="3400" b="1">
+                <a:solidFill>
+                  <a:srgbClr val="F5F7FA"/>
+                </a:solidFill>
+                <a:latin typeface="Arial"/>
+              </a:rPr>
+              <a:t>From value down to the prompts you'll build</a:t>
+            </a:r>
+          </a:p>
+        </p:txBody>
+      </p:sp>
+      <p:sp>
+        <p:nvSpPr>
+          <p:cNvPr id="5" name="TextBox 4"/>
+          <p:cNvSpPr txBox="1"/>
+          <p:nvPr/>
+        </p:nvSpPr>
+        <p:spPr>
+          <a:xfrm>
+            <a:off x="658368" y="2286000"/>
+            <a:ext cx="10881360" cy="3657600"/>
+          </a:xfrm>
+          <a:prstGeom prst="rect">
+            <a:avLst/>
+          </a:prstGeom>
+          <a:noFill/>
+        </p:spPr>
+        <p:txBody>
+          <a:bodyPr wrap="square" anchor="t">
+            <a:spAutoFit/>
+          </a:bodyPr>
+          <a:lstStyle/>
+          <a:p>
+            <a:pPr algn="l">
+              <a:lnSpc>
+                <a:spcPct val="112000"/>
+              </a:lnSpc>
+            </a:pPr>
+            <a:r>
+              <a:rPr sz="2000" b="0">
+                <a:solidFill>
+                  <a:srgbClr val="F5F7FA"/>
+                </a:solidFill>
+                <a:latin typeface="Arial"/>
+              </a:rPr>
+              <a:t>Break your value down until it becomes something you can actually build:</a:t>
+            </a:r>
+          </a:p>
+          <a:p>
+            <a:pPr algn="l">
+              <a:lnSpc>
+                <a:spcPct val="112000"/>
+              </a:lnSpc>
+            </a:pPr>
+            <a:r>
+              <a:rPr sz="2000" b="0">
+                <a:solidFill>
+                  <a:srgbClr val="F5F7FA"/>
+                </a:solidFill>
+                <a:latin typeface="Arial"/>
+              </a:rPr>
+              <a:t/>
+            </a:r>
+          </a:p>
+          <a:p>
+            <a:pPr algn="l">
+              <a:lnSpc>
+                <a:spcPct val="112000"/>
+              </a:lnSpc>
+            </a:pPr>
+            <a:r>
+              <a:rPr sz="2200" b="0">
+                <a:solidFill>
+                  <a:srgbClr val="F5F7FA"/>
+                </a:solidFill>
+                <a:latin typeface="Arial"/>
+              </a:rPr>
+              <a:t>value  -&gt;  norms  -&gt;  requirements  -&gt;  features  -&gt;  </a:t>
+            </a:r>
+            <a:r>
+              <a:rPr sz="2200" b="1">
+                <a:solidFill>
+                  <a:srgbClr val="00FF41"/>
+                </a:solidFill>
+                <a:latin typeface="Arial"/>
+              </a:rPr>
+              <a:t>the prompts you run tomorrow</a:t>
+            </a:r>
+          </a:p>
+          <a:p>
+            <a:pPr algn="l">
+              <a:lnSpc>
+                <a:spcPct val="112000"/>
+              </a:lnSpc>
+            </a:pPr>
+            <a:r>
+              <a:rPr sz="2000" b="0">
+                <a:solidFill>
+                  <a:srgbClr val="F5F7FA"/>
+                </a:solidFill>
+                <a:latin typeface="Arial"/>
+              </a:rPr>
+              <a:t/>
+            </a:r>
+          </a:p>
+          <a:p>
+            <a:pPr algn="l">
+              <a:lnSpc>
+                <a:spcPct val="112000"/>
+              </a:lnSpc>
+            </a:pPr>
+            <a:r>
+              <a:rPr sz="1700" b="0">
+                <a:solidFill>
+                  <a:srgbClr val="8A94A6"/>
+                </a:solidFill>
+                <a:latin typeface="Arial"/>
+              </a:rPr>
+              <a:t>The bottom of the tree IS your Thursday build plan - the exact prompts, grounded in the value.</a:t>
+            </a:r>
+          </a:p>
+        </p:txBody>
+      </p:sp>
+      <p:sp>
+        <p:nvSpPr>
+          <p:cNvPr id="6" name="TextBox 5"/>
+          <p:cNvSpPr txBox="1"/>
+          <p:nvPr/>
+        </p:nvSpPr>
+        <p:spPr>
+          <a:xfrm>
+            <a:off x="640080" y="6355080"/>
+            <a:ext cx="10972800" cy="365760"/>
+          </a:xfrm>
+          <a:prstGeom prst="rect">
+            <a:avLst/>
+          </a:prstGeom>
+          <a:noFill/>
+        </p:spPr>
+        <p:txBody>
+          <a:bodyPr wrap="square" anchor="t">
+            <a:spAutoFit/>
+          </a:bodyPr>
+          <a:lstStyle/>
+          <a:p>
+            <a:pPr algn="l">
+              <a:lnSpc>
+                <a:spcPct val="100000"/>
+              </a:lnSpc>
+            </a:pPr>
+            <a:r>
+              <a:rPr sz="1000" b="0">
+                <a:solidFill>
+                  <a:srgbClr val="5A6474"/>
+                </a:solidFill>
+                <a:latin typeface="Courier New"/>
+              </a:rPr>
+              <a:t>Good Code, Good Vibes · TECHIE 1121 · Cornell Tech · Summer 2026</a:t>
+            </a:r>
+          </a:p>
+        </p:txBody>
+      </p:sp>
+    </p:spTree>
+  </p:cSld>
+  <p:clrMapOvr>
+    <a:masterClrMapping/>
+  </p:clrMapOvr>
+</p:sld>
+</file>
+
+<file path=ppt/slides/slide11.xml><?xml version="1.0" encoding="utf-8"?>
+<p:sld xmlns:a="http://schemas.openxmlformats.org/drawingml/2006/main" xmlns:p="http://schemas.openxmlformats.org/presentationml/2006/main" xmlns:r="http://schemas.openxmlformats.org/officeDocument/2006/relationships">
+  <p:cSld>
+    <p:bg>
+      <p:bgPr>
+        <a:solidFill>
+          <a:srgbClr val="0B0E14"/>
+        </a:solidFill>
+        <a:effectLst/>
+      </p:bgPr>
+    </p:bg>
+    <p:spTree>
+      <p:nvGrpSpPr>
+        <p:cNvPr id="1" name=""/>
+        <p:cNvGrpSpPr/>
+        <p:nvPr/>
+      </p:nvGrpSpPr>
+      <p:grpSpPr/>
+      <p:sp>
+        <p:nvSpPr>
+          <p:cNvPr id="2" name="TextBox 1"/>
+          <p:cNvSpPr txBox="1"/>
+          <p:nvPr/>
+        </p:nvSpPr>
+        <p:spPr>
+          <a:xfrm>
+            <a:off x="640080" y="502920"/>
+            <a:ext cx="10058400" cy="365760"/>
+          </a:xfrm>
+          <a:prstGeom prst="rect">
+            <a:avLst/>
+          </a:prstGeom>
+          <a:noFill/>
+        </p:spPr>
+        <p:txBody>
+          <a:bodyPr wrap="square" anchor="t">
+            <a:spAutoFit/>
+          </a:bodyPr>
+          <a:lstStyle/>
+          <a:p>
+            <a:pPr algn="l">
+              <a:lnSpc>
+                <a:spcPct val="100000"/>
+              </a:lnSpc>
+            </a:pPr>
+            <a:r>
+              <a:rPr sz="1300" b="1">
+                <a:solidFill>
+                  <a:srgbClr val="00FF41"/>
+                </a:solidFill>
+                <a:latin typeface="Courier New"/>
+              </a:rPr>
+              <a:t>STORYBOARD IT</a:t>
+            </a:r>
+          </a:p>
+        </p:txBody>
+      </p:sp>
+      <p:sp>
+        <p:nvSpPr>
+          <p:cNvPr id="3" name="Rectangle 2"/>
+          <p:cNvSpPr/>
+          <p:nvPr/>
+        </p:nvSpPr>
+        <p:spPr>
+          <a:xfrm>
+            <a:off x="640080" y="932688"/>
+            <a:ext cx="822960" cy="73152"/>
+          </a:xfrm>
+          <a:prstGeom prst="rect">
+            <a:avLst/>
+          </a:prstGeom>
+          <a:solidFill>
+            <a:srgbClr val="00FF41"/>
+          </a:solidFill>
+          <a:ln>
+            <a:noFill/>
+          </a:ln>
+          <a:effectLst/>
+        </p:spPr>
+        <p:style>
+          <a:lnRef idx="1">
+            <a:schemeClr val="accent1"/>
+          </a:lnRef>
+          <a:fillRef idx="3">
+            <a:schemeClr val="accent1"/>
+          </a:fillRef>
+          <a:effectRef idx="2">
+            <a:schemeClr val="accent1"/>
+          </a:effectRef>
+          <a:fontRef idx="minor">
+            <a:schemeClr val="lt1"/>
+          </a:fontRef>
+        </p:style>
+        <p:txBody>
+          <a:bodyPr rtlCol="0" anchor="ctr"/>
+          <a:lstStyle/>
+          <a:p>
+            <a:pPr algn="ctr"/>
+          </a:p>
+        </p:txBody>
+      </p:sp>
+      <p:sp>
+        <p:nvSpPr>
+          <p:cNvPr id="4" name="TextBox 3"/>
+          <p:cNvSpPr txBox="1"/>
+          <p:nvPr/>
+        </p:nvSpPr>
+        <p:spPr>
+          <a:xfrm>
+            <a:off x="640080" y="1188720"/>
+            <a:ext cx="10972800" cy="1097280"/>
+          </a:xfrm>
+          <a:prstGeom prst="rect">
+            <a:avLst/>
+          </a:prstGeom>
+          <a:noFill/>
+        </p:spPr>
+        <p:txBody>
+          <a:bodyPr wrap="square" anchor="t">
+            <a:spAutoFit/>
+          </a:bodyPr>
+          <a:lstStyle/>
+          <a:p>
+            <a:pPr algn="l">
+              <a:lnSpc>
+                <a:spcPct val="100000"/>
+              </a:lnSpc>
+            </a:pPr>
+            <a:r>
+              <a:rPr sz="3400" b="1">
+                <a:solidFill>
+                  <a:srgbClr val="F5F7FA"/>
+                </a:solidFill>
+                <a:latin typeface="Arial"/>
+              </a:rPr>
+              <a:t>4-8 frames: the value in use</a:t>
+            </a:r>
+          </a:p>
+        </p:txBody>
+      </p:sp>
+      <p:sp>
+        <p:nvSpPr>
+          <p:cNvPr id="5" name="TextBox 4"/>
+          <p:cNvSpPr txBox="1"/>
+          <p:nvPr/>
+        </p:nvSpPr>
+        <p:spPr>
+          <a:xfrm>
+            <a:off x="658368" y="2286000"/>
+            <a:ext cx="10881360" cy="3657600"/>
+          </a:xfrm>
+          <a:prstGeom prst="rect">
+            <a:avLst/>
+          </a:prstGeom>
+          <a:noFill/>
+        </p:spPr>
+        <p:txBody>
+          <a:bodyPr wrap="square" anchor="t">
+            <a:spAutoFit/>
+          </a:bodyPr>
+          <a:lstStyle/>
+          <a:p>
+            <a:pPr algn="l">
+              <a:lnSpc>
+                <a:spcPct val="112000"/>
+              </a:lnSpc>
+            </a:pPr>
+            <a:r>
+              <a:rPr sz="2000" b="1">
+                <a:solidFill>
+                  <a:srgbClr val="00FF41"/>
+                </a:solidFill>
+                <a:latin typeface="Arial"/>
+              </a:rPr>
+              <a:t>•  </a:t>
+            </a:r>
+            <a:r>
+              <a:rPr sz="2000" b="0">
+                <a:solidFill>
+                  <a:srgbClr val="F5F7FA"/>
+                </a:solidFill>
+                <a:latin typeface="Arial"/>
+              </a:rPr>
+              <a:t>Frame the user, their problem, where your thing enters, and what changes.</a:t>
+            </a:r>
+          </a:p>
+          <a:p>
+            <a:pPr algn="l">
+              <a:lnSpc>
+                <a:spcPct val="112000"/>
+              </a:lnSpc>
+            </a:pPr>
+            <a:r>
+              <a:rPr sz="2000" b="1">
+                <a:solidFill>
+                  <a:srgbClr val="00FF41"/>
+                </a:solidFill>
+                <a:latin typeface="Arial"/>
+              </a:rPr>
+              <a:t>•  </a:t>
+            </a:r>
+            <a:r>
+              <a:rPr sz="2000" b="0">
+                <a:solidFill>
+                  <a:srgbClr val="F5F7FA"/>
+                </a:solidFill>
+                <a:latin typeface="Arial"/>
+              </a:rPr>
+              <a:t>Hand-drawn (photograph it) or AI-assisted - rough is fine.</a:t>
+            </a:r>
+          </a:p>
+          <a:p>
+            <a:pPr algn="l">
+              <a:lnSpc>
+                <a:spcPct val="112000"/>
+              </a:lnSpc>
+            </a:pPr>
+            <a:r>
+              <a:rPr sz="2000" b="1">
+                <a:solidFill>
+                  <a:srgbClr val="00FF41"/>
+                </a:solidFill>
+                <a:latin typeface="Arial"/>
+              </a:rPr>
+              <a:t>•  </a:t>
+            </a:r>
+            <a:r>
+              <a:rPr sz="2000" b="0">
+                <a:solidFill>
+                  <a:srgbClr val="F5F7FA"/>
+                </a:solidFill>
+                <a:latin typeface="Arial"/>
+              </a:rPr>
+              <a:t>It doubles as your Thursday pitch skeleton.</a:t>
+            </a:r>
+          </a:p>
+          <a:p>
+            <a:pPr algn="l">
+              <a:lnSpc>
+                <a:spcPct val="112000"/>
+              </a:lnSpc>
+            </a:pPr>
+            <a:r>
+              <a:rPr sz="2000" b="1">
+                <a:solidFill>
+                  <a:srgbClr val="00FF41"/>
+                </a:solidFill>
+                <a:latin typeface="Arial"/>
+              </a:rPr>
+              <a:t>•  </a:t>
+            </a:r>
+            <a:r>
+              <a:rPr sz="2000" b="0">
+                <a:solidFill>
+                  <a:srgbClr val="F5F7FA"/>
+                </a:solidFill>
+                <a:latin typeface="Arial"/>
+              </a:rPr>
+              <a:t>Show the value living in the design, not just in the copy.</a:t>
+            </a:r>
+          </a:p>
+        </p:txBody>
+      </p:sp>
+      <p:sp>
+        <p:nvSpPr>
+          <p:cNvPr id="6" name="TextBox 5"/>
+          <p:cNvSpPr txBox="1"/>
+          <p:nvPr/>
+        </p:nvSpPr>
+        <p:spPr>
+          <a:xfrm>
+            <a:off x="640080" y="6355080"/>
+            <a:ext cx="10972800" cy="365760"/>
+          </a:xfrm>
+          <a:prstGeom prst="rect">
+            <a:avLst/>
+          </a:prstGeom>
+          <a:noFill/>
+        </p:spPr>
+        <p:txBody>
+          <a:bodyPr wrap="square" anchor="t">
+            <a:spAutoFit/>
+          </a:bodyPr>
+          <a:lstStyle/>
+          <a:p>
+            <a:pPr algn="l">
+              <a:lnSpc>
+                <a:spcPct val="100000"/>
+              </a:lnSpc>
+            </a:pPr>
+            <a:r>
+              <a:rPr sz="1000" b="0">
+                <a:solidFill>
+                  <a:srgbClr val="5A6474"/>
+                </a:solidFill>
+                <a:latin typeface="Courier New"/>
+              </a:rPr>
+              <a:t>Good Code, Good Vibes · TECHIE 1121 · Cornell Tech · Summer 2026</a:t>
+            </a:r>
+          </a:p>
+        </p:txBody>
+      </p:sp>
+    </p:spTree>
+  </p:cSld>
+  <p:clrMapOvr>
+    <a:masterClrMapping/>
+  </p:clrMapOvr>
+</p:sld>
+</file>
+
+<file path=ppt/slides/slide12.xml><?xml version="1.0" encoding="utf-8"?>
+<p:sld xmlns:a="http://schemas.openxmlformats.org/drawingml/2006/main" xmlns:p="http://schemas.openxmlformats.org/presentationml/2006/main" xmlns:r="http://schemas.openxmlformats.org/officeDocument/2006/relationships">
+  <p:cSld>
+    <p:bg>
+      <p:bgPr>
+        <a:solidFill>
+          <a:srgbClr val="0B0E14"/>
+        </a:solidFill>
+        <a:effectLst/>
+      </p:bgPr>
+    </p:bg>
+    <p:spTree>
+      <p:nvGrpSpPr>
+        <p:cNvPr id="1" name=""/>
+        <p:cNvGrpSpPr/>
+        <p:nvPr/>
+      </p:nvGrpSpPr>
+      <p:grpSpPr/>
+      <p:sp>
+        <p:nvSpPr>
+          <p:cNvPr id="2" name="TextBox 1"/>
+          <p:cNvSpPr txBox="1"/>
+          <p:nvPr/>
+        </p:nvSpPr>
+        <p:spPr>
+          <a:xfrm>
+            <a:off x="640080" y="502920"/>
+            <a:ext cx="10058400" cy="365760"/>
+          </a:xfrm>
+          <a:prstGeom prst="rect">
+            <a:avLst/>
+          </a:prstGeom>
+          <a:noFill/>
+        </p:spPr>
+        <p:txBody>
+          <a:bodyPr wrap="square" anchor="t">
+            <a:spAutoFit/>
+          </a:bodyPr>
+          <a:lstStyle/>
+          <a:p>
+            <a:pPr algn="l">
+              <a:lnSpc>
+                <a:spcPct val="100000"/>
+              </a:lnSpc>
+            </a:pPr>
+            <a:r>
+              <a:rPr sz="1300" b="1">
+                <a:solidFill>
+                  <a:srgbClr val="00FF41"/>
+                </a:solidFill>
+                <a:latin typeface="Courier New"/>
+              </a:rPr>
+              <a:t>TOOLS FOR TODAY</a:t>
+            </a:r>
+          </a:p>
+        </p:txBody>
+      </p:sp>
+      <p:sp>
+        <p:nvSpPr>
+          <p:cNvPr id="3" name="Rectangle 2"/>
+          <p:cNvSpPr/>
+          <p:nvPr/>
+        </p:nvSpPr>
+        <p:spPr>
+          <a:xfrm>
+            <a:off x="640080" y="932688"/>
+            <a:ext cx="822960" cy="73152"/>
+          </a:xfrm>
+          <a:prstGeom prst="rect">
+            <a:avLst/>
+          </a:prstGeom>
+          <a:solidFill>
+            <a:srgbClr val="00FF41"/>
+          </a:solidFill>
+          <a:ln>
+            <a:noFill/>
+          </a:ln>
+          <a:effectLst/>
+        </p:spPr>
+        <p:style>
+          <a:lnRef idx="1">
+            <a:schemeClr val="accent1"/>
+          </a:lnRef>
+          <a:fillRef idx="3">
+            <a:schemeClr val="accent1"/>
+          </a:fillRef>
+          <a:effectRef idx="2">
+            <a:schemeClr val="accent1"/>
+          </a:effectRef>
+          <a:fontRef idx="minor">
+            <a:schemeClr val="lt1"/>
+          </a:fontRef>
+        </p:style>
+        <p:txBody>
+          <a:bodyPr rtlCol="0" anchor="ctr"/>
+          <a:lstStyle/>
+          <a:p>
+            <a:pPr algn="ctr"/>
+          </a:p>
+        </p:txBody>
+      </p:sp>
+      <p:sp>
+        <p:nvSpPr>
+          <p:cNvPr id="4" name="TextBox 3"/>
+          <p:cNvSpPr txBox="1"/>
+          <p:nvPr/>
+        </p:nvSpPr>
+        <p:spPr>
+          <a:xfrm>
+            <a:off x="640080" y="1188720"/>
+            <a:ext cx="10972800" cy="1097280"/>
+          </a:xfrm>
+          <a:prstGeom prst="rect">
+            <a:avLst/>
+          </a:prstGeom>
+          <a:noFill/>
+        </p:spPr>
+        <p:txBody>
+          <a:bodyPr wrap="square" anchor="t">
+            <a:spAutoFit/>
+          </a:bodyPr>
+          <a:lstStyle/>
+          <a:p>
+            <a:pPr algn="l">
+              <a:lnSpc>
+                <a:spcPct val="100000"/>
+              </a:lnSpc>
+            </a:pPr>
+            <a:r>
+              <a:rPr sz="3400" b="1">
+                <a:solidFill>
+                  <a:srgbClr val="F5F7FA"/>
+                </a:solidFill>
+                <a:latin typeface="Arial"/>
+              </a:rPr>
+              <a:t>Storyboard + pitch</a:t>
+            </a:r>
+          </a:p>
+        </p:txBody>
+      </p:sp>
+      <p:sp>
+        <p:nvSpPr>
+          <p:cNvPr id="5" name="TextBox 4"/>
+          <p:cNvSpPr txBox="1"/>
+          <p:nvPr/>
+        </p:nvSpPr>
+        <p:spPr>
+          <a:xfrm>
+            <a:off x="658368" y="2286000"/>
+            <a:ext cx="10881360" cy="3657600"/>
+          </a:xfrm>
+          <a:prstGeom prst="rect">
+            <a:avLst/>
+          </a:prstGeom>
+          <a:noFill/>
+        </p:spPr>
+        <p:txBody>
+          <a:bodyPr wrap="square" anchor="t">
+            <a:spAutoFit/>
+          </a:bodyPr>
+          <a:lstStyle/>
+          <a:p>
+            <a:pPr algn="l">
+              <a:lnSpc>
+                <a:spcPct val="112000"/>
+              </a:lnSpc>
+            </a:pPr>
+            <a:r>
+              <a:rPr sz="2000" b="1">
+                <a:solidFill>
+                  <a:srgbClr val="00FF41"/>
+                </a:solidFill>
+                <a:latin typeface="Arial"/>
+              </a:rPr>
+              <a:t>•  </a:t>
+            </a:r>
+            <a:r>
+              <a:rPr sz="2000" b="0">
+                <a:solidFill>
+                  <a:srgbClr val="F5F7FA"/>
+                </a:solidFill>
+                <a:latin typeface="Arial"/>
+              </a:rPr>
+              <a:t>Storyboard: FigJam / Figma, Canva, Google Slides (one frame per slide), or Storyboarder (free &amp; open-source).</a:t>
+            </a:r>
+          </a:p>
+          <a:p>
+            <a:pPr algn="l">
+              <a:lnSpc>
+                <a:spcPct val="112000"/>
+              </a:lnSpc>
+            </a:pPr>
+            <a:r>
+              <a:rPr sz="2000" b="1">
+                <a:solidFill>
+                  <a:srgbClr val="00FF41"/>
+                </a:solidFill>
+                <a:latin typeface="Arial"/>
+              </a:rPr>
+              <a:t>•  </a:t>
+            </a:r>
+            <a:r>
+              <a:rPr sz="2000" b="0">
+                <a:solidFill>
+                  <a:srgbClr val="F5F7FA"/>
+                </a:solidFill>
+                <a:latin typeface="Arial"/>
+              </a:rPr>
+              <a:t>AI pitch video (for Thursday): Google Veo 3.1 (in Flow), Runway, Kling, or Pika.</a:t>
+            </a:r>
+          </a:p>
+          <a:p>
+            <a:pPr algn="l">
+              <a:lnSpc>
+                <a:spcPct val="112000"/>
+              </a:lnSpc>
+            </a:pPr>
+            <a:r>
+              <a:rPr sz="2000" b="1">
+                <a:solidFill>
+                  <a:srgbClr val="00FF41"/>
+                </a:solidFill>
+                <a:latin typeface="Arial"/>
+              </a:rPr>
+              <a:t>•  </a:t>
+            </a:r>
+            <a:r>
+              <a:rPr sz="2000" b="0">
+                <a:solidFill>
+                  <a:srgbClr val="F5F7FA"/>
+                </a:solidFill>
+                <a:latin typeface="Arial"/>
+              </a:rPr>
+              <a:t>Note: OpenAI retired the Sora app in April 2026 - use Veo / Runway / Kling / Pika instead.</a:t>
+            </a:r>
+          </a:p>
+          <a:p>
+            <a:pPr algn="l">
+              <a:lnSpc>
+                <a:spcPct val="112000"/>
+              </a:lnSpc>
+            </a:pPr>
+            <a:r>
+              <a:rPr sz="2000" b="1">
+                <a:solidFill>
+                  <a:srgbClr val="00FF41"/>
+                </a:solidFill>
+                <a:latin typeface="Arial"/>
+              </a:rPr>
+              <a:t>•  </a:t>
+            </a:r>
+            <a:r>
+              <a:rPr sz="2000" b="0">
+                <a:solidFill>
+                  <a:srgbClr val="F5F7FA"/>
+                </a:solidFill>
+                <a:latin typeface="Arial"/>
+              </a:rPr>
+              <a:t>Free tiers add watermarks + limits - fine for a class pitch.</a:t>
+            </a:r>
+          </a:p>
+          <a:p>
+            <a:pPr algn="l">
+              <a:lnSpc>
+                <a:spcPct val="112000"/>
+              </a:lnSpc>
+            </a:pPr>
+            <a:r>
+              <a:rPr sz="2000" b="1">
+                <a:solidFill>
+                  <a:srgbClr val="00FF41"/>
+                </a:solidFill>
+                <a:latin typeface="Arial"/>
+              </a:rPr>
+              <a:t>•  </a:t>
+            </a:r>
+            <a:r>
+              <a:rPr sz="2000" b="0">
+                <a:solidFill>
+                  <a:srgbClr val="F5F7FA"/>
+                </a:solidFill>
+                <a:latin typeface="Arial"/>
+              </a:rPr>
+              <a:t>Interview + persona: just talk to a person; capture notes in FigJam or a doc.</a:t>
+            </a:r>
+          </a:p>
+        </p:txBody>
+      </p:sp>
+      <p:sp>
+        <p:nvSpPr>
+          <p:cNvPr id="6" name="TextBox 5"/>
+          <p:cNvSpPr txBox="1"/>
+          <p:nvPr/>
+        </p:nvSpPr>
+        <p:spPr>
+          <a:xfrm>
+            <a:off x="640080" y="6355080"/>
+            <a:ext cx="10972800" cy="365760"/>
+          </a:xfrm>
+          <a:prstGeom prst="rect">
+            <a:avLst/>
+          </a:prstGeom>
+          <a:noFill/>
+        </p:spPr>
+        <p:txBody>
+          <a:bodyPr wrap="square" anchor="t">
+            <a:spAutoFit/>
+          </a:bodyPr>
+          <a:lstStyle/>
+          <a:p>
+            <a:pPr algn="l">
+              <a:lnSpc>
+                <a:spcPct val="100000"/>
+              </a:lnSpc>
+            </a:pPr>
+            <a:r>
+              <a:rPr sz="1000" b="0">
+                <a:solidFill>
+                  <a:srgbClr val="5A6474"/>
+                </a:solidFill>
+                <a:latin typeface="Courier New"/>
+              </a:rPr>
+              <a:t>Good Code, Good Vibes · TECHIE 1121 · Cornell Tech · Summer 2026</a:t>
+            </a:r>
+          </a:p>
+        </p:txBody>
+      </p:sp>
+    </p:spTree>
+  </p:cSld>
+  <p:clrMapOvr>
+    <a:masterClrMapping/>
+  </p:clrMapOvr>
+</p:sld>
+</file>
+
+<file path=ppt/slides/slide13.xml><?xml version="1.0" encoding="utf-8"?>
+<p:sld xmlns:a="http://schemas.openxmlformats.org/drawingml/2006/main" xmlns:p="http://schemas.openxmlformats.org/presentationml/2006/main" xmlns:r="http://schemas.openxmlformats.org/officeDocument/2006/relationships">
+  <p:cSld>
+    <p:bg>
+      <p:bgPr>
+        <a:solidFill>
+          <a:srgbClr val="0B0E14"/>
+        </a:solidFill>
+        <a:effectLst/>
+      </p:bgPr>
+    </p:bg>
+    <p:spTree>
+      <p:nvGrpSpPr>
+        <p:cNvPr id="1" name=""/>
+        <p:cNvGrpSpPr/>
+        <p:nvPr/>
+      </p:nvGrpSpPr>
+      <p:grpSpPr/>
+      <p:sp>
+        <p:nvSpPr>
+          <p:cNvPr id="2" name="TextBox 1"/>
+          <p:cNvSpPr txBox="1"/>
+          <p:nvPr/>
+        </p:nvSpPr>
+        <p:spPr>
+          <a:xfrm>
+            <a:off x="640080" y="502920"/>
+            <a:ext cx="10058400" cy="365760"/>
+          </a:xfrm>
+          <a:prstGeom prst="rect">
+            <a:avLst/>
+          </a:prstGeom>
+          <a:noFill/>
+        </p:spPr>
+        <p:txBody>
+          <a:bodyPr wrap="square" anchor="t">
+            <a:spAutoFit/>
+          </a:bodyPr>
+          <a:lstStyle/>
+          <a:p>
+            <a:pPr algn="l">
+              <a:lnSpc>
+                <a:spcPct val="100000"/>
+              </a:lnSpc>
+            </a:pPr>
+            <a:r>
+              <a:rPr sz="1300" b="1">
+                <a:solidFill>
+                  <a:srgbClr val="00FF41"/>
+                </a:solidFill>
+                <a:latin typeface="Courier New"/>
+              </a:rPr>
+              <a:t>SCREENSHOT SLOT</a:t>
+            </a:r>
+          </a:p>
+        </p:txBody>
+      </p:sp>
+      <p:sp>
+        <p:nvSpPr>
+          <p:cNvPr id="3" name="Rectangle 2"/>
+          <p:cNvSpPr/>
+          <p:nvPr/>
+        </p:nvSpPr>
+        <p:spPr>
+          <a:xfrm>
+            <a:off x="640080" y="932688"/>
+            <a:ext cx="822960" cy="73152"/>
+          </a:xfrm>
+          <a:prstGeom prst="rect">
+            <a:avLst/>
+          </a:prstGeom>
+          <a:solidFill>
+            <a:srgbClr val="00FF41"/>
+          </a:solidFill>
+          <a:ln>
+            <a:noFill/>
+          </a:ln>
+          <a:effectLst/>
+        </p:spPr>
+        <p:style>
+          <a:lnRef idx="1">
+            <a:schemeClr val="accent1"/>
+          </a:lnRef>
+          <a:fillRef idx="3">
+            <a:schemeClr val="accent1"/>
+          </a:fillRef>
+          <a:effectRef idx="2">
+            <a:schemeClr val="accent1"/>
+          </a:effectRef>
+          <a:fontRef idx="minor">
+            <a:schemeClr val="lt1"/>
+          </a:fontRef>
+        </p:style>
+        <p:txBody>
+          <a:bodyPr rtlCol="0" anchor="ctr"/>
+          <a:lstStyle/>
+          <a:p>
+            <a:pPr algn="ctr"/>
+          </a:p>
+        </p:txBody>
+      </p:sp>
+      <p:sp>
+        <p:nvSpPr>
+          <p:cNvPr id="4" name="TextBox 3"/>
+          <p:cNvSpPr txBox="1"/>
+          <p:nvPr/>
+        </p:nvSpPr>
+        <p:spPr>
+          <a:xfrm>
+            <a:off x="640080" y="1188720"/>
+            <a:ext cx="10972800" cy="914400"/>
+          </a:xfrm>
+          <a:prstGeom prst="rect">
+            <a:avLst/>
+          </a:prstGeom>
+          <a:noFill/>
+        </p:spPr>
+        <p:txBody>
+          <a:bodyPr wrap="square" anchor="t">
+            <a:spAutoFit/>
+          </a:bodyPr>
+          <a:lstStyle/>
+          <a:p>
+            <a:pPr algn="l">
+              <a:lnSpc>
+                <a:spcPct val="100000"/>
+              </a:lnSpc>
+            </a:pPr>
+            <a:r>
+              <a:rPr sz="3000" b="1">
+                <a:solidFill>
+                  <a:srgbClr val="F5F7FA"/>
+                </a:solidFill>
+                <a:latin typeface="Arial"/>
+              </a:rPr>
+              <a:t>Show an example</a:t>
+            </a:r>
+          </a:p>
+        </p:txBody>
+      </p:sp>
+      <p:sp>
+        <p:nvSpPr>
+          <p:cNvPr id="5" name="Rounded Rectangle 4"/>
+          <p:cNvSpPr/>
+          <p:nvPr/>
+        </p:nvSpPr>
+        <p:spPr>
+          <a:xfrm>
+            <a:off x="2194560" y="2331720"/>
+            <a:ext cx="7772400" cy="3566160"/>
+          </a:xfrm>
+          <a:prstGeom prst="roundRect">
+            <a:avLst/>
+          </a:prstGeom>
+          <a:solidFill>
+            <a:srgbClr val="151B26"/>
+          </a:solidFill>
+          <a:ln w="19050">
+            <a:solidFill>
+              <a:srgbClr val="00FF41"/>
+            </a:solidFill>
+            <a:prstDash val="dash"/>
+          </a:ln>
+          <a:effectLst/>
+        </p:spPr>
+        <p:style>
+          <a:lnRef idx="1">
+            <a:schemeClr val="accent1"/>
+          </a:lnRef>
+          <a:fillRef idx="3">
+            <a:schemeClr val="accent1"/>
+          </a:fillRef>
+          <a:effectRef idx="2">
+            <a:schemeClr val="accent1"/>
+          </a:effectRef>
+          <a:fontRef idx="minor">
+            <a:schemeClr val="lt1"/>
+          </a:fontRef>
+        </p:style>
+        <p:txBody>
+          <a:bodyPr rtlCol="0" anchor="ctr"/>
+          <a:lstStyle/>
+          <a:p>
+            <a:pPr algn="ctr"/>
+          </a:p>
+        </p:txBody>
+      </p:sp>
+      <p:sp>
+        <p:nvSpPr>
+          <p:cNvPr id="6" name="TextBox 5"/>
+          <p:cNvSpPr txBox="1"/>
+          <p:nvPr/>
+        </p:nvSpPr>
+        <p:spPr>
+          <a:xfrm>
+            <a:off x="2194560" y="3383280"/>
+            <a:ext cx="7772400" cy="731520"/>
+          </a:xfrm>
+          <a:prstGeom prst="rect">
+            <a:avLst/>
+          </a:prstGeom>
+          <a:noFill/>
+        </p:spPr>
+        <p:txBody>
+          <a:bodyPr wrap="square" anchor="t">
+            <a:spAutoFit/>
+          </a:bodyPr>
+          <a:lstStyle/>
+          <a:p>
+            <a:pPr algn="ctr">
+              <a:lnSpc>
+                <a:spcPct val="100000"/>
+              </a:lnSpc>
+            </a:pPr>
+            <a:r>
+              <a:rPr sz="2200" b="1">
+                <a:solidFill>
+                  <a:srgbClr val="00FF41"/>
+                </a:solidFill>
+                <a:latin typeface="Courier New"/>
+              </a:rPr>
+              <a:t>[ example storyboard or persona goes here ]</a:t>
+            </a:r>
+          </a:p>
+        </p:txBody>
+      </p:sp>
+      <p:sp>
+        <p:nvSpPr>
+          <p:cNvPr id="7" name="TextBox 6"/>
+          <p:cNvSpPr txBox="1"/>
+          <p:nvPr/>
+        </p:nvSpPr>
+        <p:spPr>
+          <a:xfrm>
+            <a:off x="2194560" y="4114800"/>
+            <a:ext cx="7772400" cy="731520"/>
+          </a:xfrm>
+          <a:prstGeom prst="rect">
+            <a:avLst/>
+          </a:prstGeom>
+          <a:noFill/>
+        </p:spPr>
+        <p:txBody>
+          <a:bodyPr wrap="square" anchor="t">
+            <a:spAutoFit/>
+          </a:bodyPr>
+          <a:lstStyle/>
+          <a:p>
+            <a:pPr algn="ctr">
+              <a:lnSpc>
+                <a:spcPct val="100000"/>
+              </a:lnSpc>
+            </a:pPr>
+            <a:r>
+              <a:rPr sz="1400" b="0">
+                <a:solidFill>
+                  <a:srgbClr val="8A94A6"/>
+                </a:solidFill>
+                <a:latin typeface="Arial"/>
+              </a:rPr>
+              <a:t>a strong persona, a storyboard, or an AI-pitch still</a:t>
+            </a:r>
+          </a:p>
+        </p:txBody>
+      </p:sp>
+      <p:sp>
+        <p:nvSpPr>
+          <p:cNvPr id="8" name="TextBox 7"/>
+          <p:cNvSpPr txBox="1"/>
+          <p:nvPr/>
+        </p:nvSpPr>
+        <p:spPr>
+          <a:xfrm>
+            <a:off x="640080" y="6355080"/>
+            <a:ext cx="10972800" cy="365760"/>
+          </a:xfrm>
+          <a:prstGeom prst="rect">
+            <a:avLst/>
+          </a:prstGeom>
+          <a:noFill/>
+        </p:spPr>
+        <p:txBody>
+          <a:bodyPr wrap="square" anchor="t">
+            <a:spAutoFit/>
+          </a:bodyPr>
+          <a:lstStyle/>
+          <a:p>
+            <a:pPr algn="l">
+              <a:lnSpc>
+                <a:spcPct val="100000"/>
+              </a:lnSpc>
+            </a:pPr>
+            <a:r>
+              <a:rPr sz="1000" b="0">
+                <a:solidFill>
+                  <a:srgbClr val="5A6474"/>
+                </a:solidFill>
+                <a:latin typeface="Courier New"/>
+              </a:rPr>
+              <a:t>Good Code, Good Vibes · TECHIE 1121 · Cornell Tech · Summer 2026</a:t>
+            </a:r>
+          </a:p>
+        </p:txBody>
+      </p:sp>
+    </p:spTree>
+  </p:cSld>
+  <p:clrMapOvr>
+    <a:masterClrMapping/>
+  </p:clrMapOvr>
+</p:sld>
+</file>
+
+<file path=ppt/slides/slide14.xml><?xml version="1.0" encoding="utf-8"?>
+<p:sld xmlns:a="http://schemas.openxmlformats.org/drawingml/2006/main" xmlns:p="http://schemas.openxmlformats.org/presentationml/2006/main" xmlns:r="http://schemas.openxmlformats.org/officeDocument/2006/relationships">
+  <p:cSld>
+    <p:bg>
+      <p:bgPr>
+        <a:solidFill>
+          <a:srgbClr val="0B0E14"/>
+        </a:solidFill>
+        <a:effectLst/>
+      </p:bgPr>
+    </p:bg>
+    <p:spTree>
+      <p:nvGrpSpPr>
+        <p:cNvPr id="1" name=""/>
+        <p:cNvGrpSpPr/>
+        <p:nvPr/>
+      </p:nvGrpSpPr>
+      <p:grpSpPr/>
+      <p:sp>
+        <p:nvSpPr>
+          <p:cNvPr id="2" name="TextBox 1"/>
+          <p:cNvSpPr txBox="1"/>
+          <p:nvPr/>
+        </p:nvSpPr>
+        <p:spPr>
+          <a:xfrm>
+            <a:off x="640080" y="502920"/>
+            <a:ext cx="10058400" cy="365760"/>
+          </a:xfrm>
+          <a:prstGeom prst="rect">
+            <a:avLst/>
+          </a:prstGeom>
+          <a:noFill/>
+        </p:spPr>
+        <p:txBody>
+          <a:bodyPr wrap="square" anchor="t">
+            <a:spAutoFit/>
+          </a:bodyPr>
+          <a:lstStyle/>
+          <a:p>
+            <a:pPr algn="l">
+              <a:lnSpc>
+                <a:spcPct val="100000"/>
+              </a:lnSpc>
+            </a:pPr>
+            <a:r>
+              <a:rPr sz="1300" b="1">
+                <a:solidFill>
+                  <a:srgbClr val="00FF41"/>
+                </a:solidFill>
+                <a:latin typeface="Courier New"/>
+              </a:rPr>
+              <a:t>ACTIVITY - TODAY (TEAM)</a:t>
+            </a:r>
+          </a:p>
+        </p:txBody>
+      </p:sp>
+      <p:sp>
+        <p:nvSpPr>
+          <p:cNvPr id="3" name="Rectangle 2"/>
+          <p:cNvSpPr/>
+          <p:nvPr/>
+        </p:nvSpPr>
+        <p:spPr>
+          <a:xfrm>
+            <a:off x="640080" y="932688"/>
+            <a:ext cx="822960" cy="73152"/>
+          </a:xfrm>
+          <a:prstGeom prst="rect">
+            <a:avLst/>
+          </a:prstGeom>
+          <a:solidFill>
+            <a:srgbClr val="00FF41"/>
+          </a:solidFill>
+          <a:ln>
+            <a:noFill/>
+          </a:ln>
+          <a:effectLst/>
+        </p:spPr>
+        <p:style>
+          <a:lnRef idx="1">
+            <a:schemeClr val="accent1"/>
+          </a:lnRef>
+          <a:fillRef idx="3">
+            <a:schemeClr val="accent1"/>
+          </a:fillRef>
+          <a:effectRef idx="2">
+            <a:schemeClr val="accent1"/>
+          </a:effectRef>
+          <a:fontRef idx="minor">
+            <a:schemeClr val="lt1"/>
+          </a:fontRef>
+        </p:style>
+        <p:txBody>
+          <a:bodyPr rtlCol="0" anchor="ctr"/>
+          <a:lstStyle/>
+          <a:p>
+            <a:pPr algn="ctr"/>
+          </a:p>
+        </p:txBody>
+      </p:sp>
+      <p:sp>
+        <p:nvSpPr>
+          <p:cNvPr id="4" name="TextBox 3"/>
+          <p:cNvSpPr txBox="1"/>
+          <p:nvPr/>
+        </p:nvSpPr>
+        <p:spPr>
+          <a:xfrm>
+            <a:off x="640080" y="1325880"/>
+            <a:ext cx="10972800" cy="1828800"/>
+          </a:xfrm>
+          <a:prstGeom prst="rect">
+            <a:avLst/>
+          </a:prstGeom>
+          <a:noFill/>
+        </p:spPr>
+        <p:txBody>
+          <a:bodyPr wrap="square" anchor="t">
+            <a:spAutoFit/>
+          </a:bodyPr>
+          <a:lstStyle/>
+          <a:p>
+            <a:pPr algn="l">
+              <a:lnSpc>
+                <a:spcPct val="105000"/>
+              </a:lnSpc>
+            </a:pPr>
+            <a:r>
+              <a:rPr sz="3800" b="1">
+                <a:solidFill>
+                  <a:srgbClr val="F5F7FA"/>
+                </a:solidFill>
+                <a:latin typeface="Arial"/>
+              </a:rPr>
+              <a:t>Plan the next iteration of your value.</a:t>
+            </a:r>
+          </a:p>
+        </p:txBody>
+      </p:sp>
+      <p:sp>
+        <p:nvSpPr>
+          <p:cNvPr id="5" name="TextBox 4"/>
+          <p:cNvSpPr txBox="1"/>
+          <p:nvPr/>
+        </p:nvSpPr>
+        <p:spPr>
+          <a:xfrm>
+            <a:off x="658368" y="3611880"/>
+            <a:ext cx="10972800" cy="1737360"/>
+          </a:xfrm>
+          <a:prstGeom prst="rect">
+            <a:avLst/>
+          </a:prstGeom>
+          <a:noFill/>
+        </p:spPr>
+        <p:txBody>
+          <a:bodyPr wrap="square" anchor="t">
+            <a:spAutoFit/>
+          </a:bodyPr>
+          <a:lstStyle/>
+          <a:p>
+            <a:pPr algn="l">
+              <a:lnSpc>
+                <a:spcPct val="135000"/>
+              </a:lnSpc>
+            </a:pPr>
+            <a:r>
+              <a:rPr sz="1900" b="1">
+                <a:solidFill>
+                  <a:srgbClr val="00FF41"/>
+                </a:solidFill>
+                <a:latin typeface="Arial"/>
+              </a:rPr>
+              <a:t>→  </a:t>
+            </a:r>
+            <a:r>
+              <a:rPr sz="1900" b="0">
+                <a:solidFill>
+                  <a:srgbClr val="8A94A6"/>
+                </a:solidFill>
+                <a:latin typeface="Arial"/>
+              </a:rPr>
+              <a:t>Interview a real person outside the class -&gt; build a persona + the need in their words.</a:t>
+            </a:r>
+          </a:p>
+          <a:p>
+            <a:pPr algn="l">
+              <a:lnSpc>
+                <a:spcPct val="135000"/>
+              </a:lnSpc>
+            </a:pPr>
+            <a:r>
+              <a:rPr sz="1900" b="1">
+                <a:solidFill>
+                  <a:srgbClr val="00FF41"/>
+                </a:solidFill>
+                <a:latin typeface="Arial"/>
+              </a:rPr>
+              <a:t>→  </a:t>
+            </a:r>
+            <a:r>
+              <a:rPr sz="1900" b="0">
+                <a:solidFill>
+                  <a:srgbClr val="8A94A6"/>
+                </a:solidFill>
+                <a:latin typeface="Arial"/>
+              </a:rPr>
+              <a:t>Operationalize: value -&gt; norms -&gt; requirements -&gt; features -&gt; the prompts you'll build.</a:t>
+            </a:r>
+          </a:p>
+          <a:p>
+            <a:pPr algn="l">
+              <a:lnSpc>
+                <a:spcPct val="135000"/>
+              </a:lnSpc>
+            </a:pPr>
+            <a:r>
+              <a:rPr sz="1900" b="1">
+                <a:solidFill>
+                  <a:srgbClr val="00FF41"/>
+                </a:solidFill>
+                <a:latin typeface="Arial"/>
+              </a:rPr>
+              <a:t>→  </a:t>
+            </a:r>
+            <a:r>
+              <a:rPr sz="1900" b="0">
+                <a:solidFill>
+                  <a:srgbClr val="8A94A6"/>
+                </a:solidFill>
+                <a:latin typeface="Arial"/>
+              </a:rPr>
+              <a:t>Storyboard the solution (4-8 frames) and scope the smallest real thing for Thursday.</a:t>
+            </a:r>
+          </a:p>
+        </p:txBody>
+      </p:sp>
+      <p:sp>
+        <p:nvSpPr>
+          <p:cNvPr id="6" name="Rounded Rectangle 5"/>
+          <p:cNvSpPr/>
+          <p:nvPr/>
+        </p:nvSpPr>
+        <p:spPr>
+          <a:xfrm>
+            <a:off x="640080" y="5532120"/>
+            <a:ext cx="10911535" cy="658368"/>
+          </a:xfrm>
+          <a:prstGeom prst="roundRect">
+            <a:avLst/>
+          </a:prstGeom>
+          <a:solidFill>
+            <a:srgbClr val="151B26"/>
+          </a:solidFill>
+          <a:ln w="19050">
+            <a:solidFill>
+              <a:srgbClr val="00FF41"/>
+            </a:solidFill>
+          </a:ln>
+          <a:effectLst/>
+        </p:spPr>
+        <p:style>
+          <a:lnRef idx="1">
+            <a:schemeClr val="accent1"/>
+          </a:lnRef>
+          <a:fillRef idx="3">
+            <a:schemeClr val="accent1"/>
+          </a:fillRef>
+          <a:effectRef idx="2">
+            <a:schemeClr val="accent1"/>
+          </a:effectRef>
+          <a:fontRef idx="minor">
+            <a:schemeClr val="lt1"/>
+          </a:fontRef>
+        </p:style>
+        <p:txBody>
+          <a:bodyPr rtlCol="0" anchor="ctr"/>
+          <a:lstStyle/>
+          <a:p>
+            <a:pPr algn="ctr"/>
+          </a:p>
+        </p:txBody>
+      </p:sp>
+      <p:sp>
+        <p:nvSpPr>
+          <p:cNvPr id="7" name="TextBox 6"/>
+          <p:cNvSpPr txBox="1"/>
+          <p:nvPr/>
+        </p:nvSpPr>
+        <p:spPr>
+          <a:xfrm>
+            <a:off x="914400" y="5532120"/>
+            <a:ext cx="10362895" cy="658368"/>
+          </a:xfrm>
+          <a:prstGeom prst="rect">
+            <a:avLst/>
+          </a:prstGeom>
+          <a:noFill/>
+        </p:spPr>
+        <p:txBody>
+          <a:bodyPr wrap="square" anchor="ctr">
+            <a:spAutoFit/>
+          </a:bodyPr>
+          <a:lstStyle/>
+          <a:p>
+            <a:pPr algn="l">
+              <a:lnSpc>
+                <a:spcPct val="100000"/>
+              </a:lnSpc>
+            </a:pPr>
+            <a:r>
+              <a:rPr sz="1600" b="1">
+                <a:solidFill>
+                  <a:srgbClr val="00FF41"/>
+                </a:solidFill>
+                <a:latin typeface="Arial"/>
+              </a:rPr>
+              <a:t>▶  </a:t>
+            </a:r>
+            <a:r>
+              <a:rPr sz="1600" b="1">
+                <a:solidFill>
+                  <a:srgbClr val="F5F7FA"/>
+                </a:solidFill>
+                <a:latin typeface="Arial"/>
+              </a:rPr>
+              <a:t>Deliverable = planning-report.md + your storyboard - this is Checkpoint 2 of the final</a:t>
+            </a:r>
+          </a:p>
+        </p:txBody>
+      </p:sp>
+      <p:sp>
+        <p:nvSpPr>
+          <p:cNvPr id="8" name="TextBox 7"/>
+          <p:cNvSpPr txBox="1"/>
+          <p:nvPr/>
+        </p:nvSpPr>
+        <p:spPr>
+          <a:xfrm>
+            <a:off x="640080" y="6355080"/>
+            <a:ext cx="10972800" cy="365760"/>
+          </a:xfrm>
+          <a:prstGeom prst="rect">
+            <a:avLst/>
+          </a:prstGeom>
+          <a:noFill/>
+        </p:spPr>
+        <p:txBody>
+          <a:bodyPr wrap="square" anchor="t">
+            <a:spAutoFit/>
+          </a:bodyPr>
+          <a:lstStyle/>
+          <a:p>
+            <a:pPr algn="l">
+              <a:lnSpc>
+                <a:spcPct val="100000"/>
+              </a:lnSpc>
+            </a:pPr>
+            <a:r>
+              <a:rPr sz="1000" b="0">
+                <a:solidFill>
+                  <a:srgbClr val="5A6474"/>
+                </a:solidFill>
+                <a:latin typeface="Courier New"/>
+              </a:rPr>
+              <a:t>Good Code, Good Vibes · TECHIE 1121 · Cornell Tech · Summer 2026</a:t>
+            </a:r>
+          </a:p>
+        </p:txBody>
+      </p:sp>
+    </p:spTree>
+  </p:cSld>
+  <p:clrMapOvr>
+    <a:masterClrMapping/>
+  </p:clrMapOvr>
+</p:sld>
+</file>
+
+<file path=ppt/slides/slide15.xml><?xml version="1.0" encoding="utf-8"?>
+<p:sld xmlns:a="http://schemas.openxmlformats.org/drawingml/2006/main" xmlns:p="http://schemas.openxmlformats.org/presentationml/2006/main" xmlns:r="http://schemas.openxmlformats.org/officeDocument/2006/relationships">
+  <p:cSld>
+    <p:bg>
+      <p:bgPr>
+        <a:solidFill>
+          <a:srgbClr val="0B0E14"/>
+        </a:solidFill>
+        <a:effectLst/>
+      </p:bgPr>
+    </p:bg>
+    <p:spTree>
+      <p:nvGrpSpPr>
+        <p:cNvPr id="1" name=""/>
+        <p:cNvGrpSpPr/>
+        <p:nvPr/>
+      </p:nvGrpSpPr>
+      <p:grpSpPr/>
+      <p:sp>
+        <p:nvSpPr>
+          <p:cNvPr id="2" name="TextBox 1"/>
+          <p:cNvSpPr txBox="1"/>
+          <p:nvPr/>
+        </p:nvSpPr>
+        <p:spPr>
+          <a:xfrm>
+            <a:off x="640080" y="502920"/>
+            <a:ext cx="10058400" cy="365760"/>
+          </a:xfrm>
+          <a:prstGeom prst="rect">
+            <a:avLst/>
+          </a:prstGeom>
+          <a:noFill/>
+        </p:spPr>
+        <p:txBody>
+          <a:bodyPr wrap="square" anchor="t">
+            <a:spAutoFit/>
+          </a:bodyPr>
+          <a:lstStyle/>
+          <a:p>
+            <a:pPr algn="l">
+              <a:lnSpc>
+                <a:spcPct val="100000"/>
+              </a:lnSpc>
+            </a:pPr>
+            <a:r>
+              <a:rPr sz="1300" b="1">
+                <a:solidFill>
+                  <a:srgbClr val="00FF41"/>
+                </a:solidFill>
+                <a:latin typeface="Courier New"/>
+              </a:rPr>
               <a:t>CARRY IT TO THURSDAY</a:t>
             </a:r>
           </a:p>
@@ -4393,7 +6103,7 @@
                 </a:solidFill>
                 <a:latin typeface="Arial"/>
               </a:rPr>
-              <a:t>You already have a value and Tuesday's verdict. The final is the NEXT iteration of that value - not a new theme.</a:t>
+              <a:t>You already have a value and what Tuesday's verification showed. The final is the NEXT iteration of that value - not a new theme.</a:t>
             </a:r>
           </a:p>
           <a:p>
@@ -5331,7 +7041,7 @@
                 </a:solidFill>
                 <a:latin typeface="Courier New"/>
               </a:rPr>
-              <a:t>OPERATIONALIZE - THE VALUE TREE</a:t>
+              <a:t>PERSONAS - WHY, AND THE RISK</a:t>
             </a:r>
           </a:p>
         </p:txBody>
@@ -5414,7 +7124,7 @@
                 </a:solidFill>
                 <a:latin typeface="Arial"/>
               </a:rPr>
-              <a:t>From value down to the prompts you'll build</a:t>
+              <a:t>A persona is a tool to EMPATHIZE - not to stereotype</a:t>
             </a:r>
           </a:p>
         </p:txBody>
@@ -5453,7 +7163,7 @@
                 </a:solidFill>
                 <a:latin typeface="Arial"/>
               </a:rPr>
-              <a:t>Break your value down until it becomes something you can actually build:</a:t>
+              <a:t>A persona holds one real user's needs in mind while you build - so you design for someone specific, not "everyone."</a:t>
             </a:r>
           </a:p>
           <a:p>
@@ -5479,54 +7189,13 @@
               </a:lnSpc>
             </a:pPr>
             <a:r>
-              <a:rPr sz="2200" b="0">
-                <a:solidFill>
-                  <a:srgbClr val="F5F7FA"/>
+              <a:rPr sz="1800" b="0">
+                <a:solidFill>
+                  <a:srgbClr val="8A94A6"/>
                 </a:solidFill>
                 <a:latin typeface="Arial"/>
               </a:rPr>
-              <a:t>value  -&gt;  norms  -&gt;  requirements  -&gt;  features  -&gt;  </a:t>
-            </a:r>
-            <a:r>
-              <a:rPr sz="2200" b="1">
-                <a:solidFill>
-                  <a:srgbClr val="00FF41"/>
-                </a:solidFill>
-                <a:latin typeface="Arial"/>
-              </a:rPr>
-              <a:t>the prompts you run tomorrow</a:t>
-            </a:r>
-          </a:p>
-          <a:p>
-            <a:pPr algn="l">
-              <a:lnSpc>
-                <a:spcPct val="112000"/>
-              </a:lnSpc>
-            </a:pPr>
-            <a:r>
-              <a:rPr sz="2000" b="0">
-                <a:solidFill>
-                  <a:srgbClr val="F5F7FA"/>
-                </a:solidFill>
-                <a:latin typeface="Arial"/>
-              </a:rPr>
-              <a:t/>
-            </a:r>
-          </a:p>
-          <a:p>
-            <a:pPr algn="l">
-              <a:lnSpc>
-                <a:spcPct val="112000"/>
-              </a:lnSpc>
-            </a:pPr>
-            <a:r>
-              <a:rPr sz="1700" b="0">
-                <a:solidFill>
-                  <a:srgbClr val="8A94A6"/>
-                </a:solidFill>
-                <a:latin typeface="Arial"/>
-              </a:rPr>
-              <a:t>The bottom of the tree IS your Thursday build plan - the exact prompts, grounded in the value.</a:t>
+              <a:t>The risk: personas flatten people into cliches. Used well they build empathy; used badly they just launder your own assumptions.</a:t>
             </a:r>
           </a:p>
         </p:txBody>
@@ -5630,7 +7299,7 @@
                 </a:solidFill>
                 <a:latin typeface="Courier New"/>
               </a:rPr>
-              <a:t>STORYBOARD IT</a:t>
+              <a:t>GET AS CLOSE TO THE PERSON AS YOU CAN</a:t>
             </a:r>
           </a:p>
         </p:txBody>
@@ -5713,7 +7382,7 @@
                 </a:solidFill>
                 <a:latin typeface="Arial"/>
               </a:rPr>
-              <a:t>4-8 frames: the value in use</a:t>
+              <a:t>Nothing beats real contact</a:t>
             </a:r>
           </a:p>
         </p:txBody>
@@ -5746,14 +7415,21 @@
               </a:lnSpc>
             </a:pPr>
             <a:r>
-              <a:rPr sz="2000" b="1">
-                <a:solidFill>
-                  <a:srgbClr val="00FF41"/>
+              <a:rPr sz="2000" b="0">
+                <a:solidFill>
+                  <a:srgbClr val="F5F7FA"/>
                 </a:solidFill>
                 <a:latin typeface="Arial"/>
               </a:rPr>
-              <a:t>•  </a:t>
-            </a:r>
+              <a:t>Best: talk to a real person - a short interview. Better still: co-design, where the user helps make the thing.</a:t>
+            </a:r>
+          </a:p>
+          <a:p>
+            <a:pPr algn="l">
+              <a:lnSpc>
+                <a:spcPct val="112000"/>
+              </a:lnSpc>
+            </a:pPr>
             <a:r>
               <a:rPr sz="2000" b="0">
                 <a:solidFill>
@@ -5761,7 +7437,7 @@
                 </a:solidFill>
                 <a:latin typeface="Arial"/>
               </a:rPr>
-              <a:t>Frame the user, their problem, where your thing enters, and what changes.</a:t>
+              <a:t/>
             </a:r>
           </a:p>
           <a:p>
@@ -5771,72 +7447,13 @@
               </a:lnSpc>
             </a:pPr>
             <a:r>
-              <a:rPr sz="2000" b="1">
-                <a:solidFill>
-                  <a:srgbClr val="00FF41"/>
+              <a:rPr sz="1800" b="0">
+                <a:solidFill>
+                  <a:srgbClr val="8A94A6"/>
                 </a:solidFill>
                 <a:latin typeface="Arial"/>
               </a:rPr>
-              <a:t>•  </a:t>
-            </a:r>
-            <a:r>
-              <a:rPr sz="2000" b="0">
-                <a:solidFill>
-                  <a:srgbClr val="F5F7FA"/>
-                </a:solidFill>
-                <a:latin typeface="Arial"/>
-              </a:rPr>
-              <a:t>Hand-drawn (photograph it) or AI-assisted - rough is fine.</a:t>
-            </a:r>
-          </a:p>
-          <a:p>
-            <a:pPr algn="l">
-              <a:lnSpc>
-                <a:spcPct val="112000"/>
-              </a:lnSpc>
-            </a:pPr>
-            <a:r>
-              <a:rPr sz="2000" b="1">
-                <a:solidFill>
-                  <a:srgbClr val="00FF41"/>
-                </a:solidFill>
-                <a:latin typeface="Arial"/>
-              </a:rPr>
-              <a:t>•  </a:t>
-            </a:r>
-            <a:r>
-              <a:rPr sz="2000" b="0">
-                <a:solidFill>
-                  <a:srgbClr val="F5F7FA"/>
-                </a:solidFill>
-                <a:latin typeface="Arial"/>
-              </a:rPr>
-              <a:t>It doubles as your Thursday pitch skeleton.</a:t>
-            </a:r>
-          </a:p>
-          <a:p>
-            <a:pPr algn="l">
-              <a:lnSpc>
-                <a:spcPct val="112000"/>
-              </a:lnSpc>
-            </a:pPr>
-            <a:r>
-              <a:rPr sz="2000" b="1">
-                <a:solidFill>
-                  <a:srgbClr val="00FF41"/>
-                </a:solidFill>
-                <a:latin typeface="Arial"/>
-              </a:rPr>
-              <a:t>•  </a:t>
-            </a:r>
-            <a:r>
-              <a:rPr sz="2000" b="0">
-                <a:solidFill>
-                  <a:srgbClr val="F5F7FA"/>
-                </a:solidFill>
-                <a:latin typeface="Arial"/>
-              </a:rPr>
-              <a:t>Show the value living in the design, not just in the copy.</a:t>
+              <a:t>We can't fully do participatory design here - so get as close as you can, and be honest about the gap.</a:t>
             </a:r>
           </a:p>
         </p:txBody>
@@ -5940,7 +7557,7 @@
                 </a:solidFill>
                 <a:latin typeface="Courier New"/>
               </a:rPr>
-              <a:t>TOOLS FOR TODAY</a:t>
+              <a:t>AI PERSONAS - THEATER OR INSIGHT?</a:t>
             </a:r>
           </a:p>
         </p:txBody>
@@ -5997,8 +7614,8 @@
         </p:nvSpPr>
         <p:spPr>
           <a:xfrm>
-            <a:off x="640080" y="1188720"/>
-            <a:ext cx="10972800" cy="1097280"/>
+            <a:off x="640080" y="1325880"/>
+            <a:ext cx="10972800" cy="1828800"/>
           </a:xfrm>
           <a:prstGeom prst="rect">
             <a:avLst/>
@@ -6013,17 +7630,17 @@
           <a:p>
             <a:pPr algn="l">
               <a:lnSpc>
-                <a:spcPct val="100000"/>
-              </a:lnSpc>
-            </a:pPr>
-            <a:r>
-              <a:rPr sz="3400" b="1">
+                <a:spcPct val="105000"/>
+              </a:lnSpc>
+            </a:pPr>
+            <a:r>
+              <a:rPr sz="3800" b="1">
                 <a:solidFill>
                   <a:srgbClr val="F5F7FA"/>
                 </a:solidFill>
                 <a:latin typeface="Arial"/>
               </a:rPr>
-              <a:t>Storyboard + pitch</a:t>
+              <a:t>Make an AI persona, then hold it against a real human.</a:t>
             </a:r>
           </a:p>
         </p:txBody>
@@ -6036,8 +7653,8 @@
         </p:nvSpPr>
         <p:spPr>
           <a:xfrm>
-            <a:off x="658368" y="2286000"/>
-            <a:ext cx="10881360" cy="3657600"/>
+            <a:off x="658368" y="3611880"/>
+            <a:ext cx="10972800" cy="1737360"/>
           </a:xfrm>
           <a:prstGeom prst="rect">
             <a:avLst/>
@@ -6052,133 +7669,177 @@
           <a:p>
             <a:pPr algn="l">
               <a:lnSpc>
-                <a:spcPct val="112000"/>
-              </a:lnSpc>
-            </a:pPr>
-            <a:r>
-              <a:rPr sz="2000" b="1">
+                <a:spcPct val="135000"/>
+              </a:lnSpc>
+            </a:pPr>
+            <a:r>
+              <a:rPr sz="1900" b="1">
                 <a:solidFill>
                   <a:srgbClr val="00FF41"/>
                 </a:solidFill>
                 <a:latin typeface="Arial"/>
               </a:rPr>
-              <a:t>•  </a:t>
-            </a:r>
-            <a:r>
-              <a:rPr sz="2000" b="0">
+              <a:t>→  </a:t>
+            </a:r>
+            <a:r>
+              <a:rPr sz="1900" b="0">
+                <a:solidFill>
+                  <a:srgbClr val="8A94A6"/>
+                </a:solidFill>
+                <a:latin typeface="Arial"/>
+              </a:rPr>
+              <a:t>Generate a persona with AI - even "chat" with the simulated user.</a:t>
+            </a:r>
+          </a:p>
+          <a:p>
+            <a:pPr algn="l">
+              <a:lnSpc>
+                <a:spcPct val="135000"/>
+              </a:lnSpc>
+            </a:pPr>
+            <a:r>
+              <a:rPr sz="1900" b="1">
+                <a:solidFill>
+                  <a:srgbClr val="00FF41"/>
+                </a:solidFill>
+                <a:latin typeface="Arial"/>
+              </a:rPr>
+              <a:t>→  </a:t>
+            </a:r>
+            <a:r>
+              <a:rPr sz="1900" b="0">
+                <a:solidFill>
+                  <a:srgbClr val="8A94A6"/>
+                </a:solidFill>
+                <a:latin typeface="Arial"/>
+              </a:rPr>
+              <a:t>Compare it to the real person you interviewed: what did each get right?</a:t>
+            </a:r>
+          </a:p>
+          <a:p>
+            <a:pPr algn="l">
+              <a:lnSpc>
+                <a:spcPct val="135000"/>
+              </a:lnSpc>
+            </a:pPr>
+            <a:r>
+              <a:rPr sz="1900" b="1">
+                <a:solidFill>
+                  <a:srgbClr val="00FF41"/>
+                </a:solidFill>
+                <a:latin typeface="Arial"/>
+              </a:rPr>
+              <a:t>→  </a:t>
+            </a:r>
+            <a:r>
+              <a:rPr sz="1900" b="0">
+                <a:solidFill>
+                  <a:srgbClr val="8A94A6"/>
+                </a:solidFill>
+                <a:latin typeface="Arial"/>
+              </a:rPr>
+              <a:t>Does the AI theater help you empathize - or hand your own stereotypes back as if they were data?</a:t>
+            </a:r>
+          </a:p>
+        </p:txBody>
+      </p:sp>
+      <p:sp>
+        <p:nvSpPr>
+          <p:cNvPr id="6" name="Rounded Rectangle 5"/>
+          <p:cNvSpPr/>
+          <p:nvPr/>
+        </p:nvSpPr>
+        <p:spPr>
+          <a:xfrm>
+            <a:off x="640080" y="5532120"/>
+            <a:ext cx="10911535" cy="658368"/>
+          </a:xfrm>
+          <a:prstGeom prst="roundRect">
+            <a:avLst/>
+          </a:prstGeom>
+          <a:solidFill>
+            <a:srgbClr val="151B26"/>
+          </a:solidFill>
+          <a:ln w="19050">
+            <a:solidFill>
+              <a:srgbClr val="00FF41"/>
+            </a:solidFill>
+          </a:ln>
+          <a:effectLst/>
+        </p:spPr>
+        <p:style>
+          <a:lnRef idx="1">
+            <a:schemeClr val="accent1"/>
+          </a:lnRef>
+          <a:fillRef idx="3">
+            <a:schemeClr val="accent1"/>
+          </a:fillRef>
+          <a:effectRef idx="2">
+            <a:schemeClr val="accent1"/>
+          </a:effectRef>
+          <a:fontRef idx="minor">
+            <a:schemeClr val="lt1"/>
+          </a:fontRef>
+        </p:style>
+        <p:txBody>
+          <a:bodyPr rtlCol="0" anchor="ctr"/>
+          <a:lstStyle/>
+          <a:p>
+            <a:pPr algn="ctr"/>
+          </a:p>
+        </p:txBody>
+      </p:sp>
+      <p:sp>
+        <p:nvSpPr>
+          <p:cNvPr id="7" name="TextBox 6"/>
+          <p:cNvSpPr txBox="1"/>
+          <p:nvPr/>
+        </p:nvSpPr>
+        <p:spPr>
+          <a:xfrm>
+            <a:off x="914400" y="5532120"/>
+            <a:ext cx="10362895" cy="658368"/>
+          </a:xfrm>
+          <a:prstGeom prst="rect">
+            <a:avLst/>
+          </a:prstGeom>
+          <a:noFill/>
+        </p:spPr>
+        <p:txBody>
+          <a:bodyPr wrap="square" anchor="ctr">
+            <a:spAutoFit/>
+          </a:bodyPr>
+          <a:lstStyle/>
+          <a:p>
+            <a:pPr algn="l">
+              <a:lnSpc>
+                <a:spcPct val="100000"/>
+              </a:lnSpc>
+            </a:pPr>
+            <a:r>
+              <a:rPr sz="1600" b="1">
+                <a:solidFill>
+                  <a:srgbClr val="00FF41"/>
+                </a:solidFill>
+                <a:latin typeface="Arial"/>
+              </a:rPr>
+              <a:t>▶  </a:t>
+            </a:r>
+            <a:r>
+              <a:rPr sz="1600" b="1">
                 <a:solidFill>
                   <a:srgbClr val="F5F7FA"/>
                 </a:solidFill>
                 <a:latin typeface="Arial"/>
               </a:rPr>
-              <a:t>Storyboard: FigJam / Figma, Canva, Google Slides (one frame per slide), or Storyboarder (free &amp; open-source).</a:t>
-            </a:r>
-          </a:p>
-          <a:p>
-            <a:pPr algn="l">
-              <a:lnSpc>
-                <a:spcPct val="112000"/>
-              </a:lnSpc>
-            </a:pPr>
-            <a:r>
-              <a:rPr sz="2000" b="1">
-                <a:solidFill>
-                  <a:srgbClr val="00FF41"/>
-                </a:solidFill>
-                <a:latin typeface="Arial"/>
-              </a:rPr>
-              <a:t>•  </a:t>
-            </a:r>
-            <a:r>
-              <a:rPr sz="2000" b="0">
-                <a:solidFill>
-                  <a:srgbClr val="F5F7FA"/>
-                </a:solidFill>
-                <a:latin typeface="Arial"/>
-              </a:rPr>
-              <a:t>AI pitch video (for Thursday): Google Veo 3.1 (in Flow), Runway, Kling, or Pika.</a:t>
-            </a:r>
-          </a:p>
-          <a:p>
-            <a:pPr algn="l">
-              <a:lnSpc>
-                <a:spcPct val="112000"/>
-              </a:lnSpc>
-            </a:pPr>
-            <a:r>
-              <a:rPr sz="2000" b="1">
-                <a:solidFill>
-                  <a:srgbClr val="00FF41"/>
-                </a:solidFill>
-                <a:latin typeface="Arial"/>
-              </a:rPr>
-              <a:t>•  </a:t>
-            </a:r>
-            <a:r>
-              <a:rPr sz="2000" b="0">
-                <a:solidFill>
-                  <a:srgbClr val="F5F7FA"/>
-                </a:solidFill>
-                <a:latin typeface="Arial"/>
-              </a:rPr>
-              <a:t>Note: OpenAI retired the Sora app in April 2026 - use Veo / Runway / Kling / Pika instead.</a:t>
-            </a:r>
-          </a:p>
-          <a:p>
-            <a:pPr algn="l">
-              <a:lnSpc>
-                <a:spcPct val="112000"/>
-              </a:lnSpc>
-            </a:pPr>
-            <a:r>
-              <a:rPr sz="2000" b="1">
-                <a:solidFill>
-                  <a:srgbClr val="00FF41"/>
-                </a:solidFill>
-                <a:latin typeface="Arial"/>
-              </a:rPr>
-              <a:t>•  </a:t>
-            </a:r>
-            <a:r>
-              <a:rPr sz="2000" b="0">
-                <a:solidFill>
-                  <a:srgbClr val="F5F7FA"/>
-                </a:solidFill>
-                <a:latin typeface="Arial"/>
-              </a:rPr>
-              <a:t>Free tiers add watermarks + limits - fine for a class pitch.</a:t>
-            </a:r>
-          </a:p>
-          <a:p>
-            <a:pPr algn="l">
-              <a:lnSpc>
-                <a:spcPct val="112000"/>
-              </a:lnSpc>
-            </a:pPr>
-            <a:r>
-              <a:rPr sz="2000" b="1">
-                <a:solidFill>
-                  <a:srgbClr val="00FF41"/>
-                </a:solidFill>
-                <a:latin typeface="Arial"/>
-              </a:rPr>
-              <a:t>•  </a:t>
-            </a:r>
-            <a:r>
-              <a:rPr sz="2000" b="0">
-                <a:solidFill>
-                  <a:srgbClr val="F5F7FA"/>
-                </a:solidFill>
-                <a:latin typeface="Arial"/>
-              </a:rPr>
-              <a:t>Interview + persona: just talk to a person; capture notes in FigJam or a doc.</a:t>
-            </a:r>
-          </a:p>
-        </p:txBody>
-      </p:sp>
-      <p:sp>
-        <p:nvSpPr>
-          <p:cNvPr id="6" name="TextBox 5"/>
+              <a:t>Bring BOTH into planning: the AI persona AND one real human's words</a:t>
+            </a:r>
+          </a:p>
+        </p:txBody>
+      </p:sp>
+      <p:sp>
+        <p:nvSpPr>
+          <p:cNvPr id="8" name="TextBox 7"/>
           <p:cNvSpPr txBox="1"/>
           <p:nvPr/>
         </p:nvSpPr>
@@ -6358,7 +8019,7 @@
                 </a:solidFill>
                 <a:latin typeface="Arial"/>
               </a:rPr>
-              <a:t>Show an example</a:t>
+              <a:t>AI persona vs. real interview</a:t>
             </a:r>
           </a:p>
         </p:txBody>
@@ -6444,7 +8105,7 @@
                 </a:solidFill>
                 <a:latin typeface="Courier New"/>
               </a:rPr>
-              <a:t>[ example storyboard or persona goes here ]</a:t>
+              <a:t>[ AI-generated persona + simulator chat, next to your real interview notes ]</a:t>
             </a:r>
           </a:p>
         </p:txBody>
@@ -6483,7 +8144,7 @@
                 </a:solidFill>
                 <a:latin typeface="Arial"/>
               </a:rPr>
-              <a:t>a strong persona, a storyboard, or an AI-pitch still</a:t>
+              <a:t>add the two side by side - where did the AI flatten the person?</a:t>
             </a:r>
           </a:p>
         </p:txBody>
@@ -6587,7 +8248,7 @@
                 </a:solidFill>
                 <a:latin typeface="Courier New"/>
               </a:rPr>
-              <a:t>ACTIVITY - TODAY (TEAM)</a:t>
+              <a:t>KEEP THE VALUE IN THE FOREGROUND</a:t>
             </a:r>
           </a:p>
         </p:txBody>
@@ -6644,8 +8305,8 @@
         </p:nvSpPr>
         <p:spPr>
           <a:xfrm>
-            <a:off x="640080" y="1325880"/>
-            <a:ext cx="10972800" cy="1828800"/>
+            <a:off x="640080" y="1188720"/>
+            <a:ext cx="10972800" cy="1097280"/>
           </a:xfrm>
           <a:prstGeom prst="rect">
             <a:avLst/>
@@ -6660,17 +8321,17 @@
           <a:p>
             <a:pPr algn="l">
               <a:lnSpc>
-                <a:spcPct val="105000"/>
-              </a:lnSpc>
-            </a:pPr>
-            <a:r>
-              <a:rPr sz="3800" b="1">
+                <a:spcPct val="100000"/>
+              </a:lnSpc>
+            </a:pPr>
+            <a:r>
+              <a:rPr sz="3400" b="1">
                 <a:solidFill>
                   <a:srgbClr val="F5F7FA"/>
                 </a:solidFill>
                 <a:latin typeface="Arial"/>
               </a:rPr>
-              <a:t>Plan the next iteration of your value.</a:t>
+              <a:t>Values-conscientious planning</a:t>
             </a:r>
           </a:p>
         </p:txBody>
@@ -6683,8 +8344,8 @@
         </p:nvSpPr>
         <p:spPr>
           <a:xfrm>
-            <a:off x="658368" y="3611880"/>
-            <a:ext cx="10972800" cy="1737360"/>
+            <a:off x="658368" y="2286000"/>
+            <a:ext cx="10881360" cy="3657600"/>
           </a:xfrm>
           <a:prstGeom prst="rect">
             <a:avLst/>
@@ -6699,7 +8360,39 @@
           <a:p>
             <a:pPr algn="l">
               <a:lnSpc>
-                <a:spcPct val="135000"/>
+                <a:spcPct val="112000"/>
+              </a:lnSpc>
+            </a:pPr>
+            <a:r>
+              <a:rPr sz="2000" b="0">
+                <a:solidFill>
+                  <a:srgbClr val="F5F7FA"/>
+                </a:solidFill>
+                <a:latin typeface="Arial"/>
+              </a:rPr>
+              <a:t>Put your value at the front of BOTH artifacts:</a:t>
+            </a:r>
+          </a:p>
+          <a:p>
+            <a:pPr algn="l">
+              <a:lnSpc>
+                <a:spcPct val="112000"/>
+              </a:lnSpc>
+            </a:pPr>
+            <a:r>
+              <a:rPr sz="2000" b="0">
+                <a:solidFill>
+                  <a:srgbClr val="F5F7FA"/>
+                </a:solidFill>
+                <a:latin typeface="Arial"/>
+              </a:rPr>
+              <a:t/>
+            </a:r>
+          </a:p>
+          <a:p>
+            <a:pPr algn="l">
+              <a:lnSpc>
+                <a:spcPct val="112000"/>
               </a:lnSpc>
             </a:pPr>
             <a:r>
@@ -6709,22 +8402,22 @@
                 </a:solidFill>
                 <a:latin typeface="Arial"/>
               </a:rPr>
-              <a:t>→  </a:t>
+              <a:t>Persona</a:t>
             </a:r>
             <a:r>
               <a:rPr sz="1900" b="0">
                 <a:solidFill>
-                  <a:srgbClr val="8A94A6"/>
+                  <a:srgbClr val="F5F7FA"/>
                 </a:solidFill>
                 <a:latin typeface="Arial"/>
               </a:rPr>
-              <a:t>Interview a real person outside the class -&gt; build a persona + the need in their words.</a:t>
-            </a:r>
-          </a:p>
-          <a:p>
-            <a:pPr algn="l">
-              <a:lnSpc>
-                <a:spcPct val="135000"/>
+              <a:t> - where does this user MEET or LOSE the value in their day?</a:t>
+            </a:r>
+          </a:p>
+          <a:p>
+            <a:pPr algn="l">
+              <a:lnSpc>
+                <a:spcPct val="112000"/>
               </a:lnSpc>
             </a:pPr>
             <a:r>
@@ -6734,142 +8427,23 @@
                 </a:solidFill>
                 <a:latin typeface="Arial"/>
               </a:rPr>
-              <a:t>→  </a:t>
+              <a:t>Storyboard</a:t>
             </a:r>
             <a:r>
               <a:rPr sz="1900" b="0">
                 <a:solidFill>
-                  <a:srgbClr val="8A94A6"/>
+                  <a:srgbClr val="F5F7FA"/>
                 </a:solidFill>
                 <a:latin typeface="Arial"/>
               </a:rPr>
-              <a:t>Operationalize: value -&gt; norms -&gt; requirements -&gt; features -&gt; the prompts you'll build.</a:t>
-            </a:r>
-          </a:p>
-          <a:p>
-            <a:pPr algn="l">
-              <a:lnSpc>
-                <a:spcPct val="135000"/>
-              </a:lnSpc>
-            </a:pPr>
-            <a:r>
-              <a:rPr sz="1900" b="1">
-                <a:solidFill>
-                  <a:srgbClr val="00FF41"/>
-                </a:solidFill>
-                <a:latin typeface="Arial"/>
-              </a:rPr>
-              <a:t>→  </a:t>
-            </a:r>
-            <a:r>
-              <a:rPr sz="1900" b="0">
-                <a:solidFill>
-                  <a:srgbClr val="8A94A6"/>
-                </a:solidFill>
-                <a:latin typeface="Arial"/>
-              </a:rPr>
-              <a:t>Storyboard the solution (4-8 frames) and scope the smallest real thing for Thursday.</a:t>
-            </a:r>
-          </a:p>
-        </p:txBody>
-      </p:sp>
-      <p:sp>
-        <p:nvSpPr>
-          <p:cNvPr id="6" name="Rounded Rectangle 5"/>
-          <p:cNvSpPr/>
-          <p:nvPr/>
-        </p:nvSpPr>
-        <p:spPr>
-          <a:xfrm>
-            <a:off x="640080" y="5532120"/>
-            <a:ext cx="10911535" cy="658368"/>
-          </a:xfrm>
-          <a:prstGeom prst="roundRect">
-            <a:avLst/>
-          </a:prstGeom>
-          <a:solidFill>
-            <a:srgbClr val="151B26"/>
-          </a:solidFill>
-          <a:ln w="19050">
-            <a:solidFill>
-              <a:srgbClr val="00FF41"/>
-            </a:solidFill>
-          </a:ln>
-          <a:effectLst/>
-        </p:spPr>
-        <p:style>
-          <a:lnRef idx="1">
-            <a:schemeClr val="accent1"/>
-          </a:lnRef>
-          <a:fillRef idx="3">
-            <a:schemeClr val="accent1"/>
-          </a:fillRef>
-          <a:effectRef idx="2">
-            <a:schemeClr val="accent1"/>
-          </a:effectRef>
-          <a:fontRef idx="minor">
-            <a:schemeClr val="lt1"/>
-          </a:fontRef>
-        </p:style>
-        <p:txBody>
-          <a:bodyPr rtlCol="0" anchor="ctr"/>
-          <a:lstStyle/>
-          <a:p>
-            <a:pPr algn="ctr"/>
-          </a:p>
-        </p:txBody>
-      </p:sp>
-      <p:sp>
-        <p:nvSpPr>
-          <p:cNvPr id="7" name="TextBox 6"/>
-          <p:cNvSpPr txBox="1"/>
-          <p:nvPr/>
-        </p:nvSpPr>
-        <p:spPr>
-          <a:xfrm>
-            <a:off x="914400" y="5532120"/>
-            <a:ext cx="10362895" cy="658368"/>
-          </a:xfrm>
-          <a:prstGeom prst="rect">
-            <a:avLst/>
-          </a:prstGeom>
-          <a:noFill/>
-        </p:spPr>
-        <p:txBody>
-          <a:bodyPr wrap="square" anchor="ctr">
-            <a:spAutoFit/>
-          </a:bodyPr>
-          <a:lstStyle/>
-          <a:p>
-            <a:pPr algn="l">
-              <a:lnSpc>
-                <a:spcPct val="100000"/>
-              </a:lnSpc>
-            </a:pPr>
-            <a:r>
-              <a:rPr sz="1600" b="1">
-                <a:solidFill>
-                  <a:srgbClr val="00FF41"/>
-                </a:solidFill>
-                <a:latin typeface="Arial"/>
-              </a:rPr>
-              <a:t>▶  </a:t>
-            </a:r>
-            <a:r>
-              <a:rPr sz="1600" b="1">
-                <a:solidFill>
-                  <a:srgbClr val="F5F7FA"/>
-                </a:solidFill>
-                <a:latin typeface="Arial"/>
-              </a:rPr>
-              <a:t>Deliverable = planning-report.md + your storyboard - this is Checkpoint 2 of the final</a:t>
-            </a:r>
-          </a:p>
-        </p:txBody>
-      </p:sp>
-      <p:sp>
-        <p:nvSpPr>
-          <p:cNvPr id="8" name="TextBox 7"/>
+              <a:t> - show the value living in each frame: the moment it's supported, defended, or repaired.</a:t>
+            </a:r>
+          </a:p>
+        </p:txBody>
+      </p:sp>
+      <p:sp>
+        <p:nvSpPr>
+          <p:cNvPr id="6" name="TextBox 5"/>
           <p:cNvSpPr txBox="1"/>
           <p:nvPr/>
         </p:nvSpPr>

--- a/slides/Week3-Wed-Working-Day.pptx
+++ b/slides/Week3-Wed-Working-Day.pptx
@@ -516,7 +516,7 @@
           <a:lstStyle/>
           <a:p>
             <a:r>
-              <a:t>AI personas are fast + frictionless but can launder assumptions back as 'data'. Comparing to a real human is the check.</a:t>
+              <a:t>AI personas are fast + frictionless but can launder assumptions back as 'data'. Comparing to a real human is the check. Ref: nngroup.com/articles/synthetic-users/</a:t>
             </a:r>
           </a:p>
         </p:txBody>
@@ -8144,7 +8144,7 @@
                 </a:solidFill>
                 <a:latin typeface="Arial"/>
               </a:rPr>
-              <a:t>add the two side by side - where did the AI flatten the person?</a:t>
+              <a:t>add the two side by side - where did the AI flatten the person?  (skeptical take: NN/g - Synthetic Users)</a:t>
             </a:r>
           </a:p>
         </p:txBody>

--- a/slides/Week3-Wed-Working-Day.pptx
+++ b/slides/Week3-Wed-Working-Day.pptx
@@ -20,6 +20,7 @@
     <p:sldId id="268" r:id="rId20"/>
     <p:sldId id="269" r:id="rId21"/>
     <p:sldId id="270" r:id="rId22"/>
+    <p:sldId id="271" r:id="rId23"/>
   </p:sldIdLst>
   <p:sldSz cx="12191695" cy="6858000" type="screen4x3"/>
   <p:notesSz cx="6858000" cy="9144000"/>
@@ -542,6 +543,76 @@
 </file>
 
 <file path=ppt/notesSlides/notesSlide2.xml><?xml version="1.0" encoding="utf-8"?>
+<p:notes xmlns:a="http://schemas.openxmlformats.org/drawingml/2006/main" xmlns:p="http://schemas.openxmlformats.org/presentationml/2006/main" xmlns:r="http://schemas.openxmlformats.org/officeDocument/2006/relationships">
+  <p:cSld>
+    <p:spTree>
+      <p:nvGrpSpPr>
+        <p:cNvPr id="1" name=""/>
+        <p:cNvGrpSpPr/>
+        <p:nvPr/>
+      </p:nvGrpSpPr>
+      <p:grpSpPr>
+        <a:xfrm>
+          <a:off x="0" y="0"/>
+          <a:ext cx="0" cy="0"/>
+          <a:chOff x="0" y="0"/>
+          <a:chExt cx="0" cy="0"/>
+        </a:xfrm>
+      </p:grpSpPr>
+      <p:sp>
+        <p:nvSpPr>
+          <p:cNvPr id="2" name="Slide Image Placeholder 1"/>
+          <p:cNvSpPr>
+            <a:spLocks noGrp="1"/>
+          </p:cNvSpPr>
+          <p:nvPr>
+            <p:ph type="sldImg" idx="2"/>
+          </p:nvPr>
+        </p:nvSpPr>
+        <p:spPr/>
+      </p:sp>
+      <p:sp>
+        <p:nvSpPr>
+          <p:cNvPr id="3" name="Notes Placeholder 2"/>
+          <p:cNvSpPr>
+            <a:spLocks noGrp="1"/>
+          </p:cNvSpPr>
+          <p:nvPr>
+            <p:ph type="body" idx="3" sz="quarter"/>
+          </p:nvPr>
+        </p:nvSpPr>
+        <p:spPr/>
+        <p:txBody>
+          <a:bodyPr/>
+          <a:lstStyle/>
+          <a:p>
+            <a:r>
+              <a:t>AI storyboarding / co-design: Sandhaus, Gu, Parreira &amp; Ju 2025, 'Co-Designing with Transformers' (DIS '25) - GenAI helps generate + iterate frames, but can flatten the narrative if you let it drive. dl.acm.org/doi/10.1145/3715336.3735805</a:t>
+            </a:r>
+          </a:p>
+        </p:txBody>
+      </p:sp>
+      <p:sp>
+        <p:nvSpPr>
+          <p:cNvPr id="4" name="Slide Number Placeholder 3"/>
+          <p:cNvSpPr>
+            <a:spLocks noGrp="1"/>
+          </p:cNvSpPr>
+          <p:nvPr>
+            <p:ph type="sldNum" idx="5" sz="quarter"/>
+          </p:nvPr>
+        </p:nvSpPr>
+        <p:spPr/>
+      </p:sp>
+    </p:spTree>
+  </p:cSld>
+  <p:clrMapOvr>
+    <a:masterClrMapping/>
+  </p:clrMapOvr>
+</p:notes>
+</file>
+
+<file path=ppt/notesSlides/notesSlide3.xml><?xml version="1.0" encoding="utf-8"?>
 <p:notes xmlns:a="http://schemas.openxmlformats.org/drawingml/2006/main" xmlns:p="http://schemas.openxmlformats.org/presentationml/2006/main" xmlns:r="http://schemas.openxmlformats.org/officeDocument/2006/relationships">
   <p:cSld>
     <p:spTree>
@@ -4301,7 +4372,7 @@
                 </a:solidFill>
                 <a:latin typeface="Arial"/>
               </a:rPr>
-              <a:t>It doubles as your Thursday pitch skeleton.</a:t>
+              <a:t>AI can sketch or fill frames fast - but keep YOUR story; the AI is a co-designer, not the author.</a:t>
             </a:r>
           </a:p>
           <a:p>
@@ -4326,7 +4397,7 @@
                 </a:solidFill>
                 <a:latin typeface="Arial"/>
               </a:rPr>
-              <a:t>Show the value living in the design, not just in the copy.</a:t>
+              <a:t>It doubles as your Thursday pitch skeleton - show the value living in the design, not just the copy.</a:t>
             </a:r>
           </a:p>
         </p:txBody>
@@ -5456,7 +5527,7 @@
                 </a:solidFill>
                 <a:latin typeface="Courier New"/>
               </a:rPr>
-              <a:t>CARRY IT TO THURSDAY</a:t>
+              <a:t>LAST 30 MINUTES - START VIBE CODING</a:t>
             </a:r>
           </a:p>
         </p:txBody>
@@ -5539,7 +5610,7 @@
                 </a:solidFill>
                 <a:latin typeface="Arial"/>
               </a:rPr>
-              <a:t>Your plan is your build</a:t>
+              <a:t>Don't wait for Thursday to open the repo</a:t>
             </a:r>
           </a:p>
         </p:txBody>
@@ -5578,7 +5649,297 @@
                 </a:solidFill>
                 <a:latin typeface="Arial"/>
               </a:rPr>
-              <a:t>Tomorrow you build straight from the prompts your value tree produced, test it, and present it in the evening.</a:t>
+              <a:t>Once the plan is locked, spend the final half hour getting a head start:</a:t>
+            </a:r>
+          </a:p>
+          <a:p>
+            <a:pPr algn="l">
+              <a:lnSpc>
+                <a:spcPct val="112000"/>
+              </a:lnSpc>
+            </a:pPr>
+            <a:r>
+              <a:rPr sz="2000" b="0">
+                <a:solidFill>
+                  <a:srgbClr val="F5F7FA"/>
+                </a:solidFill>
+                <a:latin typeface="Arial"/>
+              </a:rPr>
+              <a:t/>
+            </a:r>
+          </a:p>
+          <a:p>
+            <a:pPr algn="l">
+              <a:lnSpc>
+                <a:spcPct val="112000"/>
+              </a:lnSpc>
+            </a:pPr>
+            <a:r>
+              <a:rPr sz="1900" b="1">
+                <a:solidFill>
+                  <a:srgbClr val="00FF41"/>
+                </a:solidFill>
+                <a:latin typeface="Arial"/>
+              </a:rPr>
+              <a:t>Open your team repo, run the FIRST prompt from your value tree, and get anything at all on screen.</a:t>
+            </a:r>
+          </a:p>
+          <a:p>
+            <a:pPr algn="l">
+              <a:lnSpc>
+                <a:spcPct val="112000"/>
+              </a:lnSpc>
+            </a:pPr>
+            <a:r>
+              <a:rPr sz="2000" b="0">
+                <a:solidFill>
+                  <a:srgbClr val="F5F7FA"/>
+                </a:solidFill>
+                <a:latin typeface="Arial"/>
+              </a:rPr>
+              <a:t/>
+            </a:r>
+          </a:p>
+          <a:p>
+            <a:pPr algn="l">
+              <a:lnSpc>
+                <a:spcPct val="112000"/>
+              </a:lnSpc>
+            </a:pPr>
+            <a:r>
+              <a:rPr sz="1700" b="0">
+                <a:solidFill>
+                  <a:srgbClr val="8A94A6"/>
+                </a:solidFill>
+                <a:latin typeface="Arial"/>
+              </a:rPr>
+              <a:t>Thursday has no lecture - it's all build - so every minute you start now is a minute you keep tomorrow.</a:t>
+            </a:r>
+          </a:p>
+        </p:txBody>
+      </p:sp>
+      <p:sp>
+        <p:nvSpPr>
+          <p:cNvPr id="6" name="TextBox 5"/>
+          <p:cNvSpPr txBox="1"/>
+          <p:nvPr/>
+        </p:nvSpPr>
+        <p:spPr>
+          <a:xfrm>
+            <a:off x="640080" y="6355080"/>
+            <a:ext cx="10972800" cy="365760"/>
+          </a:xfrm>
+          <a:prstGeom prst="rect">
+            <a:avLst/>
+          </a:prstGeom>
+          <a:noFill/>
+        </p:spPr>
+        <p:txBody>
+          <a:bodyPr wrap="square" anchor="t">
+            <a:spAutoFit/>
+          </a:bodyPr>
+          <a:lstStyle/>
+          <a:p>
+            <a:pPr algn="l">
+              <a:lnSpc>
+                <a:spcPct val="100000"/>
+              </a:lnSpc>
+            </a:pPr>
+            <a:r>
+              <a:rPr sz="1000" b="0">
+                <a:solidFill>
+                  <a:srgbClr val="5A6474"/>
+                </a:solidFill>
+                <a:latin typeface="Courier New"/>
+              </a:rPr>
+              <a:t>Good Code, Good Vibes · TECHIE 1121 · Cornell Tech · Summer 2026</a:t>
+            </a:r>
+          </a:p>
+        </p:txBody>
+      </p:sp>
+    </p:spTree>
+  </p:cSld>
+  <p:clrMapOvr>
+    <a:masterClrMapping/>
+  </p:clrMapOvr>
+</p:sld>
+</file>
+
+<file path=ppt/slides/slide16.xml><?xml version="1.0" encoding="utf-8"?>
+<p:sld xmlns:a="http://schemas.openxmlformats.org/drawingml/2006/main" xmlns:p="http://schemas.openxmlformats.org/presentationml/2006/main" xmlns:r="http://schemas.openxmlformats.org/officeDocument/2006/relationships">
+  <p:cSld>
+    <p:bg>
+      <p:bgPr>
+        <a:solidFill>
+          <a:srgbClr val="0B0E14"/>
+        </a:solidFill>
+        <a:effectLst/>
+      </p:bgPr>
+    </p:bg>
+    <p:spTree>
+      <p:nvGrpSpPr>
+        <p:cNvPr id="1" name=""/>
+        <p:cNvGrpSpPr/>
+        <p:nvPr/>
+      </p:nvGrpSpPr>
+      <p:grpSpPr/>
+      <p:sp>
+        <p:nvSpPr>
+          <p:cNvPr id="2" name="TextBox 1"/>
+          <p:cNvSpPr txBox="1"/>
+          <p:nvPr/>
+        </p:nvSpPr>
+        <p:spPr>
+          <a:xfrm>
+            <a:off x="640080" y="502920"/>
+            <a:ext cx="10058400" cy="365760"/>
+          </a:xfrm>
+          <a:prstGeom prst="rect">
+            <a:avLst/>
+          </a:prstGeom>
+          <a:noFill/>
+        </p:spPr>
+        <p:txBody>
+          <a:bodyPr wrap="square" anchor="t">
+            <a:spAutoFit/>
+          </a:bodyPr>
+          <a:lstStyle/>
+          <a:p>
+            <a:pPr algn="l">
+              <a:lnSpc>
+                <a:spcPct val="100000"/>
+              </a:lnSpc>
+            </a:pPr>
+            <a:r>
+              <a:rPr sz="1300" b="1">
+                <a:solidFill>
+                  <a:srgbClr val="00FF41"/>
+                </a:solidFill>
+                <a:latin typeface="Courier New"/>
+              </a:rPr>
+              <a:t>CARRY IT TO THURSDAY</a:t>
+            </a:r>
+          </a:p>
+        </p:txBody>
+      </p:sp>
+      <p:sp>
+        <p:nvSpPr>
+          <p:cNvPr id="3" name="Rectangle 2"/>
+          <p:cNvSpPr/>
+          <p:nvPr/>
+        </p:nvSpPr>
+        <p:spPr>
+          <a:xfrm>
+            <a:off x="640080" y="932688"/>
+            <a:ext cx="822960" cy="73152"/>
+          </a:xfrm>
+          <a:prstGeom prst="rect">
+            <a:avLst/>
+          </a:prstGeom>
+          <a:solidFill>
+            <a:srgbClr val="00FF41"/>
+          </a:solidFill>
+          <a:ln>
+            <a:noFill/>
+          </a:ln>
+          <a:effectLst/>
+        </p:spPr>
+        <p:style>
+          <a:lnRef idx="1">
+            <a:schemeClr val="accent1"/>
+          </a:lnRef>
+          <a:fillRef idx="3">
+            <a:schemeClr val="accent1"/>
+          </a:fillRef>
+          <a:effectRef idx="2">
+            <a:schemeClr val="accent1"/>
+          </a:effectRef>
+          <a:fontRef idx="minor">
+            <a:schemeClr val="lt1"/>
+          </a:fontRef>
+        </p:style>
+        <p:txBody>
+          <a:bodyPr rtlCol="0" anchor="ctr"/>
+          <a:lstStyle/>
+          <a:p>
+            <a:pPr algn="ctr"/>
+          </a:p>
+        </p:txBody>
+      </p:sp>
+      <p:sp>
+        <p:nvSpPr>
+          <p:cNvPr id="4" name="TextBox 3"/>
+          <p:cNvSpPr txBox="1"/>
+          <p:nvPr/>
+        </p:nvSpPr>
+        <p:spPr>
+          <a:xfrm>
+            <a:off x="640080" y="1188720"/>
+            <a:ext cx="10972800" cy="1097280"/>
+          </a:xfrm>
+          <a:prstGeom prst="rect">
+            <a:avLst/>
+          </a:prstGeom>
+          <a:noFill/>
+        </p:spPr>
+        <p:txBody>
+          <a:bodyPr wrap="square" anchor="t">
+            <a:spAutoFit/>
+          </a:bodyPr>
+          <a:lstStyle/>
+          <a:p>
+            <a:pPr algn="l">
+              <a:lnSpc>
+                <a:spcPct val="100000"/>
+              </a:lnSpc>
+            </a:pPr>
+            <a:r>
+              <a:rPr sz="3400" b="1">
+                <a:solidFill>
+                  <a:srgbClr val="F5F7FA"/>
+                </a:solidFill>
+                <a:latin typeface="Arial"/>
+              </a:rPr>
+              <a:t>Your plan is your build</a:t>
+            </a:r>
+          </a:p>
+        </p:txBody>
+      </p:sp>
+      <p:sp>
+        <p:nvSpPr>
+          <p:cNvPr id="5" name="TextBox 4"/>
+          <p:cNvSpPr txBox="1"/>
+          <p:nvPr/>
+        </p:nvSpPr>
+        <p:spPr>
+          <a:xfrm>
+            <a:off x="658368" y="2286000"/>
+            <a:ext cx="10881360" cy="3657600"/>
+          </a:xfrm>
+          <a:prstGeom prst="rect">
+            <a:avLst/>
+          </a:prstGeom>
+          <a:noFill/>
+        </p:spPr>
+        <p:txBody>
+          <a:bodyPr wrap="square" anchor="t">
+            <a:spAutoFit/>
+          </a:bodyPr>
+          <a:lstStyle/>
+          <a:p>
+            <a:pPr algn="l">
+              <a:lnSpc>
+                <a:spcPct val="112000"/>
+              </a:lnSpc>
+            </a:pPr>
+            <a:r>
+              <a:rPr sz="2100" b="0">
+                <a:solidFill>
+                  <a:srgbClr val="F5F7FA"/>
+                </a:solidFill>
+                <a:latin typeface="Arial"/>
+              </a:rPr>
+              <a:t>Tomorrow is a full build day (no lecture): build straight from the prompts your value tree produced, then showcase it in the afternoon (3-5).</a:t>
             </a:r>
           </a:p>
           <a:p>

--- a/slides/Week3-Wed-Working-Day.pptx
+++ b/slides/Week3-Wed-Working-Day.pptx
@@ -9,18 +9,15 @@
     <p:sldId id="257" r:id="rId8"/>
     <p:sldId id="258" r:id="rId9"/>
     <p:sldId id="259" r:id="rId10"/>
-    <p:sldId id="260" r:id="rId11"/>
-    <p:sldId id="261" r:id="rId12"/>
-    <p:sldId id="262" r:id="rId13"/>
+    <p:sldId id="260" r:id="rId12"/>
+    <p:sldId id="261" r:id="rId13"/>
+    <p:sldId id="262" r:id="rId14"/>
     <p:sldId id="263" r:id="rId15"/>
     <p:sldId id="264" r:id="rId16"/>
     <p:sldId id="265" r:id="rId17"/>
     <p:sldId id="266" r:id="rId18"/>
     <p:sldId id="267" r:id="rId19"/>
     <p:sldId id="268" r:id="rId20"/>
-    <p:sldId id="269" r:id="rId21"/>
-    <p:sldId id="270" r:id="rId22"/>
-    <p:sldId id="271" r:id="rId23"/>
   </p:sldIdLst>
   <p:sldSz cx="12191695" cy="6858000" type="screen4x3"/>
   <p:notesSz cx="6858000" cy="9144000"/>
@@ -517,7 +514,7 @@
           <a:lstStyle/>
           <a:p>
             <a:r>
-              <a:t>AI personas are fast + frictionless but can launder assumptions back as 'data'. Comparing to a real human is the check. Ref: nngroup.com/articles/synthetic-users/</a:t>
+              <a:t>Persona template: figma.com/community/file/1335748909887675654/user-persona-template-set - or a Google Slides deck. A persona is a tool to EMPATHIZE, not to stereotype.</a:t>
             </a:r>
           </a:p>
         </p:txBody>
@@ -587,7 +584,7 @@
           <a:lstStyle/>
           <a:p>
             <a:r>
-              <a:t>AI storyboarding / co-design: Sandhaus, Gu, Parreira &amp; Ju 2025, 'Co-Designing with Transformers' (DIS '25) - GenAI helps generate + iterate frames, but can flatten the narrative if you let it drive. dl.acm.org/doi/10.1145/3715336.3735805</a:t>
+              <a:t>Claude / ChatGPT. The persona chatbot embodies the chosen user persona. Document the exact setup prompt + the interview transcript in the planning report.</a:t>
             </a:r>
           </a:p>
         </p:txBody>
@@ -657,7 +654,147 @@
           <a:lstStyle/>
           <a:p>
             <a:r>
-              <a:t>Sora web/app discontinued 2026-04-26. Recommend Veo 3.1 / Runway / Kling / Pika for pitch videos.</a:t>
+              <a:t>nngroup.com/articles/synthetic-users/ - synthetic users can launder assumptions. Being honest about the gap is the point.</a:t>
+            </a:r>
+          </a:p>
+        </p:txBody>
+      </p:sp>
+      <p:sp>
+        <p:nvSpPr>
+          <p:cNvPr id="4" name="Slide Number Placeholder 3"/>
+          <p:cNvSpPr>
+            <a:spLocks noGrp="1"/>
+          </p:cNvSpPr>
+          <p:nvPr>
+            <p:ph type="sldNum" idx="5" sz="quarter"/>
+          </p:nvPr>
+        </p:nvSpPr>
+        <p:spPr/>
+      </p:sp>
+    </p:spTree>
+  </p:cSld>
+  <p:clrMapOvr>
+    <a:masterClrMapping/>
+  </p:clrMapOvr>
+</p:notes>
+</file>
+
+<file path=ppt/notesSlides/notesSlide4.xml><?xml version="1.0" encoding="utf-8"?>
+<p:notes xmlns:a="http://schemas.openxmlformats.org/drawingml/2006/main" xmlns:p="http://schemas.openxmlformats.org/presentationml/2006/main" xmlns:r="http://schemas.openxmlformats.org/officeDocument/2006/relationships">
+  <p:cSld>
+    <p:spTree>
+      <p:nvGrpSpPr>
+        <p:cNvPr id="1" name=""/>
+        <p:cNvGrpSpPr/>
+        <p:nvPr/>
+      </p:nvGrpSpPr>
+      <p:grpSpPr>
+        <a:xfrm>
+          <a:off x="0" y="0"/>
+          <a:ext cx="0" cy="0"/>
+          <a:chOff x="0" y="0"/>
+          <a:chExt cx="0" cy="0"/>
+        </a:xfrm>
+      </p:grpSpPr>
+      <p:sp>
+        <p:nvSpPr>
+          <p:cNvPr id="2" name="Slide Image Placeholder 1"/>
+          <p:cNvSpPr>
+            <a:spLocks noGrp="1"/>
+          </p:cNvSpPr>
+          <p:nvPr>
+            <p:ph type="sldImg" idx="2"/>
+          </p:nvPr>
+        </p:nvSpPr>
+        <p:spPr/>
+      </p:sp>
+      <p:sp>
+        <p:nvSpPr>
+          <p:cNvPr id="3" name="Notes Placeholder 2"/>
+          <p:cNvSpPr>
+            <a:spLocks noGrp="1"/>
+          </p:cNvSpPr>
+          <p:nvPr>
+            <p:ph type="body" idx="3" sz="quarter"/>
+          </p:nvPr>
+        </p:nvSpPr>
+        <p:spPr/>
+        <p:txBody>
+          <a:bodyPr/>
+          <a:lstStyle/>
+          <a:p>
+            <a:r>
+              <a:t>One ROUGH storyboard per member (diverge/ideate), then one REFINED team storyboard (converge/communicate). AI storyboarding: Sandhaus, Gu, Parreira &amp; Ju 2025 'Co-Designing with Transformers' (DIS '25). Template: figma.com/community/file/853170162772539008/storyboard-template</a:t>
+            </a:r>
+          </a:p>
+        </p:txBody>
+      </p:sp>
+      <p:sp>
+        <p:nvSpPr>
+          <p:cNvPr id="4" name="Slide Number Placeholder 3"/>
+          <p:cNvSpPr>
+            <a:spLocks noGrp="1"/>
+          </p:cNvSpPr>
+          <p:nvPr>
+            <p:ph type="sldNum" idx="5" sz="quarter"/>
+          </p:nvPr>
+        </p:nvSpPr>
+        <p:spPr/>
+      </p:sp>
+    </p:spTree>
+  </p:cSld>
+  <p:clrMapOvr>
+    <a:masterClrMapping/>
+  </p:clrMapOvr>
+</p:notes>
+</file>
+
+<file path=ppt/notesSlides/notesSlide5.xml><?xml version="1.0" encoding="utf-8"?>
+<p:notes xmlns:a="http://schemas.openxmlformats.org/drawingml/2006/main" xmlns:p="http://schemas.openxmlformats.org/presentationml/2006/main" xmlns:r="http://schemas.openxmlformats.org/officeDocument/2006/relationships">
+  <p:cSld>
+    <p:spTree>
+      <p:nvGrpSpPr>
+        <p:cNvPr id="1" name=""/>
+        <p:cNvGrpSpPr/>
+        <p:nvPr/>
+      </p:nvGrpSpPr>
+      <p:grpSpPr>
+        <a:xfrm>
+          <a:off x="0" y="0"/>
+          <a:ext cx="0" cy="0"/>
+          <a:chOff x="0" y="0"/>
+          <a:chExt cx="0" cy="0"/>
+        </a:xfrm>
+      </p:grpSpPr>
+      <p:sp>
+        <p:nvSpPr>
+          <p:cNvPr id="2" name="Slide Image Placeholder 1"/>
+          <p:cNvSpPr>
+            <a:spLocks noGrp="1"/>
+          </p:cNvSpPr>
+          <p:nvPr>
+            <p:ph type="sldImg" idx="2"/>
+          </p:nvPr>
+        </p:nvSpPr>
+        <p:spPr/>
+      </p:sp>
+      <p:sp>
+        <p:nvSpPr>
+          <p:cNvPr id="3" name="Notes Placeholder 2"/>
+          <p:cNvSpPr>
+            <a:spLocks noGrp="1"/>
+          </p:cNvSpPr>
+          <p:nvPr>
+            <p:ph type="body" idx="3" sz="quarter"/>
+          </p:nvPr>
+        </p:nvSpPr>
+        <p:spPr/>
+        <p:txBody>
+          <a:bodyPr/>
+          <a:lstStyle/>
+          <a:p>
+            <a:r>
+              <a:t>Persona template: figma.com/community/file/1335748909887675654/user-persona-template-set. Storyboard template: figma.com/community/file/853170162772539008/storyboard-template. Sora discontinued 2026-04-26.</a:t>
             </a:r>
           </a:p>
         </p:txBody>
@@ -3892,7 +4029,7 @@
                 </a:solidFill>
                 <a:latin typeface="Courier New"/>
               </a:rPr>
-              <a:t>OPERATIONALIZE - THE VALUE TREE</a:t>
+              <a:t>SCREENSHOT SLOT</a:t>
             </a:r>
           </a:p>
         </p:txBody>
@@ -3950,7 +4087,7 @@
         <p:spPr>
           <a:xfrm>
             <a:off x="640080" y="1188720"/>
-            <a:ext cx="10972800" cy="1097280"/>
+            <a:ext cx="10972800" cy="914400"/>
           </a:xfrm>
           <a:prstGeom prst="rect">
             <a:avLst/>
@@ -3969,27 +4106,74 @@
               </a:lnSpc>
             </a:pPr>
             <a:r>
-              <a:rPr sz="3400" b="1">
+              <a:rPr sz="3000" b="1">
                 <a:solidFill>
                   <a:srgbClr val="F5F7FA"/>
                 </a:solidFill>
                 <a:latin typeface="Arial"/>
               </a:rPr>
-              <a:t>From value down to the prompts you'll build</a:t>
-            </a:r>
-          </a:p>
-        </p:txBody>
-      </p:sp>
-      <p:sp>
-        <p:nvSpPr>
-          <p:cNvPr id="5" name="TextBox 4"/>
+              <a:t>Persona + storyboard example</a:t>
+            </a:r>
+          </a:p>
+        </p:txBody>
+      </p:sp>
+      <p:sp>
+        <p:nvSpPr>
+          <p:cNvPr id="5" name="Rounded Rectangle 4"/>
+          <p:cNvSpPr/>
+          <p:nvPr/>
+        </p:nvSpPr>
+        <p:spPr>
+          <a:xfrm>
+            <a:off x="2194560" y="2331720"/>
+            <a:ext cx="7772400" cy="3566160"/>
+          </a:xfrm>
+          <a:prstGeom prst="roundRect">
+            <a:avLst/>
+          </a:prstGeom>
+          <a:solidFill>
+            <a:srgbClr val="151B26"/>
+          </a:solidFill>
+          <a:ln w="19050">
+            <a:solidFill>
+              <a:srgbClr val="00FF41"/>
+            </a:solidFill>
+            <a:prstDash val="dash"/>
+          </a:ln>
+          <a:effectLst/>
+        </p:spPr>
+        <p:style>
+          <a:lnRef idx="1">
+            <a:schemeClr val="accent1"/>
+          </a:lnRef>
+          <a:fillRef idx="3">
+            <a:schemeClr val="accent1"/>
+          </a:fillRef>
+          <a:effectRef idx="2">
+            <a:schemeClr val="accent1"/>
+          </a:effectRef>
+          <a:fontRef idx="minor">
+            <a:schemeClr val="lt1"/>
+          </a:fontRef>
+        </p:style>
+        <p:txBody>
+          <a:bodyPr rtlCol="0" anchor="ctr"/>
+          <a:lstStyle/>
+          <a:p>
+            <a:pPr algn="ctr"/>
+          </a:p>
+        </p:txBody>
+      </p:sp>
+      <p:sp>
+        <p:nvSpPr>
+          <p:cNvPr id="6" name="TextBox 5"/>
           <p:cNvSpPr txBox="1"/>
           <p:nvPr/>
         </p:nvSpPr>
         <p:spPr>
           <a:xfrm>
-            <a:off x="658368" y="2286000"/>
-            <a:ext cx="10881360" cy="3657600"/>
+            <a:off x="2194560" y="3383280"/>
+            <a:ext cx="7772400" cy="731520"/>
           </a:xfrm>
           <a:prstGeom prst="rect">
             <a:avLst/>
@@ -4002,99 +4186,65 @@
           </a:bodyPr>
           <a:lstStyle/>
           <a:p>
-            <a:pPr algn="l">
-              <a:lnSpc>
-                <a:spcPct val="112000"/>
-              </a:lnSpc>
-            </a:pPr>
-            <a:r>
-              <a:rPr sz="2000" b="0">
-                <a:solidFill>
-                  <a:srgbClr val="F5F7FA"/>
+            <a:pPr algn="ctr">
+              <a:lnSpc>
+                <a:spcPct val="100000"/>
+              </a:lnSpc>
+            </a:pPr>
+            <a:r>
+              <a:rPr sz="2200" b="1">
+                <a:solidFill>
+                  <a:srgbClr val="00FF41"/>
+                </a:solidFill>
+                <a:latin typeface="Courier New"/>
+              </a:rPr>
+              <a:t>[ persona card + chatbot interview, next to the refined storyboard ]</a:t>
+            </a:r>
+          </a:p>
+        </p:txBody>
+      </p:sp>
+      <p:sp>
+        <p:nvSpPr>
+          <p:cNvPr id="7" name="TextBox 6"/>
+          <p:cNvSpPr txBox="1"/>
+          <p:nvPr/>
+        </p:nvSpPr>
+        <p:spPr>
+          <a:xfrm>
+            <a:off x="2194560" y="4114800"/>
+            <a:ext cx="7772400" cy="731520"/>
+          </a:xfrm>
+          <a:prstGeom prst="rect">
+            <a:avLst/>
+          </a:prstGeom>
+          <a:noFill/>
+        </p:spPr>
+        <p:txBody>
+          <a:bodyPr wrap="square" anchor="t">
+            <a:spAutoFit/>
+          </a:bodyPr>
+          <a:lstStyle/>
+          <a:p>
+            <a:pPr algn="ctr">
+              <a:lnSpc>
+                <a:spcPct val="100000"/>
+              </a:lnSpc>
+            </a:pPr>
+            <a:r>
+              <a:rPr sz="1400" b="0">
+                <a:solidFill>
+                  <a:srgbClr val="8A94A6"/>
                 </a:solidFill>
                 <a:latin typeface="Arial"/>
               </a:rPr>
-              <a:t>Break your value down until it becomes something you can actually build:</a:t>
-            </a:r>
-          </a:p>
-          <a:p>
-            <a:pPr algn="l">
-              <a:lnSpc>
-                <a:spcPct val="112000"/>
-              </a:lnSpc>
-            </a:pPr>
-            <a:r>
-              <a:rPr sz="2000" b="0">
-                <a:solidFill>
-                  <a:srgbClr val="F5F7FA"/>
-                </a:solidFill>
-                <a:latin typeface="Arial"/>
-              </a:rPr>
-              <a:t/>
-            </a:r>
-          </a:p>
-          <a:p>
-            <a:pPr algn="l">
-              <a:lnSpc>
-                <a:spcPct val="112000"/>
-              </a:lnSpc>
-            </a:pPr>
-            <a:r>
-              <a:rPr sz="2200" b="0">
-                <a:solidFill>
-                  <a:srgbClr val="F5F7FA"/>
-                </a:solidFill>
-                <a:latin typeface="Arial"/>
-              </a:rPr>
-              <a:t>value  -&gt;  norms  -&gt;  requirements  -&gt;  features  -&gt;  </a:t>
-            </a:r>
-            <a:r>
-              <a:rPr sz="2200" b="1">
-                <a:solidFill>
-                  <a:srgbClr val="00FF41"/>
-                </a:solidFill>
-                <a:latin typeface="Arial"/>
-              </a:rPr>
-              <a:t>the prompts you run tomorrow</a:t>
-            </a:r>
-          </a:p>
-          <a:p>
-            <a:pPr algn="l">
-              <a:lnSpc>
-                <a:spcPct val="112000"/>
-              </a:lnSpc>
-            </a:pPr>
-            <a:r>
-              <a:rPr sz="2000" b="0">
-                <a:solidFill>
-                  <a:srgbClr val="F5F7FA"/>
-                </a:solidFill>
-                <a:latin typeface="Arial"/>
-              </a:rPr>
-              <a:t/>
-            </a:r>
-          </a:p>
-          <a:p>
-            <a:pPr algn="l">
-              <a:lnSpc>
-                <a:spcPct val="112000"/>
-              </a:lnSpc>
-            </a:pPr>
-            <a:r>
-              <a:rPr sz="1700" b="0">
-                <a:solidFill>
-                  <a:srgbClr val="8A94A6"/>
-                </a:solidFill>
-                <a:latin typeface="Arial"/>
-              </a:rPr>
-              <a:t>The bottom of the tree IS your Thursday build plan - the exact prompts, grounded in the value.</a:t>
-            </a:r>
-          </a:p>
-        </p:txBody>
-      </p:sp>
-      <p:sp>
-        <p:nvSpPr>
-          <p:cNvPr id="6" name="TextBox 5"/>
+              <a:t>show a filled persona, the AI interview transcript, and the team's refined storyboard</a:t>
+            </a:r>
+          </a:p>
+        </p:txBody>
+      </p:sp>
+      <p:sp>
+        <p:nvSpPr>
+          <p:cNvPr id="8" name="TextBox 7"/>
           <p:cNvSpPr txBox="1"/>
           <p:nvPr/>
         </p:nvSpPr>
@@ -4191,7 +4341,7 @@
                 </a:solidFill>
                 <a:latin typeface="Courier New"/>
               </a:rPr>
-              <a:t>STORYBOARD IT</a:t>
+              <a:t>ACTIVITY - TODAY (TEAM)</a:t>
             </a:r>
           </a:p>
         </p:txBody>
@@ -4248,8 +4398,8 @@
         </p:nvSpPr>
         <p:spPr>
           <a:xfrm>
-            <a:off x="640080" y="1188720"/>
-            <a:ext cx="10972800" cy="1097280"/>
+            <a:off x="640080" y="1325880"/>
+            <a:ext cx="10972800" cy="1828800"/>
           </a:xfrm>
           <a:prstGeom prst="rect">
             <a:avLst/>
@@ -4264,17 +4414,17 @@
           <a:p>
             <a:pPr algn="l">
               <a:lnSpc>
-                <a:spcPct val="100000"/>
-              </a:lnSpc>
-            </a:pPr>
-            <a:r>
-              <a:rPr sz="3400" b="1">
+                <a:spcPct val="105000"/>
+              </a:lnSpc>
+            </a:pPr>
+            <a:r>
+              <a:rPr sz="3800" b="1">
                 <a:solidFill>
                   <a:srgbClr val="F5F7FA"/>
                 </a:solidFill>
                 <a:latin typeface="Arial"/>
               </a:rPr>
-              <a:t>4-8 frames: the value in use</a:t>
+              <a:t>Plan the next iteration of your value.</a:t>
             </a:r>
           </a:p>
         </p:txBody>
@@ -4287,8 +4437,8 @@
         </p:nvSpPr>
         <p:spPr>
           <a:xfrm>
-            <a:off x="658368" y="2286000"/>
-            <a:ext cx="10881360" cy="3657600"/>
+            <a:off x="658368" y="3611880"/>
+            <a:ext cx="10972800" cy="1737360"/>
           </a:xfrm>
           <a:prstGeom prst="rect">
             <a:avLst/>
@@ -4303,108 +4453,177 @@
           <a:p>
             <a:pPr algn="l">
               <a:lnSpc>
-                <a:spcPct val="112000"/>
-              </a:lnSpc>
-            </a:pPr>
-            <a:r>
-              <a:rPr sz="2000" b="1">
+                <a:spcPct val="135000"/>
+              </a:lnSpc>
+            </a:pPr>
+            <a:r>
+              <a:rPr sz="1900" b="1">
                 <a:solidFill>
                   <a:srgbClr val="00FF41"/>
                 </a:solidFill>
                 <a:latin typeface="Arial"/>
               </a:rPr>
-              <a:t>•  </a:t>
-            </a:r>
-            <a:r>
-              <a:rPr sz="2000" b="0">
+              <a:t>→  </a:t>
+            </a:r>
+            <a:r>
+              <a:rPr sz="1900" b="0">
+                <a:solidFill>
+                  <a:srgbClr val="8A94A6"/>
+                </a:solidFill>
+                <a:latin typeface="Arial"/>
+              </a:rPr>
+              <a:t>Build a PERSONA -&gt; interview it as an AI CHATBOT (paste the prompt + conversation).</a:t>
+            </a:r>
+          </a:p>
+          <a:p>
+            <a:pPr algn="l">
+              <a:lnSpc>
+                <a:spcPct val="135000"/>
+              </a:lnSpc>
+            </a:pPr>
+            <a:r>
+              <a:rPr sz="1900" b="1">
+                <a:solidFill>
+                  <a:srgbClr val="00FF41"/>
+                </a:solidFill>
+                <a:latin typeface="Arial"/>
+              </a:rPr>
+              <a:t>→  </a:t>
+            </a:r>
+            <a:r>
+              <a:rPr sz="1900" b="0">
+                <a:solidFill>
+                  <a:srgbClr val="8A94A6"/>
+                </a:solidFill>
+                <a:latin typeface="Arial"/>
+              </a:rPr>
+              <a:t>Operationalize the value, then ROUGH storyboard each -&gt; ONE REFINED team storyboard.</a:t>
+            </a:r>
+          </a:p>
+          <a:p>
+            <a:pPr algn="l">
+              <a:lnSpc>
+                <a:spcPct val="135000"/>
+              </a:lnSpc>
+            </a:pPr>
+            <a:r>
+              <a:rPr sz="1900" b="1">
+                <a:solidFill>
+                  <a:srgbClr val="00FF41"/>
+                </a:solidFill>
+                <a:latin typeface="Arial"/>
+              </a:rPr>
+              <a:t>→  </a:t>
+            </a:r>
+            <a:r>
+              <a:rPr sz="1900" b="0">
+                <a:solidFill>
+                  <a:srgbClr val="8A94A6"/>
+                </a:solidFill>
+                <a:latin typeface="Arial"/>
+              </a:rPr>
+              <a:t>Scope the smallest real thing. Link persona + storyboard from the report.</a:t>
+            </a:r>
+          </a:p>
+        </p:txBody>
+      </p:sp>
+      <p:sp>
+        <p:nvSpPr>
+          <p:cNvPr id="6" name="Rounded Rectangle 5"/>
+          <p:cNvSpPr/>
+          <p:nvPr/>
+        </p:nvSpPr>
+        <p:spPr>
+          <a:xfrm>
+            <a:off x="640080" y="5532120"/>
+            <a:ext cx="10911535" cy="658368"/>
+          </a:xfrm>
+          <a:prstGeom prst="roundRect">
+            <a:avLst/>
+          </a:prstGeom>
+          <a:solidFill>
+            <a:srgbClr val="151B26"/>
+          </a:solidFill>
+          <a:ln w="19050">
+            <a:solidFill>
+              <a:srgbClr val="00FF41"/>
+            </a:solidFill>
+          </a:ln>
+          <a:effectLst/>
+        </p:spPr>
+        <p:style>
+          <a:lnRef idx="1">
+            <a:schemeClr val="accent1"/>
+          </a:lnRef>
+          <a:fillRef idx="3">
+            <a:schemeClr val="accent1"/>
+          </a:fillRef>
+          <a:effectRef idx="2">
+            <a:schemeClr val="accent1"/>
+          </a:effectRef>
+          <a:fontRef idx="minor">
+            <a:schemeClr val="lt1"/>
+          </a:fontRef>
+        </p:style>
+        <p:txBody>
+          <a:bodyPr rtlCol="0" anchor="ctr"/>
+          <a:lstStyle/>
+          <a:p>
+            <a:pPr algn="ctr"/>
+          </a:p>
+        </p:txBody>
+      </p:sp>
+      <p:sp>
+        <p:nvSpPr>
+          <p:cNvPr id="7" name="TextBox 6"/>
+          <p:cNvSpPr txBox="1"/>
+          <p:nvPr/>
+        </p:nvSpPr>
+        <p:spPr>
+          <a:xfrm>
+            <a:off x="914400" y="5532120"/>
+            <a:ext cx="10362895" cy="658368"/>
+          </a:xfrm>
+          <a:prstGeom prst="rect">
+            <a:avLst/>
+          </a:prstGeom>
+          <a:noFill/>
+        </p:spPr>
+        <p:txBody>
+          <a:bodyPr wrap="square" anchor="ctr">
+            <a:spAutoFit/>
+          </a:bodyPr>
+          <a:lstStyle/>
+          <a:p>
+            <a:pPr algn="l">
+              <a:lnSpc>
+                <a:spcPct val="100000"/>
+              </a:lnSpc>
+            </a:pPr>
+            <a:r>
+              <a:rPr sz="1600" b="1">
+                <a:solidFill>
+                  <a:srgbClr val="00FF41"/>
+                </a:solidFill>
+                <a:latin typeface="Arial"/>
+              </a:rPr>
+              <a:t>▶  </a:t>
+            </a:r>
+            <a:r>
+              <a:rPr sz="1600" b="1">
                 <a:solidFill>
                   <a:srgbClr val="F5F7FA"/>
                 </a:solidFill>
                 <a:latin typeface="Arial"/>
               </a:rPr>
-              <a:t>Frame the user, their problem, where your thing enters, and what changes.</a:t>
-            </a:r>
-          </a:p>
-          <a:p>
-            <a:pPr algn="l">
-              <a:lnSpc>
-                <a:spcPct val="112000"/>
-              </a:lnSpc>
-            </a:pPr>
-            <a:r>
-              <a:rPr sz="2000" b="1">
-                <a:solidFill>
-                  <a:srgbClr val="00FF41"/>
-                </a:solidFill>
-                <a:latin typeface="Arial"/>
-              </a:rPr>
-              <a:t>•  </a:t>
-            </a:r>
-            <a:r>
-              <a:rPr sz="2000" b="0">
-                <a:solidFill>
-                  <a:srgbClr val="F5F7FA"/>
-                </a:solidFill>
-                <a:latin typeface="Arial"/>
-              </a:rPr>
-              <a:t>Hand-drawn (photograph it) or AI-assisted - rough is fine.</a:t>
-            </a:r>
-          </a:p>
-          <a:p>
-            <a:pPr algn="l">
-              <a:lnSpc>
-                <a:spcPct val="112000"/>
-              </a:lnSpc>
-            </a:pPr>
-            <a:r>
-              <a:rPr sz="2000" b="1">
-                <a:solidFill>
-                  <a:srgbClr val="00FF41"/>
-                </a:solidFill>
-                <a:latin typeface="Arial"/>
-              </a:rPr>
-              <a:t>•  </a:t>
-            </a:r>
-            <a:r>
-              <a:rPr sz="2000" b="0">
-                <a:solidFill>
-                  <a:srgbClr val="F5F7FA"/>
-                </a:solidFill>
-                <a:latin typeface="Arial"/>
-              </a:rPr>
-              <a:t>AI can sketch or fill frames fast - but keep YOUR story; the AI is a co-designer, not the author.</a:t>
-            </a:r>
-          </a:p>
-          <a:p>
-            <a:pPr algn="l">
-              <a:lnSpc>
-                <a:spcPct val="112000"/>
-              </a:lnSpc>
-            </a:pPr>
-            <a:r>
-              <a:rPr sz="2000" b="1">
-                <a:solidFill>
-                  <a:srgbClr val="00FF41"/>
-                </a:solidFill>
-                <a:latin typeface="Arial"/>
-              </a:rPr>
-              <a:t>•  </a:t>
-            </a:r>
-            <a:r>
-              <a:rPr sz="2000" b="0">
-                <a:solidFill>
-                  <a:srgbClr val="F5F7FA"/>
-                </a:solidFill>
-                <a:latin typeface="Arial"/>
-              </a:rPr>
-              <a:t>It doubles as your Thursday pitch skeleton - show the value living in the design, not just the copy.</a:t>
-            </a:r>
-          </a:p>
-        </p:txBody>
-      </p:sp>
-      <p:sp>
-        <p:nvSpPr>
-          <p:cNvPr id="6" name="TextBox 5"/>
+              <a:t>Deliverable = planning-report.md - Checkpoint 2  (persona · interview · storyboards · scope)</a:t>
+            </a:r>
+          </a:p>
+        </p:txBody>
+      </p:sp>
+      <p:sp>
+        <p:nvSpPr>
+          <p:cNvPr id="8" name="TextBox 7"/>
           <p:cNvSpPr txBox="1"/>
           <p:nvPr/>
         </p:nvSpPr>
@@ -4501,7 +4720,7 @@
                 </a:solidFill>
                 <a:latin typeface="Courier New"/>
               </a:rPr>
-              <a:t>TOOLS FOR TODAY</a:t>
+              <a:t>LAST 30 MINUTES - START VIBE CODING</a:t>
             </a:r>
           </a:p>
         </p:txBody>
@@ -4584,7 +4803,7 @@
                 </a:solidFill>
                 <a:latin typeface="Arial"/>
               </a:rPr>
-              <a:t>Storyboard + pitch</a:t>
+              <a:t>Don't wait for Thursday to open the repo</a:t>
             </a:r>
           </a:p>
         </p:txBody>
@@ -4617,14 +4836,53 @@
               </a:lnSpc>
             </a:pPr>
             <a:r>
-              <a:rPr sz="2000" b="1">
+              <a:rPr sz="2100" b="0">
+                <a:solidFill>
+                  <a:srgbClr val="F5F7FA"/>
+                </a:solidFill>
+                <a:latin typeface="Arial"/>
+              </a:rPr>
+              <a:t>Once the plan is locked, spend the final half hour getting a head start:</a:t>
+            </a:r>
+          </a:p>
+          <a:p>
+            <a:pPr algn="l">
+              <a:lnSpc>
+                <a:spcPct val="112000"/>
+              </a:lnSpc>
+            </a:pPr>
+            <a:r>
+              <a:rPr sz="2000" b="0">
+                <a:solidFill>
+                  <a:srgbClr val="F5F7FA"/>
+                </a:solidFill>
+                <a:latin typeface="Arial"/>
+              </a:rPr>
+              <a:t/>
+            </a:r>
+          </a:p>
+          <a:p>
+            <a:pPr algn="l">
+              <a:lnSpc>
+                <a:spcPct val="112000"/>
+              </a:lnSpc>
+            </a:pPr>
+            <a:r>
+              <a:rPr sz="1900" b="1">
                 <a:solidFill>
                   <a:srgbClr val="00FF41"/>
                 </a:solidFill>
                 <a:latin typeface="Arial"/>
               </a:rPr>
-              <a:t>•  </a:t>
-            </a:r>
+              <a:t>Open your team repo, run the FIRST prompt from your value tree, and get anything at all on screen.</a:t>
+            </a:r>
+          </a:p>
+          <a:p>
+            <a:pPr algn="l">
+              <a:lnSpc>
+                <a:spcPct val="112000"/>
+              </a:lnSpc>
+            </a:pPr>
             <a:r>
               <a:rPr sz="2000" b="0">
                 <a:solidFill>
@@ -4632,7 +4890,7 @@
                 </a:solidFill>
                 <a:latin typeface="Arial"/>
               </a:rPr>
-              <a:t>Storyboard: FigJam / Figma, Canva, Google Slides (one frame per slide), or Storyboarder (free &amp; open-source).</a:t>
+              <a:t/>
             </a:r>
           </a:p>
           <a:p>
@@ -4642,97 +4900,13 @@
               </a:lnSpc>
             </a:pPr>
             <a:r>
-              <a:rPr sz="2000" b="1">
-                <a:solidFill>
-                  <a:srgbClr val="00FF41"/>
+              <a:rPr sz="1700" b="0">
+                <a:solidFill>
+                  <a:srgbClr val="8A94A6"/>
                 </a:solidFill>
                 <a:latin typeface="Arial"/>
               </a:rPr>
-              <a:t>•  </a:t>
-            </a:r>
-            <a:r>
-              <a:rPr sz="2000" b="0">
-                <a:solidFill>
-                  <a:srgbClr val="F5F7FA"/>
-                </a:solidFill>
-                <a:latin typeface="Arial"/>
-              </a:rPr>
-              <a:t>AI pitch video (for Thursday): Google Veo 3.1 (in Flow), Runway, Kling, or Pika.</a:t>
-            </a:r>
-          </a:p>
-          <a:p>
-            <a:pPr algn="l">
-              <a:lnSpc>
-                <a:spcPct val="112000"/>
-              </a:lnSpc>
-            </a:pPr>
-            <a:r>
-              <a:rPr sz="2000" b="1">
-                <a:solidFill>
-                  <a:srgbClr val="00FF41"/>
-                </a:solidFill>
-                <a:latin typeface="Arial"/>
-              </a:rPr>
-              <a:t>•  </a:t>
-            </a:r>
-            <a:r>
-              <a:rPr sz="2000" b="0">
-                <a:solidFill>
-                  <a:srgbClr val="F5F7FA"/>
-                </a:solidFill>
-                <a:latin typeface="Arial"/>
-              </a:rPr>
-              <a:t>Note: OpenAI retired the Sora app in April 2026 - use Veo / Runway / Kling / Pika instead.</a:t>
-            </a:r>
-          </a:p>
-          <a:p>
-            <a:pPr algn="l">
-              <a:lnSpc>
-                <a:spcPct val="112000"/>
-              </a:lnSpc>
-            </a:pPr>
-            <a:r>
-              <a:rPr sz="2000" b="1">
-                <a:solidFill>
-                  <a:srgbClr val="00FF41"/>
-                </a:solidFill>
-                <a:latin typeface="Arial"/>
-              </a:rPr>
-              <a:t>•  </a:t>
-            </a:r>
-            <a:r>
-              <a:rPr sz="2000" b="0">
-                <a:solidFill>
-                  <a:srgbClr val="F5F7FA"/>
-                </a:solidFill>
-                <a:latin typeface="Arial"/>
-              </a:rPr>
-              <a:t>Free tiers add watermarks + limits - fine for a class pitch.</a:t>
-            </a:r>
-          </a:p>
-          <a:p>
-            <a:pPr algn="l">
-              <a:lnSpc>
-                <a:spcPct val="112000"/>
-              </a:lnSpc>
-            </a:pPr>
-            <a:r>
-              <a:rPr sz="2000" b="1">
-                <a:solidFill>
-                  <a:srgbClr val="00FF41"/>
-                </a:solidFill>
-                <a:latin typeface="Arial"/>
-              </a:rPr>
-              <a:t>•  </a:t>
-            </a:r>
-            <a:r>
-              <a:rPr sz="2000" b="0">
-                <a:solidFill>
-                  <a:srgbClr val="F5F7FA"/>
-                </a:solidFill>
-                <a:latin typeface="Arial"/>
-              </a:rPr>
-              <a:t>Interview + persona: just talk to a person; capture notes in FigJam or a doc.</a:t>
+              <a:t>Thursday has no lecture - it's all build - so every minute you start now is a minute you keep tomorrow.</a:t>
             </a:r>
           </a:p>
         </p:txBody>
@@ -4836,987 +5010,6 @@
                 </a:solidFill>
                 <a:latin typeface="Courier New"/>
               </a:rPr>
-              <a:t>SCREENSHOT SLOT</a:t>
-            </a:r>
-          </a:p>
-        </p:txBody>
-      </p:sp>
-      <p:sp>
-        <p:nvSpPr>
-          <p:cNvPr id="3" name="Rectangle 2"/>
-          <p:cNvSpPr/>
-          <p:nvPr/>
-        </p:nvSpPr>
-        <p:spPr>
-          <a:xfrm>
-            <a:off x="640080" y="932688"/>
-            <a:ext cx="822960" cy="73152"/>
-          </a:xfrm>
-          <a:prstGeom prst="rect">
-            <a:avLst/>
-          </a:prstGeom>
-          <a:solidFill>
-            <a:srgbClr val="00FF41"/>
-          </a:solidFill>
-          <a:ln>
-            <a:noFill/>
-          </a:ln>
-          <a:effectLst/>
-        </p:spPr>
-        <p:style>
-          <a:lnRef idx="1">
-            <a:schemeClr val="accent1"/>
-          </a:lnRef>
-          <a:fillRef idx="3">
-            <a:schemeClr val="accent1"/>
-          </a:fillRef>
-          <a:effectRef idx="2">
-            <a:schemeClr val="accent1"/>
-          </a:effectRef>
-          <a:fontRef idx="minor">
-            <a:schemeClr val="lt1"/>
-          </a:fontRef>
-        </p:style>
-        <p:txBody>
-          <a:bodyPr rtlCol="0" anchor="ctr"/>
-          <a:lstStyle/>
-          <a:p>
-            <a:pPr algn="ctr"/>
-          </a:p>
-        </p:txBody>
-      </p:sp>
-      <p:sp>
-        <p:nvSpPr>
-          <p:cNvPr id="4" name="TextBox 3"/>
-          <p:cNvSpPr txBox="1"/>
-          <p:nvPr/>
-        </p:nvSpPr>
-        <p:spPr>
-          <a:xfrm>
-            <a:off x="640080" y="1188720"/>
-            <a:ext cx="10972800" cy="914400"/>
-          </a:xfrm>
-          <a:prstGeom prst="rect">
-            <a:avLst/>
-          </a:prstGeom>
-          <a:noFill/>
-        </p:spPr>
-        <p:txBody>
-          <a:bodyPr wrap="square" anchor="t">
-            <a:spAutoFit/>
-          </a:bodyPr>
-          <a:lstStyle/>
-          <a:p>
-            <a:pPr algn="l">
-              <a:lnSpc>
-                <a:spcPct val="100000"/>
-              </a:lnSpc>
-            </a:pPr>
-            <a:r>
-              <a:rPr sz="3000" b="1">
-                <a:solidFill>
-                  <a:srgbClr val="F5F7FA"/>
-                </a:solidFill>
-                <a:latin typeface="Arial"/>
-              </a:rPr>
-              <a:t>Show an example</a:t>
-            </a:r>
-          </a:p>
-        </p:txBody>
-      </p:sp>
-      <p:sp>
-        <p:nvSpPr>
-          <p:cNvPr id="5" name="Rounded Rectangle 4"/>
-          <p:cNvSpPr/>
-          <p:nvPr/>
-        </p:nvSpPr>
-        <p:spPr>
-          <a:xfrm>
-            <a:off x="2194560" y="2331720"/>
-            <a:ext cx="7772400" cy="3566160"/>
-          </a:xfrm>
-          <a:prstGeom prst="roundRect">
-            <a:avLst/>
-          </a:prstGeom>
-          <a:solidFill>
-            <a:srgbClr val="151B26"/>
-          </a:solidFill>
-          <a:ln w="19050">
-            <a:solidFill>
-              <a:srgbClr val="00FF41"/>
-            </a:solidFill>
-            <a:prstDash val="dash"/>
-          </a:ln>
-          <a:effectLst/>
-        </p:spPr>
-        <p:style>
-          <a:lnRef idx="1">
-            <a:schemeClr val="accent1"/>
-          </a:lnRef>
-          <a:fillRef idx="3">
-            <a:schemeClr val="accent1"/>
-          </a:fillRef>
-          <a:effectRef idx="2">
-            <a:schemeClr val="accent1"/>
-          </a:effectRef>
-          <a:fontRef idx="minor">
-            <a:schemeClr val="lt1"/>
-          </a:fontRef>
-        </p:style>
-        <p:txBody>
-          <a:bodyPr rtlCol="0" anchor="ctr"/>
-          <a:lstStyle/>
-          <a:p>
-            <a:pPr algn="ctr"/>
-          </a:p>
-        </p:txBody>
-      </p:sp>
-      <p:sp>
-        <p:nvSpPr>
-          <p:cNvPr id="6" name="TextBox 5"/>
-          <p:cNvSpPr txBox="1"/>
-          <p:nvPr/>
-        </p:nvSpPr>
-        <p:spPr>
-          <a:xfrm>
-            <a:off x="2194560" y="3383280"/>
-            <a:ext cx="7772400" cy="731520"/>
-          </a:xfrm>
-          <a:prstGeom prst="rect">
-            <a:avLst/>
-          </a:prstGeom>
-          <a:noFill/>
-        </p:spPr>
-        <p:txBody>
-          <a:bodyPr wrap="square" anchor="t">
-            <a:spAutoFit/>
-          </a:bodyPr>
-          <a:lstStyle/>
-          <a:p>
-            <a:pPr algn="ctr">
-              <a:lnSpc>
-                <a:spcPct val="100000"/>
-              </a:lnSpc>
-            </a:pPr>
-            <a:r>
-              <a:rPr sz="2200" b="1">
-                <a:solidFill>
-                  <a:srgbClr val="00FF41"/>
-                </a:solidFill>
-                <a:latin typeface="Courier New"/>
-              </a:rPr>
-              <a:t>[ example storyboard or persona goes here ]</a:t>
-            </a:r>
-          </a:p>
-        </p:txBody>
-      </p:sp>
-      <p:sp>
-        <p:nvSpPr>
-          <p:cNvPr id="7" name="TextBox 6"/>
-          <p:cNvSpPr txBox="1"/>
-          <p:nvPr/>
-        </p:nvSpPr>
-        <p:spPr>
-          <a:xfrm>
-            <a:off x="2194560" y="4114800"/>
-            <a:ext cx="7772400" cy="731520"/>
-          </a:xfrm>
-          <a:prstGeom prst="rect">
-            <a:avLst/>
-          </a:prstGeom>
-          <a:noFill/>
-        </p:spPr>
-        <p:txBody>
-          <a:bodyPr wrap="square" anchor="t">
-            <a:spAutoFit/>
-          </a:bodyPr>
-          <a:lstStyle/>
-          <a:p>
-            <a:pPr algn="ctr">
-              <a:lnSpc>
-                <a:spcPct val="100000"/>
-              </a:lnSpc>
-            </a:pPr>
-            <a:r>
-              <a:rPr sz="1400" b="0">
-                <a:solidFill>
-                  <a:srgbClr val="8A94A6"/>
-                </a:solidFill>
-                <a:latin typeface="Arial"/>
-              </a:rPr>
-              <a:t>a strong persona, a storyboard, or an AI-pitch still</a:t>
-            </a:r>
-          </a:p>
-        </p:txBody>
-      </p:sp>
-      <p:sp>
-        <p:nvSpPr>
-          <p:cNvPr id="8" name="TextBox 7"/>
-          <p:cNvSpPr txBox="1"/>
-          <p:nvPr/>
-        </p:nvSpPr>
-        <p:spPr>
-          <a:xfrm>
-            <a:off x="640080" y="6355080"/>
-            <a:ext cx="10972800" cy="365760"/>
-          </a:xfrm>
-          <a:prstGeom prst="rect">
-            <a:avLst/>
-          </a:prstGeom>
-          <a:noFill/>
-        </p:spPr>
-        <p:txBody>
-          <a:bodyPr wrap="square" anchor="t">
-            <a:spAutoFit/>
-          </a:bodyPr>
-          <a:lstStyle/>
-          <a:p>
-            <a:pPr algn="l">
-              <a:lnSpc>
-                <a:spcPct val="100000"/>
-              </a:lnSpc>
-            </a:pPr>
-            <a:r>
-              <a:rPr sz="1000" b="0">
-                <a:solidFill>
-                  <a:srgbClr val="5A6474"/>
-                </a:solidFill>
-                <a:latin typeface="Courier New"/>
-              </a:rPr>
-              <a:t>Good Code, Good Vibes · TECHIE 1121 · Cornell Tech · Summer 2026</a:t>
-            </a:r>
-          </a:p>
-        </p:txBody>
-      </p:sp>
-    </p:spTree>
-  </p:cSld>
-  <p:clrMapOvr>
-    <a:masterClrMapping/>
-  </p:clrMapOvr>
-</p:sld>
-</file>
-
-<file path=ppt/slides/slide14.xml><?xml version="1.0" encoding="utf-8"?>
-<p:sld xmlns:a="http://schemas.openxmlformats.org/drawingml/2006/main" xmlns:p="http://schemas.openxmlformats.org/presentationml/2006/main" xmlns:r="http://schemas.openxmlformats.org/officeDocument/2006/relationships">
-  <p:cSld>
-    <p:bg>
-      <p:bgPr>
-        <a:solidFill>
-          <a:srgbClr val="0B0E14"/>
-        </a:solidFill>
-        <a:effectLst/>
-      </p:bgPr>
-    </p:bg>
-    <p:spTree>
-      <p:nvGrpSpPr>
-        <p:cNvPr id="1" name=""/>
-        <p:cNvGrpSpPr/>
-        <p:nvPr/>
-      </p:nvGrpSpPr>
-      <p:grpSpPr/>
-      <p:sp>
-        <p:nvSpPr>
-          <p:cNvPr id="2" name="TextBox 1"/>
-          <p:cNvSpPr txBox="1"/>
-          <p:nvPr/>
-        </p:nvSpPr>
-        <p:spPr>
-          <a:xfrm>
-            <a:off x="640080" y="502920"/>
-            <a:ext cx="10058400" cy="365760"/>
-          </a:xfrm>
-          <a:prstGeom prst="rect">
-            <a:avLst/>
-          </a:prstGeom>
-          <a:noFill/>
-        </p:spPr>
-        <p:txBody>
-          <a:bodyPr wrap="square" anchor="t">
-            <a:spAutoFit/>
-          </a:bodyPr>
-          <a:lstStyle/>
-          <a:p>
-            <a:pPr algn="l">
-              <a:lnSpc>
-                <a:spcPct val="100000"/>
-              </a:lnSpc>
-            </a:pPr>
-            <a:r>
-              <a:rPr sz="1300" b="1">
-                <a:solidFill>
-                  <a:srgbClr val="00FF41"/>
-                </a:solidFill>
-                <a:latin typeface="Courier New"/>
-              </a:rPr>
-              <a:t>ACTIVITY - TODAY (TEAM)</a:t>
-            </a:r>
-          </a:p>
-        </p:txBody>
-      </p:sp>
-      <p:sp>
-        <p:nvSpPr>
-          <p:cNvPr id="3" name="Rectangle 2"/>
-          <p:cNvSpPr/>
-          <p:nvPr/>
-        </p:nvSpPr>
-        <p:spPr>
-          <a:xfrm>
-            <a:off x="640080" y="932688"/>
-            <a:ext cx="822960" cy="73152"/>
-          </a:xfrm>
-          <a:prstGeom prst="rect">
-            <a:avLst/>
-          </a:prstGeom>
-          <a:solidFill>
-            <a:srgbClr val="00FF41"/>
-          </a:solidFill>
-          <a:ln>
-            <a:noFill/>
-          </a:ln>
-          <a:effectLst/>
-        </p:spPr>
-        <p:style>
-          <a:lnRef idx="1">
-            <a:schemeClr val="accent1"/>
-          </a:lnRef>
-          <a:fillRef idx="3">
-            <a:schemeClr val="accent1"/>
-          </a:fillRef>
-          <a:effectRef idx="2">
-            <a:schemeClr val="accent1"/>
-          </a:effectRef>
-          <a:fontRef idx="minor">
-            <a:schemeClr val="lt1"/>
-          </a:fontRef>
-        </p:style>
-        <p:txBody>
-          <a:bodyPr rtlCol="0" anchor="ctr"/>
-          <a:lstStyle/>
-          <a:p>
-            <a:pPr algn="ctr"/>
-          </a:p>
-        </p:txBody>
-      </p:sp>
-      <p:sp>
-        <p:nvSpPr>
-          <p:cNvPr id="4" name="TextBox 3"/>
-          <p:cNvSpPr txBox="1"/>
-          <p:nvPr/>
-        </p:nvSpPr>
-        <p:spPr>
-          <a:xfrm>
-            <a:off x="640080" y="1325880"/>
-            <a:ext cx="10972800" cy="1828800"/>
-          </a:xfrm>
-          <a:prstGeom prst="rect">
-            <a:avLst/>
-          </a:prstGeom>
-          <a:noFill/>
-        </p:spPr>
-        <p:txBody>
-          <a:bodyPr wrap="square" anchor="t">
-            <a:spAutoFit/>
-          </a:bodyPr>
-          <a:lstStyle/>
-          <a:p>
-            <a:pPr algn="l">
-              <a:lnSpc>
-                <a:spcPct val="105000"/>
-              </a:lnSpc>
-            </a:pPr>
-            <a:r>
-              <a:rPr sz="3800" b="1">
-                <a:solidFill>
-                  <a:srgbClr val="F5F7FA"/>
-                </a:solidFill>
-                <a:latin typeface="Arial"/>
-              </a:rPr>
-              <a:t>Plan the next iteration of your value.</a:t>
-            </a:r>
-          </a:p>
-        </p:txBody>
-      </p:sp>
-      <p:sp>
-        <p:nvSpPr>
-          <p:cNvPr id="5" name="TextBox 4"/>
-          <p:cNvSpPr txBox="1"/>
-          <p:nvPr/>
-        </p:nvSpPr>
-        <p:spPr>
-          <a:xfrm>
-            <a:off x="658368" y="3611880"/>
-            <a:ext cx="10972800" cy="1737360"/>
-          </a:xfrm>
-          <a:prstGeom prst="rect">
-            <a:avLst/>
-          </a:prstGeom>
-          <a:noFill/>
-        </p:spPr>
-        <p:txBody>
-          <a:bodyPr wrap="square" anchor="t">
-            <a:spAutoFit/>
-          </a:bodyPr>
-          <a:lstStyle/>
-          <a:p>
-            <a:pPr algn="l">
-              <a:lnSpc>
-                <a:spcPct val="135000"/>
-              </a:lnSpc>
-            </a:pPr>
-            <a:r>
-              <a:rPr sz="1900" b="1">
-                <a:solidFill>
-                  <a:srgbClr val="00FF41"/>
-                </a:solidFill>
-                <a:latin typeface="Arial"/>
-              </a:rPr>
-              <a:t>→  </a:t>
-            </a:r>
-            <a:r>
-              <a:rPr sz="1900" b="0">
-                <a:solidFill>
-                  <a:srgbClr val="8A94A6"/>
-                </a:solidFill>
-                <a:latin typeface="Arial"/>
-              </a:rPr>
-              <a:t>Interview a real person outside the class -&gt; build a persona + the need in their words.</a:t>
-            </a:r>
-          </a:p>
-          <a:p>
-            <a:pPr algn="l">
-              <a:lnSpc>
-                <a:spcPct val="135000"/>
-              </a:lnSpc>
-            </a:pPr>
-            <a:r>
-              <a:rPr sz="1900" b="1">
-                <a:solidFill>
-                  <a:srgbClr val="00FF41"/>
-                </a:solidFill>
-                <a:latin typeface="Arial"/>
-              </a:rPr>
-              <a:t>→  </a:t>
-            </a:r>
-            <a:r>
-              <a:rPr sz="1900" b="0">
-                <a:solidFill>
-                  <a:srgbClr val="8A94A6"/>
-                </a:solidFill>
-                <a:latin typeface="Arial"/>
-              </a:rPr>
-              <a:t>Operationalize: value -&gt; norms -&gt; requirements -&gt; features -&gt; the prompts you'll build.</a:t>
-            </a:r>
-          </a:p>
-          <a:p>
-            <a:pPr algn="l">
-              <a:lnSpc>
-                <a:spcPct val="135000"/>
-              </a:lnSpc>
-            </a:pPr>
-            <a:r>
-              <a:rPr sz="1900" b="1">
-                <a:solidFill>
-                  <a:srgbClr val="00FF41"/>
-                </a:solidFill>
-                <a:latin typeface="Arial"/>
-              </a:rPr>
-              <a:t>→  </a:t>
-            </a:r>
-            <a:r>
-              <a:rPr sz="1900" b="0">
-                <a:solidFill>
-                  <a:srgbClr val="8A94A6"/>
-                </a:solidFill>
-                <a:latin typeface="Arial"/>
-              </a:rPr>
-              <a:t>Storyboard the solution (4-8 frames) and scope the smallest real thing for Thursday.</a:t>
-            </a:r>
-          </a:p>
-        </p:txBody>
-      </p:sp>
-      <p:sp>
-        <p:nvSpPr>
-          <p:cNvPr id="6" name="Rounded Rectangle 5"/>
-          <p:cNvSpPr/>
-          <p:nvPr/>
-        </p:nvSpPr>
-        <p:spPr>
-          <a:xfrm>
-            <a:off x="640080" y="5532120"/>
-            <a:ext cx="10911535" cy="658368"/>
-          </a:xfrm>
-          <a:prstGeom prst="roundRect">
-            <a:avLst/>
-          </a:prstGeom>
-          <a:solidFill>
-            <a:srgbClr val="151B26"/>
-          </a:solidFill>
-          <a:ln w="19050">
-            <a:solidFill>
-              <a:srgbClr val="00FF41"/>
-            </a:solidFill>
-          </a:ln>
-          <a:effectLst/>
-        </p:spPr>
-        <p:style>
-          <a:lnRef idx="1">
-            <a:schemeClr val="accent1"/>
-          </a:lnRef>
-          <a:fillRef idx="3">
-            <a:schemeClr val="accent1"/>
-          </a:fillRef>
-          <a:effectRef idx="2">
-            <a:schemeClr val="accent1"/>
-          </a:effectRef>
-          <a:fontRef idx="minor">
-            <a:schemeClr val="lt1"/>
-          </a:fontRef>
-        </p:style>
-        <p:txBody>
-          <a:bodyPr rtlCol="0" anchor="ctr"/>
-          <a:lstStyle/>
-          <a:p>
-            <a:pPr algn="ctr"/>
-          </a:p>
-        </p:txBody>
-      </p:sp>
-      <p:sp>
-        <p:nvSpPr>
-          <p:cNvPr id="7" name="TextBox 6"/>
-          <p:cNvSpPr txBox="1"/>
-          <p:nvPr/>
-        </p:nvSpPr>
-        <p:spPr>
-          <a:xfrm>
-            <a:off x="914400" y="5532120"/>
-            <a:ext cx="10362895" cy="658368"/>
-          </a:xfrm>
-          <a:prstGeom prst="rect">
-            <a:avLst/>
-          </a:prstGeom>
-          <a:noFill/>
-        </p:spPr>
-        <p:txBody>
-          <a:bodyPr wrap="square" anchor="ctr">
-            <a:spAutoFit/>
-          </a:bodyPr>
-          <a:lstStyle/>
-          <a:p>
-            <a:pPr algn="l">
-              <a:lnSpc>
-                <a:spcPct val="100000"/>
-              </a:lnSpc>
-            </a:pPr>
-            <a:r>
-              <a:rPr sz="1600" b="1">
-                <a:solidFill>
-                  <a:srgbClr val="00FF41"/>
-                </a:solidFill>
-                <a:latin typeface="Arial"/>
-              </a:rPr>
-              <a:t>▶  </a:t>
-            </a:r>
-            <a:r>
-              <a:rPr sz="1600" b="1">
-                <a:solidFill>
-                  <a:srgbClr val="F5F7FA"/>
-                </a:solidFill>
-                <a:latin typeface="Arial"/>
-              </a:rPr>
-              <a:t>Deliverable = planning-report.md + your storyboard - this is Checkpoint 2 of the final</a:t>
-            </a:r>
-          </a:p>
-        </p:txBody>
-      </p:sp>
-      <p:sp>
-        <p:nvSpPr>
-          <p:cNvPr id="8" name="TextBox 7"/>
-          <p:cNvSpPr txBox="1"/>
-          <p:nvPr/>
-        </p:nvSpPr>
-        <p:spPr>
-          <a:xfrm>
-            <a:off x="640080" y="6355080"/>
-            <a:ext cx="10972800" cy="365760"/>
-          </a:xfrm>
-          <a:prstGeom prst="rect">
-            <a:avLst/>
-          </a:prstGeom>
-          <a:noFill/>
-        </p:spPr>
-        <p:txBody>
-          <a:bodyPr wrap="square" anchor="t">
-            <a:spAutoFit/>
-          </a:bodyPr>
-          <a:lstStyle/>
-          <a:p>
-            <a:pPr algn="l">
-              <a:lnSpc>
-                <a:spcPct val="100000"/>
-              </a:lnSpc>
-            </a:pPr>
-            <a:r>
-              <a:rPr sz="1000" b="0">
-                <a:solidFill>
-                  <a:srgbClr val="5A6474"/>
-                </a:solidFill>
-                <a:latin typeface="Courier New"/>
-              </a:rPr>
-              <a:t>Good Code, Good Vibes · TECHIE 1121 · Cornell Tech · Summer 2026</a:t>
-            </a:r>
-          </a:p>
-        </p:txBody>
-      </p:sp>
-    </p:spTree>
-  </p:cSld>
-  <p:clrMapOvr>
-    <a:masterClrMapping/>
-  </p:clrMapOvr>
-</p:sld>
-</file>
-
-<file path=ppt/slides/slide15.xml><?xml version="1.0" encoding="utf-8"?>
-<p:sld xmlns:a="http://schemas.openxmlformats.org/drawingml/2006/main" xmlns:p="http://schemas.openxmlformats.org/presentationml/2006/main" xmlns:r="http://schemas.openxmlformats.org/officeDocument/2006/relationships">
-  <p:cSld>
-    <p:bg>
-      <p:bgPr>
-        <a:solidFill>
-          <a:srgbClr val="0B0E14"/>
-        </a:solidFill>
-        <a:effectLst/>
-      </p:bgPr>
-    </p:bg>
-    <p:spTree>
-      <p:nvGrpSpPr>
-        <p:cNvPr id="1" name=""/>
-        <p:cNvGrpSpPr/>
-        <p:nvPr/>
-      </p:nvGrpSpPr>
-      <p:grpSpPr/>
-      <p:sp>
-        <p:nvSpPr>
-          <p:cNvPr id="2" name="TextBox 1"/>
-          <p:cNvSpPr txBox="1"/>
-          <p:nvPr/>
-        </p:nvSpPr>
-        <p:spPr>
-          <a:xfrm>
-            <a:off x="640080" y="502920"/>
-            <a:ext cx="10058400" cy="365760"/>
-          </a:xfrm>
-          <a:prstGeom prst="rect">
-            <a:avLst/>
-          </a:prstGeom>
-          <a:noFill/>
-        </p:spPr>
-        <p:txBody>
-          <a:bodyPr wrap="square" anchor="t">
-            <a:spAutoFit/>
-          </a:bodyPr>
-          <a:lstStyle/>
-          <a:p>
-            <a:pPr algn="l">
-              <a:lnSpc>
-                <a:spcPct val="100000"/>
-              </a:lnSpc>
-            </a:pPr>
-            <a:r>
-              <a:rPr sz="1300" b="1">
-                <a:solidFill>
-                  <a:srgbClr val="00FF41"/>
-                </a:solidFill>
-                <a:latin typeface="Courier New"/>
-              </a:rPr>
-              <a:t>LAST 30 MINUTES - START VIBE CODING</a:t>
-            </a:r>
-          </a:p>
-        </p:txBody>
-      </p:sp>
-      <p:sp>
-        <p:nvSpPr>
-          <p:cNvPr id="3" name="Rectangle 2"/>
-          <p:cNvSpPr/>
-          <p:nvPr/>
-        </p:nvSpPr>
-        <p:spPr>
-          <a:xfrm>
-            <a:off x="640080" y="932688"/>
-            <a:ext cx="822960" cy="73152"/>
-          </a:xfrm>
-          <a:prstGeom prst="rect">
-            <a:avLst/>
-          </a:prstGeom>
-          <a:solidFill>
-            <a:srgbClr val="00FF41"/>
-          </a:solidFill>
-          <a:ln>
-            <a:noFill/>
-          </a:ln>
-          <a:effectLst/>
-        </p:spPr>
-        <p:style>
-          <a:lnRef idx="1">
-            <a:schemeClr val="accent1"/>
-          </a:lnRef>
-          <a:fillRef idx="3">
-            <a:schemeClr val="accent1"/>
-          </a:fillRef>
-          <a:effectRef idx="2">
-            <a:schemeClr val="accent1"/>
-          </a:effectRef>
-          <a:fontRef idx="minor">
-            <a:schemeClr val="lt1"/>
-          </a:fontRef>
-        </p:style>
-        <p:txBody>
-          <a:bodyPr rtlCol="0" anchor="ctr"/>
-          <a:lstStyle/>
-          <a:p>
-            <a:pPr algn="ctr"/>
-          </a:p>
-        </p:txBody>
-      </p:sp>
-      <p:sp>
-        <p:nvSpPr>
-          <p:cNvPr id="4" name="TextBox 3"/>
-          <p:cNvSpPr txBox="1"/>
-          <p:nvPr/>
-        </p:nvSpPr>
-        <p:spPr>
-          <a:xfrm>
-            <a:off x="640080" y="1188720"/>
-            <a:ext cx="10972800" cy="1097280"/>
-          </a:xfrm>
-          <a:prstGeom prst="rect">
-            <a:avLst/>
-          </a:prstGeom>
-          <a:noFill/>
-        </p:spPr>
-        <p:txBody>
-          <a:bodyPr wrap="square" anchor="t">
-            <a:spAutoFit/>
-          </a:bodyPr>
-          <a:lstStyle/>
-          <a:p>
-            <a:pPr algn="l">
-              <a:lnSpc>
-                <a:spcPct val="100000"/>
-              </a:lnSpc>
-            </a:pPr>
-            <a:r>
-              <a:rPr sz="3400" b="1">
-                <a:solidFill>
-                  <a:srgbClr val="F5F7FA"/>
-                </a:solidFill>
-                <a:latin typeface="Arial"/>
-              </a:rPr>
-              <a:t>Don't wait for Thursday to open the repo</a:t>
-            </a:r>
-          </a:p>
-        </p:txBody>
-      </p:sp>
-      <p:sp>
-        <p:nvSpPr>
-          <p:cNvPr id="5" name="TextBox 4"/>
-          <p:cNvSpPr txBox="1"/>
-          <p:nvPr/>
-        </p:nvSpPr>
-        <p:spPr>
-          <a:xfrm>
-            <a:off x="658368" y="2286000"/>
-            <a:ext cx="10881360" cy="3657600"/>
-          </a:xfrm>
-          <a:prstGeom prst="rect">
-            <a:avLst/>
-          </a:prstGeom>
-          <a:noFill/>
-        </p:spPr>
-        <p:txBody>
-          <a:bodyPr wrap="square" anchor="t">
-            <a:spAutoFit/>
-          </a:bodyPr>
-          <a:lstStyle/>
-          <a:p>
-            <a:pPr algn="l">
-              <a:lnSpc>
-                <a:spcPct val="112000"/>
-              </a:lnSpc>
-            </a:pPr>
-            <a:r>
-              <a:rPr sz="2100" b="0">
-                <a:solidFill>
-                  <a:srgbClr val="F5F7FA"/>
-                </a:solidFill>
-                <a:latin typeface="Arial"/>
-              </a:rPr>
-              <a:t>Once the plan is locked, spend the final half hour getting a head start:</a:t>
-            </a:r>
-          </a:p>
-          <a:p>
-            <a:pPr algn="l">
-              <a:lnSpc>
-                <a:spcPct val="112000"/>
-              </a:lnSpc>
-            </a:pPr>
-            <a:r>
-              <a:rPr sz="2000" b="0">
-                <a:solidFill>
-                  <a:srgbClr val="F5F7FA"/>
-                </a:solidFill>
-                <a:latin typeface="Arial"/>
-              </a:rPr>
-              <a:t/>
-            </a:r>
-          </a:p>
-          <a:p>
-            <a:pPr algn="l">
-              <a:lnSpc>
-                <a:spcPct val="112000"/>
-              </a:lnSpc>
-            </a:pPr>
-            <a:r>
-              <a:rPr sz="1900" b="1">
-                <a:solidFill>
-                  <a:srgbClr val="00FF41"/>
-                </a:solidFill>
-                <a:latin typeface="Arial"/>
-              </a:rPr>
-              <a:t>Open your team repo, run the FIRST prompt from your value tree, and get anything at all on screen.</a:t>
-            </a:r>
-          </a:p>
-          <a:p>
-            <a:pPr algn="l">
-              <a:lnSpc>
-                <a:spcPct val="112000"/>
-              </a:lnSpc>
-            </a:pPr>
-            <a:r>
-              <a:rPr sz="2000" b="0">
-                <a:solidFill>
-                  <a:srgbClr val="F5F7FA"/>
-                </a:solidFill>
-                <a:latin typeface="Arial"/>
-              </a:rPr>
-              <a:t/>
-            </a:r>
-          </a:p>
-          <a:p>
-            <a:pPr algn="l">
-              <a:lnSpc>
-                <a:spcPct val="112000"/>
-              </a:lnSpc>
-            </a:pPr>
-            <a:r>
-              <a:rPr sz="1700" b="0">
-                <a:solidFill>
-                  <a:srgbClr val="8A94A6"/>
-                </a:solidFill>
-                <a:latin typeface="Arial"/>
-              </a:rPr>
-              <a:t>Thursday has no lecture - it's all build - so every minute you start now is a minute you keep tomorrow.</a:t>
-            </a:r>
-          </a:p>
-        </p:txBody>
-      </p:sp>
-      <p:sp>
-        <p:nvSpPr>
-          <p:cNvPr id="6" name="TextBox 5"/>
-          <p:cNvSpPr txBox="1"/>
-          <p:nvPr/>
-        </p:nvSpPr>
-        <p:spPr>
-          <a:xfrm>
-            <a:off x="640080" y="6355080"/>
-            <a:ext cx="10972800" cy="365760"/>
-          </a:xfrm>
-          <a:prstGeom prst="rect">
-            <a:avLst/>
-          </a:prstGeom>
-          <a:noFill/>
-        </p:spPr>
-        <p:txBody>
-          <a:bodyPr wrap="square" anchor="t">
-            <a:spAutoFit/>
-          </a:bodyPr>
-          <a:lstStyle/>
-          <a:p>
-            <a:pPr algn="l">
-              <a:lnSpc>
-                <a:spcPct val="100000"/>
-              </a:lnSpc>
-            </a:pPr>
-            <a:r>
-              <a:rPr sz="1000" b="0">
-                <a:solidFill>
-                  <a:srgbClr val="5A6474"/>
-                </a:solidFill>
-                <a:latin typeface="Courier New"/>
-              </a:rPr>
-              <a:t>Good Code, Good Vibes · TECHIE 1121 · Cornell Tech · Summer 2026</a:t>
-            </a:r>
-          </a:p>
-        </p:txBody>
-      </p:sp>
-    </p:spTree>
-  </p:cSld>
-  <p:clrMapOvr>
-    <a:masterClrMapping/>
-  </p:clrMapOvr>
-</p:sld>
-</file>
-
-<file path=ppt/slides/slide16.xml><?xml version="1.0" encoding="utf-8"?>
-<p:sld xmlns:a="http://schemas.openxmlformats.org/drawingml/2006/main" xmlns:p="http://schemas.openxmlformats.org/presentationml/2006/main" xmlns:r="http://schemas.openxmlformats.org/officeDocument/2006/relationships">
-  <p:cSld>
-    <p:bg>
-      <p:bgPr>
-        <a:solidFill>
-          <a:srgbClr val="0B0E14"/>
-        </a:solidFill>
-        <a:effectLst/>
-      </p:bgPr>
-    </p:bg>
-    <p:spTree>
-      <p:nvGrpSpPr>
-        <p:cNvPr id="1" name=""/>
-        <p:cNvGrpSpPr/>
-        <p:nvPr/>
-      </p:nvGrpSpPr>
-      <p:grpSpPr/>
-      <p:sp>
-        <p:nvSpPr>
-          <p:cNvPr id="2" name="TextBox 1"/>
-          <p:cNvSpPr txBox="1"/>
-          <p:nvPr/>
-        </p:nvSpPr>
-        <p:spPr>
-          <a:xfrm>
-            <a:off x="640080" y="502920"/>
-            <a:ext cx="10058400" cy="365760"/>
-          </a:xfrm>
-          <a:prstGeom prst="rect">
-            <a:avLst/>
-          </a:prstGeom>
-          <a:noFill/>
-        </p:spPr>
-        <p:txBody>
-          <a:bodyPr wrap="square" anchor="t">
-            <a:spAutoFit/>
-          </a:bodyPr>
-          <a:lstStyle/>
-          <a:p>
-            <a:pPr algn="l">
-              <a:lnSpc>
-                <a:spcPct val="100000"/>
-              </a:lnSpc>
-            </a:pPr>
-            <a:r>
-              <a:rPr sz="1300" b="1">
-                <a:solidFill>
-                  <a:srgbClr val="00FF41"/>
-                </a:solidFill>
-                <a:latin typeface="Courier New"/>
-              </a:rPr>
               <a:t>CARRY IT TO THURSDAY</a:t>
             </a:r>
           </a:p>
@@ -6600,7 +5793,7 @@
                 </a:solidFill>
                 <a:latin typeface="Courier New"/>
               </a:rPr>
-              <a:t>FIND THE NEED</a:t>
+              <a:t>BUILD YOUR PERSONA</a:t>
             </a:r>
           </a:p>
         </p:txBody>
@@ -6658,7 +5851,7 @@
         <p:spPr>
           <a:xfrm>
             <a:off x="640080" y="1188720"/>
-            <a:ext cx="10972800" cy="914400"/>
+            <a:ext cx="10972800" cy="1097280"/>
           </a:xfrm>
           <a:prstGeom prst="rect">
             <a:avLst/>
@@ -6677,115 +5870,27 @@
               </a:lnSpc>
             </a:pPr>
             <a:r>
-              <a:rPr sz="3200" b="1">
+              <a:rPr sz="3400" b="1">
                 <a:solidFill>
                   <a:srgbClr val="F5F7FA"/>
                 </a:solidFill>
                 <a:latin typeface="Arial"/>
               </a:rPr>
-              <a:t>Talk to someone - don't guess</a:t>
-            </a:r>
-          </a:p>
-        </p:txBody>
-      </p:sp>
-      <p:sp>
-        <p:nvSpPr>
-          <p:cNvPr id="5" name="Rounded Rectangle 4"/>
-          <p:cNvSpPr/>
-          <p:nvPr/>
-        </p:nvSpPr>
-        <p:spPr>
-          <a:xfrm>
-            <a:off x="640080" y="2468880"/>
-            <a:ext cx="3393338" cy="3383280"/>
-          </a:xfrm>
-          <a:prstGeom prst="roundRect">
-            <a:avLst/>
-          </a:prstGeom>
-          <a:solidFill>
-            <a:srgbClr val="151B26"/>
-          </a:solidFill>
-          <a:ln>
-            <a:noFill/>
-          </a:ln>
-          <a:effectLst/>
-        </p:spPr>
-        <p:style>
-          <a:lnRef idx="1">
-            <a:schemeClr val="accent1"/>
-          </a:lnRef>
-          <a:fillRef idx="3">
-            <a:schemeClr val="accent1"/>
-          </a:fillRef>
-          <a:effectRef idx="2">
-            <a:schemeClr val="accent1"/>
-          </a:effectRef>
-          <a:fontRef idx="minor">
-            <a:schemeClr val="lt1"/>
-          </a:fontRef>
-        </p:style>
-        <p:txBody>
-          <a:bodyPr rtlCol="0" anchor="ctr"/>
-          <a:lstStyle/>
-          <a:p>
-            <a:pPr algn="ctr"/>
-          </a:p>
-        </p:txBody>
-      </p:sp>
-      <p:sp>
-        <p:nvSpPr>
-          <p:cNvPr id="6" name="Rectangle 5"/>
-          <p:cNvSpPr/>
-          <p:nvPr/>
-        </p:nvSpPr>
-        <p:spPr>
-          <a:xfrm>
-            <a:off x="640080" y="2468880"/>
-            <a:ext cx="3393338" cy="82296"/>
-          </a:xfrm>
-          <a:prstGeom prst="rect">
-            <a:avLst/>
-          </a:prstGeom>
-          <a:solidFill>
-            <a:srgbClr val="00FF41"/>
-          </a:solidFill>
-          <a:ln>
-            <a:noFill/>
-          </a:ln>
-          <a:effectLst/>
-        </p:spPr>
-        <p:style>
-          <a:lnRef idx="1">
-            <a:schemeClr val="accent1"/>
-          </a:lnRef>
-          <a:fillRef idx="3">
-            <a:schemeClr val="accent1"/>
-          </a:fillRef>
-          <a:effectRef idx="2">
-            <a:schemeClr val="accent1"/>
-          </a:effectRef>
-          <a:fontRef idx="minor">
-            <a:schemeClr val="lt1"/>
-          </a:fontRef>
-        </p:style>
-        <p:txBody>
-          <a:bodyPr rtlCol="0" anchor="ctr"/>
-          <a:lstStyle/>
-          <a:p>
-            <a:pPr algn="ctr"/>
-          </a:p>
-        </p:txBody>
-      </p:sp>
-      <p:sp>
-        <p:nvSpPr>
-          <p:cNvPr id="7" name="TextBox 6"/>
+              <a:t>One specific human - not "everyone"</a:t>
+            </a:r>
+          </a:p>
+        </p:txBody>
+      </p:sp>
+      <p:sp>
+        <p:nvSpPr>
+          <p:cNvPr id="5" name="TextBox 4"/>
           <p:cNvSpPr txBox="1"/>
           <p:nvPr/>
         </p:nvSpPr>
         <p:spPr>
           <a:xfrm>
-            <a:off x="914400" y="2788920"/>
-            <a:ext cx="2844698" cy="457200"/>
+            <a:off x="658368" y="2286000"/>
+            <a:ext cx="10881360" cy="3657600"/>
           </a:xfrm>
           <a:prstGeom prst="rect">
             <a:avLst/>
@@ -6800,512 +5905,56 @@
           <a:p>
             <a:pPr algn="l">
               <a:lnSpc>
-                <a:spcPct val="100000"/>
-              </a:lnSpc>
-            </a:pPr>
-            <a:r>
-              <a:rPr sz="1200" b="1">
-                <a:solidFill>
-                  <a:srgbClr val="00FF41"/>
-                </a:solidFill>
-                <a:latin typeface="Courier New"/>
-              </a:rPr>
-              <a:t>INTERVIEW</a:t>
-            </a:r>
-          </a:p>
-        </p:txBody>
-      </p:sp>
-      <p:sp>
-        <p:nvSpPr>
-          <p:cNvPr id="8" name="TextBox 7"/>
-          <p:cNvSpPr txBox="1"/>
-          <p:nvPr/>
-        </p:nvSpPr>
-        <p:spPr>
-          <a:xfrm>
-            <a:off x="914400" y="3246120"/>
-            <a:ext cx="2844698" cy="822960"/>
-          </a:xfrm>
-          <a:prstGeom prst="rect">
-            <a:avLst/>
-          </a:prstGeom>
-          <a:noFill/>
-        </p:spPr>
-        <p:txBody>
-          <a:bodyPr wrap="square" anchor="t">
-            <a:spAutoFit/>
-          </a:bodyPr>
-          <a:lstStyle/>
+                <a:spcPct val="112000"/>
+              </a:lnSpc>
+            </a:pPr>
+            <a:r>
+              <a:rPr sz="2000" b="0">
+                <a:solidFill>
+                  <a:srgbClr val="F5F7FA"/>
+                </a:solidFill>
+                <a:latin typeface="Arial"/>
+              </a:rPr>
+              <a:t>Name a specific beneficiary OUTSIDE this class, and build a persona: name, situation, goal, frustration, context - and where they MEET or LOSE your value in their day.</a:t>
+            </a:r>
+          </a:p>
           <a:p>
             <a:pPr algn="l">
               <a:lnSpc>
-                <a:spcPct val="100000"/>
-              </a:lnSpc>
-            </a:pPr>
-            <a:r>
-              <a:rPr sz="2000" b="1">
+                <a:spcPct val="112000"/>
+              </a:lnSpc>
+            </a:pPr>
+            <a:r>
+              <a:rPr sz="2000" b="0">
                 <a:solidFill>
                   <a:srgbClr val="F5F7FA"/>
                 </a:solidFill>
                 <a:latin typeface="Arial"/>
               </a:rPr>
-              <a:t>Ask, don't pitch</a:t>
-            </a:r>
-          </a:p>
-        </p:txBody>
-      </p:sp>
-      <p:sp>
-        <p:nvSpPr>
-          <p:cNvPr id="9" name="TextBox 8"/>
-          <p:cNvSpPr txBox="1"/>
-          <p:nvPr/>
-        </p:nvSpPr>
-        <p:spPr>
-          <a:xfrm>
-            <a:off x="914400" y="4114800"/>
-            <a:ext cx="2844698" cy="1554480"/>
-          </a:xfrm>
-          <a:prstGeom prst="rect">
-            <a:avLst/>
-          </a:prstGeom>
-          <a:noFill/>
-        </p:spPr>
-        <p:txBody>
-          <a:bodyPr wrap="square" anchor="t">
-            <a:spAutoFit/>
-          </a:bodyPr>
-          <a:lstStyle/>
+              <a:t/>
+            </a:r>
+          </a:p>
           <a:p>
             <a:pPr algn="l">
               <a:lnSpc>
-                <a:spcPct val="110000"/>
-              </a:lnSpc>
-            </a:pPr>
-            <a:r>
-              <a:rPr sz="1500" b="0">
+                <a:spcPct val="112000"/>
+              </a:lnSpc>
+            </a:pPr>
+            <a:r>
+              <a:rPr sz="1800" b="0">
                 <a:solidFill>
                   <a:srgbClr val="8A94A6"/>
                 </a:solidFill>
                 <a:latin typeface="Arial"/>
               </a:rPr>
-              <a:t>A short conversation with a real person outside the class. Ask about their problem, not your idea.</a:t>
-            </a:r>
-          </a:p>
-        </p:txBody>
-      </p:sp>
-      <p:sp>
-        <p:nvSpPr>
-          <p:cNvPr id="10" name="Rounded Rectangle 9"/>
-          <p:cNvSpPr/>
-          <p:nvPr/>
-        </p:nvSpPr>
-        <p:spPr>
-          <a:xfrm>
-            <a:off x="4399178" y="2468880"/>
-            <a:ext cx="3393338" cy="3383280"/>
-          </a:xfrm>
-          <a:prstGeom prst="roundRect">
-            <a:avLst/>
-          </a:prstGeom>
-          <a:solidFill>
-            <a:srgbClr val="151B26"/>
-          </a:solidFill>
-          <a:ln>
-            <a:noFill/>
-          </a:ln>
-          <a:effectLst/>
-        </p:spPr>
-        <p:style>
-          <a:lnRef idx="1">
-            <a:schemeClr val="accent1"/>
-          </a:lnRef>
-          <a:fillRef idx="3">
-            <a:schemeClr val="accent1"/>
-          </a:fillRef>
-          <a:effectRef idx="2">
-            <a:schemeClr val="accent1"/>
-          </a:effectRef>
-          <a:fontRef idx="minor">
-            <a:schemeClr val="lt1"/>
-          </a:fontRef>
-        </p:style>
-        <p:txBody>
-          <a:bodyPr rtlCol="0" anchor="ctr"/>
-          <a:lstStyle/>
-          <a:p>
-            <a:pPr algn="ctr"/>
-          </a:p>
-        </p:txBody>
-      </p:sp>
-      <p:sp>
-        <p:nvSpPr>
-          <p:cNvPr id="11" name="Rectangle 10"/>
-          <p:cNvSpPr/>
-          <p:nvPr/>
-        </p:nvSpPr>
-        <p:spPr>
-          <a:xfrm>
-            <a:off x="4399178" y="2468880"/>
-            <a:ext cx="3393338" cy="82296"/>
-          </a:xfrm>
-          <a:prstGeom prst="rect">
-            <a:avLst/>
-          </a:prstGeom>
-          <a:solidFill>
-            <a:srgbClr val="00FF41"/>
-          </a:solidFill>
-          <a:ln>
-            <a:noFill/>
-          </a:ln>
-          <a:effectLst/>
-        </p:spPr>
-        <p:style>
-          <a:lnRef idx="1">
-            <a:schemeClr val="accent1"/>
-          </a:lnRef>
-          <a:fillRef idx="3">
-            <a:schemeClr val="accent1"/>
-          </a:fillRef>
-          <a:effectRef idx="2">
-            <a:schemeClr val="accent1"/>
-          </a:effectRef>
-          <a:fontRef idx="minor">
-            <a:schemeClr val="lt1"/>
-          </a:fontRef>
-        </p:style>
-        <p:txBody>
-          <a:bodyPr rtlCol="0" anchor="ctr"/>
-          <a:lstStyle/>
-          <a:p>
-            <a:pPr algn="ctr"/>
-          </a:p>
-        </p:txBody>
-      </p:sp>
-      <p:sp>
-        <p:nvSpPr>
-          <p:cNvPr id="12" name="TextBox 11"/>
-          <p:cNvSpPr txBox="1"/>
-          <p:nvPr/>
-        </p:nvSpPr>
-        <p:spPr>
-          <a:xfrm>
-            <a:off x="4673498" y="2788920"/>
-            <a:ext cx="2844698" cy="457200"/>
-          </a:xfrm>
-          <a:prstGeom prst="rect">
-            <a:avLst/>
-          </a:prstGeom>
-          <a:noFill/>
-        </p:spPr>
-        <p:txBody>
-          <a:bodyPr wrap="square" anchor="t">
-            <a:spAutoFit/>
-          </a:bodyPr>
-          <a:lstStyle/>
-          <a:p>
-            <a:pPr algn="l">
-              <a:lnSpc>
-                <a:spcPct val="100000"/>
-              </a:lnSpc>
-            </a:pPr>
-            <a:r>
-              <a:rPr sz="1200" b="1">
-                <a:solidFill>
-                  <a:srgbClr val="00FF41"/>
-                </a:solidFill>
-                <a:latin typeface="Courier New"/>
-              </a:rPr>
-              <a:t>PERSONA</a:t>
-            </a:r>
-          </a:p>
-        </p:txBody>
-      </p:sp>
-      <p:sp>
-        <p:nvSpPr>
-          <p:cNvPr id="13" name="TextBox 12"/>
-          <p:cNvSpPr txBox="1"/>
-          <p:nvPr/>
-        </p:nvSpPr>
-        <p:spPr>
-          <a:xfrm>
-            <a:off x="4673498" y="3246120"/>
-            <a:ext cx="2844698" cy="822960"/>
-          </a:xfrm>
-          <a:prstGeom prst="rect">
-            <a:avLst/>
-          </a:prstGeom>
-          <a:noFill/>
-        </p:spPr>
-        <p:txBody>
-          <a:bodyPr wrap="square" anchor="t">
-            <a:spAutoFit/>
-          </a:bodyPr>
-          <a:lstStyle/>
-          <a:p>
-            <a:pPr algn="l">
-              <a:lnSpc>
-                <a:spcPct val="100000"/>
-              </a:lnSpc>
-            </a:pPr>
-            <a:r>
-              <a:rPr sz="2000" b="1">
-                <a:solidFill>
-                  <a:srgbClr val="F5F7FA"/>
-                </a:solidFill>
-                <a:latin typeface="Arial"/>
-              </a:rPr>
-              <a:t>One specific human</a:t>
-            </a:r>
-          </a:p>
-        </p:txBody>
-      </p:sp>
-      <p:sp>
-        <p:nvSpPr>
-          <p:cNvPr id="14" name="TextBox 13"/>
-          <p:cNvSpPr txBox="1"/>
-          <p:nvPr/>
-        </p:nvSpPr>
-        <p:spPr>
-          <a:xfrm>
-            <a:off x="4673498" y="4114800"/>
-            <a:ext cx="2844698" cy="1554480"/>
-          </a:xfrm>
-          <a:prstGeom prst="rect">
-            <a:avLst/>
-          </a:prstGeom>
-          <a:noFill/>
-        </p:spPr>
-        <p:txBody>
-          <a:bodyPr wrap="square" anchor="t">
-            <a:spAutoFit/>
-          </a:bodyPr>
-          <a:lstStyle/>
-          <a:p>
-            <a:pPr algn="l">
-              <a:lnSpc>
-                <a:spcPct val="110000"/>
-              </a:lnSpc>
-            </a:pPr>
-            <a:r>
-              <a:rPr sz="1500" b="0">
-                <a:solidFill>
-                  <a:srgbClr val="8A94A6"/>
-                </a:solidFill>
-                <a:latin typeface="Arial"/>
-              </a:rPr>
-              <a:t>Name, situation, goal, frustration, context. Not 'students' - one person you design for.</a:t>
-            </a:r>
-          </a:p>
-        </p:txBody>
-      </p:sp>
-      <p:sp>
-        <p:nvSpPr>
-          <p:cNvPr id="15" name="Rounded Rectangle 14"/>
-          <p:cNvSpPr/>
-          <p:nvPr/>
-        </p:nvSpPr>
-        <p:spPr>
-          <a:xfrm>
-            <a:off x="8158276" y="2468880"/>
-            <a:ext cx="3393338" cy="3383280"/>
-          </a:xfrm>
-          <a:prstGeom prst="roundRect">
-            <a:avLst/>
-          </a:prstGeom>
-          <a:solidFill>
-            <a:srgbClr val="151B26"/>
-          </a:solidFill>
-          <a:ln>
-            <a:noFill/>
-          </a:ln>
-          <a:effectLst/>
-        </p:spPr>
-        <p:style>
-          <a:lnRef idx="1">
-            <a:schemeClr val="accent1"/>
-          </a:lnRef>
-          <a:fillRef idx="3">
-            <a:schemeClr val="accent1"/>
-          </a:fillRef>
-          <a:effectRef idx="2">
-            <a:schemeClr val="accent1"/>
-          </a:effectRef>
-          <a:fontRef idx="minor">
-            <a:schemeClr val="lt1"/>
-          </a:fontRef>
-        </p:style>
-        <p:txBody>
-          <a:bodyPr rtlCol="0" anchor="ctr"/>
-          <a:lstStyle/>
-          <a:p>
-            <a:pPr algn="ctr"/>
-          </a:p>
-        </p:txBody>
-      </p:sp>
-      <p:sp>
-        <p:nvSpPr>
-          <p:cNvPr id="16" name="Rectangle 15"/>
-          <p:cNvSpPr/>
-          <p:nvPr/>
-        </p:nvSpPr>
-        <p:spPr>
-          <a:xfrm>
-            <a:off x="8158276" y="2468880"/>
-            <a:ext cx="3393338" cy="82296"/>
-          </a:xfrm>
-          <a:prstGeom prst="rect">
-            <a:avLst/>
-          </a:prstGeom>
-          <a:solidFill>
-            <a:srgbClr val="00FF41"/>
-          </a:solidFill>
-          <a:ln>
-            <a:noFill/>
-          </a:ln>
-          <a:effectLst/>
-        </p:spPr>
-        <p:style>
-          <a:lnRef idx="1">
-            <a:schemeClr val="accent1"/>
-          </a:lnRef>
-          <a:fillRef idx="3">
-            <a:schemeClr val="accent1"/>
-          </a:fillRef>
-          <a:effectRef idx="2">
-            <a:schemeClr val="accent1"/>
-          </a:effectRef>
-          <a:fontRef idx="minor">
-            <a:schemeClr val="lt1"/>
-          </a:fontRef>
-        </p:style>
-        <p:txBody>
-          <a:bodyPr rtlCol="0" anchor="ctr"/>
-          <a:lstStyle/>
-          <a:p>
-            <a:pPr algn="ctr"/>
-          </a:p>
-        </p:txBody>
-      </p:sp>
-      <p:sp>
-        <p:nvSpPr>
-          <p:cNvPr id="17" name="TextBox 16"/>
-          <p:cNvSpPr txBox="1"/>
-          <p:nvPr/>
-        </p:nvSpPr>
-        <p:spPr>
-          <a:xfrm>
-            <a:off x="8432596" y="2788920"/>
-            <a:ext cx="2844698" cy="457200"/>
-          </a:xfrm>
-          <a:prstGeom prst="rect">
-            <a:avLst/>
-          </a:prstGeom>
-          <a:noFill/>
-        </p:spPr>
-        <p:txBody>
-          <a:bodyPr wrap="square" anchor="t">
-            <a:spAutoFit/>
-          </a:bodyPr>
-          <a:lstStyle/>
-          <a:p>
-            <a:pPr algn="l">
-              <a:lnSpc>
-                <a:spcPct val="100000"/>
-              </a:lnSpc>
-            </a:pPr>
-            <a:r>
-              <a:rPr sz="1200" b="1">
-                <a:solidFill>
-                  <a:srgbClr val="00FF41"/>
-                </a:solidFill>
-                <a:latin typeface="Courier New"/>
-              </a:rPr>
-              <a:t>THE NEED</a:t>
-            </a:r>
-          </a:p>
-        </p:txBody>
-      </p:sp>
-      <p:sp>
-        <p:nvSpPr>
-          <p:cNvPr id="18" name="TextBox 17"/>
-          <p:cNvSpPr txBox="1"/>
-          <p:nvPr/>
-        </p:nvSpPr>
-        <p:spPr>
-          <a:xfrm>
-            <a:off x="8432596" y="3246120"/>
-            <a:ext cx="2844698" cy="822960"/>
-          </a:xfrm>
-          <a:prstGeom prst="rect">
-            <a:avLst/>
-          </a:prstGeom>
-          <a:noFill/>
-        </p:spPr>
-        <p:txBody>
-          <a:bodyPr wrap="square" anchor="t">
-            <a:spAutoFit/>
-          </a:bodyPr>
-          <a:lstStyle/>
-          <a:p>
-            <a:pPr algn="l">
-              <a:lnSpc>
-                <a:spcPct val="100000"/>
-              </a:lnSpc>
-            </a:pPr>
-            <a:r>
-              <a:rPr sz="2000" b="1">
-                <a:solidFill>
-                  <a:srgbClr val="F5F7FA"/>
-                </a:solidFill>
-                <a:latin typeface="Arial"/>
-              </a:rPr>
-              <a:t>In their words</a:t>
-            </a:r>
-          </a:p>
-        </p:txBody>
-      </p:sp>
-      <p:sp>
-        <p:nvSpPr>
-          <p:cNvPr id="19" name="TextBox 18"/>
-          <p:cNvSpPr txBox="1"/>
-          <p:nvPr/>
-        </p:nvSpPr>
-        <p:spPr>
-          <a:xfrm>
-            <a:off x="8432596" y="4114800"/>
-            <a:ext cx="2844698" cy="1554480"/>
-          </a:xfrm>
-          <a:prstGeom prst="rect">
-            <a:avLst/>
-          </a:prstGeom>
-          <a:noFill/>
-        </p:spPr>
-        <p:txBody>
-          <a:bodyPr wrap="square" anchor="t">
-            <a:spAutoFit/>
-          </a:bodyPr>
-          <a:lstStyle/>
-          <a:p>
-            <a:pPr algn="l">
-              <a:lnSpc>
-                <a:spcPct val="110000"/>
-              </a:lnSpc>
-            </a:pPr>
-            <a:r>
-              <a:rPr sz="1500" b="0">
-                <a:solidFill>
-                  <a:srgbClr val="8A94A6"/>
-                </a:solidFill>
-                <a:latin typeface="Arial"/>
-              </a:rPr>
-              <a:t>Write the need the way they would say it. That sentence is what your design has to serve.</a:t>
-            </a:r>
-          </a:p>
-        </p:txBody>
-      </p:sp>
-      <p:sp>
-        <p:nvSpPr>
-          <p:cNvPr id="20" name="TextBox 19"/>
+              <a:t>Use a template: the Figma 'User Persona Template Set' (community) or a Google Slides deck. Add a photo/sketch so it feels like a person.</a:t>
+            </a:r>
+          </a:p>
+        </p:txBody>
+      </p:sp>
+      <p:sp>
+        <p:nvSpPr>
+          <p:cNvPr id="6" name="TextBox 5"/>
           <p:cNvSpPr txBox="1"/>
           <p:nvPr/>
         </p:nvSpPr>
@@ -7402,7 +6051,7 @@
                 </a:solidFill>
                 <a:latin typeface="Courier New"/>
               </a:rPr>
-              <a:t>PERSONAS - WHY, AND THE RISK</a:t>
+              <a:t>ELICIT THE NEED - INTERVIEW YOUR PERSONA AS A CHATBOT</a:t>
             </a:r>
           </a:p>
         </p:txBody>
@@ -7459,8 +6108,8 @@
         </p:nvSpPr>
         <p:spPr>
           <a:xfrm>
-            <a:off x="640080" y="1188720"/>
-            <a:ext cx="10972800" cy="1097280"/>
+            <a:off x="640080" y="1325880"/>
+            <a:ext cx="10972800" cy="1828800"/>
           </a:xfrm>
           <a:prstGeom prst="rect">
             <a:avLst/>
@@ -7475,17 +6124,17 @@
           <a:p>
             <a:pPr algn="l">
               <a:lnSpc>
-                <a:spcPct val="100000"/>
-              </a:lnSpc>
-            </a:pPr>
-            <a:r>
-              <a:rPr sz="3400" b="1">
+                <a:spcPct val="105000"/>
+              </a:lnSpc>
+            </a:pPr>
+            <a:r>
+              <a:rPr sz="3800" b="1">
                 <a:solidFill>
                   <a:srgbClr val="F5F7FA"/>
                 </a:solidFill>
                 <a:latin typeface="Arial"/>
               </a:rPr>
-              <a:t>A persona is a tool to EMPATHIZE - not to stereotype</a:t>
+              <a:t>No time to find a stranger? Interview the persona you built.</a:t>
             </a:r>
           </a:p>
         </p:txBody>
@@ -7498,8 +6147,8 @@
         </p:nvSpPr>
         <p:spPr>
           <a:xfrm>
-            <a:off x="658368" y="2286000"/>
-            <a:ext cx="10881360" cy="3657600"/>
+            <a:off x="658368" y="3611880"/>
+            <a:ext cx="10972800" cy="1737360"/>
           </a:xfrm>
           <a:prstGeom prst="rect">
             <a:avLst/>
@@ -7514,56 +6163,177 @@
           <a:p>
             <a:pPr algn="l">
               <a:lnSpc>
-                <a:spcPct val="112000"/>
-              </a:lnSpc>
-            </a:pPr>
-            <a:r>
-              <a:rPr sz="2000" b="0">
+                <a:spcPct val="135000"/>
+              </a:lnSpc>
+            </a:pPr>
+            <a:r>
+              <a:rPr sz="1900" b="1">
+                <a:solidFill>
+                  <a:srgbClr val="00FF41"/>
+                </a:solidFill>
+                <a:latin typeface="Arial"/>
+              </a:rPr>
+              <a:t>→  </a:t>
+            </a:r>
+            <a:r>
+              <a:rPr sz="1900" b="0">
+                <a:solidFill>
+                  <a:srgbClr val="8A94A6"/>
+                </a:solidFill>
+                <a:latin typeface="Arial"/>
+              </a:rPr>
+              <a:t>Turn your persona into an AI chatbot - give it RICH detail: its life, constraints, what it cares about.</a:t>
+            </a:r>
+          </a:p>
+          <a:p>
+            <a:pPr algn="l">
+              <a:lnSpc>
+                <a:spcPct val="135000"/>
+              </a:lnSpc>
+            </a:pPr>
+            <a:r>
+              <a:rPr sz="1900" b="1">
+                <a:solidFill>
+                  <a:srgbClr val="00FF41"/>
+                </a:solidFill>
+                <a:latin typeface="Arial"/>
+              </a:rPr>
+              <a:t>→  </a:t>
+            </a:r>
+            <a:r>
+              <a:rPr sz="1900" b="0">
+                <a:solidFill>
+                  <a:srgbClr val="8A94A6"/>
+                </a:solidFill>
+                <a:latin typeface="Arial"/>
+              </a:rPr>
+              <a:t>Run a short interview about ITS problem, not your idea. Capture the need in its words.</a:t>
+            </a:r>
+          </a:p>
+          <a:p>
+            <a:pPr algn="l">
+              <a:lnSpc>
+                <a:spcPct val="135000"/>
+              </a:lnSpc>
+            </a:pPr>
+            <a:r>
+              <a:rPr sz="1900" b="1">
+                <a:solidFill>
+                  <a:srgbClr val="00FF41"/>
+                </a:solidFill>
+                <a:latin typeface="Arial"/>
+              </a:rPr>
+              <a:t>→  </a:t>
+            </a:r>
+            <a:r>
+              <a:rPr sz="1900" b="0">
+                <a:solidFill>
+                  <a:srgbClr val="8A94A6"/>
+                </a:solidFill>
+                <a:latin typeface="Arial"/>
+              </a:rPr>
+              <a:t>Paste the SETUP PROMPT and the CONVERSATION into planning-report.md - that is your elicitation evidence.</a:t>
+            </a:r>
+          </a:p>
+        </p:txBody>
+      </p:sp>
+      <p:sp>
+        <p:nvSpPr>
+          <p:cNvPr id="6" name="Rounded Rectangle 5"/>
+          <p:cNvSpPr/>
+          <p:nvPr/>
+        </p:nvSpPr>
+        <p:spPr>
+          <a:xfrm>
+            <a:off x="640080" y="5532120"/>
+            <a:ext cx="10911535" cy="658368"/>
+          </a:xfrm>
+          <a:prstGeom prst="roundRect">
+            <a:avLst/>
+          </a:prstGeom>
+          <a:solidFill>
+            <a:srgbClr val="151B26"/>
+          </a:solidFill>
+          <a:ln w="19050">
+            <a:solidFill>
+              <a:srgbClr val="00FF41"/>
+            </a:solidFill>
+          </a:ln>
+          <a:effectLst/>
+        </p:spPr>
+        <p:style>
+          <a:lnRef idx="1">
+            <a:schemeClr val="accent1"/>
+          </a:lnRef>
+          <a:fillRef idx="3">
+            <a:schemeClr val="accent1"/>
+          </a:fillRef>
+          <a:effectRef idx="2">
+            <a:schemeClr val="accent1"/>
+          </a:effectRef>
+          <a:fontRef idx="minor">
+            <a:schemeClr val="lt1"/>
+          </a:fontRef>
+        </p:style>
+        <p:txBody>
+          <a:bodyPr rtlCol="0" anchor="ctr"/>
+          <a:lstStyle/>
+          <a:p>
+            <a:pPr algn="ctr"/>
+          </a:p>
+        </p:txBody>
+      </p:sp>
+      <p:sp>
+        <p:nvSpPr>
+          <p:cNvPr id="7" name="TextBox 6"/>
+          <p:cNvSpPr txBox="1"/>
+          <p:nvPr/>
+        </p:nvSpPr>
+        <p:spPr>
+          <a:xfrm>
+            <a:off x="914400" y="5532120"/>
+            <a:ext cx="10362895" cy="658368"/>
+          </a:xfrm>
+          <a:prstGeom prst="rect">
+            <a:avLst/>
+          </a:prstGeom>
+          <a:noFill/>
+        </p:spPr>
+        <p:txBody>
+          <a:bodyPr wrap="square" anchor="ctr">
+            <a:spAutoFit/>
+          </a:bodyPr>
+          <a:lstStyle/>
+          <a:p>
+            <a:pPr algn="l">
+              <a:lnSpc>
+                <a:spcPct val="100000"/>
+              </a:lnSpc>
+            </a:pPr>
+            <a:r>
+              <a:rPr sz="1600" b="1">
+                <a:solidFill>
+                  <a:srgbClr val="00FF41"/>
+                </a:solidFill>
+                <a:latin typeface="Arial"/>
+              </a:rPr>
+              <a:t>▶  </a:t>
+            </a:r>
+            <a:r>
+              <a:rPr sz="1600" b="1">
                 <a:solidFill>
                   <a:srgbClr val="F5F7FA"/>
                 </a:solidFill>
                 <a:latin typeface="Arial"/>
               </a:rPr>
-              <a:t>A persona holds one real user's needs in mind while you build - so you design for someone specific, not "everyone."</a:t>
-            </a:r>
-          </a:p>
-          <a:p>
-            <a:pPr algn="l">
-              <a:lnSpc>
-                <a:spcPct val="112000"/>
-              </a:lnSpc>
-            </a:pPr>
-            <a:r>
-              <a:rPr sz="2000" b="0">
-                <a:solidFill>
-                  <a:srgbClr val="F5F7FA"/>
-                </a:solidFill>
-                <a:latin typeface="Arial"/>
-              </a:rPr>
-              <a:t/>
-            </a:r>
-          </a:p>
-          <a:p>
-            <a:pPr algn="l">
-              <a:lnSpc>
-                <a:spcPct val="112000"/>
-              </a:lnSpc>
-            </a:pPr>
-            <a:r>
-              <a:rPr sz="1800" b="0">
-                <a:solidFill>
-                  <a:srgbClr val="8A94A6"/>
-                </a:solidFill>
-                <a:latin typeface="Arial"/>
-              </a:rPr>
-              <a:t>The risk: personas flatten people into cliches. Used well they build empathy; used badly they just launder your own assumptions.</a:t>
-            </a:r>
-          </a:p>
-        </p:txBody>
-      </p:sp>
-      <p:sp>
-        <p:nvSpPr>
-          <p:cNvPr id="6" name="TextBox 5"/>
+              <a:t>The chatbot IS your persona, now interviewable - document the prompt + transcript</a:t>
+            </a:r>
+          </a:p>
+        </p:txBody>
+      </p:sp>
+      <p:sp>
+        <p:nvSpPr>
+          <p:cNvPr id="8" name="TextBox 7"/>
           <p:cNvSpPr txBox="1"/>
           <p:nvPr/>
         </p:nvSpPr>
@@ -7660,7 +6430,7 @@
                 </a:solidFill>
                 <a:latin typeface="Courier New"/>
               </a:rPr>
-              <a:t>GET AS CLOSE TO THE PERSON AS YOU CAN</a:t>
+              <a:t>BE HONEST ABOUT THE SIMULATION</a:t>
             </a:r>
           </a:p>
         </p:txBody>
@@ -7743,7 +6513,7 @@
                 </a:solidFill>
                 <a:latin typeface="Arial"/>
               </a:rPr>
-              <a:t>Nothing beats real contact</a:t>
+              <a:t>It's an AI voiced by your own assumptions</a:t>
             </a:r>
           </a:p>
         </p:txBody>
@@ -7782,7 +6552,7 @@
                 </a:solidFill>
                 <a:latin typeface="Arial"/>
               </a:rPr>
-              <a:t>Best: talk to a real person - a short interview. Better still: co-design, where the user helps make the thing.</a:t>
+              <a:t>A persona chatbot is fast and frictionless - but it can hand your stereotypes back as if they were data, and it tends to agree with you.</a:t>
             </a:r>
           </a:p>
           <a:p>
@@ -7814,7 +6584,7 @@
                 </a:solidFill>
                 <a:latin typeface="Arial"/>
               </a:rPr>
-              <a:t>We can't fully do participatory design here - so get as close as you can, and be honest about the gap.</a:t>
+              <a:t>Treat what it says as a HYPOTHESIS, not proof. Note where it might be flattering you. (Skeptical read: NN/g - Synthetic Users.)</a:t>
             </a:r>
           </a:p>
         </p:txBody>
@@ -7918,7 +6688,7 @@
                 </a:solidFill>
                 <a:latin typeface="Courier New"/>
               </a:rPr>
-              <a:t>AI PERSONAS - THEATER OR INSIGHT?</a:t>
+              <a:t>OPERATIONALIZE - THE VALUE TREE</a:t>
             </a:r>
           </a:p>
         </p:txBody>
@@ -7975,8 +6745,8 @@
         </p:nvSpPr>
         <p:spPr>
           <a:xfrm>
-            <a:off x="640080" y="1325880"/>
-            <a:ext cx="10972800" cy="1828800"/>
+            <a:off x="640080" y="1188720"/>
+            <a:ext cx="10972800" cy="1097280"/>
           </a:xfrm>
           <a:prstGeom prst="rect">
             <a:avLst/>
@@ -7991,17 +6761,17 @@
           <a:p>
             <a:pPr algn="l">
               <a:lnSpc>
-                <a:spcPct val="105000"/>
-              </a:lnSpc>
-            </a:pPr>
-            <a:r>
-              <a:rPr sz="3800" b="1">
+                <a:spcPct val="100000"/>
+              </a:lnSpc>
+            </a:pPr>
+            <a:r>
+              <a:rPr sz="3400" b="1">
                 <a:solidFill>
                   <a:srgbClr val="F5F7FA"/>
                 </a:solidFill>
                 <a:latin typeface="Arial"/>
               </a:rPr>
-              <a:t>Make an AI persona, then hold it against a real human.</a:t>
+              <a:t>From value down to the prompts you'll build</a:t>
             </a:r>
           </a:p>
         </p:txBody>
@@ -8014,8 +6784,8 @@
         </p:nvSpPr>
         <p:spPr>
           <a:xfrm>
-            <a:off x="658368" y="3611880"/>
-            <a:ext cx="10972800" cy="1737360"/>
+            <a:off x="658368" y="2286000"/>
+            <a:ext cx="10881360" cy="3657600"/>
           </a:xfrm>
           <a:prstGeom prst="rect">
             <a:avLst/>
@@ -8030,177 +6800,97 @@
           <a:p>
             <a:pPr algn="l">
               <a:lnSpc>
-                <a:spcPct val="135000"/>
-              </a:lnSpc>
-            </a:pPr>
-            <a:r>
-              <a:rPr sz="1900" b="1">
+                <a:spcPct val="112000"/>
+              </a:lnSpc>
+            </a:pPr>
+            <a:r>
+              <a:rPr sz="2000" b="0">
+                <a:solidFill>
+                  <a:srgbClr val="F5F7FA"/>
+                </a:solidFill>
+                <a:latin typeface="Arial"/>
+              </a:rPr>
+              <a:t>Break your value down until it becomes something you can actually build:</a:t>
+            </a:r>
+          </a:p>
+          <a:p>
+            <a:pPr algn="l">
+              <a:lnSpc>
+                <a:spcPct val="112000"/>
+              </a:lnSpc>
+            </a:pPr>
+            <a:r>
+              <a:rPr sz="2000" b="0">
+                <a:solidFill>
+                  <a:srgbClr val="F5F7FA"/>
+                </a:solidFill>
+                <a:latin typeface="Arial"/>
+              </a:rPr>
+              <a:t/>
+            </a:r>
+          </a:p>
+          <a:p>
+            <a:pPr algn="l">
+              <a:lnSpc>
+                <a:spcPct val="112000"/>
+              </a:lnSpc>
+            </a:pPr>
+            <a:r>
+              <a:rPr sz="2200" b="0">
+                <a:solidFill>
+                  <a:srgbClr val="F5F7FA"/>
+                </a:solidFill>
+                <a:latin typeface="Arial"/>
+              </a:rPr>
+              <a:t>value  -&gt;  norms  -&gt;  requirements  -&gt;  features  -&gt;  </a:t>
+            </a:r>
+            <a:r>
+              <a:rPr sz="2200" b="1">
                 <a:solidFill>
                   <a:srgbClr val="00FF41"/>
                 </a:solidFill>
                 <a:latin typeface="Arial"/>
               </a:rPr>
-              <a:t>→  </a:t>
-            </a:r>
-            <a:r>
-              <a:rPr sz="1900" b="0">
+              <a:t>the prompts you run tomorrow</a:t>
+            </a:r>
+          </a:p>
+          <a:p>
+            <a:pPr algn="l">
+              <a:lnSpc>
+                <a:spcPct val="112000"/>
+              </a:lnSpc>
+            </a:pPr>
+            <a:r>
+              <a:rPr sz="2000" b="0">
+                <a:solidFill>
+                  <a:srgbClr val="F5F7FA"/>
+                </a:solidFill>
+                <a:latin typeface="Arial"/>
+              </a:rPr>
+              <a:t/>
+            </a:r>
+          </a:p>
+          <a:p>
+            <a:pPr algn="l">
+              <a:lnSpc>
+                <a:spcPct val="112000"/>
+              </a:lnSpc>
+            </a:pPr>
+            <a:r>
+              <a:rPr sz="1700" b="0">
                 <a:solidFill>
                   <a:srgbClr val="8A94A6"/>
                 </a:solidFill>
                 <a:latin typeface="Arial"/>
               </a:rPr>
-              <a:t>Generate a persona with AI - even "chat" with the simulated user.</a:t>
-            </a:r>
-          </a:p>
-          <a:p>
-            <a:pPr algn="l">
-              <a:lnSpc>
-                <a:spcPct val="135000"/>
-              </a:lnSpc>
-            </a:pPr>
-            <a:r>
-              <a:rPr sz="1900" b="1">
-                <a:solidFill>
-                  <a:srgbClr val="00FF41"/>
-                </a:solidFill>
-                <a:latin typeface="Arial"/>
-              </a:rPr>
-              <a:t>→  </a:t>
-            </a:r>
-            <a:r>
-              <a:rPr sz="1900" b="0">
-                <a:solidFill>
-                  <a:srgbClr val="8A94A6"/>
-                </a:solidFill>
-                <a:latin typeface="Arial"/>
-              </a:rPr>
-              <a:t>Compare it to the real person you interviewed: what did each get right?</a:t>
-            </a:r>
-          </a:p>
-          <a:p>
-            <a:pPr algn="l">
-              <a:lnSpc>
-                <a:spcPct val="135000"/>
-              </a:lnSpc>
-            </a:pPr>
-            <a:r>
-              <a:rPr sz="1900" b="1">
-                <a:solidFill>
-                  <a:srgbClr val="00FF41"/>
-                </a:solidFill>
-                <a:latin typeface="Arial"/>
-              </a:rPr>
-              <a:t>→  </a:t>
-            </a:r>
-            <a:r>
-              <a:rPr sz="1900" b="0">
-                <a:solidFill>
-                  <a:srgbClr val="8A94A6"/>
-                </a:solidFill>
-                <a:latin typeface="Arial"/>
-              </a:rPr>
-              <a:t>Does the AI theater help you empathize - or hand your own stereotypes back as if they were data?</a:t>
-            </a:r>
-          </a:p>
-        </p:txBody>
-      </p:sp>
-      <p:sp>
-        <p:nvSpPr>
-          <p:cNvPr id="6" name="Rounded Rectangle 5"/>
-          <p:cNvSpPr/>
-          <p:nvPr/>
-        </p:nvSpPr>
-        <p:spPr>
-          <a:xfrm>
-            <a:off x="640080" y="5532120"/>
-            <a:ext cx="10911535" cy="658368"/>
-          </a:xfrm>
-          <a:prstGeom prst="roundRect">
-            <a:avLst/>
-          </a:prstGeom>
-          <a:solidFill>
-            <a:srgbClr val="151B26"/>
-          </a:solidFill>
-          <a:ln w="19050">
-            <a:solidFill>
-              <a:srgbClr val="00FF41"/>
-            </a:solidFill>
-          </a:ln>
-          <a:effectLst/>
-        </p:spPr>
-        <p:style>
-          <a:lnRef idx="1">
-            <a:schemeClr val="accent1"/>
-          </a:lnRef>
-          <a:fillRef idx="3">
-            <a:schemeClr val="accent1"/>
-          </a:fillRef>
-          <a:effectRef idx="2">
-            <a:schemeClr val="accent1"/>
-          </a:effectRef>
-          <a:fontRef idx="minor">
-            <a:schemeClr val="lt1"/>
-          </a:fontRef>
-        </p:style>
-        <p:txBody>
-          <a:bodyPr rtlCol="0" anchor="ctr"/>
-          <a:lstStyle/>
-          <a:p>
-            <a:pPr algn="ctr"/>
-          </a:p>
-        </p:txBody>
-      </p:sp>
-      <p:sp>
-        <p:nvSpPr>
-          <p:cNvPr id="7" name="TextBox 6"/>
-          <p:cNvSpPr txBox="1"/>
-          <p:nvPr/>
-        </p:nvSpPr>
-        <p:spPr>
-          <a:xfrm>
-            <a:off x="914400" y="5532120"/>
-            <a:ext cx="10362895" cy="658368"/>
-          </a:xfrm>
-          <a:prstGeom prst="rect">
-            <a:avLst/>
-          </a:prstGeom>
-          <a:noFill/>
-        </p:spPr>
-        <p:txBody>
-          <a:bodyPr wrap="square" anchor="ctr">
-            <a:spAutoFit/>
-          </a:bodyPr>
-          <a:lstStyle/>
-          <a:p>
-            <a:pPr algn="l">
-              <a:lnSpc>
-                <a:spcPct val="100000"/>
-              </a:lnSpc>
-            </a:pPr>
-            <a:r>
-              <a:rPr sz="1600" b="1">
-                <a:solidFill>
-                  <a:srgbClr val="00FF41"/>
-                </a:solidFill>
-                <a:latin typeface="Arial"/>
-              </a:rPr>
-              <a:t>▶  </a:t>
-            </a:r>
-            <a:r>
-              <a:rPr sz="1600" b="1">
-                <a:solidFill>
-                  <a:srgbClr val="F5F7FA"/>
-                </a:solidFill>
-                <a:latin typeface="Arial"/>
-              </a:rPr>
-              <a:t>Bring BOTH into planning: the AI persona AND one real human's words</a:t>
-            </a:r>
-          </a:p>
-        </p:txBody>
-      </p:sp>
-      <p:sp>
-        <p:nvSpPr>
-          <p:cNvPr id="8" name="TextBox 7"/>
+              <a:t>The bottom of the tree IS your Thursday build plan - the exact prompts, grounded in the value.</a:t>
+            </a:r>
+          </a:p>
+        </p:txBody>
+      </p:sp>
+      <p:sp>
+        <p:nvSpPr>
+          <p:cNvPr id="6" name="TextBox 5"/>
           <p:cNvSpPr txBox="1"/>
           <p:nvPr/>
         </p:nvSpPr>
@@ -8297,7 +6987,7 @@
                 </a:solidFill>
                 <a:latin typeface="Courier New"/>
               </a:rPr>
-              <a:t>SCREENSHOT SLOT</a:t>
+              <a:t>STORYBOARD - ROUGH, THEN REFINED</a:t>
             </a:r>
           </a:p>
         </p:txBody>
@@ -8355,7 +7045,7 @@
         <p:spPr>
           <a:xfrm>
             <a:off x="640080" y="1188720"/>
-            <a:ext cx="10972800" cy="914400"/>
+            <a:ext cx="10972800" cy="1097280"/>
           </a:xfrm>
           <a:prstGeom prst="rect">
             <a:avLst/>
@@ -8374,74 +7064,27 @@
               </a:lnSpc>
             </a:pPr>
             <a:r>
-              <a:rPr sz="3000" b="1">
+              <a:rPr sz="3400" b="1">
                 <a:solidFill>
                   <a:srgbClr val="F5F7FA"/>
                 </a:solidFill>
                 <a:latin typeface="Arial"/>
               </a:rPr>
-              <a:t>AI persona vs. real interview</a:t>
-            </a:r>
-          </a:p>
-        </p:txBody>
-      </p:sp>
-      <p:sp>
-        <p:nvSpPr>
-          <p:cNvPr id="5" name="Rounded Rectangle 4"/>
-          <p:cNvSpPr/>
-          <p:nvPr/>
-        </p:nvSpPr>
-        <p:spPr>
-          <a:xfrm>
-            <a:off x="2194560" y="2331720"/>
-            <a:ext cx="7772400" cy="3566160"/>
-          </a:xfrm>
-          <a:prstGeom prst="roundRect">
-            <a:avLst/>
-          </a:prstGeom>
-          <a:solidFill>
-            <a:srgbClr val="151B26"/>
-          </a:solidFill>
-          <a:ln w="19050">
-            <a:solidFill>
-              <a:srgbClr val="00FF41"/>
-            </a:solidFill>
-            <a:prstDash val="dash"/>
-          </a:ln>
-          <a:effectLst/>
-        </p:spPr>
-        <p:style>
-          <a:lnRef idx="1">
-            <a:schemeClr val="accent1"/>
-          </a:lnRef>
-          <a:fillRef idx="3">
-            <a:schemeClr val="accent1"/>
-          </a:fillRef>
-          <a:effectRef idx="2">
-            <a:schemeClr val="accent1"/>
-          </a:effectRef>
-          <a:fontRef idx="minor">
-            <a:schemeClr val="lt1"/>
-          </a:fontRef>
-        </p:style>
-        <p:txBody>
-          <a:bodyPr rtlCol="0" anchor="ctr"/>
-          <a:lstStyle/>
-          <a:p>
-            <a:pPr algn="ctr"/>
-          </a:p>
-        </p:txBody>
-      </p:sp>
-      <p:sp>
-        <p:nvSpPr>
-          <p:cNvPr id="6" name="TextBox 5"/>
+              <a:t>Diverge to find ideas, converge to communicate one</a:t>
+            </a:r>
+          </a:p>
+        </p:txBody>
+      </p:sp>
+      <p:sp>
+        <p:nvSpPr>
+          <p:cNvPr id="5" name="TextBox 4"/>
           <p:cNvSpPr txBox="1"/>
           <p:nvPr/>
         </p:nvSpPr>
         <p:spPr>
           <a:xfrm>
-            <a:off x="2194560" y="3383280"/>
-            <a:ext cx="7772400" cy="731520"/>
+            <a:off x="658368" y="2286000"/>
+            <a:ext cx="10881360" cy="3657600"/>
           </a:xfrm>
           <a:prstGeom prst="rect">
             <a:avLst/>
@@ -8454,65 +7097,90 @@
           </a:bodyPr>
           <a:lstStyle/>
           <a:p>
-            <a:pPr algn="ctr">
-              <a:lnSpc>
-                <a:spcPct val="100000"/>
-              </a:lnSpc>
-            </a:pPr>
-            <a:r>
-              <a:rPr sz="2200" b="1">
+            <a:pPr algn="l">
+              <a:lnSpc>
+                <a:spcPct val="112000"/>
+              </a:lnSpc>
+            </a:pPr>
+            <a:r>
+              <a:rPr sz="1900" b="0">
+                <a:solidFill>
+                  <a:srgbClr val="F5F7FA"/>
+                </a:solidFill>
+                <a:latin typeface="Arial"/>
+              </a:rPr>
+              <a:t>ROUGH (each member): a quick 4-8 frame sketch of YOUR idea - the user, their problem, where your thing enters, what changes. Rough is the point; it helps you think.</a:t>
+            </a:r>
+          </a:p>
+          <a:p>
+            <a:pPr algn="l">
+              <a:lnSpc>
+                <a:spcPct val="112000"/>
+              </a:lnSpc>
+            </a:pPr>
+            <a:r>
+              <a:rPr sz="2000" b="0">
+                <a:solidFill>
+                  <a:srgbClr val="F5F7FA"/>
+                </a:solidFill>
+                <a:latin typeface="Arial"/>
+              </a:rPr>
+              <a:t/>
+            </a:r>
+          </a:p>
+          <a:p>
+            <a:pPr algn="l">
+              <a:lnSpc>
+                <a:spcPct val="112000"/>
+              </a:lnSpc>
+            </a:pPr>
+            <a:r>
+              <a:rPr sz="1900" b="1">
                 <a:solidFill>
                   <a:srgbClr val="00FF41"/>
                 </a:solidFill>
-                <a:latin typeface="Courier New"/>
-              </a:rPr>
-              <a:t>[ AI-generated persona + simulator chat, next to your real interview notes ]</a:t>
-            </a:r>
-          </a:p>
-        </p:txBody>
-      </p:sp>
-      <p:sp>
-        <p:nvSpPr>
-          <p:cNvPr id="7" name="TextBox 6"/>
-          <p:cNvSpPr txBox="1"/>
-          <p:nvPr/>
-        </p:nvSpPr>
-        <p:spPr>
-          <a:xfrm>
-            <a:off x="2194560" y="4114800"/>
-            <a:ext cx="7772400" cy="731520"/>
-          </a:xfrm>
-          <a:prstGeom prst="rect">
-            <a:avLst/>
-          </a:prstGeom>
-          <a:noFill/>
-        </p:spPr>
-        <p:txBody>
-          <a:bodyPr wrap="square" anchor="t">
-            <a:spAutoFit/>
-          </a:bodyPr>
-          <a:lstStyle/>
-          <a:p>
-            <a:pPr algn="ctr">
-              <a:lnSpc>
-                <a:spcPct val="100000"/>
-              </a:lnSpc>
-            </a:pPr>
-            <a:r>
-              <a:rPr sz="1400" b="0">
+                <a:latin typeface="Arial"/>
+              </a:rPr>
+              <a:t>REFINED (team): pick + combine the best into ONE clean storyboard that communicates the idea - your Thursday build plan + pitch skeleton.</a:t>
+            </a:r>
+          </a:p>
+          <a:p>
+            <a:pPr algn="l">
+              <a:lnSpc>
+                <a:spcPct val="112000"/>
+              </a:lnSpc>
+            </a:pPr>
+            <a:r>
+              <a:rPr sz="2000" b="0">
+                <a:solidFill>
+                  <a:srgbClr val="F5F7FA"/>
+                </a:solidFill>
+                <a:latin typeface="Arial"/>
+              </a:rPr>
+              <a:t/>
+            </a:r>
+          </a:p>
+          <a:p>
+            <a:pPr algn="l">
+              <a:lnSpc>
+                <a:spcPct val="112000"/>
+              </a:lnSpc>
+            </a:pPr>
+            <a:r>
+              <a:rPr sz="1700" b="0">
                 <a:solidFill>
                   <a:srgbClr val="8A94A6"/>
                 </a:solidFill>
                 <a:latin typeface="Arial"/>
               </a:rPr>
-              <a:t>add the two side by side - where did the AI flatten the person?  (skeptical take: NN/g - Synthetic Users)</a:t>
-            </a:r>
-          </a:p>
-        </p:txBody>
-      </p:sp>
-      <p:sp>
-        <p:nvSpPr>
-          <p:cNvPr id="8" name="TextBox 7"/>
+              <a:t>Show the value living in each frame - not just in the copy.</a:t>
+            </a:r>
+          </a:p>
+        </p:txBody>
+      </p:sp>
+      <p:sp>
+        <p:nvSpPr>
+          <p:cNvPr id="6" name="TextBox 5"/>
           <p:cNvSpPr txBox="1"/>
           <p:nvPr/>
         </p:nvSpPr>
@@ -8609,7 +7277,7 @@
                 </a:solidFill>
                 <a:latin typeface="Courier New"/>
               </a:rPr>
-              <a:t>KEEP THE VALUE IN THE FOREGROUND</a:t>
+              <a:t>TEMPLATES + TOOLS</a:t>
             </a:r>
           </a:p>
         </p:txBody>
@@ -8692,7 +7360,7 @@
                 </a:solidFill>
                 <a:latin typeface="Arial"/>
               </a:rPr>
-              <a:t>Values-conscientious planning</a:t>
+              <a:t>Your persona + storyboard are LINKS in the report</a:t>
             </a:r>
           </a:p>
         </p:txBody>
@@ -8725,13 +7393,22 @@
               </a:lnSpc>
             </a:pPr>
             <a:r>
+              <a:rPr sz="2000" b="1">
+                <a:solidFill>
+                  <a:srgbClr val="00FF41"/>
+                </a:solidFill>
+                <a:latin typeface="Arial"/>
+              </a:rPr>
+              <a:t>•  </a:t>
+            </a:r>
+            <a:r>
               <a:rPr sz="2000" b="0">
                 <a:solidFill>
                   <a:srgbClr val="F5F7FA"/>
                 </a:solidFill>
                 <a:latin typeface="Arial"/>
               </a:rPr>
-              <a:t>Put your value at the front of BOTH artifacts:</a:t>
+              <a:t>Persona: Figma 'User Persona Template Set' (community) or a Google Slides deck.</a:t>
             </a:r>
           </a:p>
           <a:p>
@@ -8741,13 +7418,22 @@
               </a:lnSpc>
             </a:pPr>
             <a:r>
+              <a:rPr sz="2000" b="1">
+                <a:solidFill>
+                  <a:srgbClr val="00FF41"/>
+                </a:solidFill>
+                <a:latin typeface="Arial"/>
+              </a:rPr>
+              <a:t>•  </a:t>
+            </a:r>
+            <a:r>
               <a:rPr sz="2000" b="0">
                 <a:solidFill>
                   <a:srgbClr val="F5F7FA"/>
                 </a:solidFill>
                 <a:latin typeface="Arial"/>
               </a:rPr>
-              <a:t/>
+              <a:t>Storyboard: Figma 'Storyboard Template' (community), Google Slides (one frame / slide), Canva, or Storyboarder.</a:t>
             </a:r>
           </a:p>
           <a:p>
@@ -8757,22 +7443,22 @@
               </a:lnSpc>
             </a:pPr>
             <a:r>
-              <a:rPr sz="1900" b="1">
+              <a:rPr sz="2000" b="1">
                 <a:solidFill>
                   <a:srgbClr val="00FF41"/>
                 </a:solidFill>
                 <a:latin typeface="Arial"/>
               </a:rPr>
-              <a:t>Persona</a:t>
-            </a:r>
-            <a:r>
-              <a:rPr sz="1900" b="0">
+              <a:t>•  </a:t>
+            </a:r>
+            <a:r>
+              <a:rPr sz="2000" b="0">
                 <a:solidFill>
                   <a:srgbClr val="F5F7FA"/>
                 </a:solidFill>
                 <a:latin typeface="Arial"/>
               </a:rPr>
-              <a:t> - where does this user MEET or LOSE the value in their day?</a:t>
+              <a:t>Persona chatbot: Claude or ChatGPT - give it rich detail, then interview it.</a:t>
             </a:r>
           </a:p>
           <a:p>
@@ -8782,22 +7468,47 @@
               </a:lnSpc>
             </a:pPr>
             <a:r>
-              <a:rPr sz="1900" b="1">
+              <a:rPr sz="2000" b="1">
                 <a:solidFill>
                   <a:srgbClr val="00FF41"/>
                 </a:solidFill>
                 <a:latin typeface="Arial"/>
               </a:rPr>
-              <a:t>Storyboard</a:t>
-            </a:r>
-            <a:r>
-              <a:rPr sz="1900" b="0">
+              <a:t>•  </a:t>
+            </a:r>
+            <a:r>
+              <a:rPr sz="2000" b="0">
                 <a:solidFill>
                   <a:srgbClr val="F5F7FA"/>
                 </a:solidFill>
                 <a:latin typeface="Arial"/>
               </a:rPr>
-              <a:t> - show the value living in each frame: the moment it's supported, defended, or repaired.</a:t>
+              <a:t>AI pitch video (Thursday): Google Veo 3.1 (Flow), Runway, Kling, or Pika. (Sora retired in 2026.)</a:t>
+            </a:r>
+          </a:p>
+          <a:p>
+            <a:pPr algn="l">
+              <a:lnSpc>
+                <a:spcPct val="112000"/>
+              </a:lnSpc>
+            </a:pPr>
+            <a:r>
+              <a:rPr sz="2000" b="1">
+                <a:solidFill>
+                  <a:srgbClr val="00FF41"/>
+                </a:solidFill>
+                <a:latin typeface="Arial"/>
+              </a:rPr>
+              <a:t>•  </a:t>
+            </a:r>
+            <a:r>
+              <a:rPr sz="2000" b="0">
+                <a:solidFill>
+                  <a:srgbClr val="F5F7FA"/>
+                </a:solidFill>
+                <a:latin typeface="Arial"/>
+              </a:rPr>
+              <a:t>Paste the Slides / Figma LINKS into planning-report.md - don't dump giant images.</a:t>
             </a:r>
           </a:p>
         </p:txBody>

--- a/slides/Week3-Wed-Working-Day.pptx
+++ b/slides/Week3-Wed-Working-Day.pptx
@@ -8,7 +8,7 @@
     <p:sldId id="256" r:id="rId7"/>
     <p:sldId id="257" r:id="rId8"/>
     <p:sldId id="258" r:id="rId9"/>
-    <p:sldId id="259" r:id="rId10"/>
+    <p:sldId id="259" r:id="rId11"/>
     <p:sldId id="260" r:id="rId12"/>
     <p:sldId id="261" r:id="rId13"/>
     <p:sldId id="262" r:id="rId14"/>
@@ -18,6 +18,13 @@
     <p:sldId id="266" r:id="rId18"/>
     <p:sldId id="267" r:id="rId19"/>
     <p:sldId id="268" r:id="rId20"/>
+    <p:sldId id="269" r:id="rId21"/>
+    <p:sldId id="270" r:id="rId22"/>
+    <p:sldId id="271" r:id="rId23"/>
+    <p:sldId id="272" r:id="rId24"/>
+    <p:sldId id="273" r:id="rId25"/>
+    <p:sldId id="274" r:id="rId26"/>
+    <p:sldId id="275" r:id="rId27"/>
   </p:sldIdLst>
   <p:sldSz cx="12191695" cy="6858000" type="screen4x3"/>
   <p:notesSz cx="6858000" cy="9144000"/>
@@ -514,7 +521,77 @@
           <a:lstStyle/>
           <a:p>
             <a:r>
-              <a:t>Persona template: figma.com/community/file/1335748909887675654/user-persona-template-set - or a Google Slides deck. A persona is a tool to EMPATHIZE, not to stereotype.</a:t>
+              <a:t>Carry-over from Tuesday's wrap - we ran out of time. Keep it to ~1 min/team, then transition to the planning mini-lecture.</a:t>
+            </a:r>
+          </a:p>
+        </p:txBody>
+      </p:sp>
+      <p:sp>
+        <p:nvSpPr>
+          <p:cNvPr id="4" name="Slide Number Placeholder 3"/>
+          <p:cNvSpPr>
+            <a:spLocks noGrp="1"/>
+          </p:cNvSpPr>
+          <p:nvPr>
+            <p:ph type="sldNum" idx="5" sz="quarter"/>
+          </p:nvPr>
+        </p:nvSpPr>
+        <p:spPr/>
+      </p:sp>
+    </p:spTree>
+  </p:cSld>
+  <p:clrMapOvr>
+    <a:masterClrMapping/>
+  </p:clrMapOvr>
+</p:notes>
+</file>
+
+<file path=ppt/notesSlides/notesSlide10.xml><?xml version="1.0" encoding="utf-8"?>
+<p:notes xmlns:a="http://schemas.openxmlformats.org/drawingml/2006/main" xmlns:p="http://schemas.openxmlformats.org/presentationml/2006/main" xmlns:r="http://schemas.openxmlformats.org/officeDocument/2006/relationships">
+  <p:cSld>
+    <p:spTree>
+      <p:nvGrpSpPr>
+        <p:cNvPr id="1" name=""/>
+        <p:cNvGrpSpPr/>
+        <p:nvPr/>
+      </p:nvGrpSpPr>
+      <p:grpSpPr>
+        <a:xfrm>
+          <a:off x="0" y="0"/>
+          <a:ext cx="0" cy="0"/>
+          <a:chOff x="0" y="0"/>
+          <a:chExt cx="0" cy="0"/>
+        </a:xfrm>
+      </p:grpSpPr>
+      <p:sp>
+        <p:nvSpPr>
+          <p:cNvPr id="2" name="Slide Image Placeholder 1"/>
+          <p:cNvSpPr>
+            <a:spLocks noGrp="1"/>
+          </p:cNvSpPr>
+          <p:nvPr>
+            <p:ph type="sldImg" idx="2"/>
+          </p:nvPr>
+        </p:nvSpPr>
+        <p:spPr/>
+      </p:sp>
+      <p:sp>
+        <p:nvSpPr>
+          <p:cNvPr id="3" name="Notes Placeholder 2"/>
+          <p:cNvSpPr>
+            <a:spLocks noGrp="1"/>
+          </p:cNvSpPr>
+          <p:nvPr>
+            <p:ph type="body" idx="3" sz="quarter"/>
+          </p:nvPr>
+        </p:nvSpPr>
+        <p:spPr/>
+        <p:txBody>
+          <a:bodyPr/>
+          <a:lstStyle/>
+          <a:p>
+            <a:r>
+              <a:t>Phaser 4 (2026), Kaplay/Kaboom, Three.js (WebGPU 2026) are web-native + easy. Godot/Unity web export + native toolchains need more setup - NOT recommended for the final's time budget.</a:t>
             </a:r>
           </a:p>
         </p:txBody>
@@ -584,7 +661,7 @@
           <a:lstStyle/>
           <a:p>
             <a:r>
-              <a:t>Claude / ChatGPT. The persona chatbot embodies the chosen user persona. Document the exact setup prompt + the interview transcript in the planning report.</a:t>
+              <a:t>Add your own images. The traditional methods are slower but grounded in real contact - name that honestly before showing the AI shortcuts.</a:t>
             </a:r>
           </a:p>
         </p:txBody>
@@ -654,7 +731,7 @@
           <a:lstStyle/>
           <a:p>
             <a:r>
-              <a:t>nngroup.com/articles/synthetic-users/ - synthetic users can launder assumptions. Being honest about the gap is the point.</a:t>
+              <a:t>Persona template: figma.com/community/file/1335748909887675654/user-persona-template-set. Add your screenshot. A persona is a tool to EMPATHIZE, not to stereotype.</a:t>
             </a:r>
           </a:p>
         </p:txBody>
@@ -724,7 +801,7 @@
           <a:lstStyle/>
           <a:p>
             <a:r>
-              <a:t>One ROUGH storyboard per member (diverge/ideate), then one REFINED team storyboard (converge/communicate). AI storyboarding: Sandhaus, Gu, Parreira &amp; Ju 2025 'Co-Designing with Transformers' (DIS '25). Template: figma.com/community/file/853170162772539008/storyboard-template</a:t>
+              <a:t>The chatbot embodies the chosen persona - now interviewable. Ask about its problem, not your idea. Document the prompt + transcript as elicitation evidence.</a:t>
             </a:r>
           </a:p>
         </p:txBody>
@@ -794,7 +871,287 @@
           <a:lstStyle/>
           <a:p>
             <a:r>
+              <a:t>nngroup.com/articles/synthetic-users/ - synthetic users can launder assumptions. Being honest about the gap is the point.</a:t>
+            </a:r>
+          </a:p>
+        </p:txBody>
+      </p:sp>
+      <p:sp>
+        <p:nvSpPr>
+          <p:cNvPr id="4" name="Slide Number Placeholder 3"/>
+          <p:cNvSpPr>
+            <a:spLocks noGrp="1"/>
+          </p:cNvSpPr>
+          <p:nvPr>
+            <p:ph type="sldNum" idx="5" sz="quarter"/>
+          </p:nvPr>
+        </p:nvSpPr>
+        <p:spPr/>
+      </p:sp>
+    </p:spTree>
+  </p:cSld>
+  <p:clrMapOvr>
+    <a:masterClrMapping/>
+  </p:clrMapOvr>
+</p:notes>
+</file>
+
+<file path=ppt/notesSlides/notesSlide6.xml><?xml version="1.0" encoding="utf-8"?>
+<p:notes xmlns:a="http://schemas.openxmlformats.org/drawingml/2006/main" xmlns:p="http://schemas.openxmlformats.org/presentationml/2006/main" xmlns:r="http://schemas.openxmlformats.org/officeDocument/2006/relationships">
+  <p:cSld>
+    <p:spTree>
+      <p:nvGrpSpPr>
+        <p:cNvPr id="1" name=""/>
+        <p:cNvGrpSpPr/>
+        <p:nvPr/>
+      </p:nvGrpSpPr>
+      <p:grpSpPr>
+        <a:xfrm>
+          <a:off x="0" y="0"/>
+          <a:ext cx="0" cy="0"/>
+          <a:chOff x="0" y="0"/>
+          <a:chExt cx="0" cy="0"/>
+        </a:xfrm>
+      </p:grpSpPr>
+      <p:sp>
+        <p:nvSpPr>
+          <p:cNvPr id="2" name="Slide Image Placeholder 1"/>
+          <p:cNvSpPr>
+            <a:spLocks noGrp="1"/>
+          </p:cNvSpPr>
+          <p:nvPr>
+            <p:ph type="sldImg" idx="2"/>
+          </p:nvPr>
+        </p:nvSpPr>
+        <p:spPr/>
+      </p:sp>
+      <p:sp>
+        <p:nvSpPr>
+          <p:cNvPr id="3" name="Notes Placeholder 2"/>
+          <p:cNvSpPr>
+            <a:spLocks noGrp="1"/>
+          </p:cNvSpPr>
+          <p:nvPr>
+            <p:ph type="body" idx="3" sz="quarter"/>
+          </p:nvPr>
+        </p:nvSpPr>
+        <p:spPr/>
+        <p:txBody>
+          <a:bodyPr/>
+          <a:lstStyle/>
+          <a:p>
+            <a:r>
+              <a:t>One rough storyboard per member, then one refined team storyboard. Show the value living in each frame. AI storyboarding: Sandhaus, Gu, Parreira &amp; Ju 2025 (DIS '25). Template: figma.com/community/file/853170162772539008/storyboard-template</a:t>
+            </a:r>
+          </a:p>
+        </p:txBody>
+      </p:sp>
+      <p:sp>
+        <p:nvSpPr>
+          <p:cNvPr id="4" name="Slide Number Placeholder 3"/>
+          <p:cNvSpPr>
+            <a:spLocks noGrp="1"/>
+          </p:cNvSpPr>
+          <p:nvPr>
+            <p:ph type="sldNum" idx="5" sz="quarter"/>
+          </p:nvPr>
+        </p:nvSpPr>
+        <p:spPr/>
+      </p:sp>
+    </p:spTree>
+  </p:cSld>
+  <p:clrMapOvr>
+    <a:masterClrMapping/>
+  </p:clrMapOvr>
+</p:notes>
+</file>
+
+<file path=ppt/notesSlides/notesSlide7.xml><?xml version="1.0" encoding="utf-8"?>
+<p:notes xmlns:a="http://schemas.openxmlformats.org/drawingml/2006/main" xmlns:p="http://schemas.openxmlformats.org/presentationml/2006/main" xmlns:r="http://schemas.openxmlformats.org/officeDocument/2006/relationships">
+  <p:cSld>
+    <p:spTree>
+      <p:nvGrpSpPr>
+        <p:cNvPr id="1" name=""/>
+        <p:cNvGrpSpPr/>
+        <p:nvPr/>
+      </p:nvGrpSpPr>
+      <p:grpSpPr>
+        <a:xfrm>
+          <a:off x="0" y="0"/>
+          <a:ext cx="0" cy="0"/>
+          <a:chOff x="0" y="0"/>
+          <a:chExt cx="0" cy="0"/>
+        </a:xfrm>
+      </p:grpSpPr>
+      <p:sp>
+        <p:nvSpPr>
+          <p:cNvPr id="2" name="Slide Image Placeholder 1"/>
+          <p:cNvSpPr>
+            <a:spLocks noGrp="1"/>
+          </p:cNvSpPr>
+          <p:nvPr>
+            <p:ph type="sldImg" idx="2"/>
+          </p:nvPr>
+        </p:nvSpPr>
+        <p:spPr/>
+      </p:sp>
+      <p:sp>
+        <p:nvSpPr>
+          <p:cNvPr id="3" name="Notes Placeholder 2"/>
+          <p:cNvSpPr>
+            <a:spLocks noGrp="1"/>
+          </p:cNvSpPr>
+          <p:nvPr>
+            <p:ph type="body" idx="3" sz="quarter"/>
+          </p:nvPr>
+        </p:nvSpPr>
+        <p:spPr/>
+        <p:txBody>
+          <a:bodyPr/>
+          <a:lstStyle/>
+          <a:p>
+            <a:r>
               <a:t>Persona template: figma.com/community/file/1335748909887675654/user-persona-template-set. Storyboard template: figma.com/community/file/853170162772539008/storyboard-template. Sora discontinued 2026-04-26.</a:t>
+            </a:r>
+          </a:p>
+        </p:txBody>
+      </p:sp>
+      <p:sp>
+        <p:nvSpPr>
+          <p:cNvPr id="4" name="Slide Number Placeholder 3"/>
+          <p:cNvSpPr>
+            <a:spLocks noGrp="1"/>
+          </p:cNvSpPr>
+          <p:nvPr>
+            <p:ph type="sldNum" idx="5" sz="quarter"/>
+          </p:nvPr>
+        </p:nvSpPr>
+        <p:spPr/>
+      </p:sp>
+    </p:spTree>
+  </p:cSld>
+  <p:clrMapOvr>
+    <a:masterClrMapping/>
+  </p:clrMapOvr>
+</p:notes>
+</file>
+
+<file path=ppt/notesSlides/notesSlide8.xml><?xml version="1.0" encoding="utf-8"?>
+<p:notes xmlns:a="http://schemas.openxmlformats.org/drawingml/2006/main" xmlns:p="http://schemas.openxmlformats.org/presentationml/2006/main" xmlns:r="http://schemas.openxmlformats.org/officeDocument/2006/relationships">
+  <p:cSld>
+    <p:spTree>
+      <p:nvGrpSpPr>
+        <p:cNvPr id="1" name=""/>
+        <p:cNvGrpSpPr/>
+        <p:nvPr/>
+      </p:nvGrpSpPr>
+      <p:grpSpPr>
+        <a:xfrm>
+          <a:off x="0" y="0"/>
+          <a:ext cx="0" cy="0"/>
+          <a:chOff x="0" y="0"/>
+          <a:chExt cx="0" cy="0"/>
+        </a:xfrm>
+      </p:grpSpPr>
+      <p:sp>
+        <p:nvSpPr>
+          <p:cNvPr id="2" name="Slide Image Placeholder 1"/>
+          <p:cNvSpPr>
+            <a:spLocks noGrp="1"/>
+          </p:cNvSpPr>
+          <p:nvPr>
+            <p:ph type="sldImg" idx="2"/>
+          </p:nvPr>
+        </p:nvSpPr>
+        <p:spPr/>
+      </p:sp>
+      <p:sp>
+        <p:nvSpPr>
+          <p:cNvPr id="3" name="Notes Placeholder 2"/>
+          <p:cNvSpPr>
+            <a:spLocks noGrp="1"/>
+          </p:cNvSpPr>
+          <p:nvPr>
+            <p:ph type="body" idx="3" sz="quarter"/>
+          </p:nvPr>
+        </p:nvSpPr>
+        <p:spPr/>
+        <p:txBody>
+          <a:bodyPr/>
+          <a:lstStyle/>
+          <a:p>
+            <a:r>
+              <a:t>PWA is the easy default. Capacitor (Ionic) wraps web into native mobile. Electron/Tauri for desktop - Tauri ~3MB vs Electron ~85MB (2026). Heonjun likely used a web-&gt;native wrapper like Capacitor/Ionic.</a:t>
+            </a:r>
+          </a:p>
+        </p:txBody>
+      </p:sp>
+      <p:sp>
+        <p:nvSpPr>
+          <p:cNvPr id="4" name="Slide Number Placeholder 3"/>
+          <p:cNvSpPr>
+            <a:spLocks noGrp="1"/>
+          </p:cNvSpPr>
+          <p:nvPr>
+            <p:ph type="sldNum" idx="5" sz="quarter"/>
+          </p:nvPr>
+        </p:nvSpPr>
+        <p:spPr/>
+      </p:sp>
+    </p:spTree>
+  </p:cSld>
+  <p:clrMapOvr>
+    <a:masterClrMapping/>
+  </p:clrMapOvr>
+</p:notes>
+</file>
+
+<file path=ppt/notesSlides/notesSlide9.xml><?xml version="1.0" encoding="utf-8"?>
+<p:notes xmlns:a="http://schemas.openxmlformats.org/drawingml/2006/main" xmlns:p="http://schemas.openxmlformats.org/presentationml/2006/main" xmlns:r="http://schemas.openxmlformats.org/officeDocument/2006/relationships">
+  <p:cSld>
+    <p:spTree>
+      <p:nvGrpSpPr>
+        <p:cNvPr id="1" name=""/>
+        <p:cNvGrpSpPr/>
+        <p:nvPr/>
+      </p:nvGrpSpPr>
+      <p:grpSpPr>
+        <a:xfrm>
+          <a:off x="0" y="0"/>
+          <a:ext cx="0" cy="0"/>
+          <a:chOff x="0" y="0"/>
+          <a:chExt cx="0" cy="0"/>
+        </a:xfrm>
+      </p:grpSpPr>
+      <p:sp>
+        <p:nvSpPr>
+          <p:cNvPr id="2" name="Slide Image Placeholder 1"/>
+          <p:cNvSpPr>
+            <a:spLocks noGrp="1"/>
+          </p:cNvSpPr>
+          <p:nvPr>
+            <p:ph type="sldImg" idx="2"/>
+          </p:nvPr>
+        </p:nvSpPr>
+        <p:spPr/>
+      </p:sp>
+      <p:sp>
+        <p:nvSpPr>
+          <p:cNvPr id="3" name="Notes Placeholder 2"/>
+          <p:cNvSpPr>
+            <a:spLocks noGrp="1"/>
+          </p:cNvSpPr>
+          <p:nvPr>
+            <p:ph type="body" idx="3" sz="quarter"/>
+          </p:nvPr>
+        </p:nvSpPr>
+        <p:spPr/>
+        <p:txBody>
+          <a:bodyPr/>
+          <a:lstStyle/>
+          <a:p>
+            <a:r>
+              <a:t>AI app builders (2026): Google AI Studio native Android; CatDoes/Nativly native iOS+Android; Lovable/Bolt/Replit/v0 web (then wrap); Expo/Rork/a0.dev React Native.</a:t>
             </a:r>
           </a:p>
         </p:txBody>
@@ -4029,7 +4386,7 @@
                 </a:solidFill>
                 <a:latin typeface="Courier New"/>
               </a:rPr>
-              <a:t>SCREENSHOT SLOT</a:t>
+              <a:t>STORYBOARD - WITH AI</a:t>
             </a:r>
           </a:p>
         </p:txBody>
@@ -4112,7 +4469,7 @@
                 </a:solidFill>
                 <a:latin typeface="Arial"/>
               </a:rPr>
-              <a:t>Persona + storyboard example</a:t>
+              <a:t>Sketch or fill frames fast - keep YOUR story</a:t>
             </a:r>
           </a:p>
         </p:txBody>
@@ -4198,7 +4555,7 @@
                 </a:solidFill>
                 <a:latin typeface="Courier New"/>
               </a:rPr>
-              <a:t>[ persona card + chatbot interview, next to the refined storyboard ]</a:t>
+              <a:t>[ your screenshot: an AI-assisted storyboard ]</a:t>
             </a:r>
           </a:p>
         </p:txBody>
@@ -4237,7 +4594,7 @@
                 </a:solidFill>
                 <a:latin typeface="Arial"/>
               </a:rPr>
-              <a:t>show a filled persona, the AI interview transcript, and the team's refined storyboard</a:t>
+              <a:t>ROUGH per member (diverge to find ideas) -&gt; ONE REFINED team storyboard (converge to communicate). AI is a co-designer, not the author.</a:t>
             </a:r>
           </a:p>
         </p:txBody>
@@ -4341,7 +4698,7 @@
                 </a:solidFill>
                 <a:latin typeface="Courier New"/>
               </a:rPr>
-              <a:t>ACTIVITY - TODAY (TEAM)</a:t>
+              <a:t>OPERATIONALIZE - THE VALUE TREE</a:t>
             </a:r>
           </a:p>
         </p:txBody>
@@ -4398,8 +4755,8 @@
         </p:nvSpPr>
         <p:spPr>
           <a:xfrm>
-            <a:off x="640080" y="1325880"/>
-            <a:ext cx="10972800" cy="1828800"/>
+            <a:off x="640080" y="1188720"/>
+            <a:ext cx="10972800" cy="1097280"/>
           </a:xfrm>
           <a:prstGeom prst="rect">
             <a:avLst/>
@@ -4414,17 +4771,17 @@
           <a:p>
             <a:pPr algn="l">
               <a:lnSpc>
-                <a:spcPct val="105000"/>
-              </a:lnSpc>
-            </a:pPr>
-            <a:r>
-              <a:rPr sz="3800" b="1">
+                <a:spcPct val="100000"/>
+              </a:lnSpc>
+            </a:pPr>
+            <a:r>
+              <a:rPr sz="3400" b="1">
                 <a:solidFill>
                   <a:srgbClr val="F5F7FA"/>
                 </a:solidFill>
                 <a:latin typeface="Arial"/>
               </a:rPr>
-              <a:t>Plan the next iteration of your value.</a:t>
+              <a:t>From value down to the prompts you'll build</a:t>
             </a:r>
           </a:p>
         </p:txBody>
@@ -4437,8 +4794,8 @@
         </p:nvSpPr>
         <p:spPr>
           <a:xfrm>
-            <a:off x="658368" y="3611880"/>
-            <a:ext cx="10972800" cy="1737360"/>
+            <a:off x="658368" y="2286000"/>
+            <a:ext cx="10881360" cy="3657600"/>
           </a:xfrm>
           <a:prstGeom prst="rect">
             <a:avLst/>
@@ -4453,177 +4810,97 @@
           <a:p>
             <a:pPr algn="l">
               <a:lnSpc>
-                <a:spcPct val="135000"/>
-              </a:lnSpc>
-            </a:pPr>
-            <a:r>
-              <a:rPr sz="1900" b="1">
+                <a:spcPct val="112000"/>
+              </a:lnSpc>
+            </a:pPr>
+            <a:r>
+              <a:rPr sz="2000" b="0">
+                <a:solidFill>
+                  <a:srgbClr val="F5F7FA"/>
+                </a:solidFill>
+                <a:latin typeface="Arial"/>
+              </a:rPr>
+              <a:t>Break your value down until it becomes something you can actually build:</a:t>
+            </a:r>
+          </a:p>
+          <a:p>
+            <a:pPr algn="l">
+              <a:lnSpc>
+                <a:spcPct val="112000"/>
+              </a:lnSpc>
+            </a:pPr>
+            <a:r>
+              <a:rPr sz="2000" b="0">
+                <a:solidFill>
+                  <a:srgbClr val="F5F7FA"/>
+                </a:solidFill>
+                <a:latin typeface="Arial"/>
+              </a:rPr>
+              <a:t/>
+            </a:r>
+          </a:p>
+          <a:p>
+            <a:pPr algn="l">
+              <a:lnSpc>
+                <a:spcPct val="112000"/>
+              </a:lnSpc>
+            </a:pPr>
+            <a:r>
+              <a:rPr sz="2200" b="0">
+                <a:solidFill>
+                  <a:srgbClr val="F5F7FA"/>
+                </a:solidFill>
+                <a:latin typeface="Arial"/>
+              </a:rPr>
+              <a:t>value  -&gt;  norms  -&gt;  requirements  -&gt;  features  -&gt;  </a:t>
+            </a:r>
+            <a:r>
+              <a:rPr sz="2200" b="1">
                 <a:solidFill>
                   <a:srgbClr val="00FF41"/>
                 </a:solidFill>
                 <a:latin typeface="Arial"/>
               </a:rPr>
-              <a:t>→  </a:t>
-            </a:r>
-            <a:r>
-              <a:rPr sz="1900" b="0">
+              <a:t>the prompts you run tomorrow</a:t>
+            </a:r>
+          </a:p>
+          <a:p>
+            <a:pPr algn="l">
+              <a:lnSpc>
+                <a:spcPct val="112000"/>
+              </a:lnSpc>
+            </a:pPr>
+            <a:r>
+              <a:rPr sz="2000" b="0">
+                <a:solidFill>
+                  <a:srgbClr val="F5F7FA"/>
+                </a:solidFill>
+                <a:latin typeface="Arial"/>
+              </a:rPr>
+              <a:t/>
+            </a:r>
+          </a:p>
+          <a:p>
+            <a:pPr algn="l">
+              <a:lnSpc>
+                <a:spcPct val="112000"/>
+              </a:lnSpc>
+            </a:pPr>
+            <a:r>
+              <a:rPr sz="1700" b="0">
                 <a:solidFill>
                   <a:srgbClr val="8A94A6"/>
                 </a:solidFill>
                 <a:latin typeface="Arial"/>
               </a:rPr>
-              <a:t>Build a PERSONA -&gt; interview it as an AI CHATBOT (paste the prompt + conversation).</a:t>
-            </a:r>
-          </a:p>
-          <a:p>
-            <a:pPr algn="l">
-              <a:lnSpc>
-                <a:spcPct val="135000"/>
-              </a:lnSpc>
-            </a:pPr>
-            <a:r>
-              <a:rPr sz="1900" b="1">
-                <a:solidFill>
-                  <a:srgbClr val="00FF41"/>
-                </a:solidFill>
-                <a:latin typeface="Arial"/>
-              </a:rPr>
-              <a:t>→  </a:t>
-            </a:r>
-            <a:r>
-              <a:rPr sz="1900" b="0">
-                <a:solidFill>
-                  <a:srgbClr val="8A94A6"/>
-                </a:solidFill>
-                <a:latin typeface="Arial"/>
-              </a:rPr>
-              <a:t>Operationalize the value, then ROUGH storyboard each -&gt; ONE REFINED team storyboard.</a:t>
-            </a:r>
-          </a:p>
-          <a:p>
-            <a:pPr algn="l">
-              <a:lnSpc>
-                <a:spcPct val="135000"/>
-              </a:lnSpc>
-            </a:pPr>
-            <a:r>
-              <a:rPr sz="1900" b="1">
-                <a:solidFill>
-                  <a:srgbClr val="00FF41"/>
-                </a:solidFill>
-                <a:latin typeface="Arial"/>
-              </a:rPr>
-              <a:t>→  </a:t>
-            </a:r>
-            <a:r>
-              <a:rPr sz="1900" b="0">
-                <a:solidFill>
-                  <a:srgbClr val="8A94A6"/>
-                </a:solidFill>
-                <a:latin typeface="Arial"/>
-              </a:rPr>
-              <a:t>Scope the smallest real thing. Link persona + storyboard from the report.</a:t>
-            </a:r>
-          </a:p>
-        </p:txBody>
-      </p:sp>
-      <p:sp>
-        <p:nvSpPr>
-          <p:cNvPr id="6" name="Rounded Rectangle 5"/>
-          <p:cNvSpPr/>
-          <p:nvPr/>
-        </p:nvSpPr>
-        <p:spPr>
-          <a:xfrm>
-            <a:off x="640080" y="5532120"/>
-            <a:ext cx="10911535" cy="658368"/>
-          </a:xfrm>
-          <a:prstGeom prst="roundRect">
-            <a:avLst/>
-          </a:prstGeom>
-          <a:solidFill>
-            <a:srgbClr val="151B26"/>
-          </a:solidFill>
-          <a:ln w="19050">
-            <a:solidFill>
-              <a:srgbClr val="00FF41"/>
-            </a:solidFill>
-          </a:ln>
-          <a:effectLst/>
-        </p:spPr>
-        <p:style>
-          <a:lnRef idx="1">
-            <a:schemeClr val="accent1"/>
-          </a:lnRef>
-          <a:fillRef idx="3">
-            <a:schemeClr val="accent1"/>
-          </a:fillRef>
-          <a:effectRef idx="2">
-            <a:schemeClr val="accent1"/>
-          </a:effectRef>
-          <a:fontRef idx="minor">
-            <a:schemeClr val="lt1"/>
-          </a:fontRef>
-        </p:style>
-        <p:txBody>
-          <a:bodyPr rtlCol="0" anchor="ctr"/>
-          <a:lstStyle/>
-          <a:p>
-            <a:pPr algn="ctr"/>
-          </a:p>
-        </p:txBody>
-      </p:sp>
-      <p:sp>
-        <p:nvSpPr>
-          <p:cNvPr id="7" name="TextBox 6"/>
-          <p:cNvSpPr txBox="1"/>
-          <p:nvPr/>
-        </p:nvSpPr>
-        <p:spPr>
-          <a:xfrm>
-            <a:off x="914400" y="5532120"/>
-            <a:ext cx="10362895" cy="658368"/>
-          </a:xfrm>
-          <a:prstGeom prst="rect">
-            <a:avLst/>
-          </a:prstGeom>
-          <a:noFill/>
-        </p:spPr>
-        <p:txBody>
-          <a:bodyPr wrap="square" anchor="ctr">
-            <a:spAutoFit/>
-          </a:bodyPr>
-          <a:lstStyle/>
-          <a:p>
-            <a:pPr algn="l">
-              <a:lnSpc>
-                <a:spcPct val="100000"/>
-              </a:lnSpc>
-            </a:pPr>
-            <a:r>
-              <a:rPr sz="1600" b="1">
-                <a:solidFill>
-                  <a:srgbClr val="00FF41"/>
-                </a:solidFill>
-                <a:latin typeface="Arial"/>
-              </a:rPr>
-              <a:t>▶  </a:t>
-            </a:r>
-            <a:r>
-              <a:rPr sz="1600" b="1">
-                <a:solidFill>
-                  <a:srgbClr val="F5F7FA"/>
-                </a:solidFill>
-                <a:latin typeface="Arial"/>
-              </a:rPr>
-              <a:t>Deliverable = planning-report.md - Checkpoint 2  (persona · interview · storyboards · scope)</a:t>
-            </a:r>
-          </a:p>
-        </p:txBody>
-      </p:sp>
-      <p:sp>
-        <p:nvSpPr>
-          <p:cNvPr id="8" name="TextBox 7"/>
+              <a:t>The bottom of the tree IS your Thursday build plan - the exact prompts, grounded in the value.</a:t>
+            </a:r>
+          </a:p>
+        </p:txBody>
+      </p:sp>
+      <p:sp>
+        <p:nvSpPr>
+          <p:cNvPr id="6" name="TextBox 5"/>
           <p:cNvSpPr txBox="1"/>
           <p:nvPr/>
         </p:nvSpPr>
@@ -4720,7 +4997,7 @@
                 </a:solidFill>
                 <a:latin typeface="Courier New"/>
               </a:rPr>
-              <a:t>LAST 30 MINUTES - START VIBE CODING</a:t>
+              <a:t>TEMPLATES + TOOLS</a:t>
             </a:r>
           </a:p>
         </p:txBody>
@@ -4803,7 +5080,7 @@
                 </a:solidFill>
                 <a:latin typeface="Arial"/>
               </a:rPr>
-              <a:t>Don't wait for Thursday to open the repo</a:t>
+              <a:t>Your persona + storyboard are LINKS in the report</a:t>
             </a:r>
           </a:p>
         </p:txBody>
@@ -4836,13 +5113,22 @@
               </a:lnSpc>
             </a:pPr>
             <a:r>
-              <a:rPr sz="2100" b="0">
+              <a:rPr sz="2000" b="1">
+                <a:solidFill>
+                  <a:srgbClr val="00FF41"/>
+                </a:solidFill>
+                <a:latin typeface="Arial"/>
+              </a:rPr>
+              <a:t>•  </a:t>
+            </a:r>
+            <a:r>
+              <a:rPr sz="2000" b="0">
                 <a:solidFill>
                   <a:srgbClr val="F5F7FA"/>
                 </a:solidFill>
                 <a:latin typeface="Arial"/>
               </a:rPr>
-              <a:t>Once the plan is locked, spend the final half hour getting a head start:</a:t>
+              <a:t>Persona: Figma 'User Persona Template Set' (community) or a Google Slides deck.</a:t>
             </a:r>
           </a:p>
           <a:p>
@@ -4852,13 +5138,22 @@
               </a:lnSpc>
             </a:pPr>
             <a:r>
+              <a:rPr sz="2000" b="1">
+                <a:solidFill>
+                  <a:srgbClr val="00FF41"/>
+                </a:solidFill>
+                <a:latin typeface="Arial"/>
+              </a:rPr>
+              <a:t>•  </a:t>
+            </a:r>
+            <a:r>
               <a:rPr sz="2000" b="0">
                 <a:solidFill>
                   <a:srgbClr val="F5F7FA"/>
                 </a:solidFill>
                 <a:latin typeface="Arial"/>
               </a:rPr>
-              <a:t/>
+              <a:t>Storyboard: Figma 'Storyboard Template' (community), Google Slides (one frame / slide), Canva, or Storyboarder.</a:t>
             </a:r>
           </a:p>
           <a:p>
@@ -4868,13 +5163,22 @@
               </a:lnSpc>
             </a:pPr>
             <a:r>
-              <a:rPr sz="1900" b="1">
+              <a:rPr sz="2000" b="1">
                 <a:solidFill>
                   <a:srgbClr val="00FF41"/>
                 </a:solidFill>
                 <a:latin typeface="Arial"/>
               </a:rPr>
-              <a:t>Open your team repo, run the FIRST prompt from your value tree, and get anything at all on screen.</a:t>
+              <a:t>•  </a:t>
+            </a:r>
+            <a:r>
+              <a:rPr sz="2000" b="0">
+                <a:solidFill>
+                  <a:srgbClr val="F5F7FA"/>
+                </a:solidFill>
+                <a:latin typeface="Arial"/>
+              </a:rPr>
+              <a:t>Persona chatbot: Claude or ChatGPT - give it rich detail, then interview it.</a:t>
             </a:r>
           </a:p>
           <a:p>
@@ -4884,13 +5188,22 @@
               </a:lnSpc>
             </a:pPr>
             <a:r>
+              <a:rPr sz="2000" b="1">
+                <a:solidFill>
+                  <a:srgbClr val="00FF41"/>
+                </a:solidFill>
+                <a:latin typeface="Arial"/>
+              </a:rPr>
+              <a:t>•  </a:t>
+            </a:r>
+            <a:r>
               <a:rPr sz="2000" b="0">
                 <a:solidFill>
                   <a:srgbClr val="F5F7FA"/>
                 </a:solidFill>
                 <a:latin typeface="Arial"/>
               </a:rPr>
-              <a:t/>
+              <a:t>AI pitch video (Thursday): Google Veo 3.1 (Flow), Runway, Kling, or Pika. (Sora retired in 2026.)</a:t>
             </a:r>
           </a:p>
           <a:p>
@@ -4900,13 +5213,22 @@
               </a:lnSpc>
             </a:pPr>
             <a:r>
-              <a:rPr sz="1700" b="0">
-                <a:solidFill>
-                  <a:srgbClr val="8A94A6"/>
+              <a:rPr sz="2000" b="1">
+                <a:solidFill>
+                  <a:srgbClr val="00FF41"/>
                 </a:solidFill>
                 <a:latin typeface="Arial"/>
               </a:rPr>
-              <a:t>Thursday has no lecture - it's all build - so every minute you start now is a minute you keep tomorrow.</a:t>
+              <a:t>•  </a:t>
+            </a:r>
+            <a:r>
+              <a:rPr sz="2000" b="0">
+                <a:solidFill>
+                  <a:srgbClr val="F5F7FA"/>
+                </a:solidFill>
+                <a:latin typeface="Arial"/>
+              </a:rPr>
+              <a:t>Paste the Slides / Figma LINKS into planning-report.md - don't dump giant images.</a:t>
             </a:r>
           </a:p>
         </p:txBody>
@@ -5010,7 +5332,7 @@
                 </a:solidFill>
                 <a:latin typeface="Courier New"/>
               </a:rPr>
-              <a:t>CARRY IT TO THURSDAY</a:t>
+              <a:t>ACTIVITY - TODAY (TEAM)</a:t>
             </a:r>
           </a:p>
         </p:txBody>
@@ -5067,8 +5389,8 @@
         </p:nvSpPr>
         <p:spPr>
           <a:xfrm>
-            <a:off x="640080" y="1188720"/>
-            <a:ext cx="10972800" cy="1097280"/>
+            <a:off x="640080" y="1325880"/>
+            <a:ext cx="10972800" cy="1828800"/>
           </a:xfrm>
           <a:prstGeom prst="rect">
             <a:avLst/>
@@ -5083,17 +5405,17 @@
           <a:p>
             <a:pPr algn="l">
               <a:lnSpc>
-                <a:spcPct val="100000"/>
-              </a:lnSpc>
-            </a:pPr>
-            <a:r>
-              <a:rPr sz="3400" b="1">
+                <a:spcPct val="105000"/>
+              </a:lnSpc>
+            </a:pPr>
+            <a:r>
+              <a:rPr sz="3800" b="1">
                 <a:solidFill>
                   <a:srgbClr val="F5F7FA"/>
                 </a:solidFill>
                 <a:latin typeface="Arial"/>
               </a:rPr>
-              <a:t>Your plan is your build</a:t>
+              <a:t>Plan the next iteration of your value.</a:t>
             </a:r>
           </a:p>
         </p:txBody>
@@ -5106,8 +5428,8 @@
         </p:nvSpPr>
         <p:spPr>
           <a:xfrm>
-            <a:off x="658368" y="2286000"/>
-            <a:ext cx="10881360" cy="3657600"/>
+            <a:off x="658368" y="3611880"/>
+            <a:ext cx="10972800" cy="1737360"/>
           </a:xfrm>
           <a:prstGeom prst="rect">
             <a:avLst/>
@@ -5122,17 +5444,2744 @@
           <a:p>
             <a:pPr algn="l">
               <a:lnSpc>
+                <a:spcPct val="135000"/>
+              </a:lnSpc>
+            </a:pPr>
+            <a:r>
+              <a:rPr sz="1900" b="1">
+                <a:solidFill>
+                  <a:srgbClr val="00FF41"/>
+                </a:solidFill>
+                <a:latin typeface="Arial"/>
+              </a:rPr>
+              <a:t>→  </a:t>
+            </a:r>
+            <a:r>
+              <a:rPr sz="1900" b="0">
+                <a:solidFill>
+                  <a:srgbClr val="8A94A6"/>
+                </a:solidFill>
+                <a:latin typeface="Arial"/>
+              </a:rPr>
+              <a:t>Build a PERSONA -&gt; interview it as an AI CHATBOT (paste the prompt + conversation).</a:t>
+            </a:r>
+          </a:p>
+          <a:p>
+            <a:pPr algn="l">
+              <a:lnSpc>
+                <a:spcPct val="135000"/>
+              </a:lnSpc>
+            </a:pPr>
+            <a:r>
+              <a:rPr sz="1900" b="1">
+                <a:solidFill>
+                  <a:srgbClr val="00FF41"/>
+                </a:solidFill>
+                <a:latin typeface="Arial"/>
+              </a:rPr>
+              <a:t>→  </a:t>
+            </a:r>
+            <a:r>
+              <a:rPr sz="1900" b="0">
+                <a:solidFill>
+                  <a:srgbClr val="8A94A6"/>
+                </a:solidFill>
+                <a:latin typeface="Arial"/>
+              </a:rPr>
+              <a:t>Operationalize the value, then ROUGH storyboard each -&gt; ONE REFINED team storyboard.</a:t>
+            </a:r>
+          </a:p>
+          <a:p>
+            <a:pPr algn="l">
+              <a:lnSpc>
+                <a:spcPct val="135000"/>
+              </a:lnSpc>
+            </a:pPr>
+            <a:r>
+              <a:rPr sz="1900" b="1">
+                <a:solidFill>
+                  <a:srgbClr val="00FF41"/>
+                </a:solidFill>
+                <a:latin typeface="Arial"/>
+              </a:rPr>
+              <a:t>→  </a:t>
+            </a:r>
+            <a:r>
+              <a:rPr sz="1900" b="0">
+                <a:solidFill>
+                  <a:srgbClr val="8A94A6"/>
+                </a:solidFill>
+                <a:latin typeface="Arial"/>
+              </a:rPr>
+              <a:t>Scope the smallest real thing. Link persona + storyboard from the report.</a:t>
+            </a:r>
+          </a:p>
+        </p:txBody>
+      </p:sp>
+      <p:sp>
+        <p:nvSpPr>
+          <p:cNvPr id="6" name="Rounded Rectangle 5"/>
+          <p:cNvSpPr/>
+          <p:nvPr/>
+        </p:nvSpPr>
+        <p:spPr>
+          <a:xfrm>
+            <a:off x="640080" y="5532120"/>
+            <a:ext cx="10911535" cy="658368"/>
+          </a:xfrm>
+          <a:prstGeom prst="roundRect">
+            <a:avLst/>
+          </a:prstGeom>
+          <a:solidFill>
+            <a:srgbClr val="151B26"/>
+          </a:solidFill>
+          <a:ln w="19050">
+            <a:solidFill>
+              <a:srgbClr val="00FF41"/>
+            </a:solidFill>
+          </a:ln>
+          <a:effectLst/>
+        </p:spPr>
+        <p:style>
+          <a:lnRef idx="1">
+            <a:schemeClr val="accent1"/>
+          </a:lnRef>
+          <a:fillRef idx="3">
+            <a:schemeClr val="accent1"/>
+          </a:fillRef>
+          <a:effectRef idx="2">
+            <a:schemeClr val="accent1"/>
+          </a:effectRef>
+          <a:fontRef idx="minor">
+            <a:schemeClr val="lt1"/>
+          </a:fontRef>
+        </p:style>
+        <p:txBody>
+          <a:bodyPr rtlCol="0" anchor="ctr"/>
+          <a:lstStyle/>
+          <a:p>
+            <a:pPr algn="ctr"/>
+          </a:p>
+        </p:txBody>
+      </p:sp>
+      <p:sp>
+        <p:nvSpPr>
+          <p:cNvPr id="7" name="TextBox 6"/>
+          <p:cNvSpPr txBox="1"/>
+          <p:nvPr/>
+        </p:nvSpPr>
+        <p:spPr>
+          <a:xfrm>
+            <a:off x="914400" y="5532120"/>
+            <a:ext cx="10362895" cy="658368"/>
+          </a:xfrm>
+          <a:prstGeom prst="rect">
+            <a:avLst/>
+          </a:prstGeom>
+          <a:noFill/>
+        </p:spPr>
+        <p:txBody>
+          <a:bodyPr wrap="square" anchor="ctr">
+            <a:spAutoFit/>
+          </a:bodyPr>
+          <a:lstStyle/>
+          <a:p>
+            <a:pPr algn="l">
+              <a:lnSpc>
+                <a:spcPct val="100000"/>
+              </a:lnSpc>
+            </a:pPr>
+            <a:r>
+              <a:rPr sz="1600" b="1">
+                <a:solidFill>
+                  <a:srgbClr val="00FF41"/>
+                </a:solidFill>
+                <a:latin typeface="Arial"/>
+              </a:rPr>
+              <a:t>▶  </a:t>
+            </a:r>
+            <a:r>
+              <a:rPr sz="1600" b="1">
+                <a:solidFill>
+                  <a:srgbClr val="F5F7FA"/>
+                </a:solidFill>
+                <a:latin typeface="Arial"/>
+              </a:rPr>
+              <a:t>Deliverable = planning-report.md - Checkpoint 2  (persona · interview · storyboards · scope)</a:t>
+            </a:r>
+          </a:p>
+        </p:txBody>
+      </p:sp>
+      <p:sp>
+        <p:nvSpPr>
+          <p:cNvPr id="8" name="TextBox 7"/>
+          <p:cNvSpPr txBox="1"/>
+          <p:nvPr/>
+        </p:nvSpPr>
+        <p:spPr>
+          <a:xfrm>
+            <a:off x="640080" y="6355080"/>
+            <a:ext cx="10972800" cy="365760"/>
+          </a:xfrm>
+          <a:prstGeom prst="rect">
+            <a:avLst/>
+          </a:prstGeom>
+          <a:noFill/>
+        </p:spPr>
+        <p:txBody>
+          <a:bodyPr wrap="square" anchor="t">
+            <a:spAutoFit/>
+          </a:bodyPr>
+          <a:lstStyle/>
+          <a:p>
+            <a:pPr algn="l">
+              <a:lnSpc>
+                <a:spcPct val="100000"/>
+              </a:lnSpc>
+            </a:pPr>
+            <a:r>
+              <a:rPr sz="1000" b="0">
+                <a:solidFill>
+                  <a:srgbClr val="5A6474"/>
+                </a:solidFill>
+                <a:latin typeface="Courier New"/>
+              </a:rPr>
+              <a:t>Good Code, Good Vibes · TECHIE 1121 · Cornell Tech · Summer 2026</a:t>
+            </a:r>
+          </a:p>
+        </p:txBody>
+      </p:sp>
+    </p:spTree>
+  </p:cSld>
+  <p:clrMapOvr>
+    <a:masterClrMapping/>
+  </p:clrMapOvr>
+</p:sld>
+</file>
+
+<file path=ppt/slides/slide14.xml><?xml version="1.0" encoding="utf-8"?>
+<p:sld xmlns:a="http://schemas.openxmlformats.org/drawingml/2006/main" xmlns:p="http://schemas.openxmlformats.org/presentationml/2006/main" xmlns:r="http://schemas.openxmlformats.org/officeDocument/2006/relationships">
+  <p:cSld>
+    <p:bg>
+      <p:bgPr>
+        <a:solidFill>
+          <a:srgbClr val="0B0E14"/>
+        </a:solidFill>
+        <a:effectLst/>
+      </p:bgPr>
+    </p:bg>
+    <p:spTree>
+      <p:nvGrpSpPr>
+        <p:cNvPr id="1" name=""/>
+        <p:cNvGrpSpPr/>
+        <p:nvPr/>
+      </p:nvGrpSpPr>
+      <p:grpSpPr/>
+      <p:sp>
+        <p:nvSpPr>
+          <p:cNvPr id="2" name="Rectangle 1"/>
+          <p:cNvSpPr/>
+          <p:nvPr/>
+        </p:nvSpPr>
+        <p:spPr>
+          <a:xfrm>
+            <a:off x="0" y="0"/>
+            <a:ext cx="256032" cy="6858000"/>
+          </a:xfrm>
+          <a:prstGeom prst="rect">
+            <a:avLst/>
+          </a:prstGeom>
+          <a:solidFill>
+            <a:srgbClr val="00FF41"/>
+          </a:solidFill>
+          <a:ln>
+            <a:noFill/>
+          </a:ln>
+          <a:effectLst/>
+        </p:spPr>
+        <p:style>
+          <a:lnRef idx="1">
+            <a:schemeClr val="accent1"/>
+          </a:lnRef>
+          <a:fillRef idx="3">
+            <a:schemeClr val="accent1"/>
+          </a:fillRef>
+          <a:effectRef idx="2">
+            <a:schemeClr val="accent1"/>
+          </a:effectRef>
+          <a:fontRef idx="minor">
+            <a:schemeClr val="lt1"/>
+          </a:fontRef>
+        </p:style>
+        <p:txBody>
+          <a:bodyPr rtlCol="0" anchor="ctr"/>
+          <a:lstStyle/>
+          <a:p>
+            <a:pPr algn="ctr"/>
+          </a:p>
+        </p:txBody>
+      </p:sp>
+      <p:sp>
+        <p:nvSpPr>
+          <p:cNvPr id="3" name="TextBox 2"/>
+          <p:cNvSpPr txBox="1"/>
+          <p:nvPr/>
+        </p:nvSpPr>
+        <p:spPr>
+          <a:xfrm>
+            <a:off x="822960" y="2194560"/>
+            <a:ext cx="10515600" cy="548640"/>
+          </a:xfrm>
+          <a:prstGeom prst="rect">
+            <a:avLst/>
+          </a:prstGeom>
+          <a:noFill/>
+        </p:spPr>
+        <p:txBody>
+          <a:bodyPr wrap="square" anchor="t">
+            <a:spAutoFit/>
+          </a:bodyPr>
+          <a:lstStyle/>
+          <a:p>
+            <a:pPr algn="l">
+              <a:lnSpc>
+                <a:spcPct val="100000"/>
+              </a:lnSpc>
+            </a:pPr>
+            <a:r>
+              <a:rPr sz="1800" b="1">
+                <a:solidFill>
+                  <a:srgbClr val="00FF41"/>
+                </a:solidFill>
+                <a:latin typeface="Courier New"/>
+              </a:rPr>
+              <a:t>BONUS - APPS, NOT JUST WEBSITES</a:t>
+            </a:r>
+          </a:p>
+        </p:txBody>
+      </p:sp>
+      <p:sp>
+        <p:nvSpPr>
+          <p:cNvPr id="4" name="TextBox 3"/>
+          <p:cNvSpPr txBox="1"/>
+          <p:nvPr/>
+        </p:nvSpPr>
+        <p:spPr>
+          <a:xfrm>
+            <a:off x="804672" y="2743200"/>
+            <a:ext cx="10515600" cy="1554480"/>
+          </a:xfrm>
+          <a:prstGeom prst="rect">
+            <a:avLst/>
+          </a:prstGeom>
+          <a:noFill/>
+        </p:spPr>
+        <p:txBody>
+          <a:bodyPr wrap="square" anchor="t">
+            <a:spAutoFit/>
+          </a:bodyPr>
+          <a:lstStyle/>
+          <a:p>
+            <a:pPr algn="l">
+              <a:lnSpc>
+                <a:spcPct val="100000"/>
+              </a:lnSpc>
+            </a:pPr>
+            <a:r>
+              <a:rPr sz="4800" b="1">
+                <a:solidFill>
+                  <a:srgbClr val="F5F7FA"/>
+                </a:solidFill>
+                <a:latin typeface="Arial"/>
+              </a:rPr>
+              <a:t>Ship a real app from what you vibe-code</a:t>
+            </a:r>
+          </a:p>
+        </p:txBody>
+      </p:sp>
+      <p:sp>
+        <p:nvSpPr>
+          <p:cNvPr id="5" name="TextBox 4"/>
+          <p:cNvSpPr txBox="1"/>
+          <p:nvPr/>
+        </p:nvSpPr>
+        <p:spPr>
+          <a:xfrm>
+            <a:off x="841248" y="4297680"/>
+            <a:ext cx="10058400" cy="640080"/>
+          </a:xfrm>
+          <a:prstGeom prst="rect">
+            <a:avLst/>
+          </a:prstGeom>
+          <a:noFill/>
+        </p:spPr>
+        <p:txBody>
+          <a:bodyPr wrap="square" anchor="t">
+            <a:spAutoFit/>
+          </a:bodyPr>
+          <a:lstStyle/>
+          <a:p>
+            <a:pPr algn="l">
+              <a:lnSpc>
+                <a:spcPct val="100000"/>
+              </a:lnSpc>
+            </a:pPr>
+            <a:r>
+              <a:rPr sz="1900" b="0">
+                <a:solidFill>
+                  <a:srgbClr val="8A94A6"/>
+                </a:solidFill>
+                <a:latin typeface="Arial"/>
+              </a:rPr>
+              <a:t>A lot of you asked - yes. Prototype on the web first, then wrap it. Keep the setup simple.</a:t>
+            </a:r>
+          </a:p>
+        </p:txBody>
+      </p:sp>
+    </p:spTree>
+  </p:cSld>
+  <p:clrMapOvr>
+    <a:masterClrMapping/>
+  </p:clrMapOvr>
+</p:sld>
+</file>
+
+<file path=ppt/slides/slide15.xml><?xml version="1.0" encoding="utf-8"?>
+<p:sld xmlns:a="http://schemas.openxmlformats.org/drawingml/2006/main" xmlns:p="http://schemas.openxmlformats.org/presentationml/2006/main" xmlns:r="http://schemas.openxmlformats.org/officeDocument/2006/relationships">
+  <p:cSld>
+    <p:bg>
+      <p:bgPr>
+        <a:solidFill>
+          <a:srgbClr val="0B0E14"/>
+        </a:solidFill>
+        <a:effectLst/>
+      </p:bgPr>
+    </p:bg>
+    <p:spTree>
+      <p:nvGrpSpPr>
+        <p:cNvPr id="1" name=""/>
+        <p:cNvGrpSpPr/>
+        <p:nvPr/>
+      </p:nvGrpSpPr>
+      <p:grpSpPr/>
+      <p:sp>
+        <p:nvSpPr>
+          <p:cNvPr id="2" name="TextBox 1"/>
+          <p:cNvSpPr txBox="1"/>
+          <p:nvPr/>
+        </p:nvSpPr>
+        <p:spPr>
+          <a:xfrm>
+            <a:off x="640080" y="502920"/>
+            <a:ext cx="10058400" cy="365760"/>
+          </a:xfrm>
+          <a:prstGeom prst="rect">
+            <a:avLst/>
+          </a:prstGeom>
+          <a:noFill/>
+        </p:spPr>
+        <p:txBody>
+          <a:bodyPr wrap="square" anchor="t">
+            <a:spAutoFit/>
+          </a:bodyPr>
+          <a:lstStyle/>
+          <a:p>
+            <a:pPr algn="l">
+              <a:lnSpc>
+                <a:spcPct val="100000"/>
+              </a:lnSpc>
+            </a:pPr>
+            <a:r>
+              <a:rPr sz="1300" b="1">
+                <a:solidFill>
+                  <a:srgbClr val="00FF41"/>
+                </a:solidFill>
+                <a:latin typeface="Courier New"/>
+              </a:rPr>
+              <a:t>THE RULE FOR THE FINAL</a:t>
+            </a:r>
+          </a:p>
+        </p:txBody>
+      </p:sp>
+      <p:sp>
+        <p:nvSpPr>
+          <p:cNvPr id="3" name="Rectangle 2"/>
+          <p:cNvSpPr/>
+          <p:nvPr/>
+        </p:nvSpPr>
+        <p:spPr>
+          <a:xfrm>
+            <a:off x="640080" y="932688"/>
+            <a:ext cx="822960" cy="73152"/>
+          </a:xfrm>
+          <a:prstGeom prst="rect">
+            <a:avLst/>
+          </a:prstGeom>
+          <a:solidFill>
+            <a:srgbClr val="00FF41"/>
+          </a:solidFill>
+          <a:ln>
+            <a:noFill/>
+          </a:ln>
+          <a:effectLst/>
+        </p:spPr>
+        <p:style>
+          <a:lnRef idx="1">
+            <a:schemeClr val="accent1"/>
+          </a:lnRef>
+          <a:fillRef idx="3">
+            <a:schemeClr val="accent1"/>
+          </a:fillRef>
+          <a:effectRef idx="2">
+            <a:schemeClr val="accent1"/>
+          </a:effectRef>
+          <a:fontRef idx="minor">
+            <a:schemeClr val="lt1"/>
+          </a:fontRef>
+        </p:style>
+        <p:txBody>
+          <a:bodyPr rtlCol="0" anchor="ctr"/>
+          <a:lstStyle/>
+          <a:p>
+            <a:pPr algn="ctr"/>
+          </a:p>
+        </p:txBody>
+      </p:sp>
+      <p:sp>
+        <p:nvSpPr>
+          <p:cNvPr id="4" name="TextBox 3"/>
+          <p:cNvSpPr txBox="1"/>
+          <p:nvPr/>
+        </p:nvSpPr>
+        <p:spPr>
+          <a:xfrm>
+            <a:off x="640080" y="1188720"/>
+            <a:ext cx="10972800" cy="1097280"/>
+          </a:xfrm>
+          <a:prstGeom prst="rect">
+            <a:avLst/>
+          </a:prstGeom>
+          <a:noFill/>
+        </p:spPr>
+        <p:txBody>
+          <a:bodyPr wrap="square" anchor="t">
+            <a:spAutoFit/>
+          </a:bodyPr>
+          <a:lstStyle/>
+          <a:p>
+            <a:pPr algn="l">
+              <a:lnSpc>
+                <a:spcPct val="100000"/>
+              </a:lnSpc>
+            </a:pPr>
+            <a:r>
+              <a:rPr sz="3400" b="1">
+                <a:solidFill>
+                  <a:srgbClr val="F5F7FA"/>
+                </a:solidFill>
+                <a:latin typeface="Arial"/>
+              </a:rPr>
+              <a:t>Prototype with vibe coding - don't fight your tools</a:t>
+            </a:r>
+          </a:p>
+        </p:txBody>
+      </p:sp>
+      <p:sp>
+        <p:nvSpPr>
+          <p:cNvPr id="5" name="TextBox 4"/>
+          <p:cNvSpPr txBox="1"/>
+          <p:nvPr/>
+        </p:nvSpPr>
+        <p:spPr>
+          <a:xfrm>
+            <a:off x="658368" y="2286000"/>
+            <a:ext cx="10881360" cy="3657600"/>
+          </a:xfrm>
+          <a:prstGeom prst="rect">
+            <a:avLst/>
+          </a:prstGeom>
+          <a:noFill/>
+        </p:spPr>
+        <p:txBody>
+          <a:bodyPr wrap="square" anchor="t">
+            <a:spAutoFit/>
+          </a:bodyPr>
+          <a:lstStyle/>
+          <a:p>
+            <a:pPr algn="l">
+              <a:lnSpc>
                 <a:spcPct val="112000"/>
               </a:lnSpc>
             </a:pPr>
             <a:r>
+              <a:rPr sz="2000" b="0">
+                <a:solidFill>
+                  <a:srgbClr val="F5F7FA"/>
+                </a:solidFill>
+                <a:latin typeface="Arial"/>
+              </a:rPr>
+              <a:t>Build the smallest real thing on the WEB with vibe coding. No heavy compilers, no backend infrastructure, no complex dev setup - that is not where your time should go.</a:t>
+            </a:r>
+          </a:p>
+          <a:p>
+            <a:pPr algn="l">
+              <a:lnSpc>
+                <a:spcPct val="112000"/>
+              </a:lnSpc>
+            </a:pPr>
+            <a:r>
+              <a:rPr sz="2000" b="0">
+                <a:solidFill>
+                  <a:srgbClr val="F5F7FA"/>
+                </a:solidFill>
+                <a:latin typeface="Arial"/>
+              </a:rPr>
+              <a:t/>
+            </a:r>
+          </a:p>
+          <a:p>
+            <a:pPr algn="l">
+              <a:lnSpc>
+                <a:spcPct val="112000"/>
+              </a:lnSpc>
+            </a:pPr>
+            <a:r>
+              <a:rPr sz="1800" b="0">
+                <a:solidFill>
+                  <a:srgbClr val="8A94A6"/>
+                </a:solidFill>
+                <a:latin typeface="Arial"/>
+              </a:rPr>
+              <a:t>Want it to FEEL like an app? Wrap it (next slide). AI can even build a fully functional app for you. But the value + the prototype come first.</a:t>
+            </a:r>
+          </a:p>
+        </p:txBody>
+      </p:sp>
+      <p:sp>
+        <p:nvSpPr>
+          <p:cNvPr id="6" name="TextBox 5"/>
+          <p:cNvSpPr txBox="1"/>
+          <p:nvPr/>
+        </p:nvSpPr>
+        <p:spPr>
+          <a:xfrm>
+            <a:off x="640080" y="6355080"/>
+            <a:ext cx="10972800" cy="365760"/>
+          </a:xfrm>
+          <a:prstGeom prst="rect">
+            <a:avLst/>
+          </a:prstGeom>
+          <a:noFill/>
+        </p:spPr>
+        <p:txBody>
+          <a:bodyPr wrap="square" anchor="t">
+            <a:spAutoFit/>
+          </a:bodyPr>
+          <a:lstStyle/>
+          <a:p>
+            <a:pPr algn="l">
+              <a:lnSpc>
+                <a:spcPct val="100000"/>
+              </a:lnSpc>
+            </a:pPr>
+            <a:r>
+              <a:rPr sz="1000" b="0">
+                <a:solidFill>
+                  <a:srgbClr val="5A6474"/>
+                </a:solidFill>
+                <a:latin typeface="Courier New"/>
+              </a:rPr>
+              <a:t>Good Code, Good Vibes · TECHIE 1121 · Cornell Tech · Summer 2026</a:t>
+            </a:r>
+          </a:p>
+        </p:txBody>
+      </p:sp>
+    </p:spTree>
+  </p:cSld>
+  <p:clrMapOvr>
+    <a:masterClrMapping/>
+  </p:clrMapOvr>
+</p:sld>
+</file>
+
+<file path=ppt/slides/slide16.xml><?xml version="1.0" encoding="utf-8"?>
+<p:sld xmlns:a="http://schemas.openxmlformats.org/drawingml/2006/main" xmlns:p="http://schemas.openxmlformats.org/presentationml/2006/main" xmlns:r="http://schemas.openxmlformats.org/officeDocument/2006/relationships">
+  <p:cSld>
+    <p:bg>
+      <p:bgPr>
+        <a:solidFill>
+          <a:srgbClr val="0B0E14"/>
+        </a:solidFill>
+        <a:effectLst/>
+      </p:bgPr>
+    </p:bg>
+    <p:spTree>
+      <p:nvGrpSpPr>
+        <p:cNvPr id="1" name=""/>
+        <p:cNvGrpSpPr/>
+        <p:nvPr/>
+      </p:nvGrpSpPr>
+      <p:grpSpPr/>
+      <p:sp>
+        <p:nvSpPr>
+          <p:cNvPr id="2" name="TextBox 1"/>
+          <p:cNvSpPr txBox="1"/>
+          <p:nvPr/>
+        </p:nvSpPr>
+        <p:spPr>
+          <a:xfrm>
+            <a:off x="640080" y="502920"/>
+            <a:ext cx="10058400" cy="365760"/>
+          </a:xfrm>
+          <a:prstGeom prst="rect">
+            <a:avLst/>
+          </a:prstGeom>
+          <a:noFill/>
+        </p:spPr>
+        <p:txBody>
+          <a:bodyPr wrap="square" anchor="t">
+            <a:spAutoFit/>
+          </a:bodyPr>
+          <a:lstStyle/>
+          <a:p>
+            <a:pPr algn="l">
+              <a:lnSpc>
+                <a:spcPct val="100000"/>
+              </a:lnSpc>
+            </a:pPr>
+            <a:r>
+              <a:rPr sz="1300" b="1">
+                <a:solidFill>
+                  <a:srgbClr val="00FF41"/>
+                </a:solidFill>
+                <a:latin typeface="Courier New"/>
+              </a:rPr>
+              <a:t>WRAP YOUR WEB APP -&gt; AN APP</a:t>
+            </a:r>
+          </a:p>
+        </p:txBody>
+      </p:sp>
+      <p:sp>
+        <p:nvSpPr>
+          <p:cNvPr id="3" name="Rectangle 2"/>
+          <p:cNvSpPr/>
+          <p:nvPr/>
+        </p:nvSpPr>
+        <p:spPr>
+          <a:xfrm>
+            <a:off x="640080" y="932688"/>
+            <a:ext cx="822960" cy="73152"/>
+          </a:xfrm>
+          <a:prstGeom prst="rect">
+            <a:avLst/>
+          </a:prstGeom>
+          <a:solidFill>
+            <a:srgbClr val="00FF41"/>
+          </a:solidFill>
+          <a:ln>
+            <a:noFill/>
+          </a:ln>
+          <a:effectLst/>
+        </p:spPr>
+        <p:style>
+          <a:lnRef idx="1">
+            <a:schemeClr val="accent1"/>
+          </a:lnRef>
+          <a:fillRef idx="3">
+            <a:schemeClr val="accent1"/>
+          </a:fillRef>
+          <a:effectRef idx="2">
+            <a:schemeClr val="accent1"/>
+          </a:effectRef>
+          <a:fontRef idx="minor">
+            <a:schemeClr val="lt1"/>
+          </a:fontRef>
+        </p:style>
+        <p:txBody>
+          <a:bodyPr rtlCol="0" anchor="ctr"/>
+          <a:lstStyle/>
+          <a:p>
+            <a:pPr algn="ctr"/>
+          </a:p>
+        </p:txBody>
+      </p:sp>
+      <p:sp>
+        <p:nvSpPr>
+          <p:cNvPr id="4" name="TextBox 3"/>
+          <p:cNvSpPr txBox="1"/>
+          <p:nvPr/>
+        </p:nvSpPr>
+        <p:spPr>
+          <a:xfrm>
+            <a:off x="640080" y="1188720"/>
+            <a:ext cx="10972800" cy="914400"/>
+          </a:xfrm>
+          <a:prstGeom prst="rect">
+            <a:avLst/>
+          </a:prstGeom>
+          <a:noFill/>
+        </p:spPr>
+        <p:txBody>
+          <a:bodyPr wrap="square" anchor="t">
+            <a:spAutoFit/>
+          </a:bodyPr>
+          <a:lstStyle/>
+          <a:p>
+            <a:pPr algn="l">
+              <a:lnSpc>
+                <a:spcPct val="100000"/>
+              </a:lnSpc>
+            </a:pPr>
+            <a:r>
+              <a:rPr sz="3200" b="1">
+                <a:solidFill>
+                  <a:srgbClr val="F5F7FA"/>
+                </a:solidFill>
+                <a:latin typeface="Arial"/>
+              </a:rPr>
+              <a:t>Easiest first</a:t>
+            </a:r>
+          </a:p>
+        </p:txBody>
+      </p:sp>
+      <p:sp>
+        <p:nvSpPr>
+          <p:cNvPr id="5" name="Rounded Rectangle 4"/>
+          <p:cNvSpPr/>
+          <p:nvPr/>
+        </p:nvSpPr>
+        <p:spPr>
+          <a:xfrm>
+            <a:off x="640080" y="2468880"/>
+            <a:ext cx="3393338" cy="3383280"/>
+          </a:xfrm>
+          <a:prstGeom prst="roundRect">
+            <a:avLst/>
+          </a:prstGeom>
+          <a:solidFill>
+            <a:srgbClr val="151B26"/>
+          </a:solidFill>
+          <a:ln>
+            <a:noFill/>
+          </a:ln>
+          <a:effectLst/>
+        </p:spPr>
+        <p:style>
+          <a:lnRef idx="1">
+            <a:schemeClr val="accent1"/>
+          </a:lnRef>
+          <a:fillRef idx="3">
+            <a:schemeClr val="accent1"/>
+          </a:fillRef>
+          <a:effectRef idx="2">
+            <a:schemeClr val="accent1"/>
+          </a:effectRef>
+          <a:fontRef idx="minor">
+            <a:schemeClr val="lt1"/>
+          </a:fontRef>
+        </p:style>
+        <p:txBody>
+          <a:bodyPr rtlCol="0" anchor="ctr"/>
+          <a:lstStyle/>
+          <a:p>
+            <a:pPr algn="ctr"/>
+          </a:p>
+        </p:txBody>
+      </p:sp>
+      <p:sp>
+        <p:nvSpPr>
+          <p:cNvPr id="6" name="Rectangle 5"/>
+          <p:cNvSpPr/>
+          <p:nvPr/>
+        </p:nvSpPr>
+        <p:spPr>
+          <a:xfrm>
+            <a:off x="640080" y="2468880"/>
+            <a:ext cx="3393338" cy="82296"/>
+          </a:xfrm>
+          <a:prstGeom prst="rect">
+            <a:avLst/>
+          </a:prstGeom>
+          <a:solidFill>
+            <a:srgbClr val="00FF41"/>
+          </a:solidFill>
+          <a:ln>
+            <a:noFill/>
+          </a:ln>
+          <a:effectLst/>
+        </p:spPr>
+        <p:style>
+          <a:lnRef idx="1">
+            <a:schemeClr val="accent1"/>
+          </a:lnRef>
+          <a:fillRef idx="3">
+            <a:schemeClr val="accent1"/>
+          </a:fillRef>
+          <a:effectRef idx="2">
+            <a:schemeClr val="accent1"/>
+          </a:effectRef>
+          <a:fontRef idx="minor">
+            <a:schemeClr val="lt1"/>
+          </a:fontRef>
+        </p:style>
+        <p:txBody>
+          <a:bodyPr rtlCol="0" anchor="ctr"/>
+          <a:lstStyle/>
+          <a:p>
+            <a:pPr algn="ctr"/>
+          </a:p>
+        </p:txBody>
+      </p:sp>
+      <p:sp>
+        <p:nvSpPr>
+          <p:cNvPr id="7" name="TextBox 6"/>
+          <p:cNvSpPr txBox="1"/>
+          <p:nvPr/>
+        </p:nvSpPr>
+        <p:spPr>
+          <a:xfrm>
+            <a:off x="914400" y="2788920"/>
+            <a:ext cx="2844698" cy="457200"/>
+          </a:xfrm>
+          <a:prstGeom prst="rect">
+            <a:avLst/>
+          </a:prstGeom>
+          <a:noFill/>
+        </p:spPr>
+        <p:txBody>
+          <a:bodyPr wrap="square" anchor="t">
+            <a:spAutoFit/>
+          </a:bodyPr>
+          <a:lstStyle/>
+          <a:p>
+            <a:pPr algn="l">
+              <a:lnSpc>
+                <a:spcPct val="100000"/>
+              </a:lnSpc>
+            </a:pPr>
+            <a:r>
+              <a:rPr sz="1200" b="1">
+                <a:solidFill>
+                  <a:srgbClr val="00FF41"/>
+                </a:solidFill>
+                <a:latin typeface="Courier New"/>
+              </a:rPr>
+              <a:t>PWA</a:t>
+            </a:r>
+          </a:p>
+        </p:txBody>
+      </p:sp>
+      <p:sp>
+        <p:nvSpPr>
+          <p:cNvPr id="8" name="TextBox 7"/>
+          <p:cNvSpPr txBox="1"/>
+          <p:nvPr/>
+        </p:nvSpPr>
+        <p:spPr>
+          <a:xfrm>
+            <a:off x="914400" y="3246120"/>
+            <a:ext cx="2844698" cy="822960"/>
+          </a:xfrm>
+          <a:prstGeom prst="rect">
+            <a:avLst/>
+          </a:prstGeom>
+          <a:noFill/>
+        </p:spPr>
+        <p:txBody>
+          <a:bodyPr wrap="square" anchor="t">
+            <a:spAutoFit/>
+          </a:bodyPr>
+          <a:lstStyle/>
+          <a:p>
+            <a:pPr algn="l">
+              <a:lnSpc>
+                <a:spcPct val="100000"/>
+              </a:lnSpc>
+            </a:pPr>
+            <a:r>
+              <a:rPr sz="2000" b="1">
+                <a:solidFill>
+                  <a:srgbClr val="F5F7FA"/>
+                </a:solidFill>
+                <a:latin typeface="Arial"/>
+              </a:rPr>
+              <a:t>Zero install</a:t>
+            </a:r>
+          </a:p>
+        </p:txBody>
+      </p:sp>
+      <p:sp>
+        <p:nvSpPr>
+          <p:cNvPr id="9" name="TextBox 8"/>
+          <p:cNvSpPr txBox="1"/>
+          <p:nvPr/>
+        </p:nvSpPr>
+        <p:spPr>
+          <a:xfrm>
+            <a:off x="914400" y="4114800"/>
+            <a:ext cx="2844698" cy="1554480"/>
+          </a:xfrm>
+          <a:prstGeom prst="rect">
+            <a:avLst/>
+          </a:prstGeom>
+          <a:noFill/>
+        </p:spPr>
+        <p:txBody>
+          <a:bodyPr wrap="square" anchor="t">
+            <a:spAutoFit/>
+          </a:bodyPr>
+          <a:lstStyle/>
+          <a:p>
+            <a:pPr algn="l">
+              <a:lnSpc>
+                <a:spcPct val="110000"/>
+              </a:lnSpc>
+            </a:pPr>
+            <a:r>
+              <a:rPr sz="1500" b="0">
+                <a:solidFill>
+                  <a:srgbClr val="8A94A6"/>
+                </a:solidFill>
+                <a:latin typeface="Arial"/>
+              </a:rPr>
+              <a:t>Add a manifest + service worker (AI does it). 'Add to Home Screen', works offline. Easiest by far.</a:t>
+            </a:r>
+          </a:p>
+        </p:txBody>
+      </p:sp>
+      <p:sp>
+        <p:nvSpPr>
+          <p:cNvPr id="10" name="Rounded Rectangle 9"/>
+          <p:cNvSpPr/>
+          <p:nvPr/>
+        </p:nvSpPr>
+        <p:spPr>
+          <a:xfrm>
+            <a:off x="4399178" y="2468880"/>
+            <a:ext cx="3393338" cy="3383280"/>
+          </a:xfrm>
+          <a:prstGeom prst="roundRect">
+            <a:avLst/>
+          </a:prstGeom>
+          <a:solidFill>
+            <a:srgbClr val="151B26"/>
+          </a:solidFill>
+          <a:ln>
+            <a:noFill/>
+          </a:ln>
+          <a:effectLst/>
+        </p:spPr>
+        <p:style>
+          <a:lnRef idx="1">
+            <a:schemeClr val="accent1"/>
+          </a:lnRef>
+          <a:fillRef idx="3">
+            <a:schemeClr val="accent1"/>
+          </a:fillRef>
+          <a:effectRef idx="2">
+            <a:schemeClr val="accent1"/>
+          </a:effectRef>
+          <a:fontRef idx="minor">
+            <a:schemeClr val="lt1"/>
+          </a:fontRef>
+        </p:style>
+        <p:txBody>
+          <a:bodyPr rtlCol="0" anchor="ctr"/>
+          <a:lstStyle/>
+          <a:p>
+            <a:pPr algn="ctr"/>
+          </a:p>
+        </p:txBody>
+      </p:sp>
+      <p:sp>
+        <p:nvSpPr>
+          <p:cNvPr id="11" name="Rectangle 10"/>
+          <p:cNvSpPr/>
+          <p:nvPr/>
+        </p:nvSpPr>
+        <p:spPr>
+          <a:xfrm>
+            <a:off x="4399178" y="2468880"/>
+            <a:ext cx="3393338" cy="82296"/>
+          </a:xfrm>
+          <a:prstGeom prst="rect">
+            <a:avLst/>
+          </a:prstGeom>
+          <a:solidFill>
+            <a:srgbClr val="00FF41"/>
+          </a:solidFill>
+          <a:ln>
+            <a:noFill/>
+          </a:ln>
+          <a:effectLst/>
+        </p:spPr>
+        <p:style>
+          <a:lnRef idx="1">
+            <a:schemeClr val="accent1"/>
+          </a:lnRef>
+          <a:fillRef idx="3">
+            <a:schemeClr val="accent1"/>
+          </a:fillRef>
+          <a:effectRef idx="2">
+            <a:schemeClr val="accent1"/>
+          </a:effectRef>
+          <a:fontRef idx="minor">
+            <a:schemeClr val="lt1"/>
+          </a:fontRef>
+        </p:style>
+        <p:txBody>
+          <a:bodyPr rtlCol="0" anchor="ctr"/>
+          <a:lstStyle/>
+          <a:p>
+            <a:pPr algn="ctr"/>
+          </a:p>
+        </p:txBody>
+      </p:sp>
+      <p:sp>
+        <p:nvSpPr>
+          <p:cNvPr id="12" name="TextBox 11"/>
+          <p:cNvSpPr txBox="1"/>
+          <p:nvPr/>
+        </p:nvSpPr>
+        <p:spPr>
+          <a:xfrm>
+            <a:off x="4673498" y="2788920"/>
+            <a:ext cx="2844698" cy="457200"/>
+          </a:xfrm>
+          <a:prstGeom prst="rect">
+            <a:avLst/>
+          </a:prstGeom>
+          <a:noFill/>
+        </p:spPr>
+        <p:txBody>
+          <a:bodyPr wrap="square" anchor="t">
+            <a:spAutoFit/>
+          </a:bodyPr>
+          <a:lstStyle/>
+          <a:p>
+            <a:pPr algn="l">
+              <a:lnSpc>
+                <a:spcPct val="100000"/>
+              </a:lnSpc>
+            </a:pPr>
+            <a:r>
+              <a:rPr sz="1200" b="1">
+                <a:solidFill>
+                  <a:srgbClr val="00FF41"/>
+                </a:solidFill>
+                <a:latin typeface="Courier New"/>
+              </a:rPr>
+              <a:t>CAPACITOR</a:t>
+            </a:r>
+          </a:p>
+        </p:txBody>
+      </p:sp>
+      <p:sp>
+        <p:nvSpPr>
+          <p:cNvPr id="13" name="TextBox 12"/>
+          <p:cNvSpPr txBox="1"/>
+          <p:nvPr/>
+        </p:nvSpPr>
+        <p:spPr>
+          <a:xfrm>
+            <a:off x="4673498" y="3246120"/>
+            <a:ext cx="2844698" cy="822960"/>
+          </a:xfrm>
+          <a:prstGeom prst="rect">
+            <a:avLst/>
+          </a:prstGeom>
+          <a:noFill/>
+        </p:spPr>
+        <p:txBody>
+          <a:bodyPr wrap="square" anchor="t">
+            <a:spAutoFit/>
+          </a:bodyPr>
+          <a:lstStyle/>
+          <a:p>
+            <a:pPr algn="l">
+              <a:lnSpc>
+                <a:spcPct val="100000"/>
+              </a:lnSpc>
+            </a:pPr>
+            <a:r>
+              <a:rPr sz="2000" b="1">
+                <a:solidFill>
+                  <a:srgbClr val="F5F7FA"/>
+                </a:solidFill>
+                <a:latin typeface="Arial"/>
+              </a:rPr>
+              <a:t>Web -&gt; native mobile</a:t>
+            </a:r>
+          </a:p>
+        </p:txBody>
+      </p:sp>
+      <p:sp>
+        <p:nvSpPr>
+          <p:cNvPr id="14" name="TextBox 13"/>
+          <p:cNvSpPr txBox="1"/>
+          <p:nvPr/>
+        </p:nvSpPr>
+        <p:spPr>
+          <a:xfrm>
+            <a:off x="4673498" y="4114800"/>
+            <a:ext cx="2844698" cy="1554480"/>
+          </a:xfrm>
+          <a:prstGeom prst="rect">
+            <a:avLst/>
+          </a:prstGeom>
+          <a:noFill/>
+        </p:spPr>
+        <p:txBody>
+          <a:bodyPr wrap="square" anchor="t">
+            <a:spAutoFit/>
+          </a:bodyPr>
+          <a:lstStyle/>
+          <a:p>
+            <a:pPr algn="l">
+              <a:lnSpc>
+                <a:spcPct val="110000"/>
+              </a:lnSpc>
+            </a:pPr>
+            <a:r>
+              <a:rPr sz="1500" b="0">
+                <a:solidFill>
+                  <a:srgbClr val="8A94A6"/>
+                </a:solidFill>
+                <a:latin typeface="Arial"/>
+              </a:rPr>
+              <a:t>By the Ionic team - wraps your web app into a real iOS / Android app. Frontend-focused.</a:t>
+            </a:r>
+          </a:p>
+        </p:txBody>
+      </p:sp>
+      <p:sp>
+        <p:nvSpPr>
+          <p:cNvPr id="15" name="Rounded Rectangle 14"/>
+          <p:cNvSpPr/>
+          <p:nvPr/>
+        </p:nvSpPr>
+        <p:spPr>
+          <a:xfrm>
+            <a:off x="8158276" y="2468880"/>
+            <a:ext cx="3393338" cy="3383280"/>
+          </a:xfrm>
+          <a:prstGeom prst="roundRect">
+            <a:avLst/>
+          </a:prstGeom>
+          <a:solidFill>
+            <a:srgbClr val="151B26"/>
+          </a:solidFill>
+          <a:ln>
+            <a:noFill/>
+          </a:ln>
+          <a:effectLst/>
+        </p:spPr>
+        <p:style>
+          <a:lnRef idx="1">
+            <a:schemeClr val="accent1"/>
+          </a:lnRef>
+          <a:fillRef idx="3">
+            <a:schemeClr val="accent1"/>
+          </a:fillRef>
+          <a:effectRef idx="2">
+            <a:schemeClr val="accent1"/>
+          </a:effectRef>
+          <a:fontRef idx="minor">
+            <a:schemeClr val="lt1"/>
+          </a:fontRef>
+        </p:style>
+        <p:txBody>
+          <a:bodyPr rtlCol="0" anchor="ctr"/>
+          <a:lstStyle/>
+          <a:p>
+            <a:pPr algn="ctr"/>
+          </a:p>
+        </p:txBody>
+      </p:sp>
+      <p:sp>
+        <p:nvSpPr>
+          <p:cNvPr id="16" name="Rectangle 15"/>
+          <p:cNvSpPr/>
+          <p:nvPr/>
+        </p:nvSpPr>
+        <p:spPr>
+          <a:xfrm>
+            <a:off x="8158276" y="2468880"/>
+            <a:ext cx="3393338" cy="82296"/>
+          </a:xfrm>
+          <a:prstGeom prst="rect">
+            <a:avLst/>
+          </a:prstGeom>
+          <a:solidFill>
+            <a:srgbClr val="00FF41"/>
+          </a:solidFill>
+          <a:ln>
+            <a:noFill/>
+          </a:ln>
+          <a:effectLst/>
+        </p:spPr>
+        <p:style>
+          <a:lnRef idx="1">
+            <a:schemeClr val="accent1"/>
+          </a:lnRef>
+          <a:fillRef idx="3">
+            <a:schemeClr val="accent1"/>
+          </a:fillRef>
+          <a:effectRef idx="2">
+            <a:schemeClr val="accent1"/>
+          </a:effectRef>
+          <a:fontRef idx="minor">
+            <a:schemeClr val="lt1"/>
+          </a:fontRef>
+        </p:style>
+        <p:txBody>
+          <a:bodyPr rtlCol="0" anchor="ctr"/>
+          <a:lstStyle/>
+          <a:p>
+            <a:pPr algn="ctr"/>
+          </a:p>
+        </p:txBody>
+      </p:sp>
+      <p:sp>
+        <p:nvSpPr>
+          <p:cNvPr id="17" name="TextBox 16"/>
+          <p:cNvSpPr txBox="1"/>
+          <p:nvPr/>
+        </p:nvSpPr>
+        <p:spPr>
+          <a:xfrm>
+            <a:off x="8432596" y="2788920"/>
+            <a:ext cx="2844698" cy="457200"/>
+          </a:xfrm>
+          <a:prstGeom prst="rect">
+            <a:avLst/>
+          </a:prstGeom>
+          <a:noFill/>
+        </p:spPr>
+        <p:txBody>
+          <a:bodyPr wrap="square" anchor="t">
+            <a:spAutoFit/>
+          </a:bodyPr>
+          <a:lstStyle/>
+          <a:p>
+            <a:pPr algn="l">
+              <a:lnSpc>
+                <a:spcPct val="100000"/>
+              </a:lnSpc>
+            </a:pPr>
+            <a:r>
+              <a:rPr sz="1200" b="1">
+                <a:solidFill>
+                  <a:srgbClr val="00FF41"/>
+                </a:solidFill>
+                <a:latin typeface="Courier New"/>
+              </a:rPr>
+              <a:t>ELECTRON / TAURI</a:t>
+            </a:r>
+          </a:p>
+        </p:txBody>
+      </p:sp>
+      <p:sp>
+        <p:nvSpPr>
+          <p:cNvPr id="18" name="TextBox 17"/>
+          <p:cNvSpPr txBox="1"/>
+          <p:nvPr/>
+        </p:nvSpPr>
+        <p:spPr>
+          <a:xfrm>
+            <a:off x="8432596" y="3246120"/>
+            <a:ext cx="2844698" cy="822960"/>
+          </a:xfrm>
+          <a:prstGeom prst="rect">
+            <a:avLst/>
+          </a:prstGeom>
+          <a:noFill/>
+        </p:spPr>
+        <p:txBody>
+          <a:bodyPr wrap="square" anchor="t">
+            <a:spAutoFit/>
+          </a:bodyPr>
+          <a:lstStyle/>
+          <a:p>
+            <a:pPr algn="l">
+              <a:lnSpc>
+                <a:spcPct val="100000"/>
+              </a:lnSpc>
+            </a:pPr>
+            <a:r>
+              <a:rPr sz="2000" b="1">
+                <a:solidFill>
+                  <a:srgbClr val="F5F7FA"/>
+                </a:solidFill>
+                <a:latin typeface="Arial"/>
+              </a:rPr>
+              <a:t>Web -&gt; desktop</a:t>
+            </a:r>
+          </a:p>
+        </p:txBody>
+      </p:sp>
+      <p:sp>
+        <p:nvSpPr>
+          <p:cNvPr id="19" name="TextBox 18"/>
+          <p:cNvSpPr txBox="1"/>
+          <p:nvPr/>
+        </p:nvSpPr>
+        <p:spPr>
+          <a:xfrm>
+            <a:off x="8432596" y="4114800"/>
+            <a:ext cx="2844698" cy="1554480"/>
+          </a:xfrm>
+          <a:prstGeom prst="rect">
+            <a:avLst/>
+          </a:prstGeom>
+          <a:noFill/>
+        </p:spPr>
+        <p:txBody>
+          <a:bodyPr wrap="square" anchor="t">
+            <a:spAutoFit/>
+          </a:bodyPr>
+          <a:lstStyle/>
+          <a:p>
+            <a:pPr algn="l">
+              <a:lnSpc>
+                <a:spcPct val="110000"/>
+              </a:lnSpc>
+            </a:pPr>
+            <a:r>
+              <a:rPr sz="1500" b="0">
+                <a:solidFill>
+                  <a:srgbClr val="8A94A6"/>
+                </a:solidFill>
+                <a:latin typeface="Arial"/>
+              </a:rPr>
+              <a:t>Electron: mature, heavy (~85MB). Tauri v2: tiny + fast (~5MB) but needs the Rust toolchain.</a:t>
+            </a:r>
+          </a:p>
+        </p:txBody>
+      </p:sp>
+      <p:sp>
+        <p:nvSpPr>
+          <p:cNvPr id="20" name="TextBox 19"/>
+          <p:cNvSpPr txBox="1"/>
+          <p:nvPr/>
+        </p:nvSpPr>
+        <p:spPr>
+          <a:xfrm>
+            <a:off x="640080" y="6355080"/>
+            <a:ext cx="10972800" cy="365760"/>
+          </a:xfrm>
+          <a:prstGeom prst="rect">
+            <a:avLst/>
+          </a:prstGeom>
+          <a:noFill/>
+        </p:spPr>
+        <p:txBody>
+          <a:bodyPr wrap="square" anchor="t">
+            <a:spAutoFit/>
+          </a:bodyPr>
+          <a:lstStyle/>
+          <a:p>
+            <a:pPr algn="l">
+              <a:lnSpc>
+                <a:spcPct val="100000"/>
+              </a:lnSpc>
+            </a:pPr>
+            <a:r>
+              <a:rPr sz="1000" b="0">
+                <a:solidFill>
+                  <a:srgbClr val="5A6474"/>
+                </a:solidFill>
+                <a:latin typeface="Courier New"/>
+              </a:rPr>
+              <a:t>Good Code, Good Vibes · TECHIE 1121 · Cornell Tech · Summer 2026</a:t>
+            </a:r>
+          </a:p>
+        </p:txBody>
+      </p:sp>
+    </p:spTree>
+  </p:cSld>
+  <p:clrMapOvr>
+    <a:masterClrMapping/>
+  </p:clrMapOvr>
+</p:sld>
+</file>
+
+<file path=ppt/slides/slide17.xml><?xml version="1.0" encoding="utf-8"?>
+<p:sld xmlns:a="http://schemas.openxmlformats.org/drawingml/2006/main" xmlns:p="http://schemas.openxmlformats.org/presentationml/2006/main" xmlns:r="http://schemas.openxmlformats.org/officeDocument/2006/relationships">
+  <p:cSld>
+    <p:bg>
+      <p:bgPr>
+        <a:solidFill>
+          <a:srgbClr val="0B0E14"/>
+        </a:solidFill>
+        <a:effectLst/>
+      </p:bgPr>
+    </p:bg>
+    <p:spTree>
+      <p:nvGrpSpPr>
+        <p:cNvPr id="1" name=""/>
+        <p:cNvGrpSpPr/>
+        <p:nvPr/>
+      </p:nvGrpSpPr>
+      <p:grpSpPr/>
+      <p:sp>
+        <p:nvSpPr>
+          <p:cNvPr id="2" name="TextBox 1"/>
+          <p:cNvSpPr txBox="1"/>
+          <p:nvPr/>
+        </p:nvSpPr>
+        <p:spPr>
+          <a:xfrm>
+            <a:off x="640080" y="502920"/>
+            <a:ext cx="10058400" cy="365760"/>
+          </a:xfrm>
+          <a:prstGeom prst="rect">
+            <a:avLst/>
+          </a:prstGeom>
+          <a:noFill/>
+        </p:spPr>
+        <p:txBody>
+          <a:bodyPr wrap="square" anchor="t">
+            <a:spAutoFit/>
+          </a:bodyPr>
+          <a:lstStyle/>
+          <a:p>
+            <a:pPr algn="l">
+              <a:lnSpc>
+                <a:spcPct val="100000"/>
+              </a:lnSpc>
+            </a:pPr>
+            <a:r>
+              <a:rPr sz="1300" b="1">
+                <a:solidFill>
+                  <a:srgbClr val="00FF41"/>
+                </a:solidFill>
+                <a:latin typeface="Courier New"/>
+              </a:rPr>
+              <a:t>OR LET AI BUILD THE APP</a:t>
+            </a:r>
+          </a:p>
+        </p:txBody>
+      </p:sp>
+      <p:sp>
+        <p:nvSpPr>
+          <p:cNvPr id="3" name="Rectangle 2"/>
+          <p:cNvSpPr/>
+          <p:nvPr/>
+        </p:nvSpPr>
+        <p:spPr>
+          <a:xfrm>
+            <a:off x="640080" y="932688"/>
+            <a:ext cx="822960" cy="73152"/>
+          </a:xfrm>
+          <a:prstGeom prst="rect">
+            <a:avLst/>
+          </a:prstGeom>
+          <a:solidFill>
+            <a:srgbClr val="00FF41"/>
+          </a:solidFill>
+          <a:ln>
+            <a:noFill/>
+          </a:ln>
+          <a:effectLst/>
+        </p:spPr>
+        <p:style>
+          <a:lnRef idx="1">
+            <a:schemeClr val="accent1"/>
+          </a:lnRef>
+          <a:fillRef idx="3">
+            <a:schemeClr val="accent1"/>
+          </a:fillRef>
+          <a:effectRef idx="2">
+            <a:schemeClr val="accent1"/>
+          </a:effectRef>
+          <a:fontRef idx="minor">
+            <a:schemeClr val="lt1"/>
+          </a:fontRef>
+        </p:style>
+        <p:txBody>
+          <a:bodyPr rtlCol="0" anchor="ctr"/>
+          <a:lstStyle/>
+          <a:p>
+            <a:pPr algn="ctr"/>
+          </a:p>
+        </p:txBody>
+      </p:sp>
+      <p:sp>
+        <p:nvSpPr>
+          <p:cNvPr id="4" name="TextBox 3"/>
+          <p:cNvSpPr txBox="1"/>
+          <p:nvPr/>
+        </p:nvSpPr>
+        <p:spPr>
+          <a:xfrm>
+            <a:off x="640080" y="1188720"/>
+            <a:ext cx="10972800" cy="914400"/>
+          </a:xfrm>
+          <a:prstGeom prst="rect">
+            <a:avLst/>
+          </a:prstGeom>
+          <a:noFill/>
+        </p:spPr>
+        <p:txBody>
+          <a:bodyPr wrap="square" anchor="t">
+            <a:spAutoFit/>
+          </a:bodyPr>
+          <a:lstStyle/>
+          <a:p>
+            <a:pPr algn="l">
+              <a:lnSpc>
+                <a:spcPct val="100000"/>
+              </a:lnSpc>
+            </a:pPr>
+            <a:r>
+              <a:rPr sz="3200" b="1">
+                <a:solidFill>
+                  <a:srgbClr val="F5F7FA"/>
+                </a:solidFill>
+                <a:latin typeface="Arial"/>
+              </a:rPr>
+              <a:t>Prompt -&gt; app</a:t>
+            </a:r>
+          </a:p>
+        </p:txBody>
+      </p:sp>
+      <p:sp>
+        <p:nvSpPr>
+          <p:cNvPr id="5" name="Rounded Rectangle 4"/>
+          <p:cNvSpPr/>
+          <p:nvPr/>
+        </p:nvSpPr>
+        <p:spPr>
+          <a:xfrm>
+            <a:off x="640080" y="2468880"/>
+            <a:ext cx="3393338" cy="3383280"/>
+          </a:xfrm>
+          <a:prstGeom prst="roundRect">
+            <a:avLst/>
+          </a:prstGeom>
+          <a:solidFill>
+            <a:srgbClr val="151B26"/>
+          </a:solidFill>
+          <a:ln>
+            <a:noFill/>
+          </a:ln>
+          <a:effectLst/>
+        </p:spPr>
+        <p:style>
+          <a:lnRef idx="1">
+            <a:schemeClr val="accent1"/>
+          </a:lnRef>
+          <a:fillRef idx="3">
+            <a:schemeClr val="accent1"/>
+          </a:fillRef>
+          <a:effectRef idx="2">
+            <a:schemeClr val="accent1"/>
+          </a:effectRef>
+          <a:fontRef idx="minor">
+            <a:schemeClr val="lt1"/>
+          </a:fontRef>
+        </p:style>
+        <p:txBody>
+          <a:bodyPr rtlCol="0" anchor="ctr"/>
+          <a:lstStyle/>
+          <a:p>
+            <a:pPr algn="ctr"/>
+          </a:p>
+        </p:txBody>
+      </p:sp>
+      <p:sp>
+        <p:nvSpPr>
+          <p:cNvPr id="6" name="Rectangle 5"/>
+          <p:cNvSpPr/>
+          <p:nvPr/>
+        </p:nvSpPr>
+        <p:spPr>
+          <a:xfrm>
+            <a:off x="640080" y="2468880"/>
+            <a:ext cx="3393338" cy="82296"/>
+          </a:xfrm>
+          <a:prstGeom prst="rect">
+            <a:avLst/>
+          </a:prstGeom>
+          <a:solidFill>
+            <a:srgbClr val="00FF41"/>
+          </a:solidFill>
+          <a:ln>
+            <a:noFill/>
+          </a:ln>
+          <a:effectLst/>
+        </p:spPr>
+        <p:style>
+          <a:lnRef idx="1">
+            <a:schemeClr val="accent1"/>
+          </a:lnRef>
+          <a:fillRef idx="3">
+            <a:schemeClr val="accent1"/>
+          </a:fillRef>
+          <a:effectRef idx="2">
+            <a:schemeClr val="accent1"/>
+          </a:effectRef>
+          <a:fontRef idx="minor">
+            <a:schemeClr val="lt1"/>
+          </a:fontRef>
+        </p:style>
+        <p:txBody>
+          <a:bodyPr rtlCol="0" anchor="ctr"/>
+          <a:lstStyle/>
+          <a:p>
+            <a:pPr algn="ctr"/>
+          </a:p>
+        </p:txBody>
+      </p:sp>
+      <p:sp>
+        <p:nvSpPr>
+          <p:cNvPr id="7" name="TextBox 6"/>
+          <p:cNvSpPr txBox="1"/>
+          <p:nvPr/>
+        </p:nvSpPr>
+        <p:spPr>
+          <a:xfrm>
+            <a:off x="914400" y="2788920"/>
+            <a:ext cx="2844698" cy="457200"/>
+          </a:xfrm>
+          <a:prstGeom prst="rect">
+            <a:avLst/>
+          </a:prstGeom>
+          <a:noFill/>
+        </p:spPr>
+        <p:txBody>
+          <a:bodyPr wrap="square" anchor="t">
+            <a:spAutoFit/>
+          </a:bodyPr>
+          <a:lstStyle/>
+          <a:p>
+            <a:pPr algn="l">
+              <a:lnSpc>
+                <a:spcPct val="100000"/>
+              </a:lnSpc>
+            </a:pPr>
+            <a:r>
+              <a:rPr sz="1200" b="1">
+                <a:solidFill>
+                  <a:srgbClr val="00FF41"/>
+                </a:solidFill>
+                <a:latin typeface="Courier New"/>
+              </a:rPr>
+              <a:t>NATIVE FROM A PROMPT</a:t>
+            </a:r>
+          </a:p>
+        </p:txBody>
+      </p:sp>
+      <p:sp>
+        <p:nvSpPr>
+          <p:cNvPr id="8" name="TextBox 7"/>
+          <p:cNvSpPr txBox="1"/>
+          <p:nvPr/>
+        </p:nvSpPr>
+        <p:spPr>
+          <a:xfrm>
+            <a:off x="914400" y="3246120"/>
+            <a:ext cx="2844698" cy="822960"/>
+          </a:xfrm>
+          <a:prstGeom prst="rect">
+            <a:avLst/>
+          </a:prstGeom>
+          <a:noFill/>
+        </p:spPr>
+        <p:txBody>
+          <a:bodyPr wrap="square" anchor="t">
+            <a:spAutoFit/>
+          </a:bodyPr>
+          <a:lstStyle/>
+          <a:p>
+            <a:pPr algn="l">
+              <a:lnSpc>
+                <a:spcPct val="100000"/>
+              </a:lnSpc>
+            </a:pPr>
+            <a:r>
+              <a:rPr sz="2000" b="1">
+                <a:solidFill>
+                  <a:srgbClr val="F5F7FA"/>
+                </a:solidFill>
+                <a:latin typeface="Arial"/>
+              </a:rPr>
+              <a:t>iOS / Android</a:t>
+            </a:r>
+          </a:p>
+        </p:txBody>
+      </p:sp>
+      <p:sp>
+        <p:nvSpPr>
+          <p:cNvPr id="9" name="TextBox 8"/>
+          <p:cNvSpPr txBox="1"/>
+          <p:nvPr/>
+        </p:nvSpPr>
+        <p:spPr>
+          <a:xfrm>
+            <a:off x="914400" y="4114800"/>
+            <a:ext cx="2844698" cy="1554480"/>
+          </a:xfrm>
+          <a:prstGeom prst="rect">
+            <a:avLst/>
+          </a:prstGeom>
+          <a:noFill/>
+        </p:spPr>
+        <p:txBody>
+          <a:bodyPr wrap="square" anchor="t">
+            <a:spAutoFit/>
+          </a:bodyPr>
+          <a:lstStyle/>
+          <a:p>
+            <a:pPr algn="l">
+              <a:lnSpc>
+                <a:spcPct val="110000"/>
+              </a:lnSpc>
+            </a:pPr>
+            <a:r>
+              <a:rPr sz="1500" b="0">
+                <a:solidFill>
+                  <a:srgbClr val="8A94A6"/>
+                </a:solidFill>
+                <a:latin typeface="Arial"/>
+              </a:rPr>
+              <a:t>Google AI Studio (native Android), CatDoes / Nativly (native iOS + Android) - describe it, get an app.</a:t>
+            </a:r>
+          </a:p>
+        </p:txBody>
+      </p:sp>
+      <p:sp>
+        <p:nvSpPr>
+          <p:cNvPr id="10" name="Rounded Rectangle 9"/>
+          <p:cNvSpPr/>
+          <p:nvPr/>
+        </p:nvSpPr>
+        <p:spPr>
+          <a:xfrm>
+            <a:off x="4399178" y="2468880"/>
+            <a:ext cx="3393338" cy="3383280"/>
+          </a:xfrm>
+          <a:prstGeom prst="roundRect">
+            <a:avLst/>
+          </a:prstGeom>
+          <a:solidFill>
+            <a:srgbClr val="151B26"/>
+          </a:solidFill>
+          <a:ln>
+            <a:noFill/>
+          </a:ln>
+          <a:effectLst/>
+        </p:spPr>
+        <p:style>
+          <a:lnRef idx="1">
+            <a:schemeClr val="accent1"/>
+          </a:lnRef>
+          <a:fillRef idx="3">
+            <a:schemeClr val="accent1"/>
+          </a:fillRef>
+          <a:effectRef idx="2">
+            <a:schemeClr val="accent1"/>
+          </a:effectRef>
+          <a:fontRef idx="minor">
+            <a:schemeClr val="lt1"/>
+          </a:fontRef>
+        </p:style>
+        <p:txBody>
+          <a:bodyPr rtlCol="0" anchor="ctr"/>
+          <a:lstStyle/>
+          <a:p>
+            <a:pPr algn="ctr"/>
+          </a:p>
+        </p:txBody>
+      </p:sp>
+      <p:sp>
+        <p:nvSpPr>
+          <p:cNvPr id="11" name="Rectangle 10"/>
+          <p:cNvSpPr/>
+          <p:nvPr/>
+        </p:nvSpPr>
+        <p:spPr>
+          <a:xfrm>
+            <a:off x="4399178" y="2468880"/>
+            <a:ext cx="3393338" cy="82296"/>
+          </a:xfrm>
+          <a:prstGeom prst="rect">
+            <a:avLst/>
+          </a:prstGeom>
+          <a:solidFill>
+            <a:srgbClr val="00FF41"/>
+          </a:solidFill>
+          <a:ln>
+            <a:noFill/>
+          </a:ln>
+          <a:effectLst/>
+        </p:spPr>
+        <p:style>
+          <a:lnRef idx="1">
+            <a:schemeClr val="accent1"/>
+          </a:lnRef>
+          <a:fillRef idx="3">
+            <a:schemeClr val="accent1"/>
+          </a:fillRef>
+          <a:effectRef idx="2">
+            <a:schemeClr val="accent1"/>
+          </a:effectRef>
+          <a:fontRef idx="minor">
+            <a:schemeClr val="lt1"/>
+          </a:fontRef>
+        </p:style>
+        <p:txBody>
+          <a:bodyPr rtlCol="0" anchor="ctr"/>
+          <a:lstStyle/>
+          <a:p>
+            <a:pPr algn="ctr"/>
+          </a:p>
+        </p:txBody>
+      </p:sp>
+      <p:sp>
+        <p:nvSpPr>
+          <p:cNvPr id="12" name="TextBox 11"/>
+          <p:cNvSpPr txBox="1"/>
+          <p:nvPr/>
+        </p:nvSpPr>
+        <p:spPr>
+          <a:xfrm>
+            <a:off x="4673498" y="2788920"/>
+            <a:ext cx="2844698" cy="457200"/>
+          </a:xfrm>
+          <a:prstGeom prst="rect">
+            <a:avLst/>
+          </a:prstGeom>
+          <a:noFill/>
+        </p:spPr>
+        <p:txBody>
+          <a:bodyPr wrap="square" anchor="t">
+            <a:spAutoFit/>
+          </a:bodyPr>
+          <a:lstStyle/>
+          <a:p>
+            <a:pPr algn="l">
+              <a:lnSpc>
+                <a:spcPct val="100000"/>
+              </a:lnSpc>
+            </a:pPr>
+            <a:r>
+              <a:rPr sz="1200" b="1">
+                <a:solidFill>
+                  <a:srgbClr val="00FF41"/>
+                </a:solidFill>
+                <a:latin typeface="Courier New"/>
+              </a:rPr>
+              <a:t>WEB APP -&gt; WRAP IT</a:t>
+            </a:r>
+          </a:p>
+        </p:txBody>
+      </p:sp>
+      <p:sp>
+        <p:nvSpPr>
+          <p:cNvPr id="13" name="TextBox 12"/>
+          <p:cNvSpPr txBox="1"/>
+          <p:nvPr/>
+        </p:nvSpPr>
+        <p:spPr>
+          <a:xfrm>
+            <a:off x="4673498" y="3246120"/>
+            <a:ext cx="2844698" cy="822960"/>
+          </a:xfrm>
+          <a:prstGeom prst="rect">
+            <a:avLst/>
+          </a:prstGeom>
+          <a:noFill/>
+        </p:spPr>
+        <p:txBody>
+          <a:bodyPr wrap="square" anchor="t">
+            <a:spAutoFit/>
+          </a:bodyPr>
+          <a:lstStyle/>
+          <a:p>
+            <a:pPr algn="l">
+              <a:lnSpc>
+                <a:spcPct val="100000"/>
+              </a:lnSpc>
+            </a:pPr>
+            <a:r>
+              <a:rPr sz="2000" b="1">
+                <a:solidFill>
+                  <a:srgbClr val="F5F7FA"/>
+                </a:solidFill>
+                <a:latin typeface="Arial"/>
+              </a:rPr>
+              <a:t>Fastest to demo</a:t>
+            </a:r>
+          </a:p>
+        </p:txBody>
+      </p:sp>
+      <p:sp>
+        <p:nvSpPr>
+          <p:cNvPr id="14" name="TextBox 13"/>
+          <p:cNvSpPr txBox="1"/>
+          <p:nvPr/>
+        </p:nvSpPr>
+        <p:spPr>
+          <a:xfrm>
+            <a:off x="4673498" y="4114800"/>
+            <a:ext cx="2844698" cy="1554480"/>
+          </a:xfrm>
+          <a:prstGeom prst="rect">
+            <a:avLst/>
+          </a:prstGeom>
+          <a:noFill/>
+        </p:spPr>
+        <p:txBody>
+          <a:bodyPr wrap="square" anchor="t">
+            <a:spAutoFit/>
+          </a:bodyPr>
+          <a:lstStyle/>
+          <a:p>
+            <a:pPr algn="l">
+              <a:lnSpc>
+                <a:spcPct val="110000"/>
+              </a:lnSpc>
+            </a:pPr>
+            <a:r>
+              <a:rPr sz="1500" b="0">
+                <a:solidFill>
+                  <a:srgbClr val="8A94A6"/>
+                </a:solidFill>
+                <a:latin typeface="Arial"/>
+              </a:rPr>
+              <a:t>Lovable, Bolt.new, Replit, v0 build a web app from a prompt - then add a PWA / Capacitor wrapper.</a:t>
+            </a:r>
+          </a:p>
+        </p:txBody>
+      </p:sp>
+      <p:sp>
+        <p:nvSpPr>
+          <p:cNvPr id="15" name="Rounded Rectangle 14"/>
+          <p:cNvSpPr/>
+          <p:nvPr/>
+        </p:nvSpPr>
+        <p:spPr>
+          <a:xfrm>
+            <a:off x="8158276" y="2468880"/>
+            <a:ext cx="3393338" cy="3383280"/>
+          </a:xfrm>
+          <a:prstGeom prst="roundRect">
+            <a:avLst/>
+          </a:prstGeom>
+          <a:solidFill>
+            <a:srgbClr val="151B26"/>
+          </a:solidFill>
+          <a:ln>
+            <a:noFill/>
+          </a:ln>
+          <a:effectLst/>
+        </p:spPr>
+        <p:style>
+          <a:lnRef idx="1">
+            <a:schemeClr val="accent1"/>
+          </a:lnRef>
+          <a:fillRef idx="3">
+            <a:schemeClr val="accent1"/>
+          </a:fillRef>
+          <a:effectRef idx="2">
+            <a:schemeClr val="accent1"/>
+          </a:effectRef>
+          <a:fontRef idx="minor">
+            <a:schemeClr val="lt1"/>
+          </a:fontRef>
+        </p:style>
+        <p:txBody>
+          <a:bodyPr rtlCol="0" anchor="ctr"/>
+          <a:lstStyle/>
+          <a:p>
+            <a:pPr algn="ctr"/>
+          </a:p>
+        </p:txBody>
+      </p:sp>
+      <p:sp>
+        <p:nvSpPr>
+          <p:cNvPr id="16" name="Rectangle 15"/>
+          <p:cNvSpPr/>
+          <p:nvPr/>
+        </p:nvSpPr>
+        <p:spPr>
+          <a:xfrm>
+            <a:off x="8158276" y="2468880"/>
+            <a:ext cx="3393338" cy="82296"/>
+          </a:xfrm>
+          <a:prstGeom prst="rect">
+            <a:avLst/>
+          </a:prstGeom>
+          <a:solidFill>
+            <a:srgbClr val="00FF41"/>
+          </a:solidFill>
+          <a:ln>
+            <a:noFill/>
+          </a:ln>
+          <a:effectLst/>
+        </p:spPr>
+        <p:style>
+          <a:lnRef idx="1">
+            <a:schemeClr val="accent1"/>
+          </a:lnRef>
+          <a:fillRef idx="3">
+            <a:schemeClr val="accent1"/>
+          </a:fillRef>
+          <a:effectRef idx="2">
+            <a:schemeClr val="accent1"/>
+          </a:effectRef>
+          <a:fontRef idx="minor">
+            <a:schemeClr val="lt1"/>
+          </a:fontRef>
+        </p:style>
+        <p:txBody>
+          <a:bodyPr rtlCol="0" anchor="ctr"/>
+          <a:lstStyle/>
+          <a:p>
+            <a:pPr algn="ctr"/>
+          </a:p>
+        </p:txBody>
+      </p:sp>
+      <p:sp>
+        <p:nvSpPr>
+          <p:cNvPr id="17" name="TextBox 16"/>
+          <p:cNvSpPr txBox="1"/>
+          <p:nvPr/>
+        </p:nvSpPr>
+        <p:spPr>
+          <a:xfrm>
+            <a:off x="8432596" y="2788920"/>
+            <a:ext cx="2844698" cy="457200"/>
+          </a:xfrm>
+          <a:prstGeom prst="rect">
+            <a:avLst/>
+          </a:prstGeom>
+          <a:noFill/>
+        </p:spPr>
+        <p:txBody>
+          <a:bodyPr wrap="square" anchor="t">
+            <a:spAutoFit/>
+          </a:bodyPr>
+          <a:lstStyle/>
+          <a:p>
+            <a:pPr algn="l">
+              <a:lnSpc>
+                <a:spcPct val="100000"/>
+              </a:lnSpc>
+            </a:pPr>
+            <a:r>
+              <a:rPr sz="1200" b="1">
+                <a:solidFill>
+                  <a:srgbClr val="00FF41"/>
+                </a:solidFill>
+                <a:latin typeface="Courier New"/>
+              </a:rPr>
+              <a:t>REACT NATIVE</a:t>
+            </a:r>
+          </a:p>
+        </p:txBody>
+      </p:sp>
+      <p:sp>
+        <p:nvSpPr>
+          <p:cNvPr id="18" name="TextBox 17"/>
+          <p:cNvSpPr txBox="1"/>
+          <p:nvPr/>
+        </p:nvSpPr>
+        <p:spPr>
+          <a:xfrm>
+            <a:off x="8432596" y="3246120"/>
+            <a:ext cx="2844698" cy="822960"/>
+          </a:xfrm>
+          <a:prstGeom prst="rect">
+            <a:avLst/>
+          </a:prstGeom>
+          <a:noFill/>
+        </p:spPr>
+        <p:txBody>
+          <a:bodyPr wrap="square" anchor="t">
+            <a:spAutoFit/>
+          </a:bodyPr>
+          <a:lstStyle/>
+          <a:p>
+            <a:pPr algn="l">
+              <a:lnSpc>
+                <a:spcPct val="100000"/>
+              </a:lnSpc>
+            </a:pPr>
+            <a:r>
+              <a:rPr sz="2000" b="1">
+                <a:solidFill>
+                  <a:srgbClr val="F5F7FA"/>
+                </a:solidFill>
+                <a:latin typeface="Arial"/>
+              </a:rPr>
+              <a:t>If you go mobile</a:t>
+            </a:r>
+          </a:p>
+        </p:txBody>
+      </p:sp>
+      <p:sp>
+        <p:nvSpPr>
+          <p:cNvPr id="19" name="TextBox 18"/>
+          <p:cNvSpPr txBox="1"/>
+          <p:nvPr/>
+        </p:nvSpPr>
+        <p:spPr>
+          <a:xfrm>
+            <a:off x="8432596" y="4114800"/>
+            <a:ext cx="2844698" cy="1554480"/>
+          </a:xfrm>
+          <a:prstGeom prst="rect">
+            <a:avLst/>
+          </a:prstGeom>
+          <a:noFill/>
+        </p:spPr>
+        <p:txBody>
+          <a:bodyPr wrap="square" anchor="t">
+            <a:spAutoFit/>
+          </a:bodyPr>
+          <a:lstStyle/>
+          <a:p>
+            <a:pPr algn="l">
+              <a:lnSpc>
+                <a:spcPct val="110000"/>
+              </a:lnSpc>
+            </a:pPr>
+            <a:r>
+              <a:rPr sz="1500" b="0">
+                <a:solidFill>
+                  <a:srgbClr val="8A94A6"/>
+                </a:solidFill>
+                <a:latin typeface="Arial"/>
+              </a:rPr>
+              <a:t>Expo (+ AI tools like Rork / a0.dev) for React Native - more power, more setup.</a:t>
+            </a:r>
+          </a:p>
+        </p:txBody>
+      </p:sp>
+      <p:sp>
+        <p:nvSpPr>
+          <p:cNvPr id="20" name="TextBox 19"/>
+          <p:cNvSpPr txBox="1"/>
+          <p:nvPr/>
+        </p:nvSpPr>
+        <p:spPr>
+          <a:xfrm>
+            <a:off x="640080" y="6355080"/>
+            <a:ext cx="10972800" cy="365760"/>
+          </a:xfrm>
+          <a:prstGeom prst="rect">
+            <a:avLst/>
+          </a:prstGeom>
+          <a:noFill/>
+        </p:spPr>
+        <p:txBody>
+          <a:bodyPr wrap="square" anchor="t">
+            <a:spAutoFit/>
+          </a:bodyPr>
+          <a:lstStyle/>
+          <a:p>
+            <a:pPr algn="l">
+              <a:lnSpc>
+                <a:spcPct val="100000"/>
+              </a:lnSpc>
+            </a:pPr>
+            <a:r>
+              <a:rPr sz="1000" b="0">
+                <a:solidFill>
+                  <a:srgbClr val="5A6474"/>
+                </a:solidFill>
+                <a:latin typeface="Courier New"/>
+              </a:rPr>
+              <a:t>Good Code, Good Vibes · TECHIE 1121 · Cornell Tech · Summer 2026</a:t>
+            </a:r>
+          </a:p>
+        </p:txBody>
+      </p:sp>
+    </p:spTree>
+  </p:cSld>
+  <p:clrMapOvr>
+    <a:masterClrMapping/>
+  </p:clrMapOvr>
+</p:sld>
+</file>
+
+<file path=ppt/slides/slide18.xml><?xml version="1.0" encoding="utf-8"?>
+<p:sld xmlns:a="http://schemas.openxmlformats.org/drawingml/2006/main" xmlns:p="http://schemas.openxmlformats.org/presentationml/2006/main" xmlns:r="http://schemas.openxmlformats.org/officeDocument/2006/relationships">
+  <p:cSld>
+    <p:bg>
+      <p:bgPr>
+        <a:solidFill>
+          <a:srgbClr val="0B0E14"/>
+        </a:solidFill>
+        <a:effectLst/>
+      </p:bgPr>
+    </p:bg>
+    <p:spTree>
+      <p:nvGrpSpPr>
+        <p:cNvPr id="1" name=""/>
+        <p:cNvGrpSpPr/>
+        <p:nvPr/>
+      </p:nvGrpSpPr>
+      <p:grpSpPr/>
+      <p:sp>
+        <p:nvSpPr>
+          <p:cNvPr id="2" name="TextBox 1"/>
+          <p:cNvSpPr txBox="1"/>
+          <p:nvPr/>
+        </p:nvSpPr>
+        <p:spPr>
+          <a:xfrm>
+            <a:off x="640080" y="502920"/>
+            <a:ext cx="10058400" cy="365760"/>
+          </a:xfrm>
+          <a:prstGeom prst="rect">
+            <a:avLst/>
+          </a:prstGeom>
+          <a:noFill/>
+        </p:spPr>
+        <p:txBody>
+          <a:bodyPr wrap="square" anchor="t">
+            <a:spAutoFit/>
+          </a:bodyPr>
+          <a:lstStyle/>
+          <a:p>
+            <a:pPr algn="l">
+              <a:lnSpc>
+                <a:spcPct val="100000"/>
+              </a:lnSpc>
+            </a:pPr>
+            <a:r>
+              <a:rPr sz="1300" b="1">
+                <a:solidFill>
+                  <a:srgbClr val="00FF41"/>
+                </a:solidFill>
+                <a:latin typeface="Courier New"/>
+              </a:rPr>
+              <a:t>GAMES &amp; NATIVE: POSSIBLE - BUT NOT FOR THE FINAL</a:t>
+            </a:r>
+          </a:p>
+        </p:txBody>
+      </p:sp>
+      <p:sp>
+        <p:nvSpPr>
+          <p:cNvPr id="3" name="Rectangle 2"/>
+          <p:cNvSpPr/>
+          <p:nvPr/>
+        </p:nvSpPr>
+        <p:spPr>
+          <a:xfrm>
+            <a:off x="640080" y="932688"/>
+            <a:ext cx="822960" cy="73152"/>
+          </a:xfrm>
+          <a:prstGeom prst="rect">
+            <a:avLst/>
+          </a:prstGeom>
+          <a:solidFill>
+            <a:srgbClr val="00FF41"/>
+          </a:solidFill>
+          <a:ln>
+            <a:noFill/>
+          </a:ln>
+          <a:effectLst/>
+        </p:spPr>
+        <p:style>
+          <a:lnRef idx="1">
+            <a:schemeClr val="accent1"/>
+          </a:lnRef>
+          <a:fillRef idx="3">
+            <a:schemeClr val="accent1"/>
+          </a:fillRef>
+          <a:effectRef idx="2">
+            <a:schemeClr val="accent1"/>
+          </a:effectRef>
+          <a:fontRef idx="minor">
+            <a:schemeClr val="lt1"/>
+          </a:fontRef>
+        </p:style>
+        <p:txBody>
+          <a:bodyPr rtlCol="0" anchor="ctr"/>
+          <a:lstStyle/>
+          <a:p>
+            <a:pPr algn="ctr"/>
+          </a:p>
+        </p:txBody>
+      </p:sp>
+      <p:sp>
+        <p:nvSpPr>
+          <p:cNvPr id="4" name="TextBox 3"/>
+          <p:cNvSpPr txBox="1"/>
+          <p:nvPr/>
+        </p:nvSpPr>
+        <p:spPr>
+          <a:xfrm>
+            <a:off x="640080" y="1188720"/>
+            <a:ext cx="10972800" cy="1097280"/>
+          </a:xfrm>
+          <a:prstGeom prst="rect">
+            <a:avLst/>
+          </a:prstGeom>
+          <a:noFill/>
+        </p:spPr>
+        <p:txBody>
+          <a:bodyPr wrap="square" anchor="t">
+            <a:spAutoFit/>
+          </a:bodyPr>
+          <a:lstStyle/>
+          <a:p>
+            <a:pPr algn="l">
+              <a:lnSpc>
+                <a:spcPct val="100000"/>
+              </a:lnSpc>
+            </a:pPr>
+            <a:r>
+              <a:rPr sz="3400" b="1">
+                <a:solidFill>
+                  <a:srgbClr val="F5F7FA"/>
+                </a:solidFill>
+                <a:latin typeface="Arial"/>
+              </a:rPr>
+              <a:t>Great, just not this week</a:t>
+            </a:r>
+          </a:p>
+        </p:txBody>
+      </p:sp>
+      <p:sp>
+        <p:nvSpPr>
+          <p:cNvPr id="5" name="TextBox 4"/>
+          <p:cNvSpPr txBox="1"/>
+          <p:nvPr/>
+        </p:nvSpPr>
+        <p:spPr>
+          <a:xfrm>
+            <a:off x="658368" y="2286000"/>
+            <a:ext cx="10881360" cy="3657600"/>
+          </a:xfrm>
+          <a:prstGeom prst="rect">
+            <a:avLst/>
+          </a:prstGeom>
+          <a:noFill/>
+        </p:spPr>
+        <p:txBody>
+          <a:bodyPr wrap="square" anchor="t">
+            <a:spAutoFit/>
+          </a:bodyPr>
+          <a:lstStyle/>
+          <a:p>
+            <a:pPr algn="l">
+              <a:lnSpc>
+                <a:spcPct val="112000"/>
+              </a:lnSpc>
+            </a:pPr>
+            <a:r>
+              <a:rPr sz="1900" b="0">
+                <a:solidFill>
+                  <a:srgbClr val="F5F7FA"/>
+                </a:solidFill>
+                <a:latin typeface="Arial"/>
+              </a:rPr>
+              <a:t>Web game engines vibe-code nicely: </a:t>
+            </a:r>
+            <a:r>
+              <a:rPr sz="1900" b="1">
+                <a:solidFill>
+                  <a:srgbClr val="00FF41"/>
+                </a:solidFill>
+                <a:latin typeface="Arial"/>
+              </a:rPr>
+              <a:t>Phaser, Kaplay, Three.js (3D).</a:t>
+            </a:r>
+          </a:p>
+          <a:p>
+            <a:pPr algn="l">
+              <a:lnSpc>
+                <a:spcPct val="112000"/>
+              </a:lnSpc>
+            </a:pPr>
+            <a:r>
+              <a:rPr sz="2000" b="0">
+                <a:solidFill>
+                  <a:srgbClr val="F5F7FA"/>
+                </a:solidFill>
+                <a:latin typeface="Arial"/>
+              </a:rPr>
+              <a:t/>
+            </a:r>
+          </a:p>
+          <a:p>
+            <a:pPr algn="l">
+              <a:lnSpc>
+                <a:spcPct val="112000"/>
+              </a:lnSpc>
+            </a:pPr>
+            <a:r>
+              <a:rPr sz="1800" b="0">
+                <a:solidFill>
+                  <a:srgbClr val="8A94A6"/>
+                </a:solidFill>
+                <a:latin typeface="Arial"/>
+              </a:rPr>
+              <a:t>But games, native mobile builds, and engines like Godot / Unity need DIFFERENT dev + publishing setups - an extra time commitment we can't assume you have.</a:t>
+            </a:r>
+          </a:p>
+          <a:p>
+            <a:pPr algn="l">
+              <a:lnSpc>
+                <a:spcPct val="112000"/>
+              </a:lnSpc>
+            </a:pPr>
+            <a:r>
+              <a:rPr sz="2000" b="0">
+                <a:solidFill>
+                  <a:srgbClr val="F5F7FA"/>
+                </a:solidFill>
+                <a:latin typeface="Arial"/>
+              </a:rPr>
+              <a:t/>
+            </a:r>
+          </a:p>
+          <a:p>
+            <a:pPr algn="l">
+              <a:lnSpc>
+                <a:spcPct val="112000"/>
+              </a:lnSpc>
+            </a:pPr>
+            <a:r>
+              <a:rPr sz="1800" b="0">
+                <a:solidFill>
+                  <a:srgbClr val="F5F7FA"/>
+                </a:solidFill>
+                <a:latin typeface="Arial"/>
+              </a:rPr>
+              <a:t>For the final: stick to the web prototype. Explore the rest after the course.</a:t>
+            </a:r>
+          </a:p>
+        </p:txBody>
+      </p:sp>
+      <p:sp>
+        <p:nvSpPr>
+          <p:cNvPr id="6" name="TextBox 5"/>
+          <p:cNvSpPr txBox="1"/>
+          <p:nvPr/>
+        </p:nvSpPr>
+        <p:spPr>
+          <a:xfrm>
+            <a:off x="640080" y="6355080"/>
+            <a:ext cx="10972800" cy="365760"/>
+          </a:xfrm>
+          <a:prstGeom prst="rect">
+            <a:avLst/>
+          </a:prstGeom>
+          <a:noFill/>
+        </p:spPr>
+        <p:txBody>
+          <a:bodyPr wrap="square" anchor="t">
+            <a:spAutoFit/>
+          </a:bodyPr>
+          <a:lstStyle/>
+          <a:p>
+            <a:pPr algn="l">
+              <a:lnSpc>
+                <a:spcPct val="100000"/>
+              </a:lnSpc>
+            </a:pPr>
+            <a:r>
+              <a:rPr sz="1000" b="0">
+                <a:solidFill>
+                  <a:srgbClr val="5A6474"/>
+                </a:solidFill>
+                <a:latin typeface="Courier New"/>
+              </a:rPr>
+              <a:t>Good Code, Good Vibes · TECHIE 1121 · Cornell Tech · Summer 2026</a:t>
+            </a:r>
+          </a:p>
+        </p:txBody>
+      </p:sp>
+    </p:spTree>
+  </p:cSld>
+  <p:clrMapOvr>
+    <a:masterClrMapping/>
+  </p:clrMapOvr>
+</p:sld>
+</file>
+
+<file path=ppt/slides/slide19.xml><?xml version="1.0" encoding="utf-8"?>
+<p:sld xmlns:a="http://schemas.openxmlformats.org/drawingml/2006/main" xmlns:p="http://schemas.openxmlformats.org/presentationml/2006/main" xmlns:r="http://schemas.openxmlformats.org/officeDocument/2006/relationships">
+  <p:cSld>
+    <p:bg>
+      <p:bgPr>
+        <a:solidFill>
+          <a:srgbClr val="0B0E14"/>
+        </a:solidFill>
+        <a:effectLst/>
+      </p:bgPr>
+    </p:bg>
+    <p:spTree>
+      <p:nvGrpSpPr>
+        <p:cNvPr id="1" name=""/>
+        <p:cNvGrpSpPr/>
+        <p:nvPr/>
+      </p:nvGrpSpPr>
+      <p:grpSpPr/>
+      <p:sp>
+        <p:nvSpPr>
+          <p:cNvPr id="2" name="TextBox 1"/>
+          <p:cNvSpPr txBox="1"/>
+          <p:nvPr/>
+        </p:nvSpPr>
+        <p:spPr>
+          <a:xfrm>
+            <a:off x="640080" y="502920"/>
+            <a:ext cx="10058400" cy="365760"/>
+          </a:xfrm>
+          <a:prstGeom prst="rect">
+            <a:avLst/>
+          </a:prstGeom>
+          <a:noFill/>
+        </p:spPr>
+        <p:txBody>
+          <a:bodyPr wrap="square" anchor="t">
+            <a:spAutoFit/>
+          </a:bodyPr>
+          <a:lstStyle/>
+          <a:p>
+            <a:pPr algn="l">
+              <a:lnSpc>
+                <a:spcPct val="100000"/>
+              </a:lnSpc>
+            </a:pPr>
+            <a:r>
+              <a:rPr sz="1300" b="1">
+                <a:solidFill>
+                  <a:srgbClr val="00FF41"/>
+                </a:solidFill>
+                <a:latin typeface="Courier New"/>
+              </a:rPr>
+              <a:t>LAST 30 MINUTES - START VIBE CODING</a:t>
+            </a:r>
+          </a:p>
+        </p:txBody>
+      </p:sp>
+      <p:sp>
+        <p:nvSpPr>
+          <p:cNvPr id="3" name="Rectangle 2"/>
+          <p:cNvSpPr/>
+          <p:nvPr/>
+        </p:nvSpPr>
+        <p:spPr>
+          <a:xfrm>
+            <a:off x="640080" y="932688"/>
+            <a:ext cx="822960" cy="73152"/>
+          </a:xfrm>
+          <a:prstGeom prst="rect">
+            <a:avLst/>
+          </a:prstGeom>
+          <a:solidFill>
+            <a:srgbClr val="00FF41"/>
+          </a:solidFill>
+          <a:ln>
+            <a:noFill/>
+          </a:ln>
+          <a:effectLst/>
+        </p:spPr>
+        <p:style>
+          <a:lnRef idx="1">
+            <a:schemeClr val="accent1"/>
+          </a:lnRef>
+          <a:fillRef idx="3">
+            <a:schemeClr val="accent1"/>
+          </a:fillRef>
+          <a:effectRef idx="2">
+            <a:schemeClr val="accent1"/>
+          </a:effectRef>
+          <a:fontRef idx="minor">
+            <a:schemeClr val="lt1"/>
+          </a:fontRef>
+        </p:style>
+        <p:txBody>
+          <a:bodyPr rtlCol="0" anchor="ctr"/>
+          <a:lstStyle/>
+          <a:p>
+            <a:pPr algn="ctr"/>
+          </a:p>
+        </p:txBody>
+      </p:sp>
+      <p:sp>
+        <p:nvSpPr>
+          <p:cNvPr id="4" name="TextBox 3"/>
+          <p:cNvSpPr txBox="1"/>
+          <p:nvPr/>
+        </p:nvSpPr>
+        <p:spPr>
+          <a:xfrm>
+            <a:off x="640080" y="1188720"/>
+            <a:ext cx="10972800" cy="1097280"/>
+          </a:xfrm>
+          <a:prstGeom prst="rect">
+            <a:avLst/>
+          </a:prstGeom>
+          <a:noFill/>
+        </p:spPr>
+        <p:txBody>
+          <a:bodyPr wrap="square" anchor="t">
+            <a:spAutoFit/>
+          </a:bodyPr>
+          <a:lstStyle/>
+          <a:p>
+            <a:pPr algn="l">
+              <a:lnSpc>
+                <a:spcPct val="100000"/>
+              </a:lnSpc>
+            </a:pPr>
+            <a:r>
+              <a:rPr sz="3400" b="1">
+                <a:solidFill>
+                  <a:srgbClr val="F5F7FA"/>
+                </a:solidFill>
+                <a:latin typeface="Arial"/>
+              </a:rPr>
+              <a:t>Don't wait for Thursday to open the repo</a:t>
+            </a:r>
+          </a:p>
+        </p:txBody>
+      </p:sp>
+      <p:sp>
+        <p:nvSpPr>
+          <p:cNvPr id="5" name="TextBox 4"/>
+          <p:cNvSpPr txBox="1"/>
+          <p:nvPr/>
+        </p:nvSpPr>
+        <p:spPr>
+          <a:xfrm>
+            <a:off x="658368" y="2286000"/>
+            <a:ext cx="10881360" cy="3657600"/>
+          </a:xfrm>
+          <a:prstGeom prst="rect">
+            <a:avLst/>
+          </a:prstGeom>
+          <a:noFill/>
+        </p:spPr>
+        <p:txBody>
+          <a:bodyPr wrap="square" anchor="t">
+            <a:spAutoFit/>
+          </a:bodyPr>
+          <a:lstStyle/>
+          <a:p>
+            <a:pPr algn="l">
+              <a:lnSpc>
+                <a:spcPct val="112000"/>
+              </a:lnSpc>
+            </a:pPr>
+            <a:r>
               <a:rPr sz="2100" b="0">
                 <a:solidFill>
                   <a:srgbClr val="F5F7FA"/>
                 </a:solidFill>
                 <a:latin typeface="Arial"/>
               </a:rPr>
-              <a:t>Tomorrow is a full build day (no lecture): build straight from the prompts your value tree produced, then showcase it in the afternoon (3-5).</a:t>
+              <a:t>Once the plan is locked, spend the final half hour getting a head start:</a:t>
             </a:r>
           </a:p>
           <a:p>
@@ -5158,13 +8207,45 @@
               </a:lnSpc>
             </a:pPr>
             <a:r>
+              <a:rPr sz="1900" b="1">
+                <a:solidFill>
+                  <a:srgbClr val="00FF41"/>
+                </a:solidFill>
+                <a:latin typeface="Arial"/>
+              </a:rPr>
+              <a:t>Open your team repo, run the FIRST prompt from your value tree, and get anything at all on screen.</a:t>
+            </a:r>
+          </a:p>
+          <a:p>
+            <a:pPr algn="l">
+              <a:lnSpc>
+                <a:spcPct val="112000"/>
+              </a:lnSpc>
+            </a:pPr>
+            <a:r>
+              <a:rPr sz="2000" b="0">
+                <a:solidFill>
+                  <a:srgbClr val="F5F7FA"/>
+                </a:solidFill>
+                <a:latin typeface="Arial"/>
+              </a:rPr>
+              <a:t/>
+            </a:r>
+          </a:p>
+          <a:p>
+            <a:pPr algn="l">
+              <a:lnSpc>
+                <a:spcPct val="112000"/>
+              </a:lnSpc>
+            </a:pPr>
+            <a:r>
               <a:rPr sz="1700" b="0">
                 <a:solidFill>
                   <a:srgbClr val="8A94A6"/>
                 </a:solidFill>
                 <a:latin typeface="Arial"/>
               </a:rPr>
-              <a:t>Guest lecture today: Remy Stewart (Figma). Bring your questions about design + prototyping.</a:t>
+              <a:t>Thursday has no lecture - it's all build - so every minute you start now is a minute you keep tomorrow.</a:t>
             </a:r>
           </a:p>
         </p:txBody>
@@ -5483,6 +8564,264 @@
 </p:sld>
 </file>
 
+<file path=ppt/slides/slide20.xml><?xml version="1.0" encoding="utf-8"?>
+<p:sld xmlns:a="http://schemas.openxmlformats.org/drawingml/2006/main" xmlns:p="http://schemas.openxmlformats.org/presentationml/2006/main" xmlns:r="http://schemas.openxmlformats.org/officeDocument/2006/relationships">
+  <p:cSld>
+    <p:bg>
+      <p:bgPr>
+        <a:solidFill>
+          <a:srgbClr val="0B0E14"/>
+        </a:solidFill>
+        <a:effectLst/>
+      </p:bgPr>
+    </p:bg>
+    <p:spTree>
+      <p:nvGrpSpPr>
+        <p:cNvPr id="1" name=""/>
+        <p:cNvGrpSpPr/>
+        <p:nvPr/>
+      </p:nvGrpSpPr>
+      <p:grpSpPr/>
+      <p:sp>
+        <p:nvSpPr>
+          <p:cNvPr id="2" name="TextBox 1"/>
+          <p:cNvSpPr txBox="1"/>
+          <p:nvPr/>
+        </p:nvSpPr>
+        <p:spPr>
+          <a:xfrm>
+            <a:off x="640080" y="502920"/>
+            <a:ext cx="10058400" cy="365760"/>
+          </a:xfrm>
+          <a:prstGeom prst="rect">
+            <a:avLst/>
+          </a:prstGeom>
+          <a:noFill/>
+        </p:spPr>
+        <p:txBody>
+          <a:bodyPr wrap="square" anchor="t">
+            <a:spAutoFit/>
+          </a:bodyPr>
+          <a:lstStyle/>
+          <a:p>
+            <a:pPr algn="l">
+              <a:lnSpc>
+                <a:spcPct val="100000"/>
+              </a:lnSpc>
+            </a:pPr>
+            <a:r>
+              <a:rPr sz="1300" b="1">
+                <a:solidFill>
+                  <a:srgbClr val="00FF41"/>
+                </a:solidFill>
+                <a:latin typeface="Courier New"/>
+              </a:rPr>
+              <a:t>CARRY IT TO THURSDAY</a:t>
+            </a:r>
+          </a:p>
+        </p:txBody>
+      </p:sp>
+      <p:sp>
+        <p:nvSpPr>
+          <p:cNvPr id="3" name="Rectangle 2"/>
+          <p:cNvSpPr/>
+          <p:nvPr/>
+        </p:nvSpPr>
+        <p:spPr>
+          <a:xfrm>
+            <a:off x="640080" y="932688"/>
+            <a:ext cx="822960" cy="73152"/>
+          </a:xfrm>
+          <a:prstGeom prst="rect">
+            <a:avLst/>
+          </a:prstGeom>
+          <a:solidFill>
+            <a:srgbClr val="00FF41"/>
+          </a:solidFill>
+          <a:ln>
+            <a:noFill/>
+          </a:ln>
+          <a:effectLst/>
+        </p:spPr>
+        <p:style>
+          <a:lnRef idx="1">
+            <a:schemeClr val="accent1"/>
+          </a:lnRef>
+          <a:fillRef idx="3">
+            <a:schemeClr val="accent1"/>
+          </a:fillRef>
+          <a:effectRef idx="2">
+            <a:schemeClr val="accent1"/>
+          </a:effectRef>
+          <a:fontRef idx="minor">
+            <a:schemeClr val="lt1"/>
+          </a:fontRef>
+        </p:style>
+        <p:txBody>
+          <a:bodyPr rtlCol="0" anchor="ctr"/>
+          <a:lstStyle/>
+          <a:p>
+            <a:pPr algn="ctr"/>
+          </a:p>
+        </p:txBody>
+      </p:sp>
+      <p:sp>
+        <p:nvSpPr>
+          <p:cNvPr id="4" name="TextBox 3"/>
+          <p:cNvSpPr txBox="1"/>
+          <p:nvPr/>
+        </p:nvSpPr>
+        <p:spPr>
+          <a:xfrm>
+            <a:off x="640080" y="1188720"/>
+            <a:ext cx="10972800" cy="1097280"/>
+          </a:xfrm>
+          <a:prstGeom prst="rect">
+            <a:avLst/>
+          </a:prstGeom>
+          <a:noFill/>
+        </p:spPr>
+        <p:txBody>
+          <a:bodyPr wrap="square" anchor="t">
+            <a:spAutoFit/>
+          </a:bodyPr>
+          <a:lstStyle/>
+          <a:p>
+            <a:pPr algn="l">
+              <a:lnSpc>
+                <a:spcPct val="100000"/>
+              </a:lnSpc>
+            </a:pPr>
+            <a:r>
+              <a:rPr sz="3400" b="1">
+                <a:solidFill>
+                  <a:srgbClr val="F5F7FA"/>
+                </a:solidFill>
+                <a:latin typeface="Arial"/>
+              </a:rPr>
+              <a:t>Your plan is your build</a:t>
+            </a:r>
+          </a:p>
+        </p:txBody>
+      </p:sp>
+      <p:sp>
+        <p:nvSpPr>
+          <p:cNvPr id="5" name="TextBox 4"/>
+          <p:cNvSpPr txBox="1"/>
+          <p:nvPr/>
+        </p:nvSpPr>
+        <p:spPr>
+          <a:xfrm>
+            <a:off x="658368" y="2286000"/>
+            <a:ext cx="10881360" cy="3657600"/>
+          </a:xfrm>
+          <a:prstGeom prst="rect">
+            <a:avLst/>
+          </a:prstGeom>
+          <a:noFill/>
+        </p:spPr>
+        <p:txBody>
+          <a:bodyPr wrap="square" anchor="t">
+            <a:spAutoFit/>
+          </a:bodyPr>
+          <a:lstStyle/>
+          <a:p>
+            <a:pPr algn="l">
+              <a:lnSpc>
+                <a:spcPct val="112000"/>
+              </a:lnSpc>
+            </a:pPr>
+            <a:r>
+              <a:rPr sz="2100" b="0">
+                <a:solidFill>
+                  <a:srgbClr val="F5F7FA"/>
+                </a:solidFill>
+                <a:latin typeface="Arial"/>
+              </a:rPr>
+              <a:t>Tomorrow is a full build day (no lecture): build straight from the prompts your value tree produced, then showcase it in the afternoon (3-5).</a:t>
+            </a:r>
+          </a:p>
+          <a:p>
+            <a:pPr algn="l">
+              <a:lnSpc>
+                <a:spcPct val="112000"/>
+              </a:lnSpc>
+            </a:pPr>
+            <a:r>
+              <a:rPr sz="2000" b="0">
+                <a:solidFill>
+                  <a:srgbClr val="F5F7FA"/>
+                </a:solidFill>
+                <a:latin typeface="Arial"/>
+              </a:rPr>
+              <a:t/>
+            </a:r>
+          </a:p>
+          <a:p>
+            <a:pPr algn="l">
+              <a:lnSpc>
+                <a:spcPct val="112000"/>
+              </a:lnSpc>
+            </a:pPr>
+            <a:r>
+              <a:rPr sz="1700" b="0">
+                <a:solidFill>
+                  <a:srgbClr val="8A94A6"/>
+                </a:solidFill>
+                <a:latin typeface="Arial"/>
+              </a:rPr>
+              <a:t>Guest lecture today: Remy Stewart (Figma). Bring your questions about design + prototyping.</a:t>
+            </a:r>
+          </a:p>
+        </p:txBody>
+      </p:sp>
+      <p:sp>
+        <p:nvSpPr>
+          <p:cNvPr id="6" name="TextBox 5"/>
+          <p:cNvSpPr txBox="1"/>
+          <p:nvPr/>
+        </p:nvSpPr>
+        <p:spPr>
+          <a:xfrm>
+            <a:off x="640080" y="6355080"/>
+            <a:ext cx="10972800" cy="365760"/>
+          </a:xfrm>
+          <a:prstGeom prst="rect">
+            <a:avLst/>
+          </a:prstGeom>
+          <a:noFill/>
+        </p:spPr>
+        <p:txBody>
+          <a:bodyPr wrap="square" anchor="t">
+            <a:spAutoFit/>
+          </a:bodyPr>
+          <a:lstStyle/>
+          <a:p>
+            <a:pPr algn="l">
+              <a:lnSpc>
+                <a:spcPct val="100000"/>
+              </a:lnSpc>
+            </a:pPr>
+            <a:r>
+              <a:rPr sz="1000" b="0">
+                <a:solidFill>
+                  <a:srgbClr val="5A6474"/>
+                </a:solidFill>
+                <a:latin typeface="Courier New"/>
+              </a:rPr>
+              <a:t>Good Code, Good Vibes · TECHIE 1121 · Cornell Tech · Summer 2026</a:t>
+            </a:r>
+          </a:p>
+        </p:txBody>
+      </p:sp>
+    </p:spTree>
+  </p:cSld>
+  <p:clrMapOvr>
+    <a:masterClrMapping/>
+  </p:clrMapOvr>
+</p:sld>
+</file>
+
 <file path=ppt/slides/slide3.xml><?xml version="1.0" encoding="utf-8"?>
 <p:sld xmlns:a="http://schemas.openxmlformats.org/drawingml/2006/main" xmlns:p="http://schemas.openxmlformats.org/presentationml/2006/main" xmlns:r="http://schemas.openxmlformats.org/officeDocument/2006/relationships">
   <p:cSld>
@@ -5535,7 +8874,7 @@
                 </a:solidFill>
                 <a:latin typeface="Courier New"/>
               </a:rPr>
-              <a:t>KEEP YOUR VALUE</a:t>
+              <a:t>RESEARCH SHARE-OUT - CARRY-OVER FROM TUESDAY</a:t>
             </a:r>
           </a:p>
         </p:txBody>
@@ -5592,8 +8931,8 @@
         </p:nvSpPr>
         <p:spPr>
           <a:xfrm>
-            <a:off x="640080" y="1188720"/>
-            <a:ext cx="10972800" cy="1097280"/>
+            <a:off x="640080" y="1325880"/>
+            <a:ext cx="10972800" cy="1828800"/>
           </a:xfrm>
           <a:prstGeom prst="rect">
             <a:avLst/>
@@ -5608,17 +8947,17 @@
           <a:p>
             <a:pPr algn="l">
               <a:lnSpc>
-                <a:spcPct val="100000"/>
-              </a:lnSpc>
-            </a:pPr>
-            <a:r>
-              <a:rPr sz="3400" b="1">
+                <a:spcPct val="105000"/>
+              </a:lnSpc>
+            </a:pPr>
+            <a:r>
+              <a:rPr sz="3800" b="1">
                 <a:solidFill>
                   <a:srgbClr val="F5F7FA"/>
                 </a:solidFill>
                 <a:latin typeface="Arial"/>
               </a:rPr>
-              <a:t>Change the design, not the commitment</a:t>
+              <a:t>The teams we didn't hear yet - one minute each.</a:t>
             </a:r>
           </a:p>
         </p:txBody>
@@ -5631,8 +8970,8 @@
         </p:nvSpPr>
         <p:spPr>
           <a:xfrm>
-            <a:off x="658368" y="2286000"/>
-            <a:ext cx="10881360" cy="3657600"/>
+            <a:off x="658368" y="3611880"/>
+            <a:ext cx="10972800" cy="1737360"/>
           </a:xfrm>
           <a:prstGeom prst="rect">
             <a:avLst/>
@@ -5647,56 +8986,177 @@
           <a:p>
             <a:pPr algn="l">
               <a:lnSpc>
-                <a:spcPct val="112000"/>
-              </a:lnSpc>
-            </a:pPr>
-            <a:r>
-              <a:rPr sz="2100" b="0">
+                <a:spcPct val="135000"/>
+              </a:lnSpc>
+            </a:pPr>
+            <a:r>
+              <a:rPr sz="1900" b="1">
+                <a:solidFill>
+                  <a:srgbClr val="00FF41"/>
+                </a:solidFill>
+                <a:latin typeface="Arial"/>
+              </a:rPr>
+              <a:t>→  </a:t>
+            </a:r>
+            <a:r>
+              <a:rPr sz="1900" b="0">
+                <a:solidFill>
+                  <a:srgbClr val="8A94A6"/>
+                </a:solidFill>
+                <a:latin typeface="Arial"/>
+              </a:rPr>
+              <a:t>Your value, and the STRONGEST thing your research said.</a:t>
+            </a:r>
+          </a:p>
+          <a:p>
+            <a:pPr algn="l">
+              <a:lnSpc>
+                <a:spcPct val="135000"/>
+              </a:lnSpc>
+            </a:pPr>
+            <a:r>
+              <a:rPr sz="1900" b="1">
+                <a:solidFill>
+                  <a:srgbClr val="00FF41"/>
+                </a:solidFill>
+                <a:latin typeface="Arial"/>
+              </a:rPr>
+              <a:t>→  </a:t>
+            </a:r>
+            <a:r>
+              <a:rPr sz="1900" b="0">
+                <a:solidFill>
+                  <a:srgbClr val="8A94A6"/>
+                </a:solidFill>
+                <a:latin typeface="Arial"/>
+              </a:rPr>
+              <a:t>The design direction it points to - what would move the value?</a:t>
+            </a:r>
+          </a:p>
+          <a:p>
+            <a:pPr algn="l">
+              <a:lnSpc>
+                <a:spcPct val="135000"/>
+              </a:lnSpc>
+            </a:pPr>
+            <a:r>
+              <a:rPr sz="1900" b="1">
+                <a:solidFill>
+                  <a:srgbClr val="00FF41"/>
+                </a:solidFill>
+                <a:latin typeface="Arial"/>
+              </a:rPr>
+              <a:t>→  </a:t>
+            </a:r>
+            <a:r>
+              <a:rPr sz="1900" b="0">
+                <a:solidFill>
+                  <a:srgbClr val="8A94A6"/>
+                </a:solidFill>
+                <a:latin typeface="Arial"/>
+              </a:rPr>
+              <a:t>Listen for approaches you could borrow for your own plan.</a:t>
+            </a:r>
+          </a:p>
+        </p:txBody>
+      </p:sp>
+      <p:sp>
+        <p:nvSpPr>
+          <p:cNvPr id="6" name="Rounded Rectangle 5"/>
+          <p:cNvSpPr/>
+          <p:nvPr/>
+        </p:nvSpPr>
+        <p:spPr>
+          <a:xfrm>
+            <a:off x="640080" y="5532120"/>
+            <a:ext cx="10911535" cy="658368"/>
+          </a:xfrm>
+          <a:prstGeom prst="roundRect">
+            <a:avLst/>
+          </a:prstGeom>
+          <a:solidFill>
+            <a:srgbClr val="151B26"/>
+          </a:solidFill>
+          <a:ln w="19050">
+            <a:solidFill>
+              <a:srgbClr val="00FF41"/>
+            </a:solidFill>
+          </a:ln>
+          <a:effectLst/>
+        </p:spPr>
+        <p:style>
+          <a:lnRef idx="1">
+            <a:schemeClr val="accent1"/>
+          </a:lnRef>
+          <a:fillRef idx="3">
+            <a:schemeClr val="accent1"/>
+          </a:fillRef>
+          <a:effectRef idx="2">
+            <a:schemeClr val="accent1"/>
+          </a:effectRef>
+          <a:fontRef idx="minor">
+            <a:schemeClr val="lt1"/>
+          </a:fontRef>
+        </p:style>
+        <p:txBody>
+          <a:bodyPr rtlCol="0" anchor="ctr"/>
+          <a:lstStyle/>
+          <a:p>
+            <a:pPr algn="ctr"/>
+          </a:p>
+        </p:txBody>
+      </p:sp>
+      <p:sp>
+        <p:nvSpPr>
+          <p:cNvPr id="7" name="TextBox 6"/>
+          <p:cNvSpPr txBox="1"/>
+          <p:nvPr/>
+        </p:nvSpPr>
+        <p:spPr>
+          <a:xfrm>
+            <a:off x="914400" y="5532120"/>
+            <a:ext cx="10362895" cy="658368"/>
+          </a:xfrm>
+          <a:prstGeom prst="rect">
+            <a:avLst/>
+          </a:prstGeom>
+          <a:noFill/>
+        </p:spPr>
+        <p:txBody>
+          <a:bodyPr wrap="square" anchor="ctr">
+            <a:spAutoFit/>
+          </a:bodyPr>
+          <a:lstStyle/>
+          <a:p>
+            <a:pPr algn="l">
+              <a:lnSpc>
+                <a:spcPct val="100000"/>
+              </a:lnSpc>
+            </a:pPr>
+            <a:r>
+              <a:rPr sz="1600" b="1">
+                <a:solidFill>
+                  <a:srgbClr val="00FF41"/>
+                </a:solidFill>
+                <a:latin typeface="Arial"/>
+              </a:rPr>
+              <a:t>▶  </a:t>
+            </a:r>
+            <a:r>
+              <a:rPr sz="1600" b="1">
                 <a:solidFill>
                   <a:srgbClr val="F5F7FA"/>
                 </a:solidFill>
                 <a:latin typeface="Arial"/>
               </a:rPr>
-              <a:t>You already have a value and what Tuesday's verification showed. The final is the NEXT iteration of that value - not a new theme.</a:t>
-            </a:r>
-          </a:p>
-          <a:p>
-            <a:pPr algn="l">
-              <a:lnSpc>
-                <a:spcPct val="112000"/>
-              </a:lnSpc>
-            </a:pPr>
-            <a:r>
-              <a:rPr sz="2000" b="0">
-                <a:solidFill>
-                  <a:srgbClr val="F5F7FA"/>
-                </a:solidFill>
-                <a:latin typeface="Arial"/>
-              </a:rPr>
-              <a:t/>
-            </a:r>
-          </a:p>
-          <a:p>
-            <a:pPr algn="l">
-              <a:lnSpc>
-                <a:spcPct val="112000"/>
-              </a:lnSpc>
-            </a:pPr>
-            <a:r>
-              <a:rPr sz="1900" b="0">
-                <a:solidFill>
-                  <a:srgbClr val="8A94A6"/>
-                </a:solidFill>
-                <a:latin typeface="Arial"/>
-              </a:rPr>
-              <a:t>Today's job: name a specific beneficiary, and find what they actually need.</a:t>
-            </a:r>
-          </a:p>
-        </p:txBody>
-      </p:sp>
-      <p:sp>
-        <p:nvSpPr>
-          <p:cNvPr id="6" name="TextBox 5"/>
+              <a:t>Quick round right after the guest talk - then we go straight into planning</a:t>
+            </a:r>
+          </a:p>
+        </p:txBody>
+      </p:sp>
+      <p:sp>
+        <p:nvSpPr>
+          <p:cNvPr id="8" name="TextBox 7"/>
           <p:cNvSpPr txBox="1"/>
           <p:nvPr/>
         </p:nvSpPr>
@@ -5793,7 +9253,7 @@
                 </a:solidFill>
                 <a:latin typeface="Courier New"/>
               </a:rPr>
-              <a:t>BUILD YOUR PERSONA</a:t>
+              <a:t>KEEP YOUR VALUE</a:t>
             </a:r>
           </a:p>
         </p:txBody>
@@ -5876,7 +9336,7 @@
                 </a:solidFill>
                 <a:latin typeface="Arial"/>
               </a:rPr>
-              <a:t>One specific human - not "everyone"</a:t>
+              <a:t>Change the design, not the commitment</a:t>
             </a:r>
           </a:p>
         </p:txBody>
@@ -5909,13 +9369,29 @@
               </a:lnSpc>
             </a:pPr>
             <a:r>
+              <a:rPr sz="2100" b="0">
+                <a:solidFill>
+                  <a:srgbClr val="F5F7FA"/>
+                </a:solidFill>
+                <a:latin typeface="Arial"/>
+              </a:rPr>
+              <a:t>You already have a value and what Tuesday's verification showed. The final is the NEXT iteration of that value - not a new theme.</a:t>
+            </a:r>
+          </a:p>
+          <a:p>
+            <a:pPr algn="l">
+              <a:lnSpc>
+                <a:spcPct val="112000"/>
+              </a:lnSpc>
+            </a:pPr>
+            <a:r>
               <a:rPr sz="2000" b="0">
                 <a:solidFill>
                   <a:srgbClr val="F5F7FA"/>
                 </a:solidFill>
                 <a:latin typeface="Arial"/>
               </a:rPr>
-              <a:t>Name a specific beneficiary OUTSIDE this class, and build a persona: name, situation, goal, frustration, context - and where they MEET or LOSE your value in their day.</a:t>
+              <a:t/>
             </a:r>
           </a:p>
           <a:p>
@@ -5925,29 +9401,13 @@
               </a:lnSpc>
             </a:pPr>
             <a:r>
-              <a:rPr sz="2000" b="0">
-                <a:solidFill>
-                  <a:srgbClr val="F5F7FA"/>
+              <a:rPr sz="1900" b="0">
+                <a:solidFill>
+                  <a:srgbClr val="8A94A6"/>
                 </a:solidFill>
                 <a:latin typeface="Arial"/>
               </a:rPr>
-              <a:t/>
-            </a:r>
-          </a:p>
-          <a:p>
-            <a:pPr algn="l">
-              <a:lnSpc>
-                <a:spcPct val="112000"/>
-              </a:lnSpc>
-            </a:pPr>
-            <a:r>
-              <a:rPr sz="1800" b="0">
-                <a:solidFill>
-                  <a:srgbClr val="8A94A6"/>
-                </a:solidFill>
-                <a:latin typeface="Arial"/>
-              </a:rPr>
-              <a:t>Use a template: the Figma 'User Persona Template Set' (community) or a Google Slides deck. Add a photo/sketch so it feels like a person.</a:t>
+              <a:t>Today's job: name a specific beneficiary, and find what they actually need.</a:t>
             </a:r>
           </a:p>
         </p:txBody>
@@ -6051,7 +9511,7 @@
                 </a:solidFill>
                 <a:latin typeface="Courier New"/>
               </a:rPr>
-              <a:t>ELICIT THE NEED - INTERVIEW YOUR PERSONA AS A CHATBOT</a:t>
+              <a:t>THREE TOOLS, VALUE-FIRST</a:t>
             </a:r>
           </a:p>
         </p:txBody>
@@ -6108,8 +9568,8 @@
         </p:nvSpPr>
         <p:spPr>
           <a:xfrm>
-            <a:off x="640080" y="1325880"/>
-            <a:ext cx="10972800" cy="1828800"/>
+            <a:off x="640080" y="1188720"/>
+            <a:ext cx="10972800" cy="914400"/>
           </a:xfrm>
           <a:prstGeom prst="rect">
             <a:avLst/>
@@ -6124,129 +9584,31 @@
           <a:p>
             <a:pPr algn="l">
               <a:lnSpc>
-                <a:spcPct val="105000"/>
-              </a:lnSpc>
-            </a:pPr>
-            <a:r>
-              <a:rPr sz="3800" b="1">
+                <a:spcPct val="100000"/>
+              </a:lnSpc>
+            </a:pPr>
+            <a:r>
+              <a:rPr sz="3200" b="1">
                 <a:solidFill>
                   <a:srgbClr val="F5F7FA"/>
                 </a:solidFill>
                 <a:latin typeface="Arial"/>
               </a:rPr>
-              <a:t>No time to find a stranger? Interview the persona you built.</a:t>
-            </a:r>
-          </a:p>
-        </p:txBody>
-      </p:sp>
-      <p:sp>
-        <p:nvSpPr>
-          <p:cNvPr id="5" name="TextBox 4"/>
-          <p:cNvSpPr txBox="1"/>
-          <p:nvPr/>
-        </p:nvSpPr>
-        <p:spPr>
-          <a:xfrm>
-            <a:off x="658368" y="3611880"/>
-            <a:ext cx="10972800" cy="1737360"/>
-          </a:xfrm>
-          <a:prstGeom prst="rect">
-            <a:avLst/>
-          </a:prstGeom>
-          <a:noFill/>
-        </p:spPr>
-        <p:txBody>
-          <a:bodyPr wrap="square" anchor="t">
-            <a:spAutoFit/>
-          </a:bodyPr>
-          <a:lstStyle/>
-          <a:p>
-            <a:pPr algn="l">
-              <a:lnSpc>
-                <a:spcPct val="135000"/>
-              </a:lnSpc>
-            </a:pPr>
-            <a:r>
-              <a:rPr sz="1900" b="1">
-                <a:solidFill>
-                  <a:srgbClr val="00FF41"/>
-                </a:solidFill>
-                <a:latin typeface="Arial"/>
-              </a:rPr>
-              <a:t>→  </a:t>
-            </a:r>
-            <a:r>
-              <a:rPr sz="1900" b="0">
-                <a:solidFill>
-                  <a:srgbClr val="8A94A6"/>
-                </a:solidFill>
-                <a:latin typeface="Arial"/>
-              </a:rPr>
-              <a:t>Turn your persona into an AI chatbot - give it RICH detail: its life, constraints, what it cares about.</a:t>
-            </a:r>
-          </a:p>
-          <a:p>
-            <a:pPr algn="l">
-              <a:lnSpc>
-                <a:spcPct val="135000"/>
-              </a:lnSpc>
-            </a:pPr>
-            <a:r>
-              <a:rPr sz="1900" b="1">
-                <a:solidFill>
-                  <a:srgbClr val="00FF41"/>
-                </a:solidFill>
-                <a:latin typeface="Arial"/>
-              </a:rPr>
-              <a:t>→  </a:t>
-            </a:r>
-            <a:r>
-              <a:rPr sz="1900" b="0">
-                <a:solidFill>
-                  <a:srgbClr val="8A94A6"/>
-                </a:solidFill>
-                <a:latin typeface="Arial"/>
-              </a:rPr>
-              <a:t>Run a short interview about ITS problem, not your idea. Capture the need in its words.</a:t>
-            </a:r>
-          </a:p>
-          <a:p>
-            <a:pPr algn="l">
-              <a:lnSpc>
-                <a:spcPct val="135000"/>
-              </a:lnSpc>
-            </a:pPr>
-            <a:r>
-              <a:rPr sz="1900" b="1">
-                <a:solidFill>
-                  <a:srgbClr val="00FF41"/>
-                </a:solidFill>
-                <a:latin typeface="Arial"/>
-              </a:rPr>
-              <a:t>→  </a:t>
-            </a:r>
-            <a:r>
-              <a:rPr sz="1900" b="0">
-                <a:solidFill>
-                  <a:srgbClr val="8A94A6"/>
-                </a:solidFill>
-                <a:latin typeface="Arial"/>
-              </a:rPr>
-              <a:t>Paste the SETUP PROMPT and the CONVERSATION into planning-report.md - that is your elicitation evidence.</a:t>
-            </a:r>
-          </a:p>
-        </p:txBody>
-      </p:sp>
-      <p:sp>
-        <p:nvSpPr>
-          <p:cNvPr id="6" name="Rounded Rectangle 5"/>
+              <a:t>Everything today points at your value</a:t>
+            </a:r>
+          </a:p>
+        </p:txBody>
+      </p:sp>
+      <p:sp>
+        <p:nvSpPr>
+          <p:cNvPr id="5" name="Rounded Rectangle 4"/>
           <p:cNvSpPr/>
           <p:nvPr/>
         </p:nvSpPr>
         <p:spPr>
           <a:xfrm>
-            <a:off x="640080" y="5532120"/>
-            <a:ext cx="10911535" cy="658368"/>
+            <a:off x="640080" y="2468880"/>
+            <a:ext cx="3393338" cy="3383280"/>
           </a:xfrm>
           <a:prstGeom prst="roundRect">
             <a:avLst/>
@@ -6254,10 +9616,8 @@
           <a:solidFill>
             <a:srgbClr val="151B26"/>
           </a:solidFill>
-          <a:ln w="19050">
-            <a:solidFill>
-              <a:srgbClr val="00FF41"/>
-            </a:solidFill>
+          <a:ln>
+            <a:noFill/>
           </a:ln>
           <a:effectLst/>
         </p:spPr>
@@ -6285,14 +9645,58 @@
       </p:sp>
       <p:sp>
         <p:nvSpPr>
+          <p:cNvPr id="6" name="Rectangle 5"/>
+          <p:cNvSpPr/>
+          <p:nvPr/>
+        </p:nvSpPr>
+        <p:spPr>
+          <a:xfrm>
+            <a:off x="640080" y="2468880"/>
+            <a:ext cx="3393338" cy="82296"/>
+          </a:xfrm>
+          <a:prstGeom prst="rect">
+            <a:avLst/>
+          </a:prstGeom>
+          <a:solidFill>
+            <a:srgbClr val="00FF41"/>
+          </a:solidFill>
+          <a:ln>
+            <a:noFill/>
+          </a:ln>
+          <a:effectLst/>
+        </p:spPr>
+        <p:style>
+          <a:lnRef idx="1">
+            <a:schemeClr val="accent1"/>
+          </a:lnRef>
+          <a:fillRef idx="3">
+            <a:schemeClr val="accent1"/>
+          </a:fillRef>
+          <a:effectRef idx="2">
+            <a:schemeClr val="accent1"/>
+          </a:effectRef>
+          <a:fontRef idx="minor">
+            <a:schemeClr val="lt1"/>
+          </a:fontRef>
+        </p:style>
+        <p:txBody>
+          <a:bodyPr rtlCol="0" anchor="ctr"/>
+          <a:lstStyle/>
+          <a:p>
+            <a:pPr algn="ctr"/>
+          </a:p>
+        </p:txBody>
+      </p:sp>
+      <p:sp>
+        <p:nvSpPr>
           <p:cNvPr id="7" name="TextBox 6"/>
           <p:cNvSpPr txBox="1"/>
           <p:nvPr/>
         </p:nvSpPr>
         <p:spPr>
           <a:xfrm>
-            <a:off x="914400" y="5532120"/>
-            <a:ext cx="10362895" cy="658368"/>
+            <a:off x="914400" y="2788920"/>
+            <a:ext cx="2844698" cy="457200"/>
           </a:xfrm>
           <a:prstGeom prst="rect">
             <a:avLst/>
@@ -6300,7 +9704,7 @@
           <a:noFill/>
         </p:spPr>
         <p:txBody>
-          <a:bodyPr wrap="square" anchor="ctr">
+          <a:bodyPr wrap="square" anchor="t">
             <a:spAutoFit/>
           </a:bodyPr>
           <a:lstStyle/>
@@ -6311,29 +9715,508 @@
               </a:lnSpc>
             </a:pPr>
             <a:r>
-              <a:rPr sz="1600" b="1">
+              <a:rPr sz="1200" b="1">
                 <a:solidFill>
                   <a:srgbClr val="00FF41"/>
                 </a:solidFill>
+                <a:latin typeface="Courier New"/>
+              </a:rPr>
+              <a:t>PERSONA</a:t>
+            </a:r>
+          </a:p>
+        </p:txBody>
+      </p:sp>
+      <p:sp>
+        <p:nvSpPr>
+          <p:cNvPr id="8" name="TextBox 7"/>
+          <p:cNvSpPr txBox="1"/>
+          <p:nvPr/>
+        </p:nvSpPr>
+        <p:spPr>
+          <a:xfrm>
+            <a:off x="914400" y="3246120"/>
+            <a:ext cx="2844698" cy="822960"/>
+          </a:xfrm>
+          <a:prstGeom prst="rect">
+            <a:avLst/>
+          </a:prstGeom>
+          <a:noFill/>
+        </p:spPr>
+        <p:txBody>
+          <a:bodyPr wrap="square" anchor="t">
+            <a:spAutoFit/>
+          </a:bodyPr>
+          <a:lstStyle/>
+          <a:p>
+            <a:pPr algn="l">
+              <a:lnSpc>
+                <a:spcPct val="100000"/>
+              </a:lnSpc>
+            </a:pPr>
+            <a:r>
+              <a:rPr sz="2000" b="1">
+                <a:solidFill>
+                  <a:srgbClr val="F5F7FA"/>
+                </a:solidFill>
                 <a:latin typeface="Arial"/>
               </a:rPr>
-              <a:t>▶  </a:t>
-            </a:r>
-            <a:r>
-              <a:rPr sz="1600" b="1">
+              <a:t>Who, specifically</a:t>
+            </a:r>
+          </a:p>
+        </p:txBody>
+      </p:sp>
+      <p:sp>
+        <p:nvSpPr>
+          <p:cNvPr id="9" name="TextBox 8"/>
+          <p:cNvSpPr txBox="1"/>
+          <p:nvPr/>
+        </p:nvSpPr>
+        <p:spPr>
+          <a:xfrm>
+            <a:off x="914400" y="4114800"/>
+            <a:ext cx="2844698" cy="1554480"/>
+          </a:xfrm>
+          <a:prstGeom prst="rect">
+            <a:avLst/>
+          </a:prstGeom>
+          <a:noFill/>
+        </p:spPr>
+        <p:txBody>
+          <a:bodyPr wrap="square" anchor="t">
+            <a:spAutoFit/>
+          </a:bodyPr>
+          <a:lstStyle/>
+          <a:p>
+            <a:pPr algn="l">
+              <a:lnSpc>
+                <a:spcPct val="110000"/>
+              </a:lnSpc>
+            </a:pPr>
+            <a:r>
+              <a:rPr sz="1500" b="0">
+                <a:solidFill>
+                  <a:srgbClr val="8A94A6"/>
+                </a:solidFill>
+                <a:latin typeface="Arial"/>
+              </a:rPr>
+              <a:t>One real person outside the class - and where they MEET or LOSE your value in their day.</a:t>
+            </a:r>
+          </a:p>
+        </p:txBody>
+      </p:sp>
+      <p:sp>
+        <p:nvSpPr>
+          <p:cNvPr id="10" name="Rounded Rectangle 9"/>
+          <p:cNvSpPr/>
+          <p:nvPr/>
+        </p:nvSpPr>
+        <p:spPr>
+          <a:xfrm>
+            <a:off x="4399178" y="2468880"/>
+            <a:ext cx="3393338" cy="3383280"/>
+          </a:xfrm>
+          <a:prstGeom prst="roundRect">
+            <a:avLst/>
+          </a:prstGeom>
+          <a:solidFill>
+            <a:srgbClr val="151B26"/>
+          </a:solidFill>
+          <a:ln>
+            <a:noFill/>
+          </a:ln>
+          <a:effectLst/>
+        </p:spPr>
+        <p:style>
+          <a:lnRef idx="1">
+            <a:schemeClr val="accent1"/>
+          </a:lnRef>
+          <a:fillRef idx="3">
+            <a:schemeClr val="accent1"/>
+          </a:fillRef>
+          <a:effectRef idx="2">
+            <a:schemeClr val="accent1"/>
+          </a:effectRef>
+          <a:fontRef idx="minor">
+            <a:schemeClr val="lt1"/>
+          </a:fontRef>
+        </p:style>
+        <p:txBody>
+          <a:bodyPr rtlCol="0" anchor="ctr"/>
+          <a:lstStyle/>
+          <a:p>
+            <a:pPr algn="ctr"/>
+          </a:p>
+        </p:txBody>
+      </p:sp>
+      <p:sp>
+        <p:nvSpPr>
+          <p:cNvPr id="11" name="Rectangle 10"/>
+          <p:cNvSpPr/>
+          <p:nvPr/>
+        </p:nvSpPr>
+        <p:spPr>
+          <a:xfrm>
+            <a:off x="4399178" y="2468880"/>
+            <a:ext cx="3393338" cy="82296"/>
+          </a:xfrm>
+          <a:prstGeom prst="rect">
+            <a:avLst/>
+          </a:prstGeom>
+          <a:solidFill>
+            <a:srgbClr val="00FF41"/>
+          </a:solidFill>
+          <a:ln>
+            <a:noFill/>
+          </a:ln>
+          <a:effectLst/>
+        </p:spPr>
+        <p:style>
+          <a:lnRef idx="1">
+            <a:schemeClr val="accent1"/>
+          </a:lnRef>
+          <a:fillRef idx="3">
+            <a:schemeClr val="accent1"/>
+          </a:fillRef>
+          <a:effectRef idx="2">
+            <a:schemeClr val="accent1"/>
+          </a:effectRef>
+          <a:fontRef idx="minor">
+            <a:schemeClr val="lt1"/>
+          </a:fontRef>
+        </p:style>
+        <p:txBody>
+          <a:bodyPr rtlCol="0" anchor="ctr"/>
+          <a:lstStyle/>
+          <a:p>
+            <a:pPr algn="ctr"/>
+          </a:p>
+        </p:txBody>
+      </p:sp>
+      <p:sp>
+        <p:nvSpPr>
+          <p:cNvPr id="12" name="TextBox 11"/>
+          <p:cNvSpPr txBox="1"/>
+          <p:nvPr/>
+        </p:nvSpPr>
+        <p:spPr>
+          <a:xfrm>
+            <a:off x="4673498" y="2788920"/>
+            <a:ext cx="2844698" cy="457200"/>
+          </a:xfrm>
+          <a:prstGeom prst="rect">
+            <a:avLst/>
+          </a:prstGeom>
+          <a:noFill/>
+        </p:spPr>
+        <p:txBody>
+          <a:bodyPr wrap="square" anchor="t">
+            <a:spAutoFit/>
+          </a:bodyPr>
+          <a:lstStyle/>
+          <a:p>
+            <a:pPr algn="l">
+              <a:lnSpc>
+                <a:spcPct val="100000"/>
+              </a:lnSpc>
+            </a:pPr>
+            <a:r>
+              <a:rPr sz="1200" b="1">
+                <a:solidFill>
+                  <a:srgbClr val="00FF41"/>
+                </a:solidFill>
+                <a:latin typeface="Courier New"/>
+              </a:rPr>
+              <a:t>USER-NEED INTERVIEW</a:t>
+            </a:r>
+          </a:p>
+        </p:txBody>
+      </p:sp>
+      <p:sp>
+        <p:nvSpPr>
+          <p:cNvPr id="13" name="TextBox 12"/>
+          <p:cNvSpPr txBox="1"/>
+          <p:nvPr/>
+        </p:nvSpPr>
+        <p:spPr>
+          <a:xfrm>
+            <a:off x="4673498" y="3246120"/>
+            <a:ext cx="2844698" cy="822960"/>
+          </a:xfrm>
+          <a:prstGeom prst="rect">
+            <a:avLst/>
+          </a:prstGeom>
+          <a:noFill/>
+        </p:spPr>
+        <p:txBody>
+          <a:bodyPr wrap="square" anchor="t">
+            <a:spAutoFit/>
+          </a:bodyPr>
+          <a:lstStyle/>
+          <a:p>
+            <a:pPr algn="l">
+              <a:lnSpc>
+                <a:spcPct val="100000"/>
+              </a:lnSpc>
+            </a:pPr>
+            <a:r>
+              <a:rPr sz="2000" b="1">
                 <a:solidFill>
                   <a:srgbClr val="F5F7FA"/>
                 </a:solidFill>
                 <a:latin typeface="Arial"/>
               </a:rPr>
-              <a:t>The chatbot IS your persona, now interviewable - document the prompt + transcript</a:t>
-            </a:r>
-          </a:p>
-        </p:txBody>
-      </p:sp>
-      <p:sp>
-        <p:nvSpPr>
-          <p:cNvPr id="8" name="TextBox 7"/>
+              <a:t>Their problem, their words</a:t>
+            </a:r>
+          </a:p>
+        </p:txBody>
+      </p:sp>
+      <p:sp>
+        <p:nvSpPr>
+          <p:cNvPr id="14" name="TextBox 13"/>
+          <p:cNvSpPr txBox="1"/>
+          <p:nvPr/>
+        </p:nvSpPr>
+        <p:spPr>
+          <a:xfrm>
+            <a:off x="4673498" y="4114800"/>
+            <a:ext cx="2844698" cy="1554480"/>
+          </a:xfrm>
+          <a:prstGeom prst="rect">
+            <a:avLst/>
+          </a:prstGeom>
+          <a:noFill/>
+        </p:spPr>
+        <p:txBody>
+          <a:bodyPr wrap="square" anchor="t">
+            <a:spAutoFit/>
+          </a:bodyPr>
+          <a:lstStyle/>
+          <a:p>
+            <a:pPr algn="l">
+              <a:lnSpc>
+                <a:spcPct val="110000"/>
+              </a:lnSpc>
+            </a:pPr>
+            <a:r>
+              <a:rPr sz="1500" b="0">
+                <a:solidFill>
+                  <a:srgbClr val="8A94A6"/>
+                </a:solidFill>
+                <a:latin typeface="Arial"/>
+              </a:rPr>
+              <a:t>Ask about the problem, not your idea - the need your design has to serve.</a:t>
+            </a:r>
+          </a:p>
+        </p:txBody>
+      </p:sp>
+      <p:sp>
+        <p:nvSpPr>
+          <p:cNvPr id="15" name="Rounded Rectangle 14"/>
+          <p:cNvSpPr/>
+          <p:nvPr/>
+        </p:nvSpPr>
+        <p:spPr>
+          <a:xfrm>
+            <a:off x="8158276" y="2468880"/>
+            <a:ext cx="3393338" cy="3383280"/>
+          </a:xfrm>
+          <a:prstGeom prst="roundRect">
+            <a:avLst/>
+          </a:prstGeom>
+          <a:solidFill>
+            <a:srgbClr val="151B26"/>
+          </a:solidFill>
+          <a:ln>
+            <a:noFill/>
+          </a:ln>
+          <a:effectLst/>
+        </p:spPr>
+        <p:style>
+          <a:lnRef idx="1">
+            <a:schemeClr val="accent1"/>
+          </a:lnRef>
+          <a:fillRef idx="3">
+            <a:schemeClr val="accent1"/>
+          </a:fillRef>
+          <a:effectRef idx="2">
+            <a:schemeClr val="accent1"/>
+          </a:effectRef>
+          <a:fontRef idx="minor">
+            <a:schemeClr val="lt1"/>
+          </a:fontRef>
+        </p:style>
+        <p:txBody>
+          <a:bodyPr rtlCol="0" anchor="ctr"/>
+          <a:lstStyle/>
+          <a:p>
+            <a:pPr algn="ctr"/>
+          </a:p>
+        </p:txBody>
+      </p:sp>
+      <p:sp>
+        <p:nvSpPr>
+          <p:cNvPr id="16" name="Rectangle 15"/>
+          <p:cNvSpPr/>
+          <p:nvPr/>
+        </p:nvSpPr>
+        <p:spPr>
+          <a:xfrm>
+            <a:off x="8158276" y="2468880"/>
+            <a:ext cx="3393338" cy="82296"/>
+          </a:xfrm>
+          <a:prstGeom prst="rect">
+            <a:avLst/>
+          </a:prstGeom>
+          <a:solidFill>
+            <a:srgbClr val="00FF41"/>
+          </a:solidFill>
+          <a:ln>
+            <a:noFill/>
+          </a:ln>
+          <a:effectLst/>
+        </p:spPr>
+        <p:style>
+          <a:lnRef idx="1">
+            <a:schemeClr val="accent1"/>
+          </a:lnRef>
+          <a:fillRef idx="3">
+            <a:schemeClr val="accent1"/>
+          </a:fillRef>
+          <a:effectRef idx="2">
+            <a:schemeClr val="accent1"/>
+          </a:effectRef>
+          <a:fontRef idx="minor">
+            <a:schemeClr val="lt1"/>
+          </a:fontRef>
+        </p:style>
+        <p:txBody>
+          <a:bodyPr rtlCol="0" anchor="ctr"/>
+          <a:lstStyle/>
+          <a:p>
+            <a:pPr algn="ctr"/>
+          </a:p>
+        </p:txBody>
+      </p:sp>
+      <p:sp>
+        <p:nvSpPr>
+          <p:cNvPr id="17" name="TextBox 16"/>
+          <p:cNvSpPr txBox="1"/>
+          <p:nvPr/>
+        </p:nvSpPr>
+        <p:spPr>
+          <a:xfrm>
+            <a:off x="8432596" y="2788920"/>
+            <a:ext cx="2844698" cy="457200"/>
+          </a:xfrm>
+          <a:prstGeom prst="rect">
+            <a:avLst/>
+          </a:prstGeom>
+          <a:noFill/>
+        </p:spPr>
+        <p:txBody>
+          <a:bodyPr wrap="square" anchor="t">
+            <a:spAutoFit/>
+          </a:bodyPr>
+          <a:lstStyle/>
+          <a:p>
+            <a:pPr algn="l">
+              <a:lnSpc>
+                <a:spcPct val="100000"/>
+              </a:lnSpc>
+            </a:pPr>
+            <a:r>
+              <a:rPr sz="1200" b="1">
+                <a:solidFill>
+                  <a:srgbClr val="00FF41"/>
+                </a:solidFill>
+                <a:latin typeface="Courier New"/>
+              </a:rPr>
+              <a:t>STORYBOARD</a:t>
+            </a:r>
+          </a:p>
+        </p:txBody>
+      </p:sp>
+      <p:sp>
+        <p:nvSpPr>
+          <p:cNvPr id="18" name="TextBox 17"/>
+          <p:cNvSpPr txBox="1"/>
+          <p:nvPr/>
+        </p:nvSpPr>
+        <p:spPr>
+          <a:xfrm>
+            <a:off x="8432596" y="3246120"/>
+            <a:ext cx="2844698" cy="822960"/>
+          </a:xfrm>
+          <a:prstGeom prst="rect">
+            <a:avLst/>
+          </a:prstGeom>
+          <a:noFill/>
+        </p:spPr>
+        <p:txBody>
+          <a:bodyPr wrap="square" anchor="t">
+            <a:spAutoFit/>
+          </a:bodyPr>
+          <a:lstStyle/>
+          <a:p>
+            <a:pPr algn="l">
+              <a:lnSpc>
+                <a:spcPct val="100000"/>
+              </a:lnSpc>
+            </a:pPr>
+            <a:r>
+              <a:rPr sz="2000" b="1">
+                <a:solidFill>
+                  <a:srgbClr val="F5F7FA"/>
+                </a:solidFill>
+                <a:latin typeface="Arial"/>
+              </a:rPr>
+              <a:t>The value in use</a:t>
+            </a:r>
+          </a:p>
+        </p:txBody>
+      </p:sp>
+      <p:sp>
+        <p:nvSpPr>
+          <p:cNvPr id="19" name="TextBox 18"/>
+          <p:cNvSpPr txBox="1"/>
+          <p:nvPr/>
+        </p:nvSpPr>
+        <p:spPr>
+          <a:xfrm>
+            <a:off x="8432596" y="4114800"/>
+            <a:ext cx="2844698" cy="1554480"/>
+          </a:xfrm>
+          <a:prstGeom prst="rect">
+            <a:avLst/>
+          </a:prstGeom>
+          <a:noFill/>
+        </p:spPr>
+        <p:txBody>
+          <a:bodyPr wrap="square" anchor="t">
+            <a:spAutoFit/>
+          </a:bodyPr>
+          <a:lstStyle/>
+          <a:p>
+            <a:pPr algn="l">
+              <a:lnSpc>
+                <a:spcPct val="110000"/>
+              </a:lnSpc>
+            </a:pPr>
+            <a:r>
+              <a:rPr sz="1500" b="0">
+                <a:solidFill>
+                  <a:srgbClr val="8A94A6"/>
+                </a:solidFill>
+                <a:latin typeface="Arial"/>
+              </a:rPr>
+              <a:t>Frame the moment your design supports / defends / repairs the value.</a:t>
+            </a:r>
+          </a:p>
+        </p:txBody>
+      </p:sp>
+      <p:sp>
+        <p:nvSpPr>
+          <p:cNvPr id="20" name="TextBox 19"/>
           <p:cNvSpPr txBox="1"/>
           <p:nvPr/>
         </p:nvSpPr>
@@ -6430,7 +10313,7 @@
                 </a:solidFill>
                 <a:latin typeface="Courier New"/>
               </a:rPr>
-              <a:t>BE HONEST ABOUT THE SIMULATION</a:t>
+              <a:t>HOW THEY'VE TRADITIONALLY BEEN MADE</a:t>
             </a:r>
           </a:p>
         </p:txBody>
@@ -6488,7 +10371,7 @@
         <p:spPr>
           <a:xfrm>
             <a:off x="640080" y="1188720"/>
-            <a:ext cx="10972800" cy="1097280"/>
+            <a:ext cx="10972800" cy="914400"/>
           </a:xfrm>
           <a:prstGeom prst="rect">
             <a:avLst/>
@@ -6507,27 +10390,74 @@
               </a:lnSpc>
             </a:pPr>
             <a:r>
-              <a:rPr sz="3400" b="1">
+              <a:rPr sz="3000" b="1">
                 <a:solidFill>
                   <a:srgbClr val="F5F7FA"/>
                 </a:solidFill>
                 <a:latin typeface="Arial"/>
               </a:rPr>
-              <a:t>It's an AI voiced by your own assumptions</a:t>
-            </a:r>
-          </a:p>
-        </p:txBody>
-      </p:sp>
-      <p:sp>
-        <p:nvSpPr>
-          <p:cNvPr id="5" name="TextBox 4"/>
+              <a:t>Before AI - slower, but grounded in real people</a:t>
+            </a:r>
+          </a:p>
+        </p:txBody>
+      </p:sp>
+      <p:sp>
+        <p:nvSpPr>
+          <p:cNvPr id="5" name="Rounded Rectangle 4"/>
+          <p:cNvSpPr/>
+          <p:nvPr/>
+        </p:nvSpPr>
+        <p:spPr>
+          <a:xfrm>
+            <a:off x="2194560" y="2331720"/>
+            <a:ext cx="7772400" cy="3566160"/>
+          </a:xfrm>
+          <a:prstGeom prst="roundRect">
+            <a:avLst/>
+          </a:prstGeom>
+          <a:solidFill>
+            <a:srgbClr val="151B26"/>
+          </a:solidFill>
+          <a:ln w="19050">
+            <a:solidFill>
+              <a:srgbClr val="00FF41"/>
+            </a:solidFill>
+            <a:prstDash val="dash"/>
+          </a:ln>
+          <a:effectLst/>
+        </p:spPr>
+        <p:style>
+          <a:lnRef idx="1">
+            <a:schemeClr val="accent1"/>
+          </a:lnRef>
+          <a:fillRef idx="3">
+            <a:schemeClr val="accent1"/>
+          </a:fillRef>
+          <a:effectRef idx="2">
+            <a:schemeClr val="accent1"/>
+          </a:effectRef>
+          <a:fontRef idx="minor">
+            <a:schemeClr val="lt1"/>
+          </a:fontRef>
+        </p:style>
+        <p:txBody>
+          <a:bodyPr rtlCol="0" anchor="ctr"/>
+          <a:lstStyle/>
+          <a:p>
+            <a:pPr algn="ctr"/>
+          </a:p>
+        </p:txBody>
+      </p:sp>
+      <p:sp>
+        <p:nvSpPr>
+          <p:cNvPr id="6" name="TextBox 5"/>
           <p:cNvSpPr txBox="1"/>
           <p:nvPr/>
         </p:nvSpPr>
         <p:spPr>
           <a:xfrm>
-            <a:off x="658368" y="2286000"/>
-            <a:ext cx="10881360" cy="3657600"/>
+            <a:off x="2194560" y="3383280"/>
+            <a:ext cx="7772400" cy="731520"/>
           </a:xfrm>
           <a:prstGeom prst="rect">
             <a:avLst/>
@@ -6540,58 +10470,65 @@
           </a:bodyPr>
           <a:lstStyle/>
           <a:p>
-            <a:pPr algn="l">
-              <a:lnSpc>
-                <a:spcPct val="112000"/>
-              </a:lnSpc>
-            </a:pPr>
-            <a:r>
-              <a:rPr sz="2000" b="0">
-                <a:solidFill>
-                  <a:srgbClr val="F5F7FA"/>
+            <a:pPr algn="ctr">
+              <a:lnSpc>
+                <a:spcPct val="100000"/>
+              </a:lnSpc>
+            </a:pPr>
+            <a:r>
+              <a:rPr sz="2200" b="1">
+                <a:solidFill>
+                  <a:srgbClr val="00FF41"/>
+                </a:solidFill>
+                <a:latin typeface="Courier New"/>
+              </a:rPr>
+              <a:t>[ your images: a persona doc  ·  a user interview  ·  a hand-drawn storyboard ]</a:t>
+            </a:r>
+          </a:p>
+        </p:txBody>
+      </p:sp>
+      <p:sp>
+        <p:nvSpPr>
+          <p:cNvPr id="7" name="TextBox 6"/>
+          <p:cNvSpPr txBox="1"/>
+          <p:nvPr/>
+        </p:nvSpPr>
+        <p:spPr>
+          <a:xfrm>
+            <a:off x="2194560" y="4114800"/>
+            <a:ext cx="7772400" cy="731520"/>
+          </a:xfrm>
+          <a:prstGeom prst="rect">
+            <a:avLst/>
+          </a:prstGeom>
+          <a:noFill/>
+        </p:spPr>
+        <p:txBody>
+          <a:bodyPr wrap="square" anchor="t">
+            <a:spAutoFit/>
+          </a:bodyPr>
+          <a:lstStyle/>
+          <a:p>
+            <a:pPr algn="ctr">
+              <a:lnSpc>
+                <a:spcPct val="100000"/>
+              </a:lnSpc>
+            </a:pPr>
+            <a:r>
+              <a:rPr sz="1400" b="0">
+                <a:solidFill>
+                  <a:srgbClr val="8A94A6"/>
                 </a:solidFill>
                 <a:latin typeface="Arial"/>
               </a:rPr>
-              <a:t>A persona chatbot is fast and frictionless - but it can hand your stereotypes back as if they were data, and it tends to agree with you.</a:t>
-            </a:r>
-          </a:p>
-          <a:p>
-            <a:pPr algn="l">
-              <a:lnSpc>
-                <a:spcPct val="112000"/>
-              </a:lnSpc>
-            </a:pPr>
-            <a:r>
-              <a:rPr sz="2000" b="0">
-                <a:solidFill>
-                  <a:srgbClr val="F5F7FA"/>
-                </a:solidFill>
-                <a:latin typeface="Arial"/>
-              </a:rPr>
-              <a:t/>
-            </a:r>
-          </a:p>
-          <a:p>
-            <a:pPr algn="l">
-              <a:lnSpc>
-                <a:spcPct val="112000"/>
-              </a:lnSpc>
-            </a:pPr>
-            <a:r>
-              <a:rPr sz="1800" b="0">
-                <a:solidFill>
-                  <a:srgbClr val="8A94A6"/>
-                </a:solidFill>
-                <a:latin typeface="Arial"/>
-              </a:rPr>
-              <a:t>Treat what it says as a HYPOTHESIS, not proof. Note where it might be flattering you. (Skeptical read: NN/g - Synthetic Users.)</a:t>
-            </a:r>
-          </a:p>
-        </p:txBody>
-      </p:sp>
-      <p:sp>
-        <p:nvSpPr>
-          <p:cNvPr id="6" name="TextBox 5"/>
+              <a:t>Persona: desk research + real interviews -&gt; a profile.   Need: recruit + interview real users.   Storyboard: hand-sketch the frames.</a:t>
+            </a:r>
+          </a:p>
+        </p:txBody>
+      </p:sp>
+      <p:sp>
+        <p:nvSpPr>
+          <p:cNvPr id="8" name="TextBox 7"/>
           <p:cNvSpPr txBox="1"/>
           <p:nvPr/>
         </p:nvSpPr>
@@ -6688,7 +10625,7 @@
                 </a:solidFill>
                 <a:latin typeface="Courier New"/>
               </a:rPr>
-              <a:t>OPERATIONALIZE - THE VALUE TREE</a:t>
+              <a:t>PERSONA - WITH AI</a:t>
             </a:r>
           </a:p>
         </p:txBody>
@@ -6746,7 +10683,7 @@
         <p:spPr>
           <a:xfrm>
             <a:off x="640080" y="1188720"/>
-            <a:ext cx="10972800" cy="1097280"/>
+            <a:ext cx="10972800" cy="914400"/>
           </a:xfrm>
           <a:prstGeom prst="rect">
             <a:avLst/>
@@ -6765,27 +10702,74 @@
               </a:lnSpc>
             </a:pPr>
             <a:r>
-              <a:rPr sz="3400" b="1">
+              <a:rPr sz="3000" b="1">
                 <a:solidFill>
                   <a:srgbClr val="F5F7FA"/>
                 </a:solidFill>
                 <a:latin typeface="Arial"/>
               </a:rPr>
-              <a:t>From value down to the prompts you'll build</a:t>
-            </a:r>
-          </a:p>
-        </p:txBody>
-      </p:sp>
-      <p:sp>
-        <p:nvSpPr>
-          <p:cNvPr id="5" name="TextBox 4"/>
+              <a:t>Draft a rich persona in seconds</a:t>
+            </a:r>
+          </a:p>
+        </p:txBody>
+      </p:sp>
+      <p:sp>
+        <p:nvSpPr>
+          <p:cNvPr id="5" name="Rounded Rectangle 4"/>
+          <p:cNvSpPr/>
+          <p:nvPr/>
+        </p:nvSpPr>
+        <p:spPr>
+          <a:xfrm>
+            <a:off x="2194560" y="2331720"/>
+            <a:ext cx="7772400" cy="3566160"/>
+          </a:xfrm>
+          <a:prstGeom prst="roundRect">
+            <a:avLst/>
+          </a:prstGeom>
+          <a:solidFill>
+            <a:srgbClr val="151B26"/>
+          </a:solidFill>
+          <a:ln w="19050">
+            <a:solidFill>
+              <a:srgbClr val="00FF41"/>
+            </a:solidFill>
+            <a:prstDash val="dash"/>
+          </a:ln>
+          <a:effectLst/>
+        </p:spPr>
+        <p:style>
+          <a:lnRef idx="1">
+            <a:schemeClr val="accent1"/>
+          </a:lnRef>
+          <a:fillRef idx="3">
+            <a:schemeClr val="accent1"/>
+          </a:fillRef>
+          <a:effectRef idx="2">
+            <a:schemeClr val="accent1"/>
+          </a:effectRef>
+          <a:fontRef idx="minor">
+            <a:schemeClr val="lt1"/>
+          </a:fontRef>
+        </p:style>
+        <p:txBody>
+          <a:bodyPr rtlCol="0" anchor="ctr"/>
+          <a:lstStyle/>
+          <a:p>
+            <a:pPr algn="ctr"/>
+          </a:p>
+        </p:txBody>
+      </p:sp>
+      <p:sp>
+        <p:nvSpPr>
+          <p:cNvPr id="6" name="TextBox 5"/>
           <p:cNvSpPr txBox="1"/>
           <p:nvPr/>
         </p:nvSpPr>
         <p:spPr>
           <a:xfrm>
-            <a:off x="658368" y="2286000"/>
-            <a:ext cx="10881360" cy="3657600"/>
+            <a:off x="2194560" y="3383280"/>
+            <a:ext cx="7772400" cy="731520"/>
           </a:xfrm>
           <a:prstGeom prst="rect">
             <a:avLst/>
@@ -6798,99 +10782,65 @@
           </a:bodyPr>
           <a:lstStyle/>
           <a:p>
-            <a:pPr algn="l">
-              <a:lnSpc>
-                <a:spcPct val="112000"/>
-              </a:lnSpc>
-            </a:pPr>
-            <a:r>
-              <a:rPr sz="2000" b="0">
-                <a:solidFill>
-                  <a:srgbClr val="F5F7FA"/>
+            <a:pPr algn="ctr">
+              <a:lnSpc>
+                <a:spcPct val="100000"/>
+              </a:lnSpc>
+            </a:pPr>
+            <a:r>
+              <a:rPr sz="2200" b="1">
+                <a:solidFill>
+                  <a:srgbClr val="00FF41"/>
+                </a:solidFill>
+                <a:latin typeface="Courier New"/>
+              </a:rPr>
+              <a:t>[ your screenshot: an AI-generated persona ]</a:t>
+            </a:r>
+          </a:p>
+        </p:txBody>
+      </p:sp>
+      <p:sp>
+        <p:nvSpPr>
+          <p:cNvPr id="7" name="TextBox 6"/>
+          <p:cNvSpPr txBox="1"/>
+          <p:nvPr/>
+        </p:nvSpPr>
+        <p:spPr>
+          <a:xfrm>
+            <a:off x="2194560" y="4114800"/>
+            <a:ext cx="7772400" cy="731520"/>
+          </a:xfrm>
+          <a:prstGeom prst="rect">
+            <a:avLst/>
+          </a:prstGeom>
+          <a:noFill/>
+        </p:spPr>
+        <p:txBody>
+          <a:bodyPr wrap="square" anchor="t">
+            <a:spAutoFit/>
+          </a:bodyPr>
+          <a:lstStyle/>
+          <a:p>
+            <a:pPr algn="ctr">
+              <a:lnSpc>
+                <a:spcPct val="100000"/>
+              </a:lnSpc>
+            </a:pPr>
+            <a:r>
+              <a:rPr sz="1400" b="0">
+                <a:solidFill>
+                  <a:srgbClr val="8A94A6"/>
                 </a:solidFill>
                 <a:latin typeface="Arial"/>
               </a:rPr>
-              <a:t>Break your value down until it becomes something you can actually build:</a:t>
-            </a:r>
-          </a:p>
-          <a:p>
-            <a:pPr algn="l">
-              <a:lnSpc>
-                <a:spcPct val="112000"/>
-              </a:lnSpc>
-            </a:pPr>
-            <a:r>
-              <a:rPr sz="2000" b="0">
-                <a:solidFill>
-                  <a:srgbClr val="F5F7FA"/>
-                </a:solidFill>
-                <a:latin typeface="Arial"/>
-              </a:rPr>
-              <a:t/>
-            </a:r>
-          </a:p>
-          <a:p>
-            <a:pPr algn="l">
-              <a:lnSpc>
-                <a:spcPct val="112000"/>
-              </a:lnSpc>
-            </a:pPr>
-            <a:r>
-              <a:rPr sz="2200" b="0">
-                <a:solidFill>
-                  <a:srgbClr val="F5F7FA"/>
-                </a:solidFill>
-                <a:latin typeface="Arial"/>
-              </a:rPr>
-              <a:t>value  -&gt;  norms  -&gt;  requirements  -&gt;  features  -&gt;  </a:t>
-            </a:r>
-            <a:r>
-              <a:rPr sz="2200" b="1">
-                <a:solidFill>
-                  <a:srgbClr val="00FF41"/>
-                </a:solidFill>
-                <a:latin typeface="Arial"/>
-              </a:rPr>
-              <a:t>the prompts you run tomorrow</a:t>
-            </a:r>
-          </a:p>
-          <a:p>
-            <a:pPr algn="l">
-              <a:lnSpc>
-                <a:spcPct val="112000"/>
-              </a:lnSpc>
-            </a:pPr>
-            <a:r>
-              <a:rPr sz="2000" b="0">
-                <a:solidFill>
-                  <a:srgbClr val="F5F7FA"/>
-                </a:solidFill>
-                <a:latin typeface="Arial"/>
-              </a:rPr>
-              <a:t/>
-            </a:r>
-          </a:p>
-          <a:p>
-            <a:pPr algn="l">
-              <a:lnSpc>
-                <a:spcPct val="112000"/>
-              </a:lnSpc>
-            </a:pPr>
-            <a:r>
-              <a:rPr sz="1700" b="0">
-                <a:solidFill>
-                  <a:srgbClr val="8A94A6"/>
-                </a:solidFill>
-                <a:latin typeface="Arial"/>
-              </a:rPr>
-              <a:t>The bottom of the tree IS your Thursday build plan - the exact prompts, grounded in the value.</a:t>
-            </a:r>
-          </a:p>
-        </p:txBody>
-      </p:sp>
-      <p:sp>
-        <p:nvSpPr>
-          <p:cNvPr id="6" name="TextBox 5"/>
+              <a:t>From your value + beneficiary, AI drafts a persona fast. Use a template (Figma persona set / Slides). Keep it anchored to a real person - not a cliche.</a:t>
+            </a:r>
+          </a:p>
+        </p:txBody>
+      </p:sp>
+      <p:sp>
+        <p:nvSpPr>
+          <p:cNvPr id="8" name="TextBox 7"/>
           <p:cNvSpPr txBox="1"/>
           <p:nvPr/>
         </p:nvSpPr>
@@ -6987,7 +10937,7 @@
                 </a:solidFill>
                 <a:latin typeface="Courier New"/>
               </a:rPr>
-              <a:t>STORYBOARD - ROUGH, THEN REFINED</a:t>
+              <a:t>USER-NEED INTERVIEW - WITH AI</a:t>
             </a:r>
           </a:p>
         </p:txBody>
@@ -7045,7 +10995,7 @@
         <p:spPr>
           <a:xfrm>
             <a:off x="640080" y="1188720"/>
-            <a:ext cx="10972800" cy="1097280"/>
+            <a:ext cx="10972800" cy="914400"/>
           </a:xfrm>
           <a:prstGeom prst="rect">
             <a:avLst/>
@@ -7064,27 +11014,74 @@
               </a:lnSpc>
             </a:pPr>
             <a:r>
-              <a:rPr sz="3400" b="1">
+              <a:rPr sz="3000" b="1">
                 <a:solidFill>
                   <a:srgbClr val="F5F7FA"/>
                 </a:solidFill>
                 <a:latin typeface="Arial"/>
               </a:rPr>
-              <a:t>Diverge to find ideas, converge to communicate one</a:t>
-            </a:r>
-          </a:p>
-        </p:txBody>
-      </p:sp>
-      <p:sp>
-        <p:nvSpPr>
-          <p:cNvPr id="5" name="TextBox 4"/>
+              <a:t>Interview the persona you built - as a chatbot</a:t>
+            </a:r>
+          </a:p>
+        </p:txBody>
+      </p:sp>
+      <p:sp>
+        <p:nvSpPr>
+          <p:cNvPr id="5" name="Rounded Rectangle 4"/>
+          <p:cNvSpPr/>
+          <p:nvPr/>
+        </p:nvSpPr>
+        <p:spPr>
+          <a:xfrm>
+            <a:off x="2194560" y="2331720"/>
+            <a:ext cx="7772400" cy="3566160"/>
+          </a:xfrm>
+          <a:prstGeom prst="roundRect">
+            <a:avLst/>
+          </a:prstGeom>
+          <a:solidFill>
+            <a:srgbClr val="151B26"/>
+          </a:solidFill>
+          <a:ln w="19050">
+            <a:solidFill>
+              <a:srgbClr val="00FF41"/>
+            </a:solidFill>
+            <a:prstDash val="dash"/>
+          </a:ln>
+          <a:effectLst/>
+        </p:spPr>
+        <p:style>
+          <a:lnRef idx="1">
+            <a:schemeClr val="accent1"/>
+          </a:lnRef>
+          <a:fillRef idx="3">
+            <a:schemeClr val="accent1"/>
+          </a:fillRef>
+          <a:effectRef idx="2">
+            <a:schemeClr val="accent1"/>
+          </a:effectRef>
+          <a:fontRef idx="minor">
+            <a:schemeClr val="lt1"/>
+          </a:fontRef>
+        </p:style>
+        <p:txBody>
+          <a:bodyPr rtlCol="0" anchor="ctr"/>
+          <a:lstStyle/>
+          <a:p>
+            <a:pPr algn="ctr"/>
+          </a:p>
+        </p:txBody>
+      </p:sp>
+      <p:sp>
+        <p:nvSpPr>
+          <p:cNvPr id="6" name="TextBox 5"/>
           <p:cNvSpPr txBox="1"/>
           <p:nvPr/>
         </p:nvSpPr>
         <p:spPr>
           <a:xfrm>
-            <a:off x="658368" y="2286000"/>
-            <a:ext cx="10881360" cy="3657600"/>
+            <a:off x="2194560" y="3383280"/>
+            <a:ext cx="7772400" cy="731520"/>
           </a:xfrm>
           <a:prstGeom prst="rect">
             <a:avLst/>
@@ -7097,90 +11094,65 @@
           </a:bodyPr>
           <a:lstStyle/>
           <a:p>
-            <a:pPr algn="l">
-              <a:lnSpc>
-                <a:spcPct val="112000"/>
-              </a:lnSpc>
-            </a:pPr>
-            <a:r>
-              <a:rPr sz="1900" b="0">
-                <a:solidFill>
-                  <a:srgbClr val="F5F7FA"/>
+            <a:pPr algn="ctr">
+              <a:lnSpc>
+                <a:spcPct val="100000"/>
+              </a:lnSpc>
+            </a:pPr>
+            <a:r>
+              <a:rPr sz="2200" b="1">
+                <a:solidFill>
+                  <a:srgbClr val="00FF41"/>
+                </a:solidFill>
+                <a:latin typeface="Courier New"/>
+              </a:rPr>
+              <a:t>[ your screenshot: chatting with the persona-bot ]</a:t>
+            </a:r>
+          </a:p>
+        </p:txBody>
+      </p:sp>
+      <p:sp>
+        <p:nvSpPr>
+          <p:cNvPr id="7" name="TextBox 6"/>
+          <p:cNvSpPr txBox="1"/>
+          <p:nvPr/>
+        </p:nvSpPr>
+        <p:spPr>
+          <a:xfrm>
+            <a:off x="2194560" y="4114800"/>
+            <a:ext cx="7772400" cy="731520"/>
+          </a:xfrm>
+          <a:prstGeom prst="rect">
+            <a:avLst/>
+          </a:prstGeom>
+          <a:noFill/>
+        </p:spPr>
+        <p:txBody>
+          <a:bodyPr wrap="square" anchor="t">
+            <a:spAutoFit/>
+          </a:bodyPr>
+          <a:lstStyle/>
+          <a:p>
+            <a:pPr algn="ctr">
+              <a:lnSpc>
+                <a:spcPct val="100000"/>
+              </a:lnSpc>
+            </a:pPr>
+            <a:r>
+              <a:rPr sz="1400" b="0">
+                <a:solidFill>
+                  <a:srgbClr val="8A94A6"/>
                 </a:solidFill>
                 <a:latin typeface="Arial"/>
               </a:rPr>
-              <a:t>ROUGH (each member): a quick 4-8 frame sketch of YOUR idea - the user, their problem, where your thing enters, what changes. Rough is the point; it helps you think.</a:t>
-            </a:r>
-          </a:p>
-          <a:p>
-            <a:pPr algn="l">
-              <a:lnSpc>
-                <a:spcPct val="112000"/>
-              </a:lnSpc>
-            </a:pPr>
-            <a:r>
-              <a:rPr sz="2000" b="0">
-                <a:solidFill>
-                  <a:srgbClr val="F5F7FA"/>
-                </a:solidFill>
-                <a:latin typeface="Arial"/>
-              </a:rPr>
-              <a:t/>
-            </a:r>
-          </a:p>
-          <a:p>
-            <a:pPr algn="l">
-              <a:lnSpc>
-                <a:spcPct val="112000"/>
-              </a:lnSpc>
-            </a:pPr>
-            <a:r>
-              <a:rPr sz="1900" b="1">
-                <a:solidFill>
-                  <a:srgbClr val="00FF41"/>
-                </a:solidFill>
-                <a:latin typeface="Arial"/>
-              </a:rPr>
-              <a:t>REFINED (team): pick + combine the best into ONE clean storyboard that communicates the idea - your Thursday build plan + pitch skeleton.</a:t>
-            </a:r>
-          </a:p>
-          <a:p>
-            <a:pPr algn="l">
-              <a:lnSpc>
-                <a:spcPct val="112000"/>
-              </a:lnSpc>
-            </a:pPr>
-            <a:r>
-              <a:rPr sz="2000" b="0">
-                <a:solidFill>
-                  <a:srgbClr val="F5F7FA"/>
-                </a:solidFill>
-                <a:latin typeface="Arial"/>
-              </a:rPr>
-              <a:t/>
-            </a:r>
-          </a:p>
-          <a:p>
-            <a:pPr algn="l">
-              <a:lnSpc>
-                <a:spcPct val="112000"/>
-              </a:lnSpc>
-            </a:pPr>
-            <a:r>
-              <a:rPr sz="1700" b="0">
-                <a:solidFill>
-                  <a:srgbClr val="8A94A6"/>
-                </a:solidFill>
-                <a:latin typeface="Arial"/>
-              </a:rPr>
-              <a:t>Show the value living in each frame - not just in the copy.</a:t>
-            </a:r>
-          </a:p>
-        </p:txBody>
-      </p:sp>
-      <p:sp>
-        <p:nvSpPr>
-          <p:cNvPr id="6" name="TextBox 5"/>
+              <a:t>Turn the persona into a chatbot (Claude / ChatGPT), interview it about ITS problem, and paste the setup prompt + transcript into planning-report.md.</a:t>
+            </a:r>
+          </a:p>
+        </p:txBody>
+      </p:sp>
+      <p:sp>
+        <p:nvSpPr>
+          <p:cNvPr id="8" name="TextBox 7"/>
           <p:cNvSpPr txBox="1"/>
           <p:nvPr/>
         </p:nvSpPr>
@@ -7277,7 +11249,7 @@
                 </a:solidFill>
                 <a:latin typeface="Courier New"/>
               </a:rPr>
-              <a:t>TEMPLATES + TOOLS</a:t>
+              <a:t>BE HONEST ABOUT THE SIMULATION</a:t>
             </a:r>
           </a:p>
         </p:txBody>
@@ -7360,7 +11332,7 @@
                 </a:solidFill>
                 <a:latin typeface="Arial"/>
               </a:rPr>
-              <a:t>Your persona + storyboard are LINKS in the report</a:t>
+              <a:t>It's an AI voiced by your own assumptions</a:t>
             </a:r>
           </a:p>
         </p:txBody>
@@ -7393,14 +11365,21 @@
               </a:lnSpc>
             </a:pPr>
             <a:r>
-              <a:rPr sz="2000" b="1">
-                <a:solidFill>
-                  <a:srgbClr val="00FF41"/>
+              <a:rPr sz="2000" b="0">
+                <a:solidFill>
+                  <a:srgbClr val="F5F7FA"/>
                 </a:solidFill>
                 <a:latin typeface="Arial"/>
               </a:rPr>
-              <a:t>•  </a:t>
-            </a:r>
+              <a:t>A persona chatbot is fast and frictionless - but it can hand your stereotypes back as if they were data, and it tends to agree with you.</a:t>
+            </a:r>
+          </a:p>
+          <a:p>
+            <a:pPr algn="l">
+              <a:lnSpc>
+                <a:spcPct val="112000"/>
+              </a:lnSpc>
+            </a:pPr>
             <a:r>
               <a:rPr sz="2000" b="0">
                 <a:solidFill>
@@ -7408,7 +11387,7 @@
                 </a:solidFill>
                 <a:latin typeface="Arial"/>
               </a:rPr>
-              <a:t>Persona: Figma 'User Persona Template Set' (community) or a Google Slides deck.</a:t>
+              <a:t/>
             </a:r>
           </a:p>
           <a:p>
@@ -7418,97 +11397,13 @@
               </a:lnSpc>
             </a:pPr>
             <a:r>
-              <a:rPr sz="2000" b="1">
-                <a:solidFill>
-                  <a:srgbClr val="00FF41"/>
+              <a:rPr sz="1800" b="0">
+                <a:solidFill>
+                  <a:srgbClr val="8A94A6"/>
                 </a:solidFill>
                 <a:latin typeface="Arial"/>
               </a:rPr>
-              <a:t>•  </a:t>
-            </a:r>
-            <a:r>
-              <a:rPr sz="2000" b="0">
-                <a:solidFill>
-                  <a:srgbClr val="F5F7FA"/>
-                </a:solidFill>
-                <a:latin typeface="Arial"/>
-              </a:rPr>
-              <a:t>Storyboard: Figma 'Storyboard Template' (community), Google Slides (one frame / slide), Canva, or Storyboarder.</a:t>
-            </a:r>
-          </a:p>
-          <a:p>
-            <a:pPr algn="l">
-              <a:lnSpc>
-                <a:spcPct val="112000"/>
-              </a:lnSpc>
-            </a:pPr>
-            <a:r>
-              <a:rPr sz="2000" b="1">
-                <a:solidFill>
-                  <a:srgbClr val="00FF41"/>
-                </a:solidFill>
-                <a:latin typeface="Arial"/>
-              </a:rPr>
-              <a:t>•  </a:t>
-            </a:r>
-            <a:r>
-              <a:rPr sz="2000" b="0">
-                <a:solidFill>
-                  <a:srgbClr val="F5F7FA"/>
-                </a:solidFill>
-                <a:latin typeface="Arial"/>
-              </a:rPr>
-              <a:t>Persona chatbot: Claude or ChatGPT - give it rich detail, then interview it.</a:t>
-            </a:r>
-          </a:p>
-          <a:p>
-            <a:pPr algn="l">
-              <a:lnSpc>
-                <a:spcPct val="112000"/>
-              </a:lnSpc>
-            </a:pPr>
-            <a:r>
-              <a:rPr sz="2000" b="1">
-                <a:solidFill>
-                  <a:srgbClr val="00FF41"/>
-                </a:solidFill>
-                <a:latin typeface="Arial"/>
-              </a:rPr>
-              <a:t>•  </a:t>
-            </a:r>
-            <a:r>
-              <a:rPr sz="2000" b="0">
-                <a:solidFill>
-                  <a:srgbClr val="F5F7FA"/>
-                </a:solidFill>
-                <a:latin typeface="Arial"/>
-              </a:rPr>
-              <a:t>AI pitch video (Thursday): Google Veo 3.1 (Flow), Runway, Kling, or Pika. (Sora retired in 2026.)</a:t>
-            </a:r>
-          </a:p>
-          <a:p>
-            <a:pPr algn="l">
-              <a:lnSpc>
-                <a:spcPct val="112000"/>
-              </a:lnSpc>
-            </a:pPr>
-            <a:r>
-              <a:rPr sz="2000" b="1">
-                <a:solidFill>
-                  <a:srgbClr val="00FF41"/>
-                </a:solidFill>
-                <a:latin typeface="Arial"/>
-              </a:rPr>
-              <a:t>•  </a:t>
-            </a:r>
-            <a:r>
-              <a:rPr sz="2000" b="0">
-                <a:solidFill>
-                  <a:srgbClr val="F5F7FA"/>
-                </a:solidFill>
-                <a:latin typeface="Arial"/>
-              </a:rPr>
-              <a:t>Paste the Slides / Figma LINKS into planning-report.md - don't dump giant images.</a:t>
+              <a:t>Treat what it says as a HYPOTHESIS, not proof. Note where it might be flattering you. (Skeptical read: NN/g - Synthetic Users.)</a:t>
             </a:r>
           </a:p>
         </p:txBody>

--- a/slides/Week3-Wed-Working-Day.pptx
+++ b/slides/Week3-Wed-Working-Day.pptx
@@ -8471,7 +8471,7 @@
                 </a:solidFill>
                 <a:latin typeface="Arial"/>
               </a:rPr>
-              <a:t>You verified your Project 2 and found where the design doesn't move the value. Today you plan the fix - for a real person </a:t>
+              <a:t>You verified your Project 2 and know what your value needs. Today you plan what to build for that value - continue Project 2, or a new idea - for a real person </a:t>
             </a:r>
             <a:r>
               <a:rPr sz="2100" b="1">
@@ -9253,7 +9253,7 @@
                 </a:solidFill>
                 <a:latin typeface="Courier New"/>
               </a:rPr>
-              <a:t>KEEP YOUR VALUE</a:t>
+              <a:t>KEEP THE VALUE - CHANGE ANYTHING ELSE</a:t>
             </a:r>
           </a:p>
         </p:txBody>
@@ -9336,7 +9336,7 @@
                 </a:solidFill>
                 <a:latin typeface="Arial"/>
               </a:rPr>
-              <a:t>Change the design, not the commitment</a:t>
+              <a:t>Your value is fixed. The project is not.</a:t>
             </a:r>
           </a:p>
         </p:txBody>
@@ -9375,7 +9375,7 @@
                 </a:solidFill>
                 <a:latin typeface="Arial"/>
               </a:rPr>
-              <a:t>You already have a value and what Tuesday's verification showed. The final is the NEXT iteration of that value - not a new theme.</a:t>
+              <a:t>You carry your value and Tuesday's learnings. The final can be the next iteration of Project 2 - OR a brand-new idea for the same value.</a:t>
             </a:r>
           </a:p>
           <a:p>

--- a/slides/Week3-Wed-Working-Day.pptx
+++ b/slides/Week3-Wed-Working-Day.pptx
@@ -8471,7 +8471,7 @@
                 </a:solidFill>
                 <a:latin typeface="Arial"/>
               </a:rPr>
-              <a:t>You verified your Project 2 and know what your value needs. Today you plan what to build for that value - continue Project 2, or a new idea - for a real person </a:t>
+              <a:t>You verified your Project 2 and found where the design doesn't move the value. Today you plan the fix - for a real person </a:t>
             </a:r>
             <a:r>
               <a:rPr sz="2100" b="1">
@@ -9253,7 +9253,7 @@
                 </a:solidFill>
                 <a:latin typeface="Courier New"/>
               </a:rPr>
-              <a:t>KEEP THE VALUE - CHANGE ANYTHING ELSE</a:t>
+              <a:t>KEEP YOUR VALUE</a:t>
             </a:r>
           </a:p>
         </p:txBody>
@@ -9336,7 +9336,7 @@
                 </a:solidFill>
                 <a:latin typeface="Arial"/>
               </a:rPr>
-              <a:t>Your value is fixed. The project is not.</a:t>
+              <a:t>Change the design, not the commitment</a:t>
             </a:r>
           </a:p>
         </p:txBody>
@@ -9375,7 +9375,7 @@
                 </a:solidFill>
                 <a:latin typeface="Arial"/>
               </a:rPr>
-              <a:t>You carry your value and Tuesday's learnings. The final can be the next iteration of Project 2 - OR a brand-new idea for the same value.</a:t>
+              <a:t>You already have a value and what Tuesday's verification showed - the final is a different design for the same value.</a:t>
             </a:r>
           </a:p>
           <a:p>
